--- a/AG-Health-ERP-Presentation.pptx
+++ b/AG-Health-ERP-Presentation.pptx
@@ -2,19 +2,21 @@
 <file path=ppt/presentation.xml><?xml version="1.0" encoding="utf-8"?>
 <p:presentation xmlns:p="http://schemas.openxmlformats.org/presentationml/2006/main">
   <p:sldMasterIdLst>
-    <p:sldMasterId xmlns:r="http://schemas.openxmlformats.org/officeDocument/2006/relationships" id="2147483648" r:id="R2553c952894d431e"/>
+    <p:sldMasterId xmlns:r="http://schemas.openxmlformats.org/officeDocument/2006/relationships" id="2147483648" r:id="R02c62d1d11834542"/>
   </p:sldMasterIdLst>
   <p:notesMasterIdLst>
-    <p:notesMasterId xmlns:r="http://schemas.openxmlformats.org/officeDocument/2006/relationships" r:id="R06b27f8dbed94bef"/>
+    <p:notesMasterId xmlns:r="http://schemas.openxmlformats.org/officeDocument/2006/relationships" r:id="R54abaaf3265f4b7d"/>
   </p:notesMasterIdLst>
   <p:sldIdLst>
-    <p:sldId xmlns:r="http://schemas.openxmlformats.org/officeDocument/2006/relationships" id="256" r:id="R1b496dca65324fd2"/>
-    <p:sldId xmlns:r="http://schemas.openxmlformats.org/officeDocument/2006/relationships" id="257" r:id="R6e313abc44d74ac9"/>
-    <p:sldId xmlns:r="http://schemas.openxmlformats.org/officeDocument/2006/relationships" id="258" r:id="R3377ed1656d74e4c"/>
-    <p:sldId xmlns:r="http://schemas.openxmlformats.org/officeDocument/2006/relationships" id="259" r:id="R05f542b9b6d64c80"/>
-    <p:sldId xmlns:r="http://schemas.openxmlformats.org/officeDocument/2006/relationships" id="260" r:id="R546e6280d3fa4c2f"/>
-    <p:sldId xmlns:r="http://schemas.openxmlformats.org/officeDocument/2006/relationships" id="261" r:id="R1ac694e0b2b54205"/>
-    <p:sldId xmlns:r="http://schemas.openxmlformats.org/officeDocument/2006/relationships" id="262" r:id="Ra68e6d8fe3674082"/>
+    <p:sldId xmlns:r="http://schemas.openxmlformats.org/officeDocument/2006/relationships" id="256" r:id="Rb566ed0c187a4bb6"/>
+    <p:sldId xmlns:r="http://schemas.openxmlformats.org/officeDocument/2006/relationships" id="257" r:id="R22fb0c5556694bd0"/>
+    <p:sldId xmlns:r="http://schemas.openxmlformats.org/officeDocument/2006/relationships" id="258" r:id="Rfec0951f2f854265"/>
+    <p:sldId xmlns:r="http://schemas.openxmlformats.org/officeDocument/2006/relationships" id="259" r:id="R03b62ddc18644d9e"/>
+    <p:sldId xmlns:r="http://schemas.openxmlformats.org/officeDocument/2006/relationships" id="260" r:id="Rb7032d02bb5e452a"/>
+    <p:sldId xmlns:r="http://schemas.openxmlformats.org/officeDocument/2006/relationships" id="261" r:id="R25741903c2bc4a8b"/>
+    <p:sldId xmlns:r="http://schemas.openxmlformats.org/officeDocument/2006/relationships" id="262" r:id="Rf4622666b3224a7f"/>
+    <p:sldId xmlns:r="http://schemas.openxmlformats.org/officeDocument/2006/relationships" id="263" r:id="R53aa1bd256384ac8"/>
+    <p:sldId xmlns:r="http://schemas.openxmlformats.org/officeDocument/2006/relationships" id="264" r:id="Rf355dd57cc3048d9"/>
   </p:sldIdLst>
   <p:sldSz cx="12192000" cy="6858000"/>
   <p:notesSz cx="6858000" cy="9144000"/>
@@ -453,12 +455,12 @@
           </a:p>
           <a:p xmlns:a="http://schemas.openxmlformats.org/drawingml/2006/main">
             <a:r>
-              <a:t>- Visual generated for this presentation: premium ERP analytics concept with no readable data values.</a:t>
-            </a:r>
-          </a:p>
-          <a:p xmlns:a="http://schemas.openxmlformats.org/drawingml/2006/main">
-            <a:r>
-              <a:t>- Product context from the current AG Health ERP dashboard project.</a:t>
+              <a:t>- Actual AG Health dashboard screenshot captured from http://localhost:3002/ag-health.</a:t>
+            </a:r>
+          </a:p>
+          <a:p xmlns:a="http://schemas.openxmlformats.org/drawingml/2006/main">
+            <a:r>
+              <a:t>- Product capabilities from current project implementation.</a:t>
             </a:r>
           </a:p>
         </p:txBody>
@@ -533,7 +535,7 @@
           </a:p>
           <a:p xmlns:a="http://schemas.openxmlformats.org/drawingml/2006/main">
             <a:r>
-              <a:t>- Problem framing based on user requirements for a simpler CEO-friendly ERP dashboard.</a:t>
+              <a:t>- Problem framing based on user requirements for CEO-friendly ERP reporting.</a:t>
             </a:r>
           </a:p>
         </p:txBody>
@@ -608,7 +610,12 @@
           </a:p>
           <a:p xmlns:a="http://schemas.openxmlformats.org/drawingml/2006/main">
             <a:r>
-              <a:t>- Data flow based on the implemented AG Health dashboard and mapped Business Central feeds.</a:t>
+              <a:t>- Actual dashboard screenshot captured from current AG Health app.</a:t>
+            </a:r>
+          </a:p>
+          <a:p xmlns:a="http://schemas.openxmlformats.org/drawingml/2006/main">
+            <a:r>
+              <a:t>- Dashboard organization from src/app/ag-health/page.tsx.</a:t>
             </a:r>
           </a:p>
         </p:txBody>
@@ -683,7 +690,7 @@
           </a:p>
           <a:p xmlns:a="http://schemas.openxmlformats.org/drawingml/2006/main">
             <a:r>
-              <a:t>- Dashboard hierarchy based on the revised AG Health dashboard: verified financial cards first, operational cards below.</a:t>
+              <a:t>- Dashboard hierarchy based on the current AG Health dashboard design.</a:t>
             </a:r>
           </a:p>
         </p:txBody>
@@ -758,7 +765,7 @@
           </a:p>
           <a:p xmlns:a="http://schemas.openxmlformats.org/drawingml/2006/main">
             <a:r>
-              <a:t>- Module list from the current AG Health application navigation.</a:t>
+              <a:t>- Actual inventory report screenshot captured from http://localhost:3002/ag-health/inventory-report.</a:t>
             </a:r>
           </a:p>
         </p:txBody>
@@ -833,7 +840,7 @@
           </a:p>
           <a:p xmlns:a="http://schemas.openxmlformats.org/drawingml/2006/main">
             <a:r>
-              <a:t>- Chatbot behavior from src/app/ag-health/AgHealthChatbot.tsx.</a:t>
+              <a:t>- Actual production page screenshot captured from http://localhost:3002/ag-health/production.</a:t>
             </a:r>
           </a:p>
         </p:txBody>
@@ -908,7 +915,162 @@
           </a:p>
           <a:p xmlns:a="http://schemas.openxmlformats.org/drawingml/2006/main">
             <a:r>
-              <a:t>- Project capabilities from current AG Health implementation and user-provided requirements.</a:t>
+              <a:t>- Actual sales analysis screenshot captured from http://localhost:3002/ag-health/sales-analysis.</a:t>
+            </a:r>
+          </a:p>
+        </p:txBody>
+      </p:sp>
+      <p:sp>
+        <p:nvSpPr>
+          <p:cNvPr id="4" name="Slide Number Placeholder 3"/>
+          <p:cNvSpPr>
+            <a:spLocks xmlns:a="http://schemas.openxmlformats.org/drawingml/2006/main" noGrp="1"/>
+          </p:cNvSpPr>
+          <p:nvPr>
+            <p:ph type="sldNum" idx="5"/>
+          </p:nvPr>
+        </p:nvSpPr>
+        <p:spPr/>
+        <p:txBody>
+          <a:bodyPr xmlns:a="http://schemas.openxmlformats.org/drawingml/2006/main"/>
+          <a:lstStyle xmlns:a="http://schemas.openxmlformats.org/drawingml/2006/main"/>
+          <a:p xmlns:a="http://schemas.openxmlformats.org/drawingml/2006/main"/>
+        </p:txBody>
+      </p:sp>
+    </p:spTree>
+  </p:cSld>
+  <p:clrMapOvr>
+    <a:masterClrMapping xmlns:a="http://schemas.openxmlformats.org/drawingml/2006/main"/>
+  </p:clrMapOvr>
+</p:notes>
+</file>
+
+<file path=ppt/notesSlides/notesSlide8.xml><?xml version="1.0" encoding="utf-8"?>
+<p:notes xmlns:p="http://schemas.openxmlformats.org/presentationml/2006/main">
+  <p:cSld>
+    <p:spTree>
+      <p:nvGrpSpPr>
+        <p:cNvPr id="1" name=""/>
+        <p:cNvGrpSpPr/>
+        <p:nvPr/>
+      </p:nvGrpSpPr>
+      <p:grpSpPr>
+        <a:xfrm xmlns:a="http://schemas.openxmlformats.org/drawingml/2006/main"/>
+      </p:grpSpPr>
+      <p:sp>
+        <p:nvSpPr>
+          <p:cNvPr id="2" name="Slide Image Placeholder 1"/>
+          <p:cNvSpPr>
+            <a:spLocks xmlns:a="http://schemas.openxmlformats.org/drawingml/2006/main" noGrp="1"/>
+          </p:cNvSpPr>
+          <p:nvPr>
+            <p:ph type="sldImg" idx="0"/>
+          </p:nvPr>
+        </p:nvSpPr>
+        <p:spPr/>
+      </p:sp>
+      <p:sp>
+        <p:nvSpPr>
+          <p:cNvPr id="3" name="Notes Placeholder 2"/>
+          <p:cNvSpPr>
+            <a:spLocks xmlns:a="http://schemas.openxmlformats.org/drawingml/2006/main" noGrp="1"/>
+          </p:cNvSpPr>
+          <p:nvPr>
+            <p:ph type="body" idx="1"/>
+          </p:nvPr>
+        </p:nvSpPr>
+        <p:spPr/>
+        <p:txBody>
+          <a:bodyPr xmlns:a="http://schemas.openxmlformats.org/drawingml/2006/main"/>
+          <a:lstStyle xmlns:a="http://schemas.openxmlformats.org/drawingml/2006/main"/>
+          <a:p xmlns:a="http://schemas.openxmlformats.org/drawingml/2006/main">
+            <a:r>
+              <a:t>[Sources]</a:t>
+            </a:r>
+          </a:p>
+          <a:p xmlns:a="http://schemas.openxmlformats.org/drawingml/2006/main">
+            <a:r>
+              <a:t>- Actual chatbot screenshot captured from the AG Health dashboard.</a:t>
+            </a:r>
+          </a:p>
+          <a:p xmlns:a="http://schemas.openxmlformats.org/drawingml/2006/main">
+            <a:r>
+              <a:t>- Chatbot behavior from src/app/ag-health/AgHealthChatbot.tsx.</a:t>
+            </a:r>
+          </a:p>
+        </p:txBody>
+      </p:sp>
+      <p:sp>
+        <p:nvSpPr>
+          <p:cNvPr id="4" name="Slide Number Placeholder 3"/>
+          <p:cNvSpPr>
+            <a:spLocks xmlns:a="http://schemas.openxmlformats.org/drawingml/2006/main" noGrp="1"/>
+          </p:cNvSpPr>
+          <p:nvPr>
+            <p:ph type="sldNum" idx="5"/>
+          </p:nvPr>
+        </p:nvSpPr>
+        <p:spPr/>
+        <p:txBody>
+          <a:bodyPr xmlns:a="http://schemas.openxmlformats.org/drawingml/2006/main"/>
+          <a:lstStyle xmlns:a="http://schemas.openxmlformats.org/drawingml/2006/main"/>
+          <a:p xmlns:a="http://schemas.openxmlformats.org/drawingml/2006/main"/>
+        </p:txBody>
+      </p:sp>
+    </p:spTree>
+  </p:cSld>
+  <p:clrMapOvr>
+    <a:masterClrMapping xmlns:a="http://schemas.openxmlformats.org/drawingml/2006/main"/>
+  </p:clrMapOvr>
+</p:notes>
+</file>
+
+<file path=ppt/notesSlides/notesSlide9.xml><?xml version="1.0" encoding="utf-8"?>
+<p:notes xmlns:p="http://schemas.openxmlformats.org/presentationml/2006/main">
+  <p:cSld>
+    <p:spTree>
+      <p:nvGrpSpPr>
+        <p:cNvPr id="1" name=""/>
+        <p:cNvGrpSpPr/>
+        <p:nvPr/>
+      </p:nvGrpSpPr>
+      <p:grpSpPr>
+        <a:xfrm xmlns:a="http://schemas.openxmlformats.org/drawingml/2006/main"/>
+      </p:grpSpPr>
+      <p:sp>
+        <p:nvSpPr>
+          <p:cNvPr id="2" name="Slide Image Placeholder 1"/>
+          <p:cNvSpPr>
+            <a:spLocks xmlns:a="http://schemas.openxmlformats.org/drawingml/2006/main" noGrp="1"/>
+          </p:cNvSpPr>
+          <p:nvPr>
+            <p:ph type="sldImg" idx="0"/>
+          </p:nvPr>
+        </p:nvSpPr>
+        <p:spPr/>
+      </p:sp>
+      <p:sp>
+        <p:nvSpPr>
+          <p:cNvPr id="3" name="Notes Placeholder 2"/>
+          <p:cNvSpPr>
+            <a:spLocks xmlns:a="http://schemas.openxmlformats.org/drawingml/2006/main" noGrp="1"/>
+          </p:cNvSpPr>
+          <p:nvPr>
+            <p:ph type="body" idx="1"/>
+          </p:nvPr>
+        </p:nvSpPr>
+        <p:spPr/>
+        <p:txBody>
+          <a:bodyPr xmlns:a="http://schemas.openxmlformats.org/drawingml/2006/main"/>
+          <a:lstStyle xmlns:a="http://schemas.openxmlformats.org/drawingml/2006/main"/>
+          <a:p xmlns:a="http://schemas.openxmlformats.org/drawingml/2006/main">
+            <a:r>
+              <a:t>[Sources]</a:t>
+            </a:r>
+          </a:p>
+          <a:p xmlns:a="http://schemas.openxmlformats.org/drawingml/2006/main">
+            <a:r>
+              <a:t>- Project capabilities from the current AG Health dashboard implementation and user requirements.</a:t>
             </a:r>
           </a:p>
         </p:txBody>
@@ -976,7 +1138,7 @@
   </p:cSld>
   <p:clrMap bg1="lt1" tx1="dk1" bg2="lt2" tx2="dk2" accent1="accent1" accent2="accent2" accent3="accent3" accent4="accent4" accent5="accent5" accent6="accent6" hlink="hlink" folHlink="folHlink"/>
   <p:sldLayoutIdLst>
-    <p:sldLayoutId xmlns:r="http://schemas.openxmlformats.org/officeDocument/2006/relationships" id="2147483649" r:id="R029ea590b1324bba"/>
+    <p:sldLayoutId xmlns:r="http://schemas.openxmlformats.org/officeDocument/2006/relationships" id="2147483649" r:id="R3211b77f98e54722"/>
   </p:sldLayoutIdLst>
   <p:txStyles>
     <p:titleStyle>
@@ -1509,7 +1671,7 @@
     <p:bg>
       <p:bgPr>
         <a:solidFill xmlns:a="http://schemas.openxmlformats.org/drawingml/2006/main">
-          <a:srgbClr val="F7FBFF"/>
+          <a:srgbClr val="17375F"/>
         </a:solidFill>
       </p:bgPr>
     </p:bg>
@@ -1527,25 +1689,25 @@
           <p:cNvPr id="13" name="">
             <a:extLst xmlns:a="http://schemas.openxmlformats.org/drawingml/2006/main">
               <a:ext uri="{FF2B5EF4-FFF2-40B4-BE49-F238E27FC236}">
-                <a16:creationId xmlns:a16="http://schemas.microsoft.com/office/drawing/2014/main" id="{ACA01CB8-1C48-4D31-8955-39C7E0C4F196}"/>
-              </a:ext>
-            </a:extLst>
-          </p:cNvPr>
-          <p:cNvSpPr>
-            <a:spLocks xmlns:a="http://schemas.openxmlformats.org/drawingml/2006/main" noGrp="1"/>
-          </p:cNvSpPr>
-          <p:nvPr/>
-        </p:nvSpPr>
-        <p:spPr>
-          <a:xfrm xmlns:a="http://schemas.openxmlformats.org/drawingml/2006/main">
-            <a:off x="10096500" y="0"/>
-            <a:ext cx="2000250" cy="2000250"/>
+                <a16:creationId xmlns:a16="http://schemas.microsoft.com/office/drawing/2014/main" id="{E03FE2E0-E600-4501-8BA2-DB1AA29734DC}"/>
+              </a:ext>
+            </a:extLst>
+          </p:cNvPr>
+          <p:cNvSpPr>
+            <a:spLocks xmlns:a="http://schemas.openxmlformats.org/drawingml/2006/main" noGrp="1"/>
+          </p:cNvSpPr>
+          <p:nvPr/>
+        </p:nvSpPr>
+        <p:spPr>
+          <a:xfrm xmlns:a="http://schemas.openxmlformats.org/drawingml/2006/main">
+            <a:off x="8572500" y="476250"/>
+            <a:ext cx="2952750" cy="2952750"/>
           </a:xfrm>
           <a:prstGeom xmlns:a="http://schemas.openxmlformats.org/drawingml/2006/main" prst="ellipse">
             <a:avLst/>
           </a:prstGeom>
           <a:solidFill xmlns:a="http://schemas.openxmlformats.org/drawingml/2006/main">
-            <a:srgbClr val="EAF4FF"/>
+            <a:srgbClr val="244D7D"/>
           </a:solidFill>
           <a:ln xmlns:a="http://schemas.openxmlformats.org/drawingml/2006/main" w="0">
             <a:noFill/>
@@ -1558,25 +1720,25 @@
           <p:cNvPr id="2" name="">
             <a:extLst xmlns:a="http://schemas.openxmlformats.org/drawingml/2006/main">
               <a:ext uri="{FF2B5EF4-FFF2-40B4-BE49-F238E27FC236}">
-                <a16:creationId xmlns:a16="http://schemas.microsoft.com/office/drawing/2014/main" id="{FD3FF407-5863-4D97-BB3B-DFBCA953F394}"/>
-              </a:ext>
-            </a:extLst>
-          </p:cNvPr>
-          <p:cNvSpPr>
-            <a:spLocks xmlns:a="http://schemas.openxmlformats.org/drawingml/2006/main" noGrp="1"/>
-          </p:cNvSpPr>
-          <p:nvPr/>
-        </p:nvSpPr>
-        <p:spPr>
-          <a:xfrm xmlns:a="http://schemas.openxmlformats.org/drawingml/2006/main">
-            <a:off x="0" y="5524500"/>
-            <a:ext cx="1333500" cy="1333500"/>
+                <a16:creationId xmlns:a16="http://schemas.microsoft.com/office/drawing/2014/main" id="{A8039C65-ACC2-4552-A074-7179738087AE}"/>
+              </a:ext>
+            </a:extLst>
+          </p:cNvPr>
+          <p:cNvSpPr>
+            <a:spLocks xmlns:a="http://schemas.openxmlformats.org/drawingml/2006/main" noGrp="1"/>
+          </p:cNvSpPr>
+          <p:nvPr/>
+        </p:nvSpPr>
+        <p:spPr>
+          <a:xfrm xmlns:a="http://schemas.openxmlformats.org/drawingml/2006/main">
+            <a:off x="285750" y="5143500"/>
+            <a:ext cx="1428750" cy="1428750"/>
           </a:xfrm>
           <a:prstGeom xmlns:a="http://schemas.openxmlformats.org/drawingml/2006/main" prst="ellipse">
             <a:avLst/>
           </a:prstGeom>
           <a:solidFill xmlns:a="http://schemas.openxmlformats.org/drawingml/2006/main">
-            <a:srgbClr val="FFF3D6"/>
+            <a:srgbClr val="294F78"/>
           </a:solidFill>
           <a:ln xmlns:a="http://schemas.openxmlformats.org/drawingml/2006/main" w="0">
             <a:noFill/>
@@ -1589,18 +1751,18 @@
           <p:cNvPr id="3" name="">
             <a:extLst xmlns:a="http://schemas.openxmlformats.org/drawingml/2006/main">
               <a:ext uri="{FF2B5EF4-FFF2-40B4-BE49-F238E27FC236}">
-                <a16:creationId xmlns:a16="http://schemas.microsoft.com/office/drawing/2014/main" id="{7F7D3740-9A5B-4D8D-BFCA-B77562DEB519}"/>
-              </a:ext>
-            </a:extLst>
-          </p:cNvPr>
-          <p:cNvSpPr>
-            <a:spLocks xmlns:a="http://schemas.openxmlformats.org/drawingml/2006/main" noGrp="1"/>
-          </p:cNvSpPr>
-          <p:nvPr/>
-        </p:nvSpPr>
-        <p:spPr>
-          <a:xfrm xmlns:a="http://schemas.openxmlformats.org/drawingml/2006/main">
-            <a:off x="723900" y="552450"/>
+                <a16:creationId xmlns:a16="http://schemas.microsoft.com/office/drawing/2014/main" id="{39582A5C-5B94-4DFD-BF6C-430DC5D74A12}"/>
+              </a:ext>
+            </a:extLst>
+          </p:cNvPr>
+          <p:cNvSpPr>
+            <a:spLocks xmlns:a="http://schemas.openxmlformats.org/drawingml/2006/main" noGrp="1"/>
+          </p:cNvSpPr>
+          <p:nvPr/>
+        </p:nvSpPr>
+        <p:spPr>
+          <a:xfrm xmlns:a="http://schemas.openxmlformats.org/drawingml/2006/main">
+            <a:off x="723900" y="533400"/>
             <a:ext cx="2286000" cy="266700"/>
           </a:xfrm>
           <a:prstGeom xmlns:a="http://schemas.openxmlformats.org/drawingml/2006/main" prst="rect">
@@ -1639,19 +1801,19 @@
           <p:cNvPr id="4" name="">
             <a:extLst xmlns:a="http://schemas.openxmlformats.org/drawingml/2006/main">
               <a:ext uri="{FF2B5EF4-FFF2-40B4-BE49-F238E27FC236}">
-                <a16:creationId xmlns:a16="http://schemas.microsoft.com/office/drawing/2014/main" id="{1F0D0D8C-8459-4CC6-950E-A50C02432C5F}"/>
-              </a:ext>
-            </a:extLst>
-          </p:cNvPr>
-          <p:cNvSpPr>
-            <a:spLocks xmlns:a="http://schemas.openxmlformats.org/drawingml/2006/main" noGrp="1"/>
-          </p:cNvSpPr>
-          <p:nvPr/>
-        </p:nvSpPr>
-        <p:spPr>
-          <a:xfrm xmlns:a="http://schemas.openxmlformats.org/drawingml/2006/main">
-            <a:off x="723900" y="1257300"/>
-            <a:ext cx="6096000" cy="1352550"/>
+                <a16:creationId xmlns:a16="http://schemas.microsoft.com/office/drawing/2014/main" id="{F1A6B43D-3FC6-4B70-93D3-2352AAFD603C}"/>
+              </a:ext>
+            </a:extLst>
+          </p:cNvPr>
+          <p:cNvSpPr>
+            <a:spLocks xmlns:a="http://schemas.openxmlformats.org/drawingml/2006/main" noGrp="1"/>
+          </p:cNvSpPr>
+          <p:nvPr/>
+        </p:nvSpPr>
+        <p:spPr>
+          <a:xfrm xmlns:a="http://schemas.openxmlformats.org/drawingml/2006/main">
+            <a:off x="723900" y="1381125"/>
+            <a:ext cx="5715000" cy="1428750"/>
           </a:xfrm>
           <a:prstGeom xmlns:a="http://schemas.openxmlformats.org/drawingml/2006/main" prst="rect">
             <a:avLst/>
@@ -1667,19 +1829,19 @@
           <a:lstStyle xmlns:a="http://schemas.openxmlformats.org/drawingml/2006/main"/>
           <a:p xmlns:a="http://schemas.openxmlformats.org/drawingml/2006/main">
             <a:pPr algn="l">
-              <a:defRPr sz="4125" b="1">
-                <a:solidFill>
-                  <a:srgbClr val="111827"/>
+              <a:defRPr sz="4050" b="1">
+                <a:solidFill>
+                  <a:srgbClr val="FFFFFF"/>
                 </a:solidFill>
               </a:defRPr>
             </a:pPr>
             <a:r>
-              <a:rPr sz="4125" b="1">
-                <a:solidFill>
-                  <a:srgbClr val="111827"/>
+              <a:rPr sz="4050" b="1">
+                <a:solidFill>
+                  <a:srgbClr val="FFFFFF"/>
                 </a:solidFill>
               </a:rPr>
-              <a:t>A smarter way to see factory performance</a:t>
+              <a:t>ERP intelligence for faster factory decisions</a:t>
             </a:r>
           </a:p>
         </p:txBody>
@@ -1689,19 +1851,19 @@
           <p:cNvPr id="5" name="">
             <a:extLst xmlns:a="http://schemas.openxmlformats.org/drawingml/2006/main">
               <a:ext uri="{FF2B5EF4-FFF2-40B4-BE49-F238E27FC236}">
-                <a16:creationId xmlns:a16="http://schemas.microsoft.com/office/drawing/2014/main" id="{44C023B7-7957-4C8B-B5F5-C1857315A45E}"/>
-              </a:ext>
-            </a:extLst>
-          </p:cNvPr>
-          <p:cNvSpPr>
-            <a:spLocks xmlns:a="http://schemas.openxmlformats.org/drawingml/2006/main" noGrp="1"/>
-          </p:cNvSpPr>
-          <p:nvPr/>
-        </p:nvSpPr>
-        <p:spPr>
-          <a:xfrm xmlns:a="http://schemas.openxmlformats.org/drawingml/2006/main">
-            <a:off x="762000" y="3009900"/>
-            <a:ext cx="5334000" cy="819150"/>
+                <a16:creationId xmlns:a16="http://schemas.microsoft.com/office/drawing/2014/main" id="{404B85A9-3A69-4D26-AE43-31EA0CBC578D}"/>
+              </a:ext>
+            </a:extLst>
+          </p:cNvPr>
+          <p:cNvSpPr>
+            <a:spLocks xmlns:a="http://schemas.openxmlformats.org/drawingml/2006/main" noGrp="1"/>
+          </p:cNvSpPr>
+          <p:nvPr/>
+        </p:nvSpPr>
+        <p:spPr>
+          <a:xfrm xmlns:a="http://schemas.openxmlformats.org/drawingml/2006/main">
+            <a:off x="762000" y="3162300"/>
+            <a:ext cx="5334000" cy="857250"/>
           </a:xfrm>
           <a:prstGeom xmlns:a="http://schemas.openxmlformats.org/drawingml/2006/main" prst="rect">
             <a:avLst/>
@@ -1719,70 +1881,43 @@
             <a:pPr algn="l">
               <a:defRPr sz="1800" b="0">
                 <a:solidFill>
-                  <a:srgbClr val="516173"/>
+                  <a:srgbClr val="DCE8F8"/>
                 </a:solidFill>
               </a:defRPr>
             </a:pPr>
             <a:r>
               <a:rPr sz="1800" b="0">
                 <a:solidFill>
-                  <a:srgbClr val="516173"/>
+                  <a:srgbClr val="DCE8F8"/>
                 </a:solidFill>
               </a:rPr>
-              <a:t>A premium ERP intelligence layer for management: live insight, cleaner reporting, and faster decisions without spreadsheet hunting.</a:t>
-            </a:r>
-          </a:p>
-        </p:txBody>
-      </p:sp>
-      <p:pic>
-        <p:nvPicPr>
-          <p:cNvPr id="18" name=""/>
-          <p:cNvPicPr>
-            <a:picLocks xmlns:a="http://schemas.openxmlformats.org/drawingml/2006/main" noChangeAspect="1"/>
-          </p:cNvPicPr>
-          <p:nvPr/>
-        </p:nvPicPr>
-        <p:blipFill>
-          <a:blip xmlns:r="http://schemas.openxmlformats.org/officeDocument/2006/relationships" xmlns:a="http://schemas.openxmlformats.org/drawingml/2006/main" r:embed="Ra8498958ae0b458d"/>
-          <a:srcRect xmlns:a="http://schemas.openxmlformats.org/drawingml/2006/main" l="12841" t="0" r="12841" b="0"/>
-          <a:stretch xmlns:a="http://schemas.openxmlformats.org/drawingml/2006/main">
-            <a:fillRect l="0" t="0" r="0" b="0"/>
-          </a:stretch>
-        </p:blipFill>
-        <p:spPr>
-          <a:xfrm xmlns:a="http://schemas.openxmlformats.org/drawingml/2006/main">
-            <a:off x="6572250" y="781050"/>
-            <a:ext cx="4905375" cy="3714750"/>
+              <a:t>A premium management layer that turns Business Central data into clear dashboards, focused modules, and simple answers.</a:t>
+            </a:r>
+          </a:p>
+        </p:txBody>
+      </p:sp>
+      <p:sp>
+        <p:nvSpPr>
+          <p:cNvPr id="6" name="">
+            <a:extLst xmlns:a="http://schemas.openxmlformats.org/drawingml/2006/main">
+              <a:ext uri="{FF2B5EF4-FFF2-40B4-BE49-F238E27FC236}">
+                <a16:creationId xmlns:a16="http://schemas.microsoft.com/office/drawing/2014/main" id="{7D3B34EC-E95D-451B-8B56-99F66AF30309}"/>
+              </a:ext>
+            </a:extLst>
+          </p:cNvPr>
+          <p:cNvSpPr>
+            <a:spLocks xmlns:a="http://schemas.openxmlformats.org/drawingml/2006/main" noGrp="1"/>
+          </p:cNvSpPr>
+          <p:nvPr/>
+        </p:nvSpPr>
+        <p:spPr>
+          <a:xfrm xmlns:a="http://schemas.openxmlformats.org/drawingml/2006/main">
+            <a:off x="6724650" y="1181100"/>
+            <a:ext cx="4362450" cy="3028950"/>
           </a:xfrm>
           <a:prstGeom xmlns:a="http://schemas.openxmlformats.org/drawingml/2006/main" prst="roundRect">
             <a:avLst>
-              <a:gd name="adj" fmla="val 4103"/>
-            </a:avLst>
-          </a:prstGeom>
-        </p:spPr>
-      </p:pic>
-      <p:sp>
-        <p:nvSpPr>
-          <p:cNvPr id="7" name="">
-            <a:extLst xmlns:a="http://schemas.openxmlformats.org/drawingml/2006/main">
-              <a:ext uri="{FF2B5EF4-FFF2-40B4-BE49-F238E27FC236}">
-                <a16:creationId xmlns:a16="http://schemas.microsoft.com/office/drawing/2014/main" id="{FD6BE9C4-CD25-48BC-A821-E6C75517B27C}"/>
-              </a:ext>
-            </a:extLst>
-          </p:cNvPr>
-          <p:cNvSpPr>
-            <a:spLocks xmlns:a="http://schemas.openxmlformats.org/drawingml/2006/main" noGrp="1"/>
-          </p:cNvSpPr>
-          <p:nvPr/>
-        </p:nvSpPr>
-        <p:spPr>
-          <a:xfrm xmlns:a="http://schemas.openxmlformats.org/drawingml/2006/main">
-            <a:off x="762000" y="4953000"/>
-            <a:ext cx="2190750" cy="457200"/>
-          </a:xfrm>
-          <a:prstGeom xmlns:a="http://schemas.openxmlformats.org/drawingml/2006/main" prst="roundRect">
-            <a:avLst>
-              <a:gd name="adj" fmla="val 33333"/>
+              <a:gd name="adj" fmla="val 5031"/>
             </a:avLst>
           </a:prstGeom>
           <a:solidFill xmlns:a="http://schemas.openxmlformats.org/drawingml/2006/main">
@@ -1804,22 +1939,175 @@
       </p:sp>
       <p:sp>
         <p:nvSpPr>
+          <p:cNvPr id="7" name="">
+            <a:extLst xmlns:a="http://schemas.openxmlformats.org/drawingml/2006/main">
+              <a:ext uri="{FF2B5EF4-FFF2-40B4-BE49-F238E27FC236}">
+                <a16:creationId xmlns:a16="http://schemas.microsoft.com/office/drawing/2014/main" id="{7125C934-6FD2-4FBE-A8AB-21F6C73A4E46}"/>
+              </a:ext>
+            </a:extLst>
+          </p:cNvPr>
+          <p:cNvSpPr>
+            <a:spLocks xmlns:a="http://schemas.openxmlformats.org/drawingml/2006/main" noGrp="1"/>
+          </p:cNvSpPr>
+          <p:nvPr/>
+        </p:nvSpPr>
+        <p:spPr>
+          <a:xfrm xmlns:a="http://schemas.openxmlformats.org/drawingml/2006/main">
+            <a:off x="6724650" y="1181100"/>
+            <a:ext cx="4362450" cy="419100"/>
+          </a:xfrm>
+          <a:prstGeom xmlns:a="http://schemas.openxmlformats.org/drawingml/2006/main" prst="roundRect">
+            <a:avLst>
+              <a:gd name="adj" fmla="val 36364"/>
+            </a:avLst>
+          </a:prstGeom>
+          <a:solidFill xmlns:a="http://schemas.openxmlformats.org/drawingml/2006/main">
+            <a:srgbClr val="17375F"/>
+          </a:solidFill>
+          <a:ln xmlns:a="http://schemas.openxmlformats.org/drawingml/2006/main" w="0">
+            <a:noFill/>
+            <a:prstDash val="solid"/>
+          </a:ln>
+        </p:spPr>
+      </p:sp>
+      <p:sp>
+        <p:nvSpPr>
           <p:cNvPr id="8" name="">
             <a:extLst xmlns:a="http://schemas.openxmlformats.org/drawingml/2006/main">
               <a:ext uri="{FF2B5EF4-FFF2-40B4-BE49-F238E27FC236}">
-                <a16:creationId xmlns:a16="http://schemas.microsoft.com/office/drawing/2014/main" id="{FA1642A4-B67B-411F-B202-F81F05FFC192}"/>
-              </a:ext>
-            </a:extLst>
-          </p:cNvPr>
-          <p:cNvSpPr>
-            <a:spLocks xmlns:a="http://schemas.openxmlformats.org/drawingml/2006/main" noGrp="1"/>
-          </p:cNvSpPr>
-          <p:nvPr/>
-        </p:nvSpPr>
-        <p:spPr>
-          <a:xfrm xmlns:a="http://schemas.openxmlformats.org/drawingml/2006/main">
-            <a:off x="971550" y="5076825"/>
-            <a:ext cx="1790700" cy="228600"/>
+                <a16:creationId xmlns:a16="http://schemas.microsoft.com/office/drawing/2014/main" id="{347CEF29-7316-4879-B249-E55EE6F27300}"/>
+              </a:ext>
+            </a:extLst>
+          </p:cNvPr>
+          <p:cNvSpPr>
+            <a:spLocks xmlns:a="http://schemas.openxmlformats.org/drawingml/2006/main" noGrp="1"/>
+          </p:cNvSpPr>
+          <p:nvPr/>
+        </p:nvSpPr>
+        <p:spPr>
+          <a:xfrm xmlns:a="http://schemas.openxmlformats.org/drawingml/2006/main">
+            <a:off x="6934200" y="1295400"/>
+            <a:ext cx="95250" cy="95250"/>
+          </a:xfrm>
+          <a:prstGeom xmlns:a="http://schemas.openxmlformats.org/drawingml/2006/main" prst="ellipse">
+            <a:avLst/>
+          </a:prstGeom>
+          <a:solidFill xmlns:a="http://schemas.openxmlformats.org/drawingml/2006/main">
+            <a:srgbClr val="FF6464"/>
+          </a:solidFill>
+          <a:ln xmlns:a="http://schemas.openxmlformats.org/drawingml/2006/main" w="0">
+            <a:noFill/>
+            <a:prstDash val="solid"/>
+          </a:ln>
+        </p:spPr>
+      </p:sp>
+      <p:sp>
+        <p:nvSpPr>
+          <p:cNvPr id="9" name="">
+            <a:extLst xmlns:a="http://schemas.openxmlformats.org/drawingml/2006/main">
+              <a:ext uri="{FF2B5EF4-FFF2-40B4-BE49-F238E27FC236}">
+                <a16:creationId xmlns:a16="http://schemas.microsoft.com/office/drawing/2014/main" id="{9FE9B294-7CB5-4773-A6F2-89A4EF241123}"/>
+              </a:ext>
+            </a:extLst>
+          </p:cNvPr>
+          <p:cNvSpPr>
+            <a:spLocks xmlns:a="http://schemas.openxmlformats.org/drawingml/2006/main" noGrp="1"/>
+          </p:cNvSpPr>
+          <p:nvPr/>
+        </p:nvSpPr>
+        <p:spPr>
+          <a:xfrm xmlns:a="http://schemas.openxmlformats.org/drawingml/2006/main">
+            <a:off x="7105650" y="1295400"/>
+            <a:ext cx="95250" cy="95250"/>
+          </a:xfrm>
+          <a:prstGeom xmlns:a="http://schemas.openxmlformats.org/drawingml/2006/main" prst="ellipse">
+            <a:avLst/>
+          </a:prstGeom>
+          <a:solidFill xmlns:a="http://schemas.openxmlformats.org/drawingml/2006/main">
+            <a:srgbClr val="FFD166"/>
+          </a:solidFill>
+          <a:ln xmlns:a="http://schemas.openxmlformats.org/drawingml/2006/main" w="0">
+            <a:noFill/>
+            <a:prstDash val="solid"/>
+          </a:ln>
+        </p:spPr>
+      </p:sp>
+      <p:sp>
+        <p:nvSpPr>
+          <p:cNvPr id="10" name="">
+            <a:extLst xmlns:a="http://schemas.openxmlformats.org/drawingml/2006/main">
+              <a:ext uri="{FF2B5EF4-FFF2-40B4-BE49-F238E27FC236}">
+                <a16:creationId xmlns:a16="http://schemas.microsoft.com/office/drawing/2014/main" id="{801F0913-723E-4886-8BC5-AE3D7A51DDF6}"/>
+              </a:ext>
+            </a:extLst>
+          </p:cNvPr>
+          <p:cNvSpPr>
+            <a:spLocks xmlns:a="http://schemas.openxmlformats.org/drawingml/2006/main" noGrp="1"/>
+          </p:cNvSpPr>
+          <p:nvPr/>
+        </p:nvSpPr>
+        <p:spPr>
+          <a:xfrm xmlns:a="http://schemas.openxmlformats.org/drawingml/2006/main">
+            <a:off x="7277100" y="1295400"/>
+            <a:ext cx="95250" cy="95250"/>
+          </a:xfrm>
+          <a:prstGeom xmlns:a="http://schemas.openxmlformats.org/drawingml/2006/main" prst="ellipse">
+            <a:avLst/>
+          </a:prstGeom>
+          <a:solidFill xmlns:a="http://schemas.openxmlformats.org/drawingml/2006/main">
+            <a:srgbClr val="06D6A0"/>
+          </a:solidFill>
+          <a:ln xmlns:a="http://schemas.openxmlformats.org/drawingml/2006/main" w="0">
+            <a:noFill/>
+            <a:prstDash val="solid"/>
+          </a:ln>
+        </p:spPr>
+      </p:sp>
+      <p:pic>
+        <p:nvPicPr>
+          <p:cNvPr id="23" name=""/>
+          <p:cNvPicPr>
+            <a:picLocks xmlns:a="http://schemas.openxmlformats.org/drawingml/2006/main" noChangeAspect="1"/>
+          </p:cNvPicPr>
+          <p:nvPr/>
+        </p:nvPicPr>
+        <p:blipFill>
+          <a:blip xmlns:r="http://schemas.openxmlformats.org/officeDocument/2006/relationships" xmlns:a="http://schemas.openxmlformats.org/drawingml/2006/main" r:embed="R0af68cc2990045c8"/>
+          <a:srcRect xmlns:a="http://schemas.openxmlformats.org/drawingml/2006/main" l="4034" t="0" r="4034" b="0"/>
+          <a:stretch xmlns:a="http://schemas.openxmlformats.org/drawingml/2006/main">
+            <a:fillRect l="0" t="0" r="0" b="0"/>
+          </a:stretch>
+        </p:blipFill>
+        <p:spPr>
+          <a:xfrm xmlns:a="http://schemas.openxmlformats.org/drawingml/2006/main">
+            <a:off x="6858000" y="1314450"/>
+            <a:ext cx="4095750" cy="2762250"/>
+          </a:xfrm>
+          <a:prstGeom xmlns:a="http://schemas.openxmlformats.org/drawingml/2006/main" prst="roundRect">
+            <a:avLst>
+              <a:gd name="adj" fmla="val 4138"/>
+            </a:avLst>
+          </a:prstGeom>
+        </p:spPr>
+      </p:pic>
+      <p:sp>
+        <p:nvSpPr>
+          <p:cNvPr id="12" name="">
+            <a:extLst xmlns:a="http://schemas.openxmlformats.org/drawingml/2006/main">
+              <a:ext uri="{FF2B5EF4-FFF2-40B4-BE49-F238E27FC236}">
+                <a16:creationId xmlns:a16="http://schemas.microsoft.com/office/drawing/2014/main" id="{ACBFCFCF-72D7-443C-98DA-4DCCA0E6760E}"/>
+              </a:ext>
+            </a:extLst>
+          </p:cNvPr>
+          <p:cNvSpPr>
+            <a:spLocks xmlns:a="http://schemas.openxmlformats.org/drawingml/2006/main" noGrp="1"/>
+          </p:cNvSpPr>
+          <p:nvPr/>
+        </p:nvSpPr>
+        <p:spPr>
+          <a:xfrm xmlns:a="http://schemas.openxmlformats.org/drawingml/2006/main">
+            <a:off x="762000" y="5238750"/>
+            <a:ext cx="5334000" cy="381000"/>
           </a:xfrm>
           <a:prstGeom xmlns:a="http://schemas.openxmlformats.org/drawingml/2006/main" prst="rect">
             <a:avLst/>
@@ -1835,201 +2123,19 @@
           <a:lstStyle xmlns:a="http://schemas.openxmlformats.org/drawingml/2006/main"/>
           <a:p xmlns:a="http://schemas.openxmlformats.org/drawingml/2006/main">
             <a:pPr algn="l">
-              <a:defRPr sz="1275" b="1">
-                <a:solidFill>
-                  <a:srgbClr val="17375F"/>
+              <a:defRPr sz="2100" b="1">
+                <a:solidFill>
+                  <a:srgbClr val="FFFFFF"/>
                 </a:solidFill>
               </a:defRPr>
             </a:pPr>
             <a:r>
-              <a:rPr sz="1275" b="1">
-                <a:solidFill>
-                  <a:srgbClr val="17375F"/>
+              <a:rPr sz="2100" b="1">
+                <a:solidFill>
+                  <a:srgbClr val="FFFFFF"/>
                 </a:solidFill>
               </a:rPr>
-              <a:t>Live ERP</a:t>
-            </a:r>
-          </a:p>
-        </p:txBody>
-      </p:sp>
-      <p:sp>
-        <p:nvSpPr>
-          <p:cNvPr id="9" name="">
-            <a:extLst xmlns:a="http://schemas.openxmlformats.org/drawingml/2006/main">
-              <a:ext uri="{FF2B5EF4-FFF2-40B4-BE49-F238E27FC236}">
-                <a16:creationId xmlns:a16="http://schemas.microsoft.com/office/drawing/2014/main" id="{06D77E8D-40EC-4547-A208-DC7DA1B1450A}"/>
-              </a:ext>
-            </a:extLst>
-          </p:cNvPr>
-          <p:cNvSpPr>
-            <a:spLocks xmlns:a="http://schemas.openxmlformats.org/drawingml/2006/main" noGrp="1"/>
-          </p:cNvSpPr>
-          <p:nvPr/>
-        </p:nvSpPr>
-        <p:spPr>
-          <a:xfrm xmlns:a="http://schemas.openxmlformats.org/drawingml/2006/main">
-            <a:off x="3162300" y="4953000"/>
-            <a:ext cx="2190750" cy="457200"/>
-          </a:xfrm>
-          <a:prstGeom xmlns:a="http://schemas.openxmlformats.org/drawingml/2006/main" prst="roundRect">
-            <a:avLst>
-              <a:gd name="adj" fmla="val 33333"/>
-            </a:avLst>
-          </a:prstGeom>
-          <a:solidFill xmlns:a="http://schemas.openxmlformats.org/drawingml/2006/main">
-            <a:srgbClr val="FFFFFF"/>
-          </a:solidFill>
-          <a:ln xmlns:a="http://schemas.openxmlformats.org/drawingml/2006/main" w="9525">
-            <a:solidFill>
-              <a:srgbClr val="DBE8F4"/>
-            </a:solidFill>
-            <a:prstDash val="solid"/>
-          </a:ln>
-        </p:spPr>
-        <p:style>
-          <a:lnRef xmlns:a="http://schemas.openxmlformats.org/drawingml/2006/main" idx="0"/>
-          <a:fillRef xmlns:a="http://schemas.openxmlformats.org/drawingml/2006/main" idx="0"/>
-          <a:effectRef xmlns:a="http://schemas.openxmlformats.org/drawingml/2006/main" idx="4"/>
-          <a:fontRef xmlns:a="http://schemas.openxmlformats.org/drawingml/2006/main" idx="major"/>
-        </p:style>
-      </p:sp>
-      <p:sp>
-        <p:nvSpPr>
-          <p:cNvPr id="10" name="">
-            <a:extLst xmlns:a="http://schemas.openxmlformats.org/drawingml/2006/main">
-              <a:ext uri="{FF2B5EF4-FFF2-40B4-BE49-F238E27FC236}">
-                <a16:creationId xmlns:a16="http://schemas.microsoft.com/office/drawing/2014/main" id="{EC2BC688-F3B2-44C9-B1B5-BD80402CED3D}"/>
-              </a:ext>
-            </a:extLst>
-          </p:cNvPr>
-          <p:cNvSpPr>
-            <a:spLocks xmlns:a="http://schemas.openxmlformats.org/drawingml/2006/main" noGrp="1"/>
-          </p:cNvSpPr>
-          <p:nvPr/>
-        </p:nvSpPr>
-        <p:spPr>
-          <a:xfrm xmlns:a="http://schemas.openxmlformats.org/drawingml/2006/main">
-            <a:off x="3371850" y="5076825"/>
-            <a:ext cx="1790700" cy="228600"/>
-          </a:xfrm>
-          <a:prstGeom xmlns:a="http://schemas.openxmlformats.org/drawingml/2006/main" prst="rect">
-            <a:avLst/>
-          </a:prstGeom>
-          <a:noFill xmlns:a="http://schemas.openxmlformats.org/drawingml/2006/main"/>
-          <a:ln xmlns:a="http://schemas.openxmlformats.org/drawingml/2006/main" w="0">
-            <a:noFill/>
-            <a:prstDash val="solid"/>
-          </a:ln>
-        </p:spPr>
-        <p:txBody>
-          <a:bodyPr xmlns:a="http://schemas.openxmlformats.org/drawingml/2006/main"/>
-          <a:lstStyle xmlns:a="http://schemas.openxmlformats.org/drawingml/2006/main"/>
-          <a:p xmlns:a="http://schemas.openxmlformats.org/drawingml/2006/main">
-            <a:pPr algn="l">
-              <a:defRPr sz="1275" b="1">
-                <a:solidFill>
-                  <a:srgbClr val="17375F"/>
-                </a:solidFill>
-              </a:defRPr>
-            </a:pPr>
-            <a:r>
-              <a:rPr sz="1275" b="1">
-                <a:solidFill>
-                  <a:srgbClr val="17375F"/>
-                </a:solidFill>
-              </a:rPr>
-              <a:t>Clean dashboards</a:t>
-            </a:r>
-          </a:p>
-        </p:txBody>
-      </p:sp>
-      <p:sp>
-        <p:nvSpPr>
-          <p:cNvPr id="11" name="">
-            <a:extLst xmlns:a="http://schemas.openxmlformats.org/drawingml/2006/main">
-              <a:ext uri="{FF2B5EF4-FFF2-40B4-BE49-F238E27FC236}">
-                <a16:creationId xmlns:a16="http://schemas.microsoft.com/office/drawing/2014/main" id="{ACA1B19F-6B7D-4E6F-8B7E-6E654A49B39D}"/>
-              </a:ext>
-            </a:extLst>
-          </p:cNvPr>
-          <p:cNvSpPr>
-            <a:spLocks xmlns:a="http://schemas.openxmlformats.org/drawingml/2006/main" noGrp="1"/>
-          </p:cNvSpPr>
-          <p:nvPr/>
-        </p:nvSpPr>
-        <p:spPr>
-          <a:xfrm xmlns:a="http://schemas.openxmlformats.org/drawingml/2006/main">
-            <a:off x="5562600" y="4953000"/>
-            <a:ext cx="2190750" cy="457200"/>
-          </a:xfrm>
-          <a:prstGeom xmlns:a="http://schemas.openxmlformats.org/drawingml/2006/main" prst="roundRect">
-            <a:avLst>
-              <a:gd name="adj" fmla="val 33333"/>
-            </a:avLst>
-          </a:prstGeom>
-          <a:solidFill xmlns:a="http://schemas.openxmlformats.org/drawingml/2006/main">
-            <a:srgbClr val="FFFFFF"/>
-          </a:solidFill>
-          <a:ln xmlns:a="http://schemas.openxmlformats.org/drawingml/2006/main" w="9525">
-            <a:solidFill>
-              <a:srgbClr val="DBE8F4"/>
-            </a:solidFill>
-            <a:prstDash val="solid"/>
-          </a:ln>
-        </p:spPr>
-        <p:style>
-          <a:lnRef xmlns:a="http://schemas.openxmlformats.org/drawingml/2006/main" idx="0"/>
-          <a:fillRef xmlns:a="http://schemas.openxmlformats.org/drawingml/2006/main" idx="0"/>
-          <a:effectRef xmlns:a="http://schemas.openxmlformats.org/drawingml/2006/main" idx="4"/>
-          <a:fontRef xmlns:a="http://schemas.openxmlformats.org/drawingml/2006/main" idx="major"/>
-        </p:style>
-      </p:sp>
-      <p:sp>
-        <p:nvSpPr>
-          <p:cNvPr id="12" name="">
-            <a:extLst xmlns:a="http://schemas.openxmlformats.org/drawingml/2006/main">
-              <a:ext uri="{FF2B5EF4-FFF2-40B4-BE49-F238E27FC236}">
-                <a16:creationId xmlns:a16="http://schemas.microsoft.com/office/drawing/2014/main" id="{4E524103-0E47-4D22-A7CA-261E3B554EF2}"/>
-              </a:ext>
-            </a:extLst>
-          </p:cNvPr>
-          <p:cNvSpPr>
-            <a:spLocks xmlns:a="http://schemas.openxmlformats.org/drawingml/2006/main" noGrp="1"/>
-          </p:cNvSpPr>
-          <p:nvPr/>
-        </p:nvSpPr>
-        <p:spPr>
-          <a:xfrm xmlns:a="http://schemas.openxmlformats.org/drawingml/2006/main">
-            <a:off x="5772150" y="5076825"/>
-            <a:ext cx="1790700" cy="228600"/>
-          </a:xfrm>
-          <a:prstGeom xmlns:a="http://schemas.openxmlformats.org/drawingml/2006/main" prst="rect">
-            <a:avLst/>
-          </a:prstGeom>
-          <a:noFill xmlns:a="http://schemas.openxmlformats.org/drawingml/2006/main"/>
-          <a:ln xmlns:a="http://schemas.openxmlformats.org/drawingml/2006/main" w="0">
-            <a:noFill/>
-            <a:prstDash val="solid"/>
-          </a:ln>
-        </p:spPr>
-        <p:txBody>
-          <a:bodyPr xmlns:a="http://schemas.openxmlformats.org/drawingml/2006/main"/>
-          <a:lstStyle xmlns:a="http://schemas.openxmlformats.org/drawingml/2006/main"/>
-          <a:p xmlns:a="http://schemas.openxmlformats.org/drawingml/2006/main">
-            <a:pPr algn="l">
-              <a:defRPr sz="1275" b="1">
-                <a:solidFill>
-                  <a:srgbClr val="17375F"/>
-                </a:solidFill>
-              </a:defRPr>
-            </a:pPr>
-            <a:r>
-              <a:rPr sz="1275" b="1">
-                <a:solidFill>
-                  <a:srgbClr val="17375F"/>
-                </a:solidFill>
-              </a:rPr>
-              <a:t>Ask data</a:t>
+              <a:t>Built to be shown, understood, and saved.</a:t>
             </a:r>
           </a:p>
         </p:txBody>
@@ -2037,7 +2143,7 @@
     </p:spTree>
     <p:extLst>
       <p:ext uri="{BB962C8B-B14F-4D97-AF65-F5344CB8AC3E}">
-        <p14:creationId xmlns:p14="http://schemas.microsoft.com/office/powerpoint/2010/main" val="378029152"/>
+        <p14:creationId xmlns:p14="http://schemas.microsoft.com/office/powerpoint/2010/main" val="191007217"/>
       </p:ext>
     </p:extLst>
   </p:cSld>
@@ -2050,7 +2156,7 @@
     <p:bg>
       <p:bgPr>
         <a:solidFill xmlns:a="http://schemas.openxmlformats.org/drawingml/2006/main">
-          <a:srgbClr val="F7FBFF"/>
+          <a:srgbClr val="F6FBFF"/>
         </a:solidFill>
       </p:bgPr>
     </p:bg>
@@ -2065,22 +2171,22 @@
       </p:grpSpPr>
       <p:sp>
         <p:nvSpPr>
-          <p:cNvPr id="19" name="">
-            <a:extLst xmlns:a="http://schemas.openxmlformats.org/drawingml/2006/main">
-              <a:ext uri="{FF2B5EF4-FFF2-40B4-BE49-F238E27FC236}">
-                <a16:creationId xmlns:a16="http://schemas.microsoft.com/office/drawing/2014/main" id="{26CCDED3-7D46-47C2-B145-EC4A25661B56}"/>
-              </a:ext>
-            </a:extLst>
-          </p:cNvPr>
-          <p:cNvSpPr>
-            <a:spLocks xmlns:a="http://schemas.openxmlformats.org/drawingml/2006/main" noGrp="1"/>
-          </p:cNvSpPr>
-          <p:nvPr/>
-        </p:nvSpPr>
-        <p:spPr>
-          <a:xfrm xmlns:a="http://schemas.openxmlformats.org/drawingml/2006/main">
-            <a:off x="10096500" y="0"/>
-            <a:ext cx="2000250" cy="2000250"/>
+          <p:cNvPr id="18" name="">
+            <a:extLst xmlns:a="http://schemas.openxmlformats.org/drawingml/2006/main">
+              <a:ext uri="{FF2B5EF4-FFF2-40B4-BE49-F238E27FC236}">
+                <a16:creationId xmlns:a16="http://schemas.microsoft.com/office/drawing/2014/main" id="{316523A5-290C-49EF-921B-D253E818B3FB}"/>
+              </a:ext>
+            </a:extLst>
+          </p:cNvPr>
+          <p:cNvSpPr>
+            <a:spLocks xmlns:a="http://schemas.openxmlformats.org/drawingml/2006/main" noGrp="1"/>
+          </p:cNvSpPr>
+          <p:nvPr/>
+        </p:nvSpPr>
+        <p:spPr>
+          <a:xfrm xmlns:a="http://schemas.openxmlformats.org/drawingml/2006/main">
+            <a:off x="9886950" y="0"/>
+            <a:ext cx="2095500" cy="2095500"/>
           </a:xfrm>
           <a:prstGeom xmlns:a="http://schemas.openxmlformats.org/drawingml/2006/main" prst="ellipse">
             <a:avLst/>
@@ -2099,7 +2205,7 @@
           <p:cNvPr id="2" name="">
             <a:extLst xmlns:a="http://schemas.openxmlformats.org/drawingml/2006/main">
               <a:ext uri="{FF2B5EF4-FFF2-40B4-BE49-F238E27FC236}">
-                <a16:creationId xmlns:a16="http://schemas.microsoft.com/office/drawing/2014/main" id="{26E3E757-8318-4006-BDDE-24F514FBF945}"/>
+                <a16:creationId xmlns:a16="http://schemas.microsoft.com/office/drawing/2014/main" id="{B7E7F6E3-C537-4B02-B945-5FD006CE982D}"/>
               </a:ext>
             </a:extLst>
           </p:cNvPr>
@@ -2111,7 +2217,7 @@
         <p:spPr>
           <a:xfrm xmlns:a="http://schemas.openxmlformats.org/drawingml/2006/main">
             <a:off x="0" y="5524500"/>
-            <a:ext cx="1333500" cy="1333500"/>
+            <a:ext cx="1295400" cy="1295400"/>
           </a:xfrm>
           <a:prstGeom xmlns:a="http://schemas.openxmlformats.org/drawingml/2006/main" prst="ellipse">
             <a:avLst/>
@@ -2130,19 +2236,48 @@
           <p:cNvPr id="3" name="">
             <a:extLst xmlns:a="http://schemas.openxmlformats.org/drawingml/2006/main">
               <a:ext uri="{FF2B5EF4-FFF2-40B4-BE49-F238E27FC236}">
-                <a16:creationId xmlns:a16="http://schemas.microsoft.com/office/drawing/2014/main" id="{4121C2AC-7094-42E2-AB04-CEEDEDB673F2}"/>
-              </a:ext>
-            </a:extLst>
-          </p:cNvPr>
-          <p:cNvSpPr>
-            <a:spLocks xmlns:a="http://schemas.openxmlformats.org/drawingml/2006/main" noGrp="1"/>
-          </p:cNvSpPr>
-          <p:nvPr/>
-        </p:nvSpPr>
-        <p:spPr>
-          <a:xfrm xmlns:a="http://schemas.openxmlformats.org/drawingml/2006/main">
-            <a:off x="723900" y="514350"/>
-            <a:ext cx="3429000" cy="266700"/>
+                <a16:creationId xmlns:a16="http://schemas.microsoft.com/office/drawing/2014/main" id="{6854E95E-30F2-431E-ADB5-319A3666860A}"/>
+              </a:ext>
+            </a:extLst>
+          </p:cNvPr>
+          <p:cNvSpPr>
+            <a:spLocks xmlns:a="http://schemas.openxmlformats.org/drawingml/2006/main" noGrp="1"/>
+          </p:cNvSpPr>
+          <p:nvPr/>
+        </p:nvSpPr>
+        <p:spPr>
+          <a:xfrm xmlns:a="http://schemas.openxmlformats.org/drawingml/2006/main">
+            <a:off x="0" y="0"/>
+            <a:ext cx="12192000" cy="6858000"/>
+          </a:xfrm>
+          <a:prstGeom xmlns:a="http://schemas.openxmlformats.org/drawingml/2006/main" prst="rect">
+            <a:avLst/>
+          </a:prstGeom>
+          <a:noFill xmlns:a="http://schemas.openxmlformats.org/drawingml/2006/main"/>
+          <a:ln xmlns:a="http://schemas.openxmlformats.org/drawingml/2006/main" w="0">
+            <a:noFill/>
+            <a:prstDash val="solid"/>
+          </a:ln>
+        </p:spPr>
+      </p:sp>
+      <p:sp>
+        <p:nvSpPr>
+          <p:cNvPr id="4" name="">
+            <a:extLst xmlns:a="http://schemas.openxmlformats.org/drawingml/2006/main">
+              <a:ext uri="{FF2B5EF4-FFF2-40B4-BE49-F238E27FC236}">
+                <a16:creationId xmlns:a16="http://schemas.microsoft.com/office/drawing/2014/main" id="{55AF688F-2D0A-41F9-B28A-4333F0FAE1A1}"/>
+              </a:ext>
+            </a:extLst>
+          </p:cNvPr>
+          <p:cNvSpPr>
+            <a:spLocks xmlns:a="http://schemas.openxmlformats.org/drawingml/2006/main" noGrp="1"/>
+          </p:cNvSpPr>
+          <p:nvPr/>
+        </p:nvSpPr>
+        <p:spPr>
+          <a:xfrm xmlns:a="http://schemas.openxmlformats.org/drawingml/2006/main">
+            <a:off x="685800" y="495300"/>
+            <a:ext cx="3429000" cy="285750"/>
           </a:xfrm>
           <a:prstGeom xmlns:a="http://schemas.openxmlformats.org/drawingml/2006/main" prst="rect">
             <a:avLst/>
@@ -2170,29 +2305,29 @@
                   <a:srgbClr val="E2BE2D"/>
                 </a:solidFill>
               </a:rPr>
-              <a:t>THE PROBLEM</a:t>
-            </a:r>
-          </a:p>
-        </p:txBody>
-      </p:sp>
-      <p:sp>
-        <p:nvSpPr>
-          <p:cNvPr id="4" name="">
-            <a:extLst xmlns:a="http://schemas.openxmlformats.org/drawingml/2006/main">
-              <a:ext uri="{FF2B5EF4-FFF2-40B4-BE49-F238E27FC236}">
-                <a16:creationId xmlns:a16="http://schemas.microsoft.com/office/drawing/2014/main" id="{980AC00C-0EE7-4586-B9E5-7C2954DC0755}"/>
-              </a:ext>
-            </a:extLst>
-          </p:cNvPr>
-          <p:cNvSpPr>
-            <a:spLocks xmlns:a="http://schemas.openxmlformats.org/drawingml/2006/main" noGrp="1"/>
-          </p:cNvSpPr>
-          <p:nvPr/>
-        </p:nvSpPr>
-        <p:spPr>
-          <a:xfrm xmlns:a="http://schemas.openxmlformats.org/drawingml/2006/main">
-            <a:off x="723900" y="914400"/>
-            <a:ext cx="8096250" cy="876300"/>
+              <a:t>THE GAP</a:t>
+            </a:r>
+          </a:p>
+        </p:txBody>
+      </p:sp>
+      <p:sp>
+        <p:nvSpPr>
+          <p:cNvPr id="5" name="">
+            <a:extLst xmlns:a="http://schemas.openxmlformats.org/drawingml/2006/main">
+              <a:ext uri="{FF2B5EF4-FFF2-40B4-BE49-F238E27FC236}">
+                <a16:creationId xmlns:a16="http://schemas.microsoft.com/office/drawing/2014/main" id="{674ED831-8625-4700-A9E7-F67A194262D9}"/>
+              </a:ext>
+            </a:extLst>
+          </p:cNvPr>
+          <p:cNvSpPr>
+            <a:spLocks xmlns:a="http://schemas.openxmlformats.org/drawingml/2006/main" noGrp="1"/>
+          </p:cNvSpPr>
+          <p:nvPr/>
+        </p:nvSpPr>
+        <p:spPr>
+          <a:xfrm xmlns:a="http://schemas.openxmlformats.org/drawingml/2006/main">
+            <a:off x="685800" y="895350"/>
+            <a:ext cx="8286750" cy="895350"/>
           </a:xfrm>
           <a:prstGeom xmlns:a="http://schemas.openxmlformats.org/drawingml/2006/main" prst="rect">
             <a:avLst/>
@@ -2208,41 +2343,41 @@
           <a:lstStyle xmlns:a="http://schemas.openxmlformats.org/drawingml/2006/main"/>
           <a:p xmlns:a="http://schemas.openxmlformats.org/drawingml/2006/main">
             <a:pPr algn="l">
-              <a:defRPr sz="3450" b="1">
+              <a:defRPr sz="3375" b="1">
                 <a:solidFill>
                   <a:srgbClr val="111827"/>
                 </a:solidFill>
               </a:defRPr>
             </a:pPr>
             <a:r>
-              <a:rPr sz="3450" b="1">
+              <a:rPr sz="3375" b="1">
                 <a:solidFill>
                   <a:srgbClr val="111827"/>
                 </a:solidFill>
               </a:rPr>
-              <a:t>Good data is there, but it is too hard to read</a:t>
-            </a:r>
-          </a:p>
-        </p:txBody>
-      </p:sp>
-      <p:sp>
-        <p:nvSpPr>
-          <p:cNvPr id="5" name="">
-            <a:extLst xmlns:a="http://schemas.openxmlformats.org/drawingml/2006/main">
-              <a:ext uri="{FF2B5EF4-FFF2-40B4-BE49-F238E27FC236}">
-                <a16:creationId xmlns:a16="http://schemas.microsoft.com/office/drawing/2014/main" id="{20E97E07-09F8-48B8-860A-84D514FCC62C}"/>
-              </a:ext>
-            </a:extLst>
-          </p:cNvPr>
-          <p:cNvSpPr>
-            <a:spLocks xmlns:a="http://schemas.openxmlformats.org/drawingml/2006/main" noGrp="1"/>
-          </p:cNvSpPr>
-          <p:nvPr/>
-        </p:nvSpPr>
-        <p:spPr>
-          <a:xfrm xmlns:a="http://schemas.openxmlformats.org/drawingml/2006/main">
-            <a:off x="742950" y="1866900"/>
-            <a:ext cx="7810500" cy="552450"/>
+              <a:t>ERP data exists, but decisions still feel slow</a:t>
+            </a:r>
+          </a:p>
+        </p:txBody>
+      </p:sp>
+      <p:sp>
+        <p:nvSpPr>
+          <p:cNvPr id="6" name="">
+            <a:extLst xmlns:a="http://schemas.openxmlformats.org/drawingml/2006/main">
+              <a:ext uri="{FF2B5EF4-FFF2-40B4-BE49-F238E27FC236}">
+                <a16:creationId xmlns:a16="http://schemas.microsoft.com/office/drawing/2014/main" id="{A0FE4A66-3C1E-4A08-9E2A-8B24EFBB93F4}"/>
+              </a:ext>
+            </a:extLst>
+          </p:cNvPr>
+          <p:cNvSpPr>
+            <a:spLocks xmlns:a="http://schemas.openxmlformats.org/drawingml/2006/main" noGrp="1"/>
+          </p:cNvSpPr>
+          <p:nvPr/>
+        </p:nvSpPr>
+        <p:spPr>
+          <a:xfrm xmlns:a="http://schemas.openxmlformats.org/drawingml/2006/main">
+            <a:off x="704850" y="1866900"/>
+            <a:ext cx="7429500" cy="571500"/>
           </a:xfrm>
           <a:prstGeom xmlns:a="http://schemas.openxmlformats.org/drawingml/2006/main" prst="rect">
             <a:avLst/>
@@ -2260,47 +2395,47 @@
             <a:pPr algn="l">
               <a:defRPr sz="1575" b="0">
                 <a:solidFill>
-                  <a:srgbClr val="516173"/>
+                  <a:srgbClr val="526173"/>
                 </a:solidFill>
               </a:defRPr>
             </a:pPr>
             <a:r>
               <a:rPr sz="1575" b="0">
                 <a:solidFill>
-                  <a:srgbClr val="516173"/>
+                  <a:srgbClr val="526173"/>
                 </a:solidFill>
               </a:rPr>
-              <a:t>Management should not need to open multiple ERP screens just to understand what is happening.</a:t>
-            </a:r>
-          </a:p>
-        </p:txBody>
-      </p:sp>
-      <p:sp>
-        <p:nvSpPr>
-          <p:cNvPr id="6" name="">
-            <a:extLst xmlns:a="http://schemas.openxmlformats.org/drawingml/2006/main">
-              <a:ext uri="{FF2B5EF4-FFF2-40B4-BE49-F238E27FC236}">
-                <a16:creationId xmlns:a16="http://schemas.microsoft.com/office/drawing/2014/main" id="{86AD1336-1645-4155-8580-C9AA6030F9F2}"/>
-              </a:ext>
-            </a:extLst>
-          </p:cNvPr>
-          <p:cNvSpPr>
-            <a:spLocks xmlns:a="http://schemas.openxmlformats.org/drawingml/2006/main" noGrp="1"/>
-          </p:cNvSpPr>
-          <p:nvPr/>
-        </p:nvSpPr>
-        <p:spPr>
-          <a:xfrm xmlns:a="http://schemas.openxmlformats.org/drawingml/2006/main">
-            <a:off x="857250" y="2857500"/>
-            <a:ext cx="10287000" cy="2190750"/>
+              <a:t>The problem is not lack of data. It is that the data is spread out, technical, and hard to read quickly.</a:t>
+            </a:r>
+          </a:p>
+        </p:txBody>
+      </p:sp>
+      <p:sp>
+        <p:nvSpPr>
+          <p:cNvPr id="7" name="">
+            <a:extLst xmlns:a="http://schemas.openxmlformats.org/drawingml/2006/main">
+              <a:ext uri="{FF2B5EF4-FFF2-40B4-BE49-F238E27FC236}">
+                <a16:creationId xmlns:a16="http://schemas.microsoft.com/office/drawing/2014/main" id="{74B4560B-010D-43A2-81C5-E9029667FC76}"/>
+              </a:ext>
+            </a:extLst>
+          </p:cNvPr>
+          <p:cNvSpPr>
+            <a:spLocks xmlns:a="http://schemas.openxmlformats.org/drawingml/2006/main" noGrp="1"/>
+          </p:cNvSpPr>
+          <p:nvPr/>
+        </p:nvSpPr>
+        <p:spPr>
+          <a:xfrm xmlns:a="http://schemas.openxmlformats.org/drawingml/2006/main">
+            <a:off x="971550" y="3048000"/>
+            <a:ext cx="2952750" cy="1381125"/>
           </a:xfrm>
           <a:prstGeom xmlns:a="http://schemas.openxmlformats.org/drawingml/2006/main" prst="roundRect">
             <a:avLst>
-              <a:gd name="adj" fmla="val 6957"/>
+              <a:gd name="adj" fmla="val 11034"/>
             </a:avLst>
           </a:prstGeom>
           <a:solidFill xmlns:a="http://schemas.openxmlformats.org/drawingml/2006/main">
-            <a:srgbClr val="FFFFFF"/>
+            <a:srgbClr val="FFFAF0"/>
           </a:solidFill>
           <a:ln xmlns:a="http://schemas.openxmlformats.org/drawingml/2006/main" w="9525">
             <a:solidFill>
@@ -2318,30 +2453,30 @@
       </p:sp>
       <p:sp>
         <p:nvSpPr>
-          <p:cNvPr id="7" name="">
-            <a:extLst xmlns:a="http://schemas.openxmlformats.org/drawingml/2006/main">
-              <a:ext uri="{FF2B5EF4-FFF2-40B4-BE49-F238E27FC236}">
-                <a16:creationId xmlns:a16="http://schemas.microsoft.com/office/drawing/2014/main" id="{DB5F9987-DA30-4B13-848B-28C548D5D0C9}"/>
-              </a:ext>
-            </a:extLst>
-          </p:cNvPr>
-          <p:cNvSpPr>
-            <a:spLocks xmlns:a="http://schemas.openxmlformats.org/drawingml/2006/main" noGrp="1"/>
-          </p:cNvSpPr>
-          <p:nvPr/>
-        </p:nvSpPr>
-        <p:spPr>
-          <a:xfrm xmlns:a="http://schemas.openxmlformats.org/drawingml/2006/main">
-            <a:off x="1219200" y="3162300"/>
-            <a:ext cx="3143250" cy="1524000"/>
+          <p:cNvPr id="8" name="">
+            <a:extLst xmlns:a="http://schemas.openxmlformats.org/drawingml/2006/main">
+              <a:ext uri="{FF2B5EF4-FFF2-40B4-BE49-F238E27FC236}">
+                <a16:creationId xmlns:a16="http://schemas.microsoft.com/office/drawing/2014/main" id="{172AFC81-6C20-4D0D-9FE4-52270AA67C88}"/>
+              </a:ext>
+            </a:extLst>
+          </p:cNvPr>
+          <p:cNvSpPr>
+            <a:spLocks xmlns:a="http://schemas.openxmlformats.org/drawingml/2006/main" noGrp="1"/>
+          </p:cNvSpPr>
+          <p:nvPr/>
+        </p:nvSpPr>
+        <p:spPr>
+          <a:xfrm xmlns:a="http://schemas.openxmlformats.org/drawingml/2006/main">
+            <a:off x="4629150" y="3048000"/>
+            <a:ext cx="2952750" cy="1381125"/>
           </a:xfrm>
           <a:prstGeom xmlns:a="http://schemas.openxmlformats.org/drawingml/2006/main" prst="roundRect">
             <a:avLst>
-              <a:gd name="adj" fmla="val 10000"/>
+              <a:gd name="adj" fmla="val 11034"/>
             </a:avLst>
           </a:prstGeom>
           <a:solidFill xmlns:a="http://schemas.openxmlformats.org/drawingml/2006/main">
-            <a:srgbClr val="FFFAF0"/>
+            <a:srgbClr val="F2F7FF"/>
           </a:solidFill>
           <a:ln xmlns:a="http://schemas.openxmlformats.org/drawingml/2006/main" w="9525">
             <a:solidFill>
@@ -2359,161 +2494,30 @@
       </p:sp>
       <p:sp>
         <p:nvSpPr>
-          <p:cNvPr id="8" name="">
-            <a:extLst xmlns:a="http://schemas.openxmlformats.org/drawingml/2006/main">
-              <a:ext uri="{FF2B5EF4-FFF2-40B4-BE49-F238E27FC236}">
-                <a16:creationId xmlns:a16="http://schemas.microsoft.com/office/drawing/2014/main" id="{F856A083-734B-4E11-8ADD-24A85147A747}"/>
-              </a:ext>
-            </a:extLst>
-          </p:cNvPr>
-          <p:cNvSpPr>
-            <a:spLocks xmlns:a="http://schemas.openxmlformats.org/drawingml/2006/main" noGrp="1"/>
-          </p:cNvSpPr>
-          <p:nvPr/>
-        </p:nvSpPr>
-        <p:spPr>
-          <a:xfrm xmlns:a="http://schemas.openxmlformats.org/drawingml/2006/main">
-            <a:off x="1485900" y="3448050"/>
-            <a:ext cx="171450" cy="171450"/>
-          </a:xfrm>
-          <a:prstGeom xmlns:a="http://schemas.openxmlformats.org/drawingml/2006/main" prst="ellipse">
-            <a:avLst/>
-          </a:prstGeom>
-          <a:solidFill xmlns:a="http://schemas.openxmlformats.org/drawingml/2006/main">
-            <a:srgbClr val="E2BE2D"/>
-          </a:solidFill>
-          <a:ln xmlns:a="http://schemas.openxmlformats.org/drawingml/2006/main" w="0">
-            <a:noFill/>
-            <a:prstDash val="solid"/>
-          </a:ln>
-        </p:spPr>
-      </p:sp>
-      <p:sp>
-        <p:nvSpPr>
           <p:cNvPr id="9" name="">
             <a:extLst xmlns:a="http://schemas.openxmlformats.org/drawingml/2006/main">
               <a:ext uri="{FF2B5EF4-FFF2-40B4-BE49-F238E27FC236}">
-                <a16:creationId xmlns:a16="http://schemas.microsoft.com/office/drawing/2014/main" id="{1852A3DA-7B84-4C9A-AE1F-32B6F325D18F}"/>
-              </a:ext>
-            </a:extLst>
-          </p:cNvPr>
-          <p:cNvSpPr>
-            <a:spLocks xmlns:a="http://schemas.openxmlformats.org/drawingml/2006/main" noGrp="1"/>
-          </p:cNvSpPr>
-          <p:nvPr/>
-        </p:nvSpPr>
-        <p:spPr>
-          <a:xfrm xmlns:a="http://schemas.openxmlformats.org/drawingml/2006/main">
-            <a:off x="1790700" y="3390900"/>
-            <a:ext cx="2238375" cy="323850"/>
-          </a:xfrm>
-          <a:prstGeom xmlns:a="http://schemas.openxmlformats.org/drawingml/2006/main" prst="rect">
-            <a:avLst/>
-          </a:prstGeom>
-          <a:noFill xmlns:a="http://schemas.openxmlformats.org/drawingml/2006/main"/>
-          <a:ln xmlns:a="http://schemas.openxmlformats.org/drawingml/2006/main" w="0">
-            <a:noFill/>
-            <a:prstDash val="solid"/>
-          </a:ln>
-        </p:spPr>
-        <p:txBody>
-          <a:bodyPr xmlns:a="http://schemas.openxmlformats.org/drawingml/2006/main"/>
-          <a:lstStyle xmlns:a="http://schemas.openxmlformats.org/drawingml/2006/main"/>
-          <a:p xmlns:a="http://schemas.openxmlformats.org/drawingml/2006/main">
-            <a:pPr algn="l">
-              <a:defRPr sz="1800" b="1">
-                <a:solidFill>
-                  <a:srgbClr val="111827"/>
-                </a:solidFill>
-              </a:defRPr>
-            </a:pPr>
-            <a:r>
-              <a:rPr sz="1800" b="1">
-                <a:solidFill>
-                  <a:srgbClr val="111827"/>
-                </a:solidFill>
-              </a:rPr>
-              <a:t>Scattered view</a:t>
-            </a:r>
-          </a:p>
-        </p:txBody>
-      </p:sp>
-      <p:sp>
-        <p:nvSpPr>
-          <p:cNvPr id="10" name="">
-            <a:extLst xmlns:a="http://schemas.openxmlformats.org/drawingml/2006/main">
-              <a:ext uri="{FF2B5EF4-FFF2-40B4-BE49-F238E27FC236}">
-                <a16:creationId xmlns:a16="http://schemas.microsoft.com/office/drawing/2014/main" id="{970DC723-BA01-4DDE-B154-CC4CFF6D20F3}"/>
-              </a:ext>
-            </a:extLst>
-          </p:cNvPr>
-          <p:cNvSpPr>
-            <a:spLocks xmlns:a="http://schemas.openxmlformats.org/drawingml/2006/main" noGrp="1"/>
-          </p:cNvSpPr>
-          <p:nvPr/>
-        </p:nvSpPr>
-        <p:spPr>
-          <a:xfrm xmlns:a="http://schemas.openxmlformats.org/drawingml/2006/main">
-            <a:off x="1524000" y="3905250"/>
-            <a:ext cx="2571750" cy="552450"/>
-          </a:xfrm>
-          <a:prstGeom xmlns:a="http://schemas.openxmlformats.org/drawingml/2006/main" prst="rect">
-            <a:avLst/>
-          </a:prstGeom>
-          <a:noFill xmlns:a="http://schemas.openxmlformats.org/drawingml/2006/main"/>
-          <a:ln xmlns:a="http://schemas.openxmlformats.org/drawingml/2006/main" w="0">
-            <a:noFill/>
-            <a:prstDash val="solid"/>
-          </a:ln>
-        </p:spPr>
-        <p:txBody>
-          <a:bodyPr xmlns:a="http://schemas.openxmlformats.org/drawingml/2006/main"/>
-          <a:lstStyle xmlns:a="http://schemas.openxmlformats.org/drawingml/2006/main"/>
-          <a:p xmlns:a="http://schemas.openxmlformats.org/drawingml/2006/main">
-            <a:pPr algn="l">
-              <a:defRPr sz="1275" b="0">
-                <a:solidFill>
-                  <a:srgbClr val="516173"/>
-                </a:solidFill>
-              </a:defRPr>
-            </a:pPr>
-            <a:r>
-              <a:rPr sz="1275" b="0">
-                <a:solidFill>
-                  <a:srgbClr val="516173"/>
-                </a:solidFill>
-              </a:rPr>
-              <a:t>Sales, orders, stock, production, and freight live in different places.</a:t>
-            </a:r>
-          </a:p>
-        </p:txBody>
-      </p:sp>
-      <p:sp>
-        <p:nvSpPr>
-          <p:cNvPr id="11" name="">
-            <a:extLst xmlns:a="http://schemas.openxmlformats.org/drawingml/2006/main">
-              <a:ext uri="{FF2B5EF4-FFF2-40B4-BE49-F238E27FC236}">
-                <a16:creationId xmlns:a16="http://schemas.microsoft.com/office/drawing/2014/main" id="{CDFEEA5B-CA4D-4C70-B8CB-F1114D4FCA48}"/>
-              </a:ext>
-            </a:extLst>
-          </p:cNvPr>
-          <p:cNvSpPr>
-            <a:spLocks xmlns:a="http://schemas.openxmlformats.org/drawingml/2006/main" noGrp="1"/>
-          </p:cNvSpPr>
-          <p:nvPr/>
-        </p:nvSpPr>
-        <p:spPr>
-          <a:xfrm xmlns:a="http://schemas.openxmlformats.org/drawingml/2006/main">
-            <a:off x="4533900" y="3162300"/>
-            <a:ext cx="3143250" cy="1524000"/>
+                <a16:creationId xmlns:a16="http://schemas.microsoft.com/office/drawing/2014/main" id="{79EDEDB6-668C-4F04-A60A-478D0C06C657}"/>
+              </a:ext>
+            </a:extLst>
+          </p:cNvPr>
+          <p:cNvSpPr>
+            <a:spLocks xmlns:a="http://schemas.openxmlformats.org/drawingml/2006/main" noGrp="1"/>
+          </p:cNvSpPr>
+          <p:nvPr/>
+        </p:nvSpPr>
+        <p:spPr>
+          <a:xfrm xmlns:a="http://schemas.openxmlformats.org/drawingml/2006/main">
+            <a:off x="8286750" y="3048000"/>
+            <a:ext cx="2952750" cy="1381125"/>
           </a:xfrm>
           <a:prstGeom xmlns:a="http://schemas.openxmlformats.org/drawingml/2006/main" prst="roundRect">
             <a:avLst>
-              <a:gd name="adj" fmla="val 10000"/>
+              <a:gd name="adj" fmla="val 11034"/>
             </a:avLst>
           </a:prstGeom>
           <a:solidFill xmlns:a="http://schemas.openxmlformats.org/drawingml/2006/main">
-            <a:srgbClr val="F2F7FF"/>
+            <a:srgbClr val="EEFCF6"/>
           </a:solidFill>
           <a:ln xmlns:a="http://schemas.openxmlformats.org/drawingml/2006/main" w="9525">
             <a:solidFill>
@@ -2531,53 +2535,22 @@
       </p:sp>
       <p:sp>
         <p:nvSpPr>
-          <p:cNvPr id="12" name="">
-            <a:extLst xmlns:a="http://schemas.openxmlformats.org/drawingml/2006/main">
-              <a:ext uri="{FF2B5EF4-FFF2-40B4-BE49-F238E27FC236}">
-                <a16:creationId xmlns:a16="http://schemas.microsoft.com/office/drawing/2014/main" id="{85FE9D6C-0E24-4C5A-8C54-2BF042224A52}"/>
-              </a:ext>
-            </a:extLst>
-          </p:cNvPr>
-          <p:cNvSpPr>
-            <a:spLocks xmlns:a="http://schemas.openxmlformats.org/drawingml/2006/main" noGrp="1"/>
-          </p:cNvSpPr>
-          <p:nvPr/>
-        </p:nvSpPr>
-        <p:spPr>
-          <a:xfrm xmlns:a="http://schemas.openxmlformats.org/drawingml/2006/main">
-            <a:off x="4800600" y="3448050"/>
-            <a:ext cx="171450" cy="171450"/>
-          </a:xfrm>
-          <a:prstGeom xmlns:a="http://schemas.openxmlformats.org/drawingml/2006/main" prst="ellipse">
-            <a:avLst/>
-          </a:prstGeom>
-          <a:solidFill xmlns:a="http://schemas.openxmlformats.org/drawingml/2006/main">
-            <a:srgbClr val="3D78DD"/>
-          </a:solidFill>
-          <a:ln xmlns:a="http://schemas.openxmlformats.org/drawingml/2006/main" w="0">
-            <a:noFill/>
-            <a:prstDash val="solid"/>
-          </a:ln>
-        </p:spPr>
-      </p:sp>
-      <p:sp>
-        <p:nvSpPr>
-          <p:cNvPr id="13" name="">
-            <a:extLst xmlns:a="http://schemas.openxmlformats.org/drawingml/2006/main">
-              <a:ext uri="{FF2B5EF4-FFF2-40B4-BE49-F238E27FC236}">
-                <a16:creationId xmlns:a16="http://schemas.microsoft.com/office/drawing/2014/main" id="{11A7D976-6214-4C44-BFCF-B429277654F6}"/>
-              </a:ext>
-            </a:extLst>
-          </p:cNvPr>
-          <p:cNvSpPr>
-            <a:spLocks xmlns:a="http://schemas.openxmlformats.org/drawingml/2006/main" noGrp="1"/>
-          </p:cNvSpPr>
-          <p:nvPr/>
-        </p:nvSpPr>
-        <p:spPr>
-          <a:xfrm xmlns:a="http://schemas.openxmlformats.org/drawingml/2006/main">
-            <a:off x="5105400" y="3390900"/>
-            <a:ext cx="2238375" cy="323850"/>
+          <p:cNvPr id="10" name="">
+            <a:extLst xmlns:a="http://schemas.openxmlformats.org/drawingml/2006/main">
+              <a:ext uri="{FF2B5EF4-FFF2-40B4-BE49-F238E27FC236}">
+                <a16:creationId xmlns:a16="http://schemas.microsoft.com/office/drawing/2014/main" id="{B7B71BE3-DE11-474A-A878-57AADC01A9B5}"/>
+              </a:ext>
+            </a:extLst>
+          </p:cNvPr>
+          <p:cNvSpPr>
+            <a:spLocks xmlns:a="http://schemas.openxmlformats.org/drawingml/2006/main" noGrp="1"/>
+          </p:cNvSpPr>
+          <p:nvPr/>
+        </p:nvSpPr>
+        <p:spPr>
+          <a:xfrm xmlns:a="http://schemas.openxmlformats.org/drawingml/2006/main">
+            <a:off x="1295400" y="3409950"/>
+            <a:ext cx="2190750" cy="323850"/>
           </a:xfrm>
           <a:prstGeom xmlns:a="http://schemas.openxmlformats.org/drawingml/2006/main" prst="rect">
             <a:avLst/>
@@ -2593,41 +2566,41 @@
           <a:lstStyle xmlns:a="http://schemas.openxmlformats.org/drawingml/2006/main"/>
           <a:p xmlns:a="http://schemas.openxmlformats.org/drawingml/2006/main">
             <a:pPr algn="l">
-              <a:defRPr sz="1800" b="1">
+              <a:defRPr sz="1875" b="1">
                 <a:solidFill>
                   <a:srgbClr val="111827"/>
                 </a:solidFill>
               </a:defRPr>
             </a:pPr>
             <a:r>
-              <a:rPr sz="1800" b="1">
+              <a:rPr sz="1875" b="1">
                 <a:solidFill>
                   <a:srgbClr val="111827"/>
                 </a:solidFill>
               </a:rPr>
-              <a:t>Slow answers</a:t>
-            </a:r>
-          </a:p>
-        </p:txBody>
-      </p:sp>
-      <p:sp>
-        <p:nvSpPr>
-          <p:cNvPr id="14" name="">
-            <a:extLst xmlns:a="http://schemas.openxmlformats.org/drawingml/2006/main">
-              <a:ext uri="{FF2B5EF4-FFF2-40B4-BE49-F238E27FC236}">
-                <a16:creationId xmlns:a16="http://schemas.microsoft.com/office/drawing/2014/main" id="{6E635F16-21E2-4475-93F7-24467A022AC2}"/>
-              </a:ext>
-            </a:extLst>
-          </p:cNvPr>
-          <p:cNvSpPr>
-            <a:spLocks xmlns:a="http://schemas.openxmlformats.org/drawingml/2006/main" noGrp="1"/>
-          </p:cNvSpPr>
-          <p:nvPr/>
-        </p:nvSpPr>
-        <p:spPr>
-          <a:xfrm xmlns:a="http://schemas.openxmlformats.org/drawingml/2006/main">
-            <a:off x="4838700" y="3905250"/>
-            <a:ext cx="2571750" cy="552450"/>
+              <a:t>Too many screens</a:t>
+            </a:r>
+          </a:p>
+        </p:txBody>
+      </p:sp>
+      <p:sp>
+        <p:nvSpPr>
+          <p:cNvPr id="11" name="">
+            <a:extLst xmlns:a="http://schemas.openxmlformats.org/drawingml/2006/main">
+              <a:ext uri="{FF2B5EF4-FFF2-40B4-BE49-F238E27FC236}">
+                <a16:creationId xmlns:a16="http://schemas.microsoft.com/office/drawing/2014/main" id="{1BD7E7EA-462D-476E-B17D-CE561A0A1D59}"/>
+              </a:ext>
+            </a:extLst>
+          </p:cNvPr>
+          <p:cNvSpPr>
+            <a:spLocks xmlns:a="http://schemas.openxmlformats.org/drawingml/2006/main" noGrp="1"/>
+          </p:cNvSpPr>
+          <p:nvPr/>
+        </p:nvSpPr>
+        <p:spPr>
+          <a:xfrm xmlns:a="http://schemas.openxmlformats.org/drawingml/2006/main">
+            <a:off x="1295400" y="3829050"/>
+            <a:ext cx="2095500" cy="381000"/>
           </a:xfrm>
           <a:prstGeom xmlns:a="http://schemas.openxmlformats.org/drawingml/2006/main" prst="rect">
             <a:avLst/>
@@ -2645,111 +2618,39 @@
             <a:pPr algn="l">
               <a:defRPr sz="1275" b="0">
                 <a:solidFill>
-                  <a:srgbClr val="516173"/>
+                  <a:srgbClr val="526173"/>
                 </a:solidFill>
               </a:defRPr>
             </a:pPr>
             <a:r>
               <a:rPr sz="1275" b="0">
                 <a:solidFill>
-                  <a:srgbClr val="516173"/>
+                  <a:srgbClr val="526173"/>
                 </a:solidFill>
               </a:rPr>
-              <a:t>Simple business questions take too many clicks and manual checks.</a:t>
-            </a:r>
-          </a:p>
-        </p:txBody>
-      </p:sp>
-      <p:sp>
-        <p:nvSpPr>
-          <p:cNvPr id="15" name="">
-            <a:extLst xmlns:a="http://schemas.openxmlformats.org/drawingml/2006/main">
-              <a:ext uri="{FF2B5EF4-FFF2-40B4-BE49-F238E27FC236}">
-                <a16:creationId xmlns:a16="http://schemas.microsoft.com/office/drawing/2014/main" id="{4CCDCBF2-1591-409D-A376-4B0A430B181C}"/>
-              </a:ext>
-            </a:extLst>
-          </p:cNvPr>
-          <p:cNvSpPr>
-            <a:spLocks xmlns:a="http://schemas.openxmlformats.org/drawingml/2006/main" noGrp="1"/>
-          </p:cNvSpPr>
-          <p:nvPr/>
-        </p:nvSpPr>
-        <p:spPr>
-          <a:xfrm xmlns:a="http://schemas.openxmlformats.org/drawingml/2006/main">
-            <a:off x="7848600" y="3162300"/>
-            <a:ext cx="3143250" cy="1524000"/>
-          </a:xfrm>
-          <a:prstGeom xmlns:a="http://schemas.openxmlformats.org/drawingml/2006/main" prst="roundRect">
-            <a:avLst>
-              <a:gd name="adj" fmla="val 10000"/>
-            </a:avLst>
-          </a:prstGeom>
-          <a:solidFill xmlns:a="http://schemas.openxmlformats.org/drawingml/2006/main">
-            <a:srgbClr val="EFFCF6"/>
-          </a:solidFill>
-          <a:ln xmlns:a="http://schemas.openxmlformats.org/drawingml/2006/main" w="9525">
-            <a:solidFill>
-              <a:srgbClr val="DBE8F4"/>
-            </a:solidFill>
-            <a:prstDash val="solid"/>
-          </a:ln>
-        </p:spPr>
-        <p:style>
-          <a:lnRef xmlns:a="http://schemas.openxmlformats.org/drawingml/2006/main" idx="0"/>
-          <a:fillRef xmlns:a="http://schemas.openxmlformats.org/drawingml/2006/main" idx="0"/>
-          <a:effectRef xmlns:a="http://schemas.openxmlformats.org/drawingml/2006/main" idx="4"/>
-          <a:fontRef xmlns:a="http://schemas.openxmlformats.org/drawingml/2006/main" idx="major"/>
-        </p:style>
-      </p:sp>
-      <p:sp>
-        <p:nvSpPr>
-          <p:cNvPr id="16" name="">
-            <a:extLst xmlns:a="http://schemas.openxmlformats.org/drawingml/2006/main">
-              <a:ext uri="{FF2B5EF4-FFF2-40B4-BE49-F238E27FC236}">
-                <a16:creationId xmlns:a16="http://schemas.microsoft.com/office/drawing/2014/main" id="{7FEAFBE5-C5A9-443C-A58A-C4C1302A9781}"/>
-              </a:ext>
-            </a:extLst>
-          </p:cNvPr>
-          <p:cNvSpPr>
-            <a:spLocks xmlns:a="http://schemas.openxmlformats.org/drawingml/2006/main" noGrp="1"/>
-          </p:cNvSpPr>
-          <p:nvPr/>
-        </p:nvSpPr>
-        <p:spPr>
-          <a:xfrm xmlns:a="http://schemas.openxmlformats.org/drawingml/2006/main">
-            <a:off x="8115300" y="3448050"/>
-            <a:ext cx="171450" cy="171450"/>
-          </a:xfrm>
-          <a:prstGeom xmlns:a="http://schemas.openxmlformats.org/drawingml/2006/main" prst="ellipse">
-            <a:avLst/>
-          </a:prstGeom>
-          <a:solidFill xmlns:a="http://schemas.openxmlformats.org/drawingml/2006/main">
-            <a:srgbClr val="10B981"/>
-          </a:solidFill>
-          <a:ln xmlns:a="http://schemas.openxmlformats.org/drawingml/2006/main" w="0">
-            <a:noFill/>
-            <a:prstDash val="solid"/>
-          </a:ln>
-        </p:spPr>
-      </p:sp>
-      <p:sp>
-        <p:nvSpPr>
-          <p:cNvPr id="17" name="">
-            <a:extLst xmlns:a="http://schemas.openxmlformats.org/drawingml/2006/main">
-              <a:ext uri="{FF2B5EF4-FFF2-40B4-BE49-F238E27FC236}">
-                <a16:creationId xmlns:a16="http://schemas.microsoft.com/office/drawing/2014/main" id="{49D6679E-9168-46F9-87B3-F6AC9E50FB66}"/>
-              </a:ext>
-            </a:extLst>
-          </p:cNvPr>
-          <p:cNvSpPr>
-            <a:spLocks xmlns:a="http://schemas.openxmlformats.org/drawingml/2006/main" noGrp="1"/>
-          </p:cNvSpPr>
-          <p:nvPr/>
-        </p:nvSpPr>
-        <p:spPr>
-          <a:xfrm xmlns:a="http://schemas.openxmlformats.org/drawingml/2006/main">
-            <a:off x="8420100" y="3390900"/>
-            <a:ext cx="2238375" cy="323850"/>
+              <a:t>Managers must jump between ERP pages.</a:t>
+            </a:r>
+          </a:p>
+        </p:txBody>
+      </p:sp>
+      <p:sp>
+        <p:nvSpPr>
+          <p:cNvPr id="12" name="">
+            <a:extLst xmlns:a="http://schemas.openxmlformats.org/drawingml/2006/main">
+              <a:ext uri="{FF2B5EF4-FFF2-40B4-BE49-F238E27FC236}">
+                <a16:creationId xmlns:a16="http://schemas.microsoft.com/office/drawing/2014/main" id="{FB880398-1997-41DA-B998-93955BA3FAB3}"/>
+              </a:ext>
+            </a:extLst>
+          </p:cNvPr>
+          <p:cNvSpPr>
+            <a:spLocks xmlns:a="http://schemas.openxmlformats.org/drawingml/2006/main" noGrp="1"/>
+          </p:cNvSpPr>
+          <p:nvPr/>
+        </p:nvSpPr>
+        <p:spPr>
+          <a:xfrm xmlns:a="http://schemas.openxmlformats.org/drawingml/2006/main">
+            <a:off x="4953000" y="3409950"/>
+            <a:ext cx="2190750" cy="323850"/>
           </a:xfrm>
           <a:prstGeom xmlns:a="http://schemas.openxmlformats.org/drawingml/2006/main" prst="rect">
             <a:avLst/>
@@ -2765,41 +2666,41 @@
           <a:lstStyle xmlns:a="http://schemas.openxmlformats.org/drawingml/2006/main"/>
           <a:p xmlns:a="http://schemas.openxmlformats.org/drawingml/2006/main">
             <a:pPr algn="l">
-              <a:defRPr sz="1800" b="1">
+              <a:defRPr sz="1875" b="1">
                 <a:solidFill>
                   <a:srgbClr val="111827"/>
                 </a:solidFill>
               </a:defRPr>
             </a:pPr>
             <a:r>
-              <a:rPr sz="1800" b="1">
+              <a:rPr sz="1875" b="1">
                 <a:solidFill>
                   <a:srgbClr val="111827"/>
                 </a:solidFill>
               </a:rPr>
-              <a:t>Low confidence</a:t>
-            </a:r>
-          </a:p>
-        </p:txBody>
-      </p:sp>
-      <p:sp>
-        <p:nvSpPr>
-          <p:cNvPr id="18" name="">
-            <a:extLst xmlns:a="http://schemas.openxmlformats.org/drawingml/2006/main">
-              <a:ext uri="{FF2B5EF4-FFF2-40B4-BE49-F238E27FC236}">
-                <a16:creationId xmlns:a16="http://schemas.microsoft.com/office/drawing/2014/main" id="{5643AA3B-054C-4799-AFDF-104F7EB6C195}"/>
-              </a:ext>
-            </a:extLst>
-          </p:cNvPr>
-          <p:cNvSpPr>
-            <a:spLocks xmlns:a="http://schemas.openxmlformats.org/drawingml/2006/main" noGrp="1"/>
-          </p:cNvSpPr>
-          <p:nvPr/>
-        </p:nvSpPr>
-        <p:spPr>
-          <a:xfrm xmlns:a="http://schemas.openxmlformats.org/drawingml/2006/main">
-            <a:off x="8153400" y="3905250"/>
-            <a:ext cx="2571750" cy="552450"/>
+              <a:t>Too much checking</a:t>
+            </a:r>
+          </a:p>
+        </p:txBody>
+      </p:sp>
+      <p:sp>
+        <p:nvSpPr>
+          <p:cNvPr id="13" name="">
+            <a:extLst xmlns:a="http://schemas.openxmlformats.org/drawingml/2006/main">
+              <a:ext uri="{FF2B5EF4-FFF2-40B4-BE49-F238E27FC236}">
+                <a16:creationId xmlns:a16="http://schemas.microsoft.com/office/drawing/2014/main" id="{7F03EC75-02FB-4AAB-B552-C64CEA338278}"/>
+              </a:ext>
+            </a:extLst>
+          </p:cNvPr>
+          <p:cNvSpPr>
+            <a:spLocks xmlns:a="http://schemas.openxmlformats.org/drawingml/2006/main" noGrp="1"/>
+          </p:cNvSpPr>
+          <p:nvPr/>
+        </p:nvSpPr>
+        <p:spPr>
+          <a:xfrm xmlns:a="http://schemas.openxmlformats.org/drawingml/2006/main">
+            <a:off x="4953000" y="3829050"/>
+            <a:ext cx="2095500" cy="381000"/>
           </a:xfrm>
           <a:prstGeom xmlns:a="http://schemas.openxmlformats.org/drawingml/2006/main" prst="rect">
             <a:avLst/>
@@ -2817,17 +2718,217 @@
             <a:pPr algn="l">
               <a:defRPr sz="1275" b="0">
                 <a:solidFill>
-                  <a:srgbClr val="516173"/>
+                  <a:srgbClr val="526173"/>
                 </a:solidFill>
               </a:defRPr>
             </a:pPr>
             <a:r>
               <a:rPr sz="1275" b="0">
                 <a:solidFill>
-                  <a:srgbClr val="516173"/>
+                  <a:srgbClr val="526173"/>
                 </a:solidFill>
               </a:rPr>
-              <a:t>When numbers are unclear, teams spend time verifying instead of deciding.</a:t>
+              <a:t>Simple answers take repeated verification.</a:t>
+            </a:r>
+          </a:p>
+        </p:txBody>
+      </p:sp>
+      <p:sp>
+        <p:nvSpPr>
+          <p:cNvPr id="14" name="">
+            <a:extLst xmlns:a="http://schemas.openxmlformats.org/drawingml/2006/main">
+              <a:ext uri="{FF2B5EF4-FFF2-40B4-BE49-F238E27FC236}">
+                <a16:creationId xmlns:a16="http://schemas.microsoft.com/office/drawing/2014/main" id="{49D9B7F2-F95B-4CB7-8839-3148B7F23D27}"/>
+              </a:ext>
+            </a:extLst>
+          </p:cNvPr>
+          <p:cNvSpPr>
+            <a:spLocks xmlns:a="http://schemas.openxmlformats.org/drawingml/2006/main" noGrp="1"/>
+          </p:cNvSpPr>
+          <p:nvPr/>
+        </p:nvSpPr>
+        <p:spPr>
+          <a:xfrm xmlns:a="http://schemas.openxmlformats.org/drawingml/2006/main">
+            <a:off x="8610600" y="3409950"/>
+            <a:ext cx="2190750" cy="323850"/>
+          </a:xfrm>
+          <a:prstGeom xmlns:a="http://schemas.openxmlformats.org/drawingml/2006/main" prst="rect">
+            <a:avLst/>
+          </a:prstGeom>
+          <a:noFill xmlns:a="http://schemas.openxmlformats.org/drawingml/2006/main"/>
+          <a:ln xmlns:a="http://schemas.openxmlformats.org/drawingml/2006/main" w="0">
+            <a:noFill/>
+            <a:prstDash val="solid"/>
+          </a:ln>
+        </p:spPr>
+        <p:txBody>
+          <a:bodyPr xmlns:a="http://schemas.openxmlformats.org/drawingml/2006/main"/>
+          <a:lstStyle xmlns:a="http://schemas.openxmlformats.org/drawingml/2006/main"/>
+          <a:p xmlns:a="http://schemas.openxmlformats.org/drawingml/2006/main">
+            <a:pPr algn="l">
+              <a:defRPr sz="1875" b="1">
+                <a:solidFill>
+                  <a:srgbClr val="111827"/>
+                </a:solidFill>
+              </a:defRPr>
+            </a:pPr>
+            <a:r>
+              <a:rPr sz="1875" b="1">
+                <a:solidFill>
+                  <a:srgbClr val="111827"/>
+                </a:solidFill>
+              </a:rPr>
+              <a:t>Too little clarity</a:t>
+            </a:r>
+          </a:p>
+        </p:txBody>
+      </p:sp>
+      <p:sp>
+        <p:nvSpPr>
+          <p:cNvPr id="15" name="">
+            <a:extLst xmlns:a="http://schemas.openxmlformats.org/drawingml/2006/main">
+              <a:ext uri="{FF2B5EF4-FFF2-40B4-BE49-F238E27FC236}">
+                <a16:creationId xmlns:a16="http://schemas.microsoft.com/office/drawing/2014/main" id="{288B1375-E7B2-468B-B87F-AA8F89F1C66D}"/>
+              </a:ext>
+            </a:extLst>
+          </p:cNvPr>
+          <p:cNvSpPr>
+            <a:spLocks xmlns:a="http://schemas.openxmlformats.org/drawingml/2006/main" noGrp="1"/>
+          </p:cNvSpPr>
+          <p:nvPr/>
+        </p:nvSpPr>
+        <p:spPr>
+          <a:xfrm xmlns:a="http://schemas.openxmlformats.org/drawingml/2006/main">
+            <a:off x="8610600" y="3829050"/>
+            <a:ext cx="2095500" cy="381000"/>
+          </a:xfrm>
+          <a:prstGeom xmlns:a="http://schemas.openxmlformats.org/drawingml/2006/main" prst="rect">
+            <a:avLst/>
+          </a:prstGeom>
+          <a:noFill xmlns:a="http://schemas.openxmlformats.org/drawingml/2006/main"/>
+          <a:ln xmlns:a="http://schemas.openxmlformats.org/drawingml/2006/main" w="0">
+            <a:noFill/>
+            <a:prstDash val="solid"/>
+          </a:ln>
+        </p:spPr>
+        <p:txBody>
+          <a:bodyPr xmlns:a="http://schemas.openxmlformats.org/drawingml/2006/main"/>
+          <a:lstStyle xmlns:a="http://schemas.openxmlformats.org/drawingml/2006/main"/>
+          <a:p xmlns:a="http://schemas.openxmlformats.org/drawingml/2006/main">
+            <a:pPr algn="l">
+              <a:defRPr sz="1275" b="0">
+                <a:solidFill>
+                  <a:srgbClr val="526173"/>
+                </a:solidFill>
+              </a:defRPr>
+            </a:pPr>
+            <a:r>
+              <a:rPr sz="1275" b="0">
+                <a:solidFill>
+                  <a:srgbClr val="526173"/>
+                </a:solidFill>
+              </a:rPr>
+              <a:t>Numbers need context to become decisions.</a:t>
+            </a:r>
+          </a:p>
+        </p:txBody>
+      </p:sp>
+      <p:sp>
+        <p:nvSpPr>
+          <p:cNvPr id="16" name="">
+            <a:extLst xmlns:a="http://schemas.openxmlformats.org/drawingml/2006/main">
+              <a:ext uri="{FF2B5EF4-FFF2-40B4-BE49-F238E27FC236}">
+                <a16:creationId xmlns:a16="http://schemas.microsoft.com/office/drawing/2014/main" id="{1C9064FD-3F2A-4155-A1B4-76B793AB98AE}"/>
+              </a:ext>
+            </a:extLst>
+          </p:cNvPr>
+          <p:cNvSpPr>
+            <a:spLocks xmlns:a="http://schemas.openxmlformats.org/drawingml/2006/main" noGrp="1"/>
+          </p:cNvSpPr>
+          <p:nvPr/>
+        </p:nvSpPr>
+        <p:spPr>
+          <a:xfrm xmlns:a="http://schemas.openxmlformats.org/drawingml/2006/main">
+            <a:off x="1562100" y="5219700"/>
+            <a:ext cx="8382000" cy="419100"/>
+          </a:xfrm>
+          <a:prstGeom xmlns:a="http://schemas.openxmlformats.org/drawingml/2006/main" prst="rect">
+            <a:avLst/>
+          </a:prstGeom>
+          <a:noFill xmlns:a="http://schemas.openxmlformats.org/drawingml/2006/main"/>
+          <a:ln xmlns:a="http://schemas.openxmlformats.org/drawingml/2006/main" w="0">
+            <a:noFill/>
+            <a:prstDash val="solid"/>
+          </a:ln>
+        </p:spPr>
+        <p:txBody>
+          <a:bodyPr xmlns:a="http://schemas.openxmlformats.org/drawingml/2006/main"/>
+          <a:lstStyle xmlns:a="http://schemas.openxmlformats.org/drawingml/2006/main"/>
+          <a:p xmlns:a="http://schemas.openxmlformats.org/drawingml/2006/main">
+            <a:pPr algn="ctr">
+              <a:defRPr sz="2100" b="1">
+                <a:solidFill>
+                  <a:srgbClr val="17375F"/>
+                </a:solidFill>
+              </a:defRPr>
+            </a:pPr>
+            <a:r>
+              <a:rPr sz="2100" b="1">
+                <a:solidFill>
+                  <a:srgbClr val="17375F"/>
+                </a:solidFill>
+              </a:rPr>
+              <a:t>This project solves the reading problem: it makes live ERP data easier to understand.</a:t>
+            </a:r>
+          </a:p>
+        </p:txBody>
+      </p:sp>
+      <p:sp>
+        <p:nvSpPr>
+          <p:cNvPr id="17" name="">
+            <a:extLst xmlns:a="http://schemas.openxmlformats.org/drawingml/2006/main">
+              <a:ext uri="{FF2B5EF4-FFF2-40B4-BE49-F238E27FC236}">
+                <a16:creationId xmlns:a16="http://schemas.microsoft.com/office/drawing/2014/main" id="{68536AD9-1188-4B8A-8B0A-8CFCB55CB7E9}"/>
+              </a:ext>
+            </a:extLst>
+          </p:cNvPr>
+          <p:cNvSpPr>
+            <a:spLocks xmlns:a="http://schemas.openxmlformats.org/drawingml/2006/main" noGrp="1"/>
+          </p:cNvSpPr>
+          <p:nvPr/>
+        </p:nvSpPr>
+        <p:spPr>
+          <a:xfrm xmlns:a="http://schemas.openxmlformats.org/drawingml/2006/main">
+            <a:off x="685800" y="6419850"/>
+            <a:ext cx="2095500" cy="228600"/>
+          </a:xfrm>
+          <a:prstGeom xmlns:a="http://schemas.openxmlformats.org/drawingml/2006/main" prst="rect">
+            <a:avLst/>
+          </a:prstGeom>
+          <a:noFill xmlns:a="http://schemas.openxmlformats.org/drawingml/2006/main"/>
+          <a:ln xmlns:a="http://schemas.openxmlformats.org/drawingml/2006/main" w="0">
+            <a:noFill/>
+            <a:prstDash val="solid"/>
+          </a:ln>
+        </p:spPr>
+        <p:txBody>
+          <a:bodyPr xmlns:a="http://schemas.openxmlformats.org/drawingml/2006/main"/>
+          <a:lstStyle xmlns:a="http://schemas.openxmlformats.org/drawingml/2006/main"/>
+          <a:p xmlns:a="http://schemas.openxmlformats.org/drawingml/2006/main">
+            <a:pPr algn="l">
+              <a:defRPr sz="900" b="1">
+                <a:solidFill>
+                  <a:srgbClr val="8EA0B4"/>
+                </a:solidFill>
+              </a:defRPr>
+            </a:pPr>
+            <a:r>
+              <a:rPr sz="900" b="1">
+                <a:solidFill>
+                  <a:srgbClr val="8EA0B4"/>
+                </a:solidFill>
+              </a:rPr>
+              <a:t>AG Health ERP · 2/9</a:t>
             </a:r>
           </a:p>
         </p:txBody>
@@ -2835,7 +2936,7 @@
     </p:spTree>
     <p:extLst>
       <p:ext uri="{BB962C8B-B14F-4D97-AF65-F5344CB8AC3E}">
-        <p14:creationId xmlns:p14="http://schemas.microsoft.com/office/powerpoint/2010/main" val="639210671"/>
+        <p14:creationId xmlns:p14="http://schemas.microsoft.com/office/powerpoint/2010/main" val="1637630701"/>
       </p:ext>
     </p:extLst>
   </p:cSld>
@@ -2848,7 +2949,7 @@
     <p:bg>
       <p:bgPr>
         <a:solidFill xmlns:a="http://schemas.openxmlformats.org/drawingml/2006/main">
-          <a:srgbClr val="F7FBFF"/>
+          <a:srgbClr val="F6FBFF"/>
         </a:solidFill>
       </p:bgPr>
     </p:bg>
@@ -2863,22 +2964,22 @@
       </p:grpSpPr>
       <p:sp>
         <p:nvSpPr>
-          <p:cNvPr id="17" name="">
-            <a:extLst xmlns:a="http://schemas.openxmlformats.org/drawingml/2006/main">
-              <a:ext uri="{FF2B5EF4-FFF2-40B4-BE49-F238E27FC236}">
-                <a16:creationId xmlns:a16="http://schemas.microsoft.com/office/drawing/2014/main" id="{A0D12B66-2887-47AF-8F0B-590D49C68E9D}"/>
-              </a:ext>
-            </a:extLst>
-          </p:cNvPr>
-          <p:cNvSpPr>
-            <a:spLocks xmlns:a="http://schemas.openxmlformats.org/drawingml/2006/main" noGrp="1"/>
-          </p:cNvSpPr>
-          <p:nvPr/>
-        </p:nvSpPr>
-        <p:spPr>
-          <a:xfrm xmlns:a="http://schemas.openxmlformats.org/drawingml/2006/main">
-            <a:off x="10096500" y="0"/>
-            <a:ext cx="2000250" cy="2000250"/>
+          <p:cNvPr id="22" name="">
+            <a:extLst xmlns:a="http://schemas.openxmlformats.org/drawingml/2006/main">
+              <a:ext uri="{FF2B5EF4-FFF2-40B4-BE49-F238E27FC236}">
+                <a16:creationId xmlns:a16="http://schemas.microsoft.com/office/drawing/2014/main" id="{42DA2E9F-27C2-40AC-9A9E-07B5BBEF2A5F}"/>
+              </a:ext>
+            </a:extLst>
+          </p:cNvPr>
+          <p:cNvSpPr>
+            <a:spLocks xmlns:a="http://schemas.openxmlformats.org/drawingml/2006/main" noGrp="1"/>
+          </p:cNvSpPr>
+          <p:nvPr/>
+        </p:nvSpPr>
+        <p:spPr>
+          <a:xfrm xmlns:a="http://schemas.openxmlformats.org/drawingml/2006/main">
+            <a:off x="9886950" y="0"/>
+            <a:ext cx="2095500" cy="2095500"/>
           </a:xfrm>
           <a:prstGeom xmlns:a="http://schemas.openxmlformats.org/drawingml/2006/main" prst="ellipse">
             <a:avLst/>
@@ -2897,7 +2998,7 @@
           <p:cNvPr id="2" name="">
             <a:extLst xmlns:a="http://schemas.openxmlformats.org/drawingml/2006/main">
               <a:ext uri="{FF2B5EF4-FFF2-40B4-BE49-F238E27FC236}">
-                <a16:creationId xmlns:a16="http://schemas.microsoft.com/office/drawing/2014/main" id="{457BC723-4041-45A7-9751-489700BD8FE9}"/>
+                <a16:creationId xmlns:a16="http://schemas.microsoft.com/office/drawing/2014/main" id="{C5321399-FFA0-43FD-A976-2394D4AA9DA7}"/>
               </a:ext>
             </a:extLst>
           </p:cNvPr>
@@ -2909,7 +3010,7 @@
         <p:spPr>
           <a:xfrm xmlns:a="http://schemas.openxmlformats.org/drawingml/2006/main">
             <a:off x="0" y="5524500"/>
-            <a:ext cx="1333500" cy="1333500"/>
+            <a:ext cx="1295400" cy="1295400"/>
           </a:xfrm>
           <a:prstGeom xmlns:a="http://schemas.openxmlformats.org/drawingml/2006/main" prst="ellipse">
             <a:avLst/>
@@ -2928,19 +3029,48 @@
           <p:cNvPr id="3" name="">
             <a:extLst xmlns:a="http://schemas.openxmlformats.org/drawingml/2006/main">
               <a:ext uri="{FF2B5EF4-FFF2-40B4-BE49-F238E27FC236}">
-                <a16:creationId xmlns:a16="http://schemas.microsoft.com/office/drawing/2014/main" id="{6A51BD33-E2D9-4F10-BE6C-61DF5C9D4152}"/>
-              </a:ext>
-            </a:extLst>
-          </p:cNvPr>
-          <p:cNvSpPr>
-            <a:spLocks xmlns:a="http://schemas.openxmlformats.org/drawingml/2006/main" noGrp="1"/>
-          </p:cNvSpPr>
-          <p:nvPr/>
-        </p:nvSpPr>
-        <p:spPr>
-          <a:xfrm xmlns:a="http://schemas.openxmlformats.org/drawingml/2006/main">
-            <a:off x="723900" y="514350"/>
-            <a:ext cx="3429000" cy="266700"/>
+                <a16:creationId xmlns:a16="http://schemas.microsoft.com/office/drawing/2014/main" id="{BF47D6EF-F185-434E-9B5C-499163AFB220}"/>
+              </a:ext>
+            </a:extLst>
+          </p:cNvPr>
+          <p:cNvSpPr>
+            <a:spLocks xmlns:a="http://schemas.openxmlformats.org/drawingml/2006/main" noGrp="1"/>
+          </p:cNvSpPr>
+          <p:nvPr/>
+        </p:nvSpPr>
+        <p:spPr>
+          <a:xfrm xmlns:a="http://schemas.openxmlformats.org/drawingml/2006/main">
+            <a:off x="0" y="0"/>
+            <a:ext cx="12192000" cy="6858000"/>
+          </a:xfrm>
+          <a:prstGeom xmlns:a="http://schemas.openxmlformats.org/drawingml/2006/main" prst="rect">
+            <a:avLst/>
+          </a:prstGeom>
+          <a:noFill xmlns:a="http://schemas.openxmlformats.org/drawingml/2006/main"/>
+          <a:ln xmlns:a="http://schemas.openxmlformats.org/drawingml/2006/main" w="0">
+            <a:noFill/>
+            <a:prstDash val="solid"/>
+          </a:ln>
+        </p:spPr>
+      </p:sp>
+      <p:sp>
+        <p:nvSpPr>
+          <p:cNvPr id="4" name="">
+            <a:extLst xmlns:a="http://schemas.openxmlformats.org/drawingml/2006/main">
+              <a:ext uri="{FF2B5EF4-FFF2-40B4-BE49-F238E27FC236}">
+                <a16:creationId xmlns:a16="http://schemas.microsoft.com/office/drawing/2014/main" id="{97196430-0529-476F-93EC-E035B9B33F32}"/>
+              </a:ext>
+            </a:extLst>
+          </p:cNvPr>
+          <p:cNvSpPr>
+            <a:spLocks xmlns:a="http://schemas.openxmlformats.org/drawingml/2006/main" noGrp="1"/>
+          </p:cNvSpPr>
+          <p:nvPr/>
+        </p:nvSpPr>
+        <p:spPr>
+          <a:xfrm xmlns:a="http://schemas.openxmlformats.org/drawingml/2006/main">
+            <a:off x="685800" y="495300"/>
+            <a:ext cx="3429000" cy="285750"/>
           </a:xfrm>
           <a:prstGeom xmlns:a="http://schemas.openxmlformats.org/drawingml/2006/main" prst="rect">
             <a:avLst/>
@@ -2968,29 +3098,29 @@
                   <a:srgbClr val="E2BE2D"/>
                 </a:solidFill>
               </a:rPr>
-              <a:t>THE SOLUTION</a:t>
-            </a:r>
-          </a:p>
-        </p:txBody>
-      </p:sp>
-      <p:sp>
-        <p:nvSpPr>
-          <p:cNvPr id="4" name="">
-            <a:extLst xmlns:a="http://schemas.openxmlformats.org/drawingml/2006/main">
-              <a:ext uri="{FF2B5EF4-FFF2-40B4-BE49-F238E27FC236}">
-                <a16:creationId xmlns:a16="http://schemas.microsoft.com/office/drawing/2014/main" id="{3A81E578-48ED-46BA-A89B-B7A52DE69652}"/>
-              </a:ext>
-            </a:extLst>
-          </p:cNvPr>
-          <p:cNvSpPr>
-            <a:spLocks xmlns:a="http://schemas.openxmlformats.org/drawingml/2006/main" noGrp="1"/>
-          </p:cNvSpPr>
-          <p:nvPr/>
-        </p:nvSpPr>
-        <p:spPr>
-          <a:xfrm xmlns:a="http://schemas.openxmlformats.org/drawingml/2006/main">
-            <a:off x="723900" y="914400"/>
-            <a:ext cx="8096250" cy="876300"/>
+              <a:t>THE PRODUCT</a:t>
+            </a:r>
+          </a:p>
+        </p:txBody>
+      </p:sp>
+      <p:sp>
+        <p:nvSpPr>
+          <p:cNvPr id="5" name="">
+            <a:extLst xmlns:a="http://schemas.openxmlformats.org/drawingml/2006/main">
+              <a:ext uri="{FF2B5EF4-FFF2-40B4-BE49-F238E27FC236}">
+                <a16:creationId xmlns:a16="http://schemas.microsoft.com/office/drawing/2014/main" id="{FF286C62-D572-4294-A12E-8823491EE5C7}"/>
+              </a:ext>
+            </a:extLst>
+          </p:cNvPr>
+          <p:cNvSpPr>
+            <a:spLocks xmlns:a="http://schemas.openxmlformats.org/drawingml/2006/main" noGrp="1"/>
+          </p:cNvSpPr>
+          <p:nvPr/>
+        </p:nvSpPr>
+        <p:spPr>
+          <a:xfrm xmlns:a="http://schemas.openxmlformats.org/drawingml/2006/main">
+            <a:off x="685800" y="895350"/>
+            <a:ext cx="8286750" cy="895350"/>
           </a:xfrm>
           <a:prstGeom xmlns:a="http://schemas.openxmlformats.org/drawingml/2006/main" prst="rect">
             <a:avLst/>
@@ -3006,41 +3136,41 @@
           <a:lstStyle xmlns:a="http://schemas.openxmlformats.org/drawingml/2006/main"/>
           <a:p xmlns:a="http://schemas.openxmlformats.org/drawingml/2006/main">
             <a:pPr algn="l">
-              <a:defRPr sz="3450" b="1">
+              <a:defRPr sz="3375" b="1">
                 <a:solidFill>
                   <a:srgbClr val="111827"/>
                 </a:solidFill>
               </a:defRPr>
             </a:pPr>
             <a:r>
-              <a:rPr sz="3450" b="1">
+              <a:rPr sz="3375" b="1">
                 <a:solidFill>
                   <a:srgbClr val="111827"/>
                 </a:solidFill>
               </a:rPr>
-              <a:t>One calm executive layer over Business Central</a:t>
-            </a:r>
-          </a:p>
-        </p:txBody>
-      </p:sp>
-      <p:sp>
-        <p:nvSpPr>
-          <p:cNvPr id="5" name="">
-            <a:extLst xmlns:a="http://schemas.openxmlformats.org/drawingml/2006/main">
-              <a:ext uri="{FF2B5EF4-FFF2-40B4-BE49-F238E27FC236}">
-                <a16:creationId xmlns:a16="http://schemas.microsoft.com/office/drawing/2014/main" id="{FB45B9A0-BA5C-4A96-8599-EA8C9D8DCE61}"/>
-              </a:ext>
-            </a:extLst>
-          </p:cNvPr>
-          <p:cNvSpPr>
-            <a:spLocks xmlns:a="http://schemas.openxmlformats.org/drawingml/2006/main" noGrp="1"/>
-          </p:cNvSpPr>
-          <p:nvPr/>
-        </p:nvSpPr>
-        <p:spPr>
-          <a:xfrm xmlns:a="http://schemas.openxmlformats.org/drawingml/2006/main">
-            <a:off x="742950" y="1866900"/>
-            <a:ext cx="7810500" cy="552450"/>
+              <a:t>One clean layer over Business Central</a:t>
+            </a:r>
+          </a:p>
+        </p:txBody>
+      </p:sp>
+      <p:sp>
+        <p:nvSpPr>
+          <p:cNvPr id="6" name="">
+            <a:extLst xmlns:a="http://schemas.openxmlformats.org/drawingml/2006/main">
+              <a:ext uri="{FF2B5EF4-FFF2-40B4-BE49-F238E27FC236}">
+                <a16:creationId xmlns:a16="http://schemas.microsoft.com/office/drawing/2014/main" id="{12FD112B-F79F-4691-92D3-92D30E973633}"/>
+              </a:ext>
+            </a:extLst>
+          </p:cNvPr>
+          <p:cNvSpPr>
+            <a:spLocks xmlns:a="http://schemas.openxmlformats.org/drawingml/2006/main" noGrp="1"/>
+          </p:cNvSpPr>
+          <p:nvPr/>
+        </p:nvSpPr>
+        <p:spPr>
+          <a:xfrm xmlns:a="http://schemas.openxmlformats.org/drawingml/2006/main">
+            <a:off x="704850" y="1866900"/>
+            <a:ext cx="7429500" cy="571500"/>
           </a:xfrm>
           <a:prstGeom xmlns:a="http://schemas.openxmlformats.org/drawingml/2006/main" prst="rect">
             <a:avLst/>
@@ -3058,50 +3188,52 @@
             <a:pPr algn="l">
               <a:defRPr sz="1575" b="0">
                 <a:solidFill>
-                  <a:srgbClr val="516173"/>
+                  <a:srgbClr val="526173"/>
                 </a:solidFill>
               </a:defRPr>
             </a:pPr>
             <a:r>
               <a:rPr sz="1575" b="0">
                 <a:solidFill>
-                  <a:srgbClr val="516173"/>
+                  <a:srgbClr val="526173"/>
                 </a:solidFill>
               </a:rPr>
-              <a:t>The system turns mapped ERP feeds into separate, easy-to-understand business views.</a:t>
-            </a:r>
-          </a:p>
-        </p:txBody>
-      </p:sp>
-      <p:sp>
-        <p:nvSpPr>
-          <p:cNvPr id="6" name="">
-            <a:extLst xmlns:a="http://schemas.openxmlformats.org/drawingml/2006/main">
-              <a:ext uri="{FF2B5EF4-FFF2-40B4-BE49-F238E27FC236}">
-                <a16:creationId xmlns:a16="http://schemas.microsoft.com/office/drawing/2014/main" id="{4403848D-64F6-4084-BBF0-4EB1615EB251}"/>
-              </a:ext>
-            </a:extLst>
-          </p:cNvPr>
-          <p:cNvSpPr>
-            <a:spLocks xmlns:a="http://schemas.openxmlformats.org/drawingml/2006/main" noGrp="1"/>
-          </p:cNvSpPr>
-          <p:nvPr/>
-        </p:nvSpPr>
-        <p:spPr>
-          <a:xfrm xmlns:a="http://schemas.openxmlformats.org/drawingml/2006/main">
-            <a:off x="1314450" y="3000375"/>
-            <a:ext cx="2857500" cy="1238250"/>
+              <a:t>The app takes ERP feeds, separates them into modules, and shows only the information needed for each decision.</a:t>
+            </a:r>
+          </a:p>
+        </p:txBody>
+      </p:sp>
+      <p:sp>
+        <p:nvSpPr>
+          <p:cNvPr id="7" name="">
+            <a:extLst xmlns:a="http://schemas.openxmlformats.org/drawingml/2006/main">
+              <a:ext uri="{FF2B5EF4-FFF2-40B4-BE49-F238E27FC236}">
+                <a16:creationId xmlns:a16="http://schemas.microsoft.com/office/drawing/2014/main" id="{9BAD7E9C-CA60-4CDA-B21D-BDD1C4A90BD4}"/>
+              </a:ext>
+            </a:extLst>
+          </p:cNvPr>
+          <p:cNvSpPr>
+            <a:spLocks xmlns:a="http://schemas.openxmlformats.org/drawingml/2006/main" noGrp="1"/>
+          </p:cNvSpPr>
+          <p:nvPr/>
+        </p:nvSpPr>
+        <p:spPr>
+          <a:xfrm xmlns:a="http://schemas.openxmlformats.org/drawingml/2006/main">
+            <a:off x="5676900" y="2343150"/>
+            <a:ext cx="5219700" cy="3124200"/>
           </a:xfrm>
           <a:prstGeom xmlns:a="http://schemas.openxmlformats.org/drawingml/2006/main" prst="roundRect">
             <a:avLst>
-              <a:gd name="adj" fmla="val 12308"/>
+              <a:gd name="adj" fmla="val 4878"/>
             </a:avLst>
           </a:prstGeom>
           <a:solidFill xmlns:a="http://schemas.openxmlformats.org/drawingml/2006/main">
-            <a:srgbClr val="17375F"/>
-          </a:solidFill>
-          <a:ln xmlns:a="http://schemas.openxmlformats.org/drawingml/2006/main" w="0">
-            <a:noFill/>
+            <a:srgbClr val="FFFFFF"/>
+          </a:solidFill>
+          <a:ln xmlns:a="http://schemas.openxmlformats.org/drawingml/2006/main" w="9525">
+            <a:solidFill>
+              <a:srgbClr val="DBE8F4"/>
+            </a:solidFill>
             <a:prstDash val="solid"/>
           </a:ln>
         </p:spPr>
@@ -3114,22 +3246,206 @@
       </p:sp>
       <p:sp>
         <p:nvSpPr>
-          <p:cNvPr id="7" name="">
-            <a:extLst xmlns:a="http://schemas.openxmlformats.org/drawingml/2006/main">
-              <a:ext uri="{FF2B5EF4-FFF2-40B4-BE49-F238E27FC236}">
-                <a16:creationId xmlns:a16="http://schemas.microsoft.com/office/drawing/2014/main" id="{2B616E44-17E9-472E-A844-ED0DE48887C0}"/>
-              </a:ext>
-            </a:extLst>
-          </p:cNvPr>
-          <p:cNvSpPr>
-            <a:spLocks xmlns:a="http://schemas.openxmlformats.org/drawingml/2006/main" noGrp="1"/>
-          </p:cNvSpPr>
-          <p:nvPr/>
-        </p:nvSpPr>
-        <p:spPr>
-          <a:xfrm xmlns:a="http://schemas.openxmlformats.org/drawingml/2006/main">
-            <a:off x="1695450" y="3381375"/>
-            <a:ext cx="2190750" cy="323850"/>
+          <p:cNvPr id="8" name="">
+            <a:extLst xmlns:a="http://schemas.openxmlformats.org/drawingml/2006/main">
+              <a:ext uri="{FF2B5EF4-FFF2-40B4-BE49-F238E27FC236}">
+                <a16:creationId xmlns:a16="http://schemas.microsoft.com/office/drawing/2014/main" id="{BCD6CA4C-448C-4AD7-8176-A43C579E95B9}"/>
+              </a:ext>
+            </a:extLst>
+          </p:cNvPr>
+          <p:cNvSpPr>
+            <a:spLocks xmlns:a="http://schemas.openxmlformats.org/drawingml/2006/main" noGrp="1"/>
+          </p:cNvSpPr>
+          <p:nvPr/>
+        </p:nvSpPr>
+        <p:spPr>
+          <a:xfrm xmlns:a="http://schemas.openxmlformats.org/drawingml/2006/main">
+            <a:off x="5676900" y="2343150"/>
+            <a:ext cx="5219700" cy="419100"/>
+          </a:xfrm>
+          <a:prstGeom xmlns:a="http://schemas.openxmlformats.org/drawingml/2006/main" prst="roundRect">
+            <a:avLst>
+              <a:gd name="adj" fmla="val 36364"/>
+            </a:avLst>
+          </a:prstGeom>
+          <a:solidFill xmlns:a="http://schemas.openxmlformats.org/drawingml/2006/main">
+            <a:srgbClr val="17375F"/>
+          </a:solidFill>
+          <a:ln xmlns:a="http://schemas.openxmlformats.org/drawingml/2006/main" w="0">
+            <a:noFill/>
+            <a:prstDash val="solid"/>
+          </a:ln>
+        </p:spPr>
+      </p:sp>
+      <p:sp>
+        <p:nvSpPr>
+          <p:cNvPr id="9" name="">
+            <a:extLst xmlns:a="http://schemas.openxmlformats.org/drawingml/2006/main">
+              <a:ext uri="{FF2B5EF4-FFF2-40B4-BE49-F238E27FC236}">
+                <a16:creationId xmlns:a16="http://schemas.microsoft.com/office/drawing/2014/main" id="{031A8777-B873-4383-AAE1-362D523C1CA6}"/>
+              </a:ext>
+            </a:extLst>
+          </p:cNvPr>
+          <p:cNvSpPr>
+            <a:spLocks xmlns:a="http://schemas.openxmlformats.org/drawingml/2006/main" noGrp="1"/>
+          </p:cNvSpPr>
+          <p:nvPr/>
+        </p:nvSpPr>
+        <p:spPr>
+          <a:xfrm xmlns:a="http://schemas.openxmlformats.org/drawingml/2006/main">
+            <a:off x="5886450" y="2457450"/>
+            <a:ext cx="95250" cy="95250"/>
+          </a:xfrm>
+          <a:prstGeom xmlns:a="http://schemas.openxmlformats.org/drawingml/2006/main" prst="ellipse">
+            <a:avLst/>
+          </a:prstGeom>
+          <a:solidFill xmlns:a="http://schemas.openxmlformats.org/drawingml/2006/main">
+            <a:srgbClr val="FF6464"/>
+          </a:solidFill>
+          <a:ln xmlns:a="http://schemas.openxmlformats.org/drawingml/2006/main" w="0">
+            <a:noFill/>
+            <a:prstDash val="solid"/>
+          </a:ln>
+        </p:spPr>
+      </p:sp>
+      <p:sp>
+        <p:nvSpPr>
+          <p:cNvPr id="10" name="">
+            <a:extLst xmlns:a="http://schemas.openxmlformats.org/drawingml/2006/main">
+              <a:ext uri="{FF2B5EF4-FFF2-40B4-BE49-F238E27FC236}">
+                <a16:creationId xmlns:a16="http://schemas.microsoft.com/office/drawing/2014/main" id="{1BAEB7EA-A71A-4248-8DB6-08C15350647A}"/>
+              </a:ext>
+            </a:extLst>
+          </p:cNvPr>
+          <p:cNvSpPr>
+            <a:spLocks xmlns:a="http://schemas.openxmlformats.org/drawingml/2006/main" noGrp="1"/>
+          </p:cNvSpPr>
+          <p:nvPr/>
+        </p:nvSpPr>
+        <p:spPr>
+          <a:xfrm xmlns:a="http://schemas.openxmlformats.org/drawingml/2006/main">
+            <a:off x="6057900" y="2457450"/>
+            <a:ext cx="95250" cy="95250"/>
+          </a:xfrm>
+          <a:prstGeom xmlns:a="http://schemas.openxmlformats.org/drawingml/2006/main" prst="ellipse">
+            <a:avLst/>
+          </a:prstGeom>
+          <a:solidFill xmlns:a="http://schemas.openxmlformats.org/drawingml/2006/main">
+            <a:srgbClr val="FFD166"/>
+          </a:solidFill>
+          <a:ln xmlns:a="http://schemas.openxmlformats.org/drawingml/2006/main" w="0">
+            <a:noFill/>
+            <a:prstDash val="solid"/>
+          </a:ln>
+        </p:spPr>
+      </p:sp>
+      <p:sp>
+        <p:nvSpPr>
+          <p:cNvPr id="11" name="">
+            <a:extLst xmlns:a="http://schemas.openxmlformats.org/drawingml/2006/main">
+              <a:ext uri="{FF2B5EF4-FFF2-40B4-BE49-F238E27FC236}">
+                <a16:creationId xmlns:a16="http://schemas.microsoft.com/office/drawing/2014/main" id="{60D6D2F4-221F-4AB2-8FE6-0490865774CE}"/>
+              </a:ext>
+            </a:extLst>
+          </p:cNvPr>
+          <p:cNvSpPr>
+            <a:spLocks xmlns:a="http://schemas.openxmlformats.org/drawingml/2006/main" noGrp="1"/>
+          </p:cNvSpPr>
+          <p:nvPr/>
+        </p:nvSpPr>
+        <p:spPr>
+          <a:xfrm xmlns:a="http://schemas.openxmlformats.org/drawingml/2006/main">
+            <a:off x="6229350" y="2457450"/>
+            <a:ext cx="95250" cy="95250"/>
+          </a:xfrm>
+          <a:prstGeom xmlns:a="http://schemas.openxmlformats.org/drawingml/2006/main" prst="ellipse">
+            <a:avLst/>
+          </a:prstGeom>
+          <a:solidFill xmlns:a="http://schemas.openxmlformats.org/drawingml/2006/main">
+            <a:srgbClr val="06D6A0"/>
+          </a:solidFill>
+          <a:ln xmlns:a="http://schemas.openxmlformats.org/drawingml/2006/main" w="0">
+            <a:noFill/>
+            <a:prstDash val="solid"/>
+          </a:ln>
+        </p:spPr>
+      </p:sp>
+      <p:pic>
+        <p:nvPicPr>
+          <p:cNvPr id="33" name=""/>
+          <p:cNvPicPr>
+            <a:picLocks xmlns:a="http://schemas.openxmlformats.org/drawingml/2006/main" noChangeAspect="1"/>
+          </p:cNvPicPr>
+          <p:nvPr/>
+        </p:nvPicPr>
+        <p:blipFill>
+          <a:blip xmlns:r="http://schemas.openxmlformats.org/officeDocument/2006/relationships" xmlns:a="http://schemas.openxmlformats.org/drawingml/2006/main" r:embed="R84853d202e3b4d05"/>
+          <a:srcRect xmlns:a="http://schemas.openxmlformats.org/drawingml/2006/main" l="0" t="3474" r="0" b="3474"/>
+          <a:stretch xmlns:a="http://schemas.openxmlformats.org/drawingml/2006/main">
+            <a:fillRect l="0" t="0" r="0" b="0"/>
+          </a:stretch>
+        </p:blipFill>
+        <p:spPr>
+          <a:xfrm xmlns:a="http://schemas.openxmlformats.org/drawingml/2006/main">
+            <a:off x="5810250" y="2476500"/>
+            <a:ext cx="4953000" cy="2857500"/>
+          </a:xfrm>
+          <a:prstGeom xmlns:a="http://schemas.openxmlformats.org/drawingml/2006/main" prst="roundRect">
+            <a:avLst>
+              <a:gd name="adj" fmla="val 4000"/>
+            </a:avLst>
+          </a:prstGeom>
+        </p:spPr>
+      </p:pic>
+      <p:sp>
+        <p:nvSpPr>
+          <p:cNvPr id="13" name="">
+            <a:extLst xmlns:a="http://schemas.openxmlformats.org/drawingml/2006/main">
+              <a:ext uri="{FF2B5EF4-FFF2-40B4-BE49-F238E27FC236}">
+                <a16:creationId xmlns:a16="http://schemas.microsoft.com/office/drawing/2014/main" id="{F2ACD424-42D7-4498-BAB0-2976A0008E85}"/>
+              </a:ext>
+            </a:extLst>
+          </p:cNvPr>
+          <p:cNvSpPr>
+            <a:spLocks xmlns:a="http://schemas.openxmlformats.org/drawingml/2006/main" noGrp="1"/>
+          </p:cNvSpPr>
+          <p:nvPr/>
+        </p:nvSpPr>
+        <p:spPr>
+          <a:xfrm xmlns:a="http://schemas.openxmlformats.org/drawingml/2006/main">
+            <a:off x="1028700" y="2981325"/>
+            <a:ext cx="123825" cy="123825"/>
+          </a:xfrm>
+          <a:prstGeom xmlns:a="http://schemas.openxmlformats.org/drawingml/2006/main" prst="ellipse">
+            <a:avLst/>
+          </a:prstGeom>
+          <a:solidFill xmlns:a="http://schemas.openxmlformats.org/drawingml/2006/main">
+            <a:srgbClr val="E2BE2D"/>
+          </a:solidFill>
+          <a:ln xmlns:a="http://schemas.openxmlformats.org/drawingml/2006/main" w="0">
+            <a:noFill/>
+            <a:prstDash val="solid"/>
+          </a:ln>
+        </p:spPr>
+      </p:sp>
+      <p:sp>
+        <p:nvSpPr>
+          <p:cNvPr id="14" name="">
+            <a:extLst xmlns:a="http://schemas.openxmlformats.org/drawingml/2006/main">
+              <a:ext uri="{FF2B5EF4-FFF2-40B4-BE49-F238E27FC236}">
+                <a16:creationId xmlns:a16="http://schemas.microsoft.com/office/drawing/2014/main" id="{23474B76-9CED-4FD4-9928-CB0A5687D322}"/>
+              </a:ext>
+            </a:extLst>
+          </p:cNvPr>
+          <p:cNvSpPr>
+            <a:spLocks xmlns:a="http://schemas.openxmlformats.org/drawingml/2006/main" noGrp="1"/>
+          </p:cNvSpPr>
+          <p:nvPr/>
+        </p:nvSpPr>
+        <p:spPr>
+          <a:xfrm xmlns:a="http://schemas.openxmlformats.org/drawingml/2006/main">
+            <a:off x="1314450" y="2905125"/>
+            <a:ext cx="3714750" cy="381000"/>
           </a:xfrm>
           <a:prstGeom xmlns:a="http://schemas.openxmlformats.org/drawingml/2006/main" prst="rect">
             <a:avLst/>
@@ -3145,41 +3461,72 @@
           <a:lstStyle xmlns:a="http://schemas.openxmlformats.org/drawingml/2006/main"/>
           <a:p xmlns:a="http://schemas.openxmlformats.org/drawingml/2006/main">
             <a:pPr algn="l">
-              <a:defRPr sz="1950" b="1">
-                <a:solidFill>
-                  <a:srgbClr val="FFFFFF"/>
+              <a:defRPr sz="1500" b="1">
+                <a:solidFill>
+                  <a:srgbClr val="111827"/>
                 </a:solidFill>
               </a:defRPr>
             </a:pPr>
             <a:r>
-              <a:rPr sz="1950" b="1">
-                <a:solidFill>
-                  <a:srgbClr val="FFFFFF"/>
+              <a:rPr sz="1500" b="1">
+                <a:solidFill>
+                  <a:srgbClr val="111827"/>
                 </a:solidFill>
               </a:rPr>
-              <a:t>Business Central</a:t>
-            </a:r>
-          </a:p>
-        </p:txBody>
-      </p:sp>
-      <p:sp>
-        <p:nvSpPr>
-          <p:cNvPr id="8" name="">
-            <a:extLst xmlns:a="http://schemas.openxmlformats.org/drawingml/2006/main">
-              <a:ext uri="{FF2B5EF4-FFF2-40B4-BE49-F238E27FC236}">
-                <a16:creationId xmlns:a16="http://schemas.microsoft.com/office/drawing/2014/main" id="{17F21B45-B459-4FE0-ADC2-2D83126F3BD2}"/>
-              </a:ext>
-            </a:extLst>
-          </p:cNvPr>
-          <p:cNvSpPr>
-            <a:spLocks xmlns:a="http://schemas.openxmlformats.org/drawingml/2006/main" noGrp="1"/>
-          </p:cNvSpPr>
-          <p:nvPr/>
-        </p:nvSpPr>
-        <p:spPr>
-          <a:xfrm xmlns:a="http://schemas.openxmlformats.org/drawingml/2006/main">
-            <a:off x="1695450" y="3790950"/>
-            <a:ext cx="1809750" cy="247650"/>
+              <a:t>Financial snapshot first</a:t>
+            </a:r>
+          </a:p>
+        </p:txBody>
+      </p:sp>
+      <p:sp>
+        <p:nvSpPr>
+          <p:cNvPr id="15" name="">
+            <a:extLst xmlns:a="http://schemas.openxmlformats.org/drawingml/2006/main">
+              <a:ext uri="{FF2B5EF4-FFF2-40B4-BE49-F238E27FC236}">
+                <a16:creationId xmlns:a16="http://schemas.microsoft.com/office/drawing/2014/main" id="{74700B82-87E4-4144-B28D-94FE980DDC7C}"/>
+              </a:ext>
+            </a:extLst>
+          </p:cNvPr>
+          <p:cNvSpPr>
+            <a:spLocks xmlns:a="http://schemas.openxmlformats.org/drawingml/2006/main" noGrp="1"/>
+          </p:cNvSpPr>
+          <p:nvPr/>
+        </p:nvSpPr>
+        <p:spPr>
+          <a:xfrm xmlns:a="http://schemas.openxmlformats.org/drawingml/2006/main">
+            <a:off x="1028700" y="3514725"/>
+            <a:ext cx="123825" cy="123825"/>
+          </a:xfrm>
+          <a:prstGeom xmlns:a="http://schemas.openxmlformats.org/drawingml/2006/main" prst="ellipse">
+            <a:avLst/>
+          </a:prstGeom>
+          <a:solidFill xmlns:a="http://schemas.openxmlformats.org/drawingml/2006/main">
+            <a:srgbClr val="3D78DD"/>
+          </a:solidFill>
+          <a:ln xmlns:a="http://schemas.openxmlformats.org/drawingml/2006/main" w="0">
+            <a:noFill/>
+            <a:prstDash val="solid"/>
+          </a:ln>
+        </p:spPr>
+      </p:sp>
+      <p:sp>
+        <p:nvSpPr>
+          <p:cNvPr id="16" name="">
+            <a:extLst xmlns:a="http://schemas.openxmlformats.org/drawingml/2006/main">
+              <a:ext uri="{FF2B5EF4-FFF2-40B4-BE49-F238E27FC236}">
+                <a16:creationId xmlns:a16="http://schemas.microsoft.com/office/drawing/2014/main" id="{11B9BD3D-AEC7-4243-951D-71189567FF77}"/>
+              </a:ext>
+            </a:extLst>
+          </p:cNvPr>
+          <p:cNvSpPr>
+            <a:spLocks xmlns:a="http://schemas.openxmlformats.org/drawingml/2006/main" noGrp="1"/>
+          </p:cNvSpPr>
+          <p:nvPr/>
+        </p:nvSpPr>
+        <p:spPr>
+          <a:xfrm xmlns:a="http://schemas.openxmlformats.org/drawingml/2006/main">
+            <a:off x="1314450" y="3438525"/>
+            <a:ext cx="3714750" cy="381000"/>
           </a:xfrm>
           <a:prstGeom xmlns:a="http://schemas.openxmlformats.org/drawingml/2006/main" prst="rect">
             <a:avLst/>
@@ -3195,113 +3542,72 @@
           <a:lstStyle xmlns:a="http://schemas.openxmlformats.org/drawingml/2006/main"/>
           <a:p xmlns:a="http://schemas.openxmlformats.org/drawingml/2006/main">
             <a:pPr algn="l">
-              <a:defRPr sz="1350" b="0">
-                <a:solidFill>
-                  <a:srgbClr val="DCE8F8"/>
+              <a:defRPr sz="1500" b="0">
+                <a:solidFill>
+                  <a:srgbClr val="111827"/>
                 </a:solidFill>
               </a:defRPr>
             </a:pPr>
             <a:r>
-              <a:rPr sz="1350" b="0">
-                <a:solidFill>
-                  <a:srgbClr val="DCE8F8"/>
+              <a:rPr sz="1500" b="0">
+                <a:solidFill>
+                  <a:srgbClr val="111827"/>
                 </a:solidFill>
               </a:rPr>
-              <a:t>Live source data</a:t>
-            </a:r>
-          </a:p>
-        </p:txBody>
-      </p:sp>
-      <p:sp>
-        <p:nvSpPr>
-          <p:cNvPr id="9" name="">
-            <a:extLst xmlns:a="http://schemas.openxmlformats.org/drawingml/2006/main">
-              <a:ext uri="{FF2B5EF4-FFF2-40B4-BE49-F238E27FC236}">
-                <a16:creationId xmlns:a16="http://schemas.microsoft.com/office/drawing/2014/main" id="{CE08D762-A10F-4ED1-83CF-949296E0CAC0}"/>
-              </a:ext>
-            </a:extLst>
-          </p:cNvPr>
-          <p:cNvSpPr>
-            <a:spLocks xmlns:a="http://schemas.openxmlformats.org/drawingml/2006/main" noGrp="1"/>
-          </p:cNvSpPr>
-          <p:nvPr/>
-        </p:nvSpPr>
-        <p:spPr>
-          <a:xfrm xmlns:a="http://schemas.openxmlformats.org/drawingml/2006/main">
-            <a:off x="4476750" y="3381375"/>
-            <a:ext cx="762000" cy="457200"/>
-          </a:xfrm>
-          <a:prstGeom xmlns:a="http://schemas.openxmlformats.org/drawingml/2006/main" prst="chevron">
+              <a:t>Operations below it</a:t>
+            </a:r>
+          </a:p>
+        </p:txBody>
+      </p:sp>
+      <p:sp>
+        <p:nvSpPr>
+          <p:cNvPr id="17" name="">
+            <a:extLst xmlns:a="http://schemas.openxmlformats.org/drawingml/2006/main">
+              <a:ext uri="{FF2B5EF4-FFF2-40B4-BE49-F238E27FC236}">
+                <a16:creationId xmlns:a16="http://schemas.microsoft.com/office/drawing/2014/main" id="{3F5E26F4-1CD8-4328-A68B-7DB6643BC7EB}"/>
+              </a:ext>
+            </a:extLst>
+          </p:cNvPr>
+          <p:cNvSpPr>
+            <a:spLocks xmlns:a="http://schemas.openxmlformats.org/drawingml/2006/main" noGrp="1"/>
+          </p:cNvSpPr>
+          <p:nvPr/>
+        </p:nvSpPr>
+        <p:spPr>
+          <a:xfrm xmlns:a="http://schemas.openxmlformats.org/drawingml/2006/main">
+            <a:off x="1028700" y="4048125"/>
+            <a:ext cx="123825" cy="123825"/>
+          </a:xfrm>
+          <a:prstGeom xmlns:a="http://schemas.openxmlformats.org/drawingml/2006/main" prst="ellipse">
             <a:avLst/>
           </a:prstGeom>
           <a:solidFill xmlns:a="http://schemas.openxmlformats.org/drawingml/2006/main">
-            <a:srgbClr val="E2BE2D"/>
-          </a:solidFill>
-          <a:ln xmlns:a="http://schemas.openxmlformats.org/drawingml/2006/main" w="0">
-            <a:noFill/>
-            <a:prstDash val="solid"/>
-          </a:ln>
-        </p:spPr>
-      </p:sp>
-      <p:sp>
-        <p:nvSpPr>
-          <p:cNvPr id="10" name="">
-            <a:extLst xmlns:a="http://schemas.openxmlformats.org/drawingml/2006/main">
-              <a:ext uri="{FF2B5EF4-FFF2-40B4-BE49-F238E27FC236}">
-                <a16:creationId xmlns:a16="http://schemas.microsoft.com/office/drawing/2014/main" id="{D4AFCD6B-CAA4-4003-9215-F068A42F9AA7}"/>
-              </a:ext>
-            </a:extLst>
-          </p:cNvPr>
-          <p:cNvSpPr>
-            <a:spLocks xmlns:a="http://schemas.openxmlformats.org/drawingml/2006/main" noGrp="1"/>
-          </p:cNvSpPr>
-          <p:nvPr/>
-        </p:nvSpPr>
-        <p:spPr>
-          <a:xfrm xmlns:a="http://schemas.openxmlformats.org/drawingml/2006/main">
-            <a:off x="5638800" y="2714625"/>
-            <a:ext cx="2857500" cy="1809750"/>
-          </a:xfrm>
-          <a:prstGeom xmlns:a="http://schemas.openxmlformats.org/drawingml/2006/main" prst="roundRect">
-            <a:avLst>
-              <a:gd name="adj" fmla="val 8421"/>
-            </a:avLst>
-          </a:prstGeom>
-          <a:solidFill xmlns:a="http://schemas.openxmlformats.org/drawingml/2006/main">
-            <a:srgbClr val="FFFFFF"/>
-          </a:solidFill>
-          <a:ln xmlns:a="http://schemas.openxmlformats.org/drawingml/2006/main" w="9525">
-            <a:solidFill>
-              <a:srgbClr val="DBE8F4"/>
-            </a:solidFill>
-            <a:prstDash val="solid"/>
-          </a:ln>
-        </p:spPr>
-        <p:style>
-          <a:lnRef xmlns:a="http://schemas.openxmlformats.org/drawingml/2006/main" idx="0"/>
-          <a:fillRef xmlns:a="http://schemas.openxmlformats.org/drawingml/2006/main" idx="0"/>
-          <a:effectRef xmlns:a="http://schemas.openxmlformats.org/drawingml/2006/main" idx="4"/>
-          <a:fontRef xmlns:a="http://schemas.openxmlformats.org/drawingml/2006/main" idx="major"/>
-        </p:style>
-      </p:sp>
-      <p:sp>
-        <p:nvSpPr>
-          <p:cNvPr id="11" name="">
-            <a:extLst xmlns:a="http://schemas.openxmlformats.org/drawingml/2006/main">
-              <a:ext uri="{FF2B5EF4-FFF2-40B4-BE49-F238E27FC236}">
-                <a16:creationId xmlns:a16="http://schemas.microsoft.com/office/drawing/2014/main" id="{CFBD73E5-E511-47FE-8BB5-F839476AD657}"/>
-              </a:ext>
-            </a:extLst>
-          </p:cNvPr>
-          <p:cNvSpPr>
-            <a:spLocks xmlns:a="http://schemas.openxmlformats.org/drawingml/2006/main" noGrp="1"/>
-          </p:cNvSpPr>
-          <p:nvPr/>
-        </p:nvSpPr>
-        <p:spPr>
-          <a:xfrm xmlns:a="http://schemas.openxmlformats.org/drawingml/2006/main">
-            <a:off x="6057900" y="3095625"/>
-            <a:ext cx="2190750" cy="552450"/>
+            <a:srgbClr val="10B981"/>
+          </a:solidFill>
+          <a:ln xmlns:a="http://schemas.openxmlformats.org/drawingml/2006/main" w="0">
+            <a:noFill/>
+            <a:prstDash val="solid"/>
+          </a:ln>
+        </p:spPr>
+      </p:sp>
+      <p:sp>
+        <p:nvSpPr>
+          <p:cNvPr id="18" name="">
+            <a:extLst xmlns:a="http://schemas.openxmlformats.org/drawingml/2006/main">
+              <a:ext uri="{FF2B5EF4-FFF2-40B4-BE49-F238E27FC236}">
+                <a16:creationId xmlns:a16="http://schemas.microsoft.com/office/drawing/2014/main" id="{9D177DA6-BA6B-4938-81A2-C1EECF93DD3C}"/>
+              </a:ext>
+            </a:extLst>
+          </p:cNvPr>
+          <p:cNvSpPr>
+            <a:spLocks xmlns:a="http://schemas.openxmlformats.org/drawingml/2006/main" noGrp="1"/>
+          </p:cNvSpPr>
+          <p:nvPr/>
+        </p:nvSpPr>
+        <p:spPr>
+          <a:xfrm xmlns:a="http://schemas.openxmlformats.org/drawingml/2006/main">
+            <a:off x="1314450" y="3971925"/>
+            <a:ext cx="3714750" cy="381000"/>
           </a:xfrm>
           <a:prstGeom xmlns:a="http://schemas.openxmlformats.org/drawingml/2006/main" prst="rect">
             <a:avLst/>
@@ -3317,41 +3623,72 @@
           <a:lstStyle xmlns:a="http://schemas.openxmlformats.org/drawingml/2006/main"/>
           <a:p xmlns:a="http://schemas.openxmlformats.org/drawingml/2006/main">
             <a:pPr algn="l">
-              <a:defRPr sz="1950" b="1">
+              <a:defRPr sz="1500" b="0">
                 <a:solidFill>
                   <a:srgbClr val="111827"/>
                 </a:solidFill>
               </a:defRPr>
             </a:pPr>
             <a:r>
-              <a:rPr sz="1950" b="1">
+              <a:rPr sz="1500" b="0">
                 <a:solidFill>
                   <a:srgbClr val="111827"/>
                 </a:solidFill>
               </a:rPr>
-              <a:t>Clean calculation layer</a:t>
-            </a:r>
-          </a:p>
-        </p:txBody>
-      </p:sp>
-      <p:sp>
-        <p:nvSpPr>
-          <p:cNvPr id="12" name="">
-            <a:extLst xmlns:a="http://schemas.openxmlformats.org/drawingml/2006/main">
-              <a:ext uri="{FF2B5EF4-FFF2-40B4-BE49-F238E27FC236}">
-                <a16:creationId xmlns:a16="http://schemas.microsoft.com/office/drawing/2014/main" id="{029EC8D5-F85C-45BD-992C-17BC593E8450}"/>
-              </a:ext>
-            </a:extLst>
-          </p:cNvPr>
-          <p:cNvSpPr>
-            <a:spLocks xmlns:a="http://schemas.openxmlformats.org/drawingml/2006/main" noGrp="1"/>
-          </p:cNvSpPr>
-          <p:nvPr/>
-        </p:nvSpPr>
-        <p:spPr>
-          <a:xfrm xmlns:a="http://schemas.openxmlformats.org/drawingml/2006/main">
-            <a:off x="6057900" y="3810000"/>
-            <a:ext cx="2000250" cy="457200"/>
+              <a:t>Detailed reports on separate pages</a:t>
+            </a:r>
+          </a:p>
+        </p:txBody>
+      </p:sp>
+      <p:sp>
+        <p:nvSpPr>
+          <p:cNvPr id="19" name="">
+            <a:extLst xmlns:a="http://schemas.openxmlformats.org/drawingml/2006/main">
+              <a:ext uri="{FF2B5EF4-FFF2-40B4-BE49-F238E27FC236}">
+                <a16:creationId xmlns:a16="http://schemas.microsoft.com/office/drawing/2014/main" id="{BB68BE73-CE1F-4D2B-96B8-703C4716F27D}"/>
+              </a:ext>
+            </a:extLst>
+          </p:cNvPr>
+          <p:cNvSpPr>
+            <a:spLocks xmlns:a="http://schemas.openxmlformats.org/drawingml/2006/main" noGrp="1"/>
+          </p:cNvSpPr>
+          <p:nvPr/>
+        </p:nvSpPr>
+        <p:spPr>
+          <a:xfrm xmlns:a="http://schemas.openxmlformats.org/drawingml/2006/main">
+            <a:off x="1028700" y="4581525"/>
+            <a:ext cx="123825" cy="123825"/>
+          </a:xfrm>
+          <a:prstGeom xmlns:a="http://schemas.openxmlformats.org/drawingml/2006/main" prst="ellipse">
+            <a:avLst/>
+          </a:prstGeom>
+          <a:solidFill xmlns:a="http://schemas.openxmlformats.org/drawingml/2006/main">
+            <a:srgbClr val="7C6CF2"/>
+          </a:solidFill>
+          <a:ln xmlns:a="http://schemas.openxmlformats.org/drawingml/2006/main" w="0">
+            <a:noFill/>
+            <a:prstDash val="solid"/>
+          </a:ln>
+        </p:spPr>
+      </p:sp>
+      <p:sp>
+        <p:nvSpPr>
+          <p:cNvPr id="20" name="">
+            <a:extLst xmlns:a="http://schemas.openxmlformats.org/drawingml/2006/main">
+              <a:ext uri="{FF2B5EF4-FFF2-40B4-BE49-F238E27FC236}">
+                <a16:creationId xmlns:a16="http://schemas.microsoft.com/office/drawing/2014/main" id="{021D6711-B8EE-4300-BAA5-C0282424C8ED}"/>
+              </a:ext>
+            </a:extLst>
+          </p:cNvPr>
+          <p:cNvSpPr>
+            <a:spLocks xmlns:a="http://schemas.openxmlformats.org/drawingml/2006/main" noGrp="1"/>
+          </p:cNvSpPr>
+          <p:nvPr/>
+        </p:nvSpPr>
+        <p:spPr>
+          <a:xfrm xmlns:a="http://schemas.openxmlformats.org/drawingml/2006/main">
+            <a:off x="1314450" y="4505325"/>
+            <a:ext cx="3714750" cy="381000"/>
           </a:xfrm>
           <a:prstGeom xmlns:a="http://schemas.openxmlformats.org/drawingml/2006/main" prst="rect">
             <a:avLst/>
@@ -3367,113 +3704,41 @@
           <a:lstStyle xmlns:a="http://schemas.openxmlformats.org/drawingml/2006/main"/>
           <a:p xmlns:a="http://schemas.openxmlformats.org/drawingml/2006/main">
             <a:pPr algn="l">
-              <a:defRPr sz="1350" b="0">
-                <a:solidFill>
-                  <a:srgbClr val="516173"/>
+              <a:defRPr sz="1500" b="0">
+                <a:solidFill>
+                  <a:srgbClr val="111827"/>
                 </a:solidFill>
               </a:defRPr>
             </a:pPr>
             <a:r>
-              <a:rPr sz="1350" b="0">
-                <a:solidFill>
-                  <a:srgbClr val="516173"/>
+              <a:rPr sz="1500" b="0">
+                <a:solidFill>
+                  <a:srgbClr val="111827"/>
                 </a:solidFill>
               </a:rPr>
-              <a:t>Filter, group, explain, and separate each module.</a:t>
-            </a:r>
-          </a:p>
-        </p:txBody>
-      </p:sp>
-      <p:sp>
-        <p:nvSpPr>
-          <p:cNvPr id="13" name="">
-            <a:extLst xmlns:a="http://schemas.openxmlformats.org/drawingml/2006/main">
-              <a:ext uri="{FF2B5EF4-FFF2-40B4-BE49-F238E27FC236}">
-                <a16:creationId xmlns:a16="http://schemas.microsoft.com/office/drawing/2014/main" id="{C299C167-8B3A-4731-A541-554F126CAAD4}"/>
-              </a:ext>
-            </a:extLst>
-          </p:cNvPr>
-          <p:cNvSpPr>
-            <a:spLocks xmlns:a="http://schemas.openxmlformats.org/drawingml/2006/main" noGrp="1"/>
-          </p:cNvSpPr>
-          <p:nvPr/>
-        </p:nvSpPr>
-        <p:spPr>
-          <a:xfrm xmlns:a="http://schemas.openxmlformats.org/drawingml/2006/main">
-            <a:off x="8810625" y="3381375"/>
-            <a:ext cx="762000" cy="457200"/>
-          </a:xfrm>
-          <a:prstGeom xmlns:a="http://schemas.openxmlformats.org/drawingml/2006/main" prst="chevron">
-            <a:avLst/>
-          </a:prstGeom>
-          <a:solidFill xmlns:a="http://schemas.openxmlformats.org/drawingml/2006/main">
-            <a:srgbClr val="E2BE2D"/>
-          </a:solidFill>
-          <a:ln xmlns:a="http://schemas.openxmlformats.org/drawingml/2006/main" w="0">
-            <a:noFill/>
-            <a:prstDash val="solid"/>
-          </a:ln>
-        </p:spPr>
-      </p:sp>
-      <p:sp>
-        <p:nvSpPr>
-          <p:cNvPr id="14" name="">
-            <a:extLst xmlns:a="http://schemas.openxmlformats.org/drawingml/2006/main">
-              <a:ext uri="{FF2B5EF4-FFF2-40B4-BE49-F238E27FC236}">
-                <a16:creationId xmlns:a16="http://schemas.microsoft.com/office/drawing/2014/main" id="{A693FB82-B5D0-48AD-90CE-F6B789E39450}"/>
-              </a:ext>
-            </a:extLst>
-          </p:cNvPr>
-          <p:cNvSpPr>
-            <a:spLocks xmlns:a="http://schemas.openxmlformats.org/drawingml/2006/main" noGrp="1"/>
-          </p:cNvSpPr>
-          <p:nvPr/>
-        </p:nvSpPr>
-        <p:spPr>
-          <a:xfrm xmlns:a="http://schemas.openxmlformats.org/drawingml/2006/main">
-            <a:off x="9829800" y="3000375"/>
-            <a:ext cx="1428750" cy="1238250"/>
-          </a:xfrm>
-          <a:prstGeom xmlns:a="http://schemas.openxmlformats.org/drawingml/2006/main" prst="roundRect">
-            <a:avLst>
-              <a:gd name="adj" fmla="val 12308"/>
-            </a:avLst>
-          </a:prstGeom>
-          <a:solidFill xmlns:a="http://schemas.openxmlformats.org/drawingml/2006/main">
-            <a:srgbClr val="E9FBF4"/>
-          </a:solidFill>
-          <a:ln xmlns:a="http://schemas.openxmlformats.org/drawingml/2006/main" w="9525">
-            <a:solidFill>
-              <a:srgbClr val="DBE8F4"/>
-            </a:solidFill>
-            <a:prstDash val="solid"/>
-          </a:ln>
-        </p:spPr>
-        <p:style>
-          <a:lnRef xmlns:a="http://schemas.openxmlformats.org/drawingml/2006/main" idx="0"/>
-          <a:fillRef xmlns:a="http://schemas.openxmlformats.org/drawingml/2006/main" idx="0"/>
-          <a:effectRef xmlns:a="http://schemas.openxmlformats.org/drawingml/2006/main" idx="4"/>
-          <a:fontRef xmlns:a="http://schemas.openxmlformats.org/drawingml/2006/main" idx="major"/>
-        </p:style>
-      </p:sp>
-      <p:sp>
-        <p:nvSpPr>
-          <p:cNvPr id="15" name="">
-            <a:extLst xmlns:a="http://schemas.openxmlformats.org/drawingml/2006/main">
-              <a:ext uri="{FF2B5EF4-FFF2-40B4-BE49-F238E27FC236}">
-                <a16:creationId xmlns:a16="http://schemas.microsoft.com/office/drawing/2014/main" id="{ABD0C2CC-76A8-4503-AD24-E27C96BDFC1E}"/>
-              </a:ext>
-            </a:extLst>
-          </p:cNvPr>
-          <p:cNvSpPr>
-            <a:spLocks xmlns:a="http://schemas.openxmlformats.org/drawingml/2006/main" noGrp="1"/>
-          </p:cNvSpPr>
-          <p:nvPr/>
-        </p:nvSpPr>
-        <p:spPr>
-          <a:xfrm xmlns:a="http://schemas.openxmlformats.org/drawingml/2006/main">
-            <a:off x="10096500" y="3352800"/>
-            <a:ext cx="1047750" cy="304800"/>
+              <a:t>Chatbot for quick data questions</a:t>
+            </a:r>
+          </a:p>
+        </p:txBody>
+      </p:sp>
+      <p:sp>
+        <p:nvSpPr>
+          <p:cNvPr id="21" name="">
+            <a:extLst xmlns:a="http://schemas.openxmlformats.org/drawingml/2006/main">
+              <a:ext uri="{FF2B5EF4-FFF2-40B4-BE49-F238E27FC236}">
+                <a16:creationId xmlns:a16="http://schemas.microsoft.com/office/drawing/2014/main" id="{8B4811AA-1EC9-419B-B3D9-96008786CC3F}"/>
+              </a:ext>
+            </a:extLst>
+          </p:cNvPr>
+          <p:cNvSpPr>
+            <a:spLocks xmlns:a="http://schemas.openxmlformats.org/drawingml/2006/main" noGrp="1"/>
+          </p:cNvSpPr>
+          <p:nvPr/>
+        </p:nvSpPr>
+        <p:spPr>
+          <a:xfrm xmlns:a="http://schemas.openxmlformats.org/drawingml/2006/main">
+            <a:off x="685800" y="6419850"/>
+            <a:ext cx="2095500" cy="228600"/>
           </a:xfrm>
           <a:prstGeom xmlns:a="http://schemas.openxmlformats.org/drawingml/2006/main" prst="rect">
             <a:avLst/>
@@ -3489,69 +3754,19 @@
           <a:lstStyle xmlns:a="http://schemas.openxmlformats.org/drawingml/2006/main"/>
           <a:p xmlns:a="http://schemas.openxmlformats.org/drawingml/2006/main">
             <a:pPr algn="l">
-              <a:defRPr sz="1800" b="1">
-                <a:solidFill>
-                  <a:srgbClr val="111827"/>
+              <a:defRPr sz="900" b="1">
+                <a:solidFill>
+                  <a:srgbClr val="8EA0B4"/>
                 </a:solidFill>
               </a:defRPr>
             </a:pPr>
             <a:r>
-              <a:rPr sz="1800" b="1">
-                <a:solidFill>
-                  <a:srgbClr val="111827"/>
+              <a:rPr sz="900" b="1">
+                <a:solidFill>
+                  <a:srgbClr val="8EA0B4"/>
                 </a:solidFill>
               </a:rPr>
-              <a:t>Decision</a:t>
-            </a:r>
-          </a:p>
-        </p:txBody>
-      </p:sp>
-      <p:sp>
-        <p:nvSpPr>
-          <p:cNvPr id="16" name="">
-            <a:extLst xmlns:a="http://schemas.openxmlformats.org/drawingml/2006/main">
-              <a:ext uri="{FF2B5EF4-FFF2-40B4-BE49-F238E27FC236}">
-                <a16:creationId xmlns:a16="http://schemas.microsoft.com/office/drawing/2014/main" id="{9C71D3E7-DA11-482D-BAAB-C1EB0EE86478}"/>
-              </a:ext>
-            </a:extLst>
-          </p:cNvPr>
-          <p:cNvSpPr>
-            <a:spLocks xmlns:a="http://schemas.openxmlformats.org/drawingml/2006/main" noGrp="1"/>
-          </p:cNvSpPr>
-          <p:nvPr/>
-        </p:nvSpPr>
-        <p:spPr>
-          <a:xfrm xmlns:a="http://schemas.openxmlformats.org/drawingml/2006/main">
-            <a:off x="10096500" y="3752850"/>
-            <a:ext cx="952500" cy="228600"/>
-          </a:xfrm>
-          <a:prstGeom xmlns:a="http://schemas.openxmlformats.org/drawingml/2006/main" prst="rect">
-            <a:avLst/>
-          </a:prstGeom>
-          <a:noFill xmlns:a="http://schemas.openxmlformats.org/drawingml/2006/main"/>
-          <a:ln xmlns:a="http://schemas.openxmlformats.org/drawingml/2006/main" w="0">
-            <a:noFill/>
-            <a:prstDash val="solid"/>
-          </a:ln>
-        </p:spPr>
-        <p:txBody>
-          <a:bodyPr xmlns:a="http://schemas.openxmlformats.org/drawingml/2006/main"/>
-          <a:lstStyle xmlns:a="http://schemas.openxmlformats.org/drawingml/2006/main"/>
-          <a:p xmlns:a="http://schemas.openxmlformats.org/drawingml/2006/main">
-            <a:pPr algn="l">
-              <a:defRPr sz="1275" b="0">
-                <a:solidFill>
-                  <a:srgbClr val="516173"/>
-                </a:solidFill>
-              </a:defRPr>
-            </a:pPr>
-            <a:r>
-              <a:rPr sz="1275" b="0">
-                <a:solidFill>
-                  <a:srgbClr val="516173"/>
-                </a:solidFill>
-              </a:rPr>
-              <a:t>Ready view</a:t>
+              <a:t>AG Health ERP · 3/9</a:t>
             </a:r>
           </a:p>
         </p:txBody>
@@ -3559,7 +3774,7 @@
     </p:spTree>
     <p:extLst>
       <p:ext uri="{BB962C8B-B14F-4D97-AF65-F5344CB8AC3E}">
-        <p14:creationId xmlns:p14="http://schemas.microsoft.com/office/powerpoint/2010/main" val="354947403"/>
+        <p14:creationId xmlns:p14="http://schemas.microsoft.com/office/powerpoint/2010/main" val="159067078"/>
       </p:ext>
     </p:extLst>
   </p:cSld>
@@ -3572,7 +3787,7 @@
     <p:bg>
       <p:bgPr>
         <a:solidFill xmlns:a="http://schemas.openxmlformats.org/drawingml/2006/main">
-          <a:srgbClr val="F7FBFF"/>
+          <a:srgbClr val="F6FBFF"/>
         </a:solidFill>
       </p:bgPr>
     </p:bg>
@@ -3587,22 +3802,22 @@
       </p:grpSpPr>
       <p:sp>
         <p:nvSpPr>
-          <p:cNvPr id="16" name="">
-            <a:extLst xmlns:a="http://schemas.openxmlformats.org/drawingml/2006/main">
-              <a:ext uri="{FF2B5EF4-FFF2-40B4-BE49-F238E27FC236}">
-                <a16:creationId xmlns:a16="http://schemas.microsoft.com/office/drawing/2014/main" id="{B77030ED-42CF-405A-8C53-637308323CE1}"/>
-              </a:ext>
-            </a:extLst>
-          </p:cNvPr>
-          <p:cNvSpPr>
-            <a:spLocks xmlns:a="http://schemas.openxmlformats.org/drawingml/2006/main" noGrp="1"/>
-          </p:cNvSpPr>
-          <p:nvPr/>
-        </p:nvSpPr>
-        <p:spPr>
-          <a:xfrm xmlns:a="http://schemas.openxmlformats.org/drawingml/2006/main">
-            <a:off x="10096500" y="0"/>
-            <a:ext cx="2000250" cy="2000250"/>
+          <p:cNvPr id="18" name="">
+            <a:extLst xmlns:a="http://schemas.openxmlformats.org/drawingml/2006/main">
+              <a:ext uri="{FF2B5EF4-FFF2-40B4-BE49-F238E27FC236}">
+                <a16:creationId xmlns:a16="http://schemas.microsoft.com/office/drawing/2014/main" id="{DE66CC1F-D614-497F-B2D1-3F0EECD7BDD7}"/>
+              </a:ext>
+            </a:extLst>
+          </p:cNvPr>
+          <p:cNvSpPr>
+            <a:spLocks xmlns:a="http://schemas.openxmlformats.org/drawingml/2006/main" noGrp="1"/>
+          </p:cNvSpPr>
+          <p:nvPr/>
+        </p:nvSpPr>
+        <p:spPr>
+          <a:xfrm xmlns:a="http://schemas.openxmlformats.org/drawingml/2006/main">
+            <a:off x="9886950" y="0"/>
+            <a:ext cx="2095500" cy="2095500"/>
           </a:xfrm>
           <a:prstGeom xmlns:a="http://schemas.openxmlformats.org/drawingml/2006/main" prst="ellipse">
             <a:avLst/>
@@ -3621,7 +3836,7 @@
           <p:cNvPr id="2" name="">
             <a:extLst xmlns:a="http://schemas.openxmlformats.org/drawingml/2006/main">
               <a:ext uri="{FF2B5EF4-FFF2-40B4-BE49-F238E27FC236}">
-                <a16:creationId xmlns:a16="http://schemas.microsoft.com/office/drawing/2014/main" id="{6F53D543-A08F-45BD-AD20-042591A032E9}"/>
+                <a16:creationId xmlns:a16="http://schemas.microsoft.com/office/drawing/2014/main" id="{00F9360A-9AEB-4294-AF21-A4E838308088}"/>
               </a:ext>
             </a:extLst>
           </p:cNvPr>
@@ -3633,7 +3848,7 @@
         <p:spPr>
           <a:xfrm xmlns:a="http://schemas.openxmlformats.org/drawingml/2006/main">
             <a:off x="0" y="5524500"/>
-            <a:ext cx="1333500" cy="1333500"/>
+            <a:ext cx="1295400" cy="1295400"/>
           </a:xfrm>
           <a:prstGeom xmlns:a="http://schemas.openxmlformats.org/drawingml/2006/main" prst="ellipse">
             <a:avLst/>
@@ -3652,19 +3867,48 @@
           <p:cNvPr id="3" name="">
             <a:extLst xmlns:a="http://schemas.openxmlformats.org/drawingml/2006/main">
               <a:ext uri="{FF2B5EF4-FFF2-40B4-BE49-F238E27FC236}">
-                <a16:creationId xmlns:a16="http://schemas.microsoft.com/office/drawing/2014/main" id="{BEDD2765-8372-4E13-92E4-085590FFF959}"/>
-              </a:ext>
-            </a:extLst>
-          </p:cNvPr>
-          <p:cNvSpPr>
-            <a:spLocks xmlns:a="http://schemas.openxmlformats.org/drawingml/2006/main" noGrp="1"/>
-          </p:cNvSpPr>
-          <p:nvPr/>
-        </p:nvSpPr>
-        <p:spPr>
-          <a:xfrm xmlns:a="http://schemas.openxmlformats.org/drawingml/2006/main">
-            <a:off x="723900" y="514350"/>
-            <a:ext cx="3429000" cy="266700"/>
+                <a16:creationId xmlns:a16="http://schemas.microsoft.com/office/drawing/2014/main" id="{2AFB84C4-A921-4A50-B458-0FE43AC1E867}"/>
+              </a:ext>
+            </a:extLst>
+          </p:cNvPr>
+          <p:cNvSpPr>
+            <a:spLocks xmlns:a="http://schemas.openxmlformats.org/drawingml/2006/main" noGrp="1"/>
+          </p:cNvSpPr>
+          <p:nvPr/>
+        </p:nvSpPr>
+        <p:spPr>
+          <a:xfrm xmlns:a="http://schemas.openxmlformats.org/drawingml/2006/main">
+            <a:off x="0" y="0"/>
+            <a:ext cx="12192000" cy="6858000"/>
+          </a:xfrm>
+          <a:prstGeom xmlns:a="http://schemas.openxmlformats.org/drawingml/2006/main" prst="rect">
+            <a:avLst/>
+          </a:prstGeom>
+          <a:noFill xmlns:a="http://schemas.openxmlformats.org/drawingml/2006/main"/>
+          <a:ln xmlns:a="http://schemas.openxmlformats.org/drawingml/2006/main" w="0">
+            <a:noFill/>
+            <a:prstDash val="solid"/>
+          </a:ln>
+        </p:spPr>
+      </p:sp>
+      <p:sp>
+        <p:nvSpPr>
+          <p:cNvPr id="4" name="">
+            <a:extLst xmlns:a="http://schemas.openxmlformats.org/drawingml/2006/main">
+              <a:ext uri="{FF2B5EF4-FFF2-40B4-BE49-F238E27FC236}">
+                <a16:creationId xmlns:a16="http://schemas.microsoft.com/office/drawing/2014/main" id="{456FE51B-9BA0-4FCC-BCDC-8FB81700D767}"/>
+              </a:ext>
+            </a:extLst>
+          </p:cNvPr>
+          <p:cNvSpPr>
+            <a:spLocks xmlns:a="http://schemas.openxmlformats.org/drawingml/2006/main" noGrp="1"/>
+          </p:cNvSpPr>
+          <p:nvPr/>
+        </p:nvSpPr>
+        <p:spPr>
+          <a:xfrm xmlns:a="http://schemas.openxmlformats.org/drawingml/2006/main">
+            <a:off x="685800" y="495300"/>
+            <a:ext cx="3429000" cy="285750"/>
           </a:xfrm>
           <a:prstGeom xmlns:a="http://schemas.openxmlformats.org/drawingml/2006/main" prst="rect">
             <a:avLst/>
@@ -3692,29 +3936,29 @@
                   <a:srgbClr val="E2BE2D"/>
                 </a:solidFill>
               </a:rPr>
-              <a:t>EXECUTIVE EXPERIENCE</a:t>
-            </a:r>
-          </a:p>
-        </p:txBody>
-      </p:sp>
-      <p:sp>
-        <p:nvSpPr>
-          <p:cNvPr id="4" name="">
-            <a:extLst xmlns:a="http://schemas.openxmlformats.org/drawingml/2006/main">
-              <a:ext uri="{FF2B5EF4-FFF2-40B4-BE49-F238E27FC236}">
-                <a16:creationId xmlns:a16="http://schemas.microsoft.com/office/drawing/2014/main" id="{0ED09E99-46E4-4401-AA01-D962A339853D}"/>
-              </a:ext>
-            </a:extLst>
-          </p:cNvPr>
-          <p:cNvSpPr>
-            <a:spLocks xmlns:a="http://schemas.openxmlformats.org/drawingml/2006/main" noGrp="1"/>
-          </p:cNvSpPr>
-          <p:nvPr/>
-        </p:nvSpPr>
-        <p:spPr>
-          <a:xfrm xmlns:a="http://schemas.openxmlformats.org/drawingml/2006/main">
-            <a:off x="723900" y="914400"/>
-            <a:ext cx="8096250" cy="876300"/>
+              <a:t>EXECUTIVE VIEW</a:t>
+            </a:r>
+          </a:p>
+        </p:txBody>
+      </p:sp>
+      <p:sp>
+        <p:nvSpPr>
+          <p:cNvPr id="5" name="">
+            <a:extLst xmlns:a="http://schemas.openxmlformats.org/drawingml/2006/main">
+              <a:ext uri="{FF2B5EF4-FFF2-40B4-BE49-F238E27FC236}">
+                <a16:creationId xmlns:a16="http://schemas.microsoft.com/office/drawing/2014/main" id="{F899440D-D951-4932-B078-B0038CFD4841}"/>
+              </a:ext>
+            </a:extLst>
+          </p:cNvPr>
+          <p:cNvSpPr>
+            <a:spLocks xmlns:a="http://schemas.openxmlformats.org/drawingml/2006/main" noGrp="1"/>
+          </p:cNvSpPr>
+          <p:nvPr/>
+        </p:nvSpPr>
+        <p:spPr>
+          <a:xfrm xmlns:a="http://schemas.openxmlformats.org/drawingml/2006/main">
+            <a:off x="685800" y="895350"/>
+            <a:ext cx="8286750" cy="895350"/>
           </a:xfrm>
           <a:prstGeom xmlns:a="http://schemas.openxmlformats.org/drawingml/2006/main" prst="rect">
             <a:avLst/>
@@ -3730,41 +3974,41 @@
           <a:lstStyle xmlns:a="http://schemas.openxmlformats.org/drawingml/2006/main"/>
           <a:p xmlns:a="http://schemas.openxmlformats.org/drawingml/2006/main">
             <a:pPr algn="l">
-              <a:defRPr sz="3450" b="1">
+              <a:defRPr sz="3375" b="1">
                 <a:solidFill>
                   <a:srgbClr val="111827"/>
                 </a:solidFill>
               </a:defRPr>
             </a:pPr>
             <a:r>
-              <a:rPr sz="3450" b="1">
+              <a:rPr sz="3375" b="1">
                 <a:solidFill>
                   <a:srgbClr val="111827"/>
                 </a:solidFill>
               </a:rPr>
-              <a:t>The top view stays simple on purpose</a:t>
-            </a:r>
-          </a:p>
-        </p:txBody>
-      </p:sp>
-      <p:sp>
-        <p:nvSpPr>
-          <p:cNvPr id="5" name="">
-            <a:extLst xmlns:a="http://schemas.openxmlformats.org/drawingml/2006/main">
-              <a:ext uri="{FF2B5EF4-FFF2-40B4-BE49-F238E27FC236}">
-                <a16:creationId xmlns:a16="http://schemas.microsoft.com/office/drawing/2014/main" id="{D79CD3EF-2330-4E3B-B417-AD9930AFE1EF}"/>
-              </a:ext>
-            </a:extLst>
-          </p:cNvPr>
-          <p:cNvSpPr>
-            <a:spLocks xmlns:a="http://schemas.openxmlformats.org/drawingml/2006/main" noGrp="1"/>
-          </p:cNvSpPr>
-          <p:nvPr/>
-        </p:nvSpPr>
-        <p:spPr>
-          <a:xfrm xmlns:a="http://schemas.openxmlformats.org/drawingml/2006/main">
-            <a:off x="742950" y="1866900"/>
-            <a:ext cx="7810500" cy="552450"/>
+              <a:t>The top of the system is simple by design</a:t>
+            </a:r>
+          </a:p>
+        </p:txBody>
+      </p:sp>
+      <p:sp>
+        <p:nvSpPr>
+          <p:cNvPr id="6" name="">
+            <a:extLst xmlns:a="http://schemas.openxmlformats.org/drawingml/2006/main">
+              <a:ext uri="{FF2B5EF4-FFF2-40B4-BE49-F238E27FC236}">
+                <a16:creationId xmlns:a16="http://schemas.microsoft.com/office/drawing/2014/main" id="{14560649-F024-42C2-AD03-D46E8EAF9438}"/>
+              </a:ext>
+            </a:extLst>
+          </p:cNvPr>
+          <p:cNvSpPr>
+            <a:spLocks xmlns:a="http://schemas.openxmlformats.org/drawingml/2006/main" noGrp="1"/>
+          </p:cNvSpPr>
+          <p:nvPr/>
+        </p:nvSpPr>
+        <p:spPr>
+          <a:xfrm xmlns:a="http://schemas.openxmlformats.org/drawingml/2006/main">
+            <a:off x="704850" y="1866900"/>
+            <a:ext cx="7429500" cy="571500"/>
           </a:xfrm>
           <a:prstGeom xmlns:a="http://schemas.openxmlformats.org/drawingml/2006/main" prst="rect">
             <a:avLst/>
@@ -3782,43 +4026,43 @@
             <a:pPr algn="l">
               <a:defRPr sz="1575" b="0">
                 <a:solidFill>
-                  <a:srgbClr val="516173"/>
+                  <a:srgbClr val="526173"/>
                 </a:solidFill>
               </a:defRPr>
             </a:pPr>
             <a:r>
               <a:rPr sz="1575" b="0">
                 <a:solidFill>
-                  <a:srgbClr val="516173"/>
+                  <a:srgbClr val="526173"/>
                 </a:solidFill>
               </a:rPr>
-              <a:t>Only trusted financial signals lead the dashboard. Operational indicators sit below with clear explanations.</a:t>
-            </a:r>
-          </a:p>
-        </p:txBody>
-      </p:sp>
-      <p:sp>
-        <p:nvSpPr>
-          <p:cNvPr id="6" name="">
-            <a:extLst xmlns:a="http://schemas.openxmlformats.org/drawingml/2006/main">
-              <a:ext uri="{FF2B5EF4-FFF2-40B4-BE49-F238E27FC236}">
-                <a16:creationId xmlns:a16="http://schemas.microsoft.com/office/drawing/2014/main" id="{25B8D841-EEF9-4BB6-8668-2A2A1086F3C1}"/>
-              </a:ext>
-            </a:extLst>
-          </p:cNvPr>
-          <p:cNvSpPr>
-            <a:spLocks xmlns:a="http://schemas.openxmlformats.org/drawingml/2006/main" noGrp="1"/>
-          </p:cNvSpPr>
-          <p:nvPr/>
-        </p:nvSpPr>
-        <p:spPr>
-          <a:xfrm xmlns:a="http://schemas.openxmlformats.org/drawingml/2006/main">
-            <a:off x="914400" y="2914650"/>
-            <a:ext cx="3105150" cy="1476375"/>
+              <a:t>For leadership, the dashboard starts with the business picture first and avoids unnecessary clutter.</a:t>
+            </a:r>
+          </a:p>
+        </p:txBody>
+      </p:sp>
+      <p:sp>
+        <p:nvSpPr>
+          <p:cNvPr id="7" name="">
+            <a:extLst xmlns:a="http://schemas.openxmlformats.org/drawingml/2006/main">
+              <a:ext uri="{FF2B5EF4-FFF2-40B4-BE49-F238E27FC236}">
+                <a16:creationId xmlns:a16="http://schemas.microsoft.com/office/drawing/2014/main" id="{FBADCD1E-60CE-43EF-871A-F64D850AE997}"/>
+              </a:ext>
+            </a:extLst>
+          </p:cNvPr>
+          <p:cNvSpPr>
+            <a:spLocks xmlns:a="http://schemas.openxmlformats.org/drawingml/2006/main" noGrp="1"/>
+          </p:cNvSpPr>
+          <p:nvPr/>
+        </p:nvSpPr>
+        <p:spPr>
+          <a:xfrm xmlns:a="http://schemas.openxmlformats.org/drawingml/2006/main">
+            <a:off x="1123950" y="2952750"/>
+            <a:ext cx="2857500" cy="1428750"/>
           </a:xfrm>
           <a:prstGeom xmlns:a="http://schemas.openxmlformats.org/drawingml/2006/main" prst="roundRect">
             <a:avLst>
-              <a:gd name="adj" fmla="val 10323"/>
+              <a:gd name="adj" fmla="val 10667"/>
             </a:avLst>
           </a:prstGeom>
           <a:solidFill xmlns:a="http://schemas.openxmlformats.org/drawingml/2006/main">
@@ -3840,26 +4084,26 @@
       </p:sp>
       <p:sp>
         <p:nvSpPr>
-          <p:cNvPr id="7" name="">
-            <a:extLst xmlns:a="http://schemas.openxmlformats.org/drawingml/2006/main">
-              <a:ext uri="{FF2B5EF4-FFF2-40B4-BE49-F238E27FC236}">
-                <a16:creationId xmlns:a16="http://schemas.microsoft.com/office/drawing/2014/main" id="{5B7C4323-04E0-47A0-BD7C-569877C56D24}"/>
-              </a:ext>
-            </a:extLst>
-          </p:cNvPr>
-          <p:cNvSpPr>
-            <a:spLocks xmlns:a="http://schemas.openxmlformats.org/drawingml/2006/main" noGrp="1"/>
-          </p:cNvSpPr>
-          <p:nvPr/>
-        </p:nvSpPr>
-        <p:spPr>
-          <a:xfrm xmlns:a="http://schemas.openxmlformats.org/drawingml/2006/main">
-            <a:off x="4533900" y="2914650"/>
-            <a:ext cx="3105150" cy="1476375"/>
+          <p:cNvPr id="8" name="">
+            <a:extLst xmlns:a="http://schemas.openxmlformats.org/drawingml/2006/main">
+              <a:ext uri="{FF2B5EF4-FFF2-40B4-BE49-F238E27FC236}">
+                <a16:creationId xmlns:a16="http://schemas.microsoft.com/office/drawing/2014/main" id="{4C68A4F3-D754-4043-A500-3FAD5310A82D}"/>
+              </a:ext>
+            </a:extLst>
+          </p:cNvPr>
+          <p:cNvSpPr>
+            <a:spLocks xmlns:a="http://schemas.openxmlformats.org/drawingml/2006/main" noGrp="1"/>
+          </p:cNvSpPr>
+          <p:nvPr/>
+        </p:nvSpPr>
+        <p:spPr>
+          <a:xfrm xmlns:a="http://schemas.openxmlformats.org/drawingml/2006/main">
+            <a:off x="4667250" y="2952750"/>
+            <a:ext cx="2857500" cy="1428750"/>
           </a:xfrm>
           <a:prstGeom xmlns:a="http://schemas.openxmlformats.org/drawingml/2006/main" prst="roundRect">
             <a:avLst>
-              <a:gd name="adj" fmla="val 10323"/>
+              <a:gd name="adj" fmla="val 10667"/>
             </a:avLst>
           </a:prstGeom>
           <a:solidFill xmlns:a="http://schemas.openxmlformats.org/drawingml/2006/main">
@@ -3881,26 +4125,26 @@
       </p:sp>
       <p:sp>
         <p:nvSpPr>
-          <p:cNvPr id="8" name="">
-            <a:extLst xmlns:a="http://schemas.openxmlformats.org/drawingml/2006/main">
-              <a:ext uri="{FF2B5EF4-FFF2-40B4-BE49-F238E27FC236}">
-                <a16:creationId xmlns:a16="http://schemas.microsoft.com/office/drawing/2014/main" id="{8D620365-7EA6-4A4F-B240-1A414A6351B1}"/>
-              </a:ext>
-            </a:extLst>
-          </p:cNvPr>
-          <p:cNvSpPr>
-            <a:spLocks xmlns:a="http://schemas.openxmlformats.org/drawingml/2006/main" noGrp="1"/>
-          </p:cNvSpPr>
-          <p:nvPr/>
-        </p:nvSpPr>
-        <p:spPr>
-          <a:xfrm xmlns:a="http://schemas.openxmlformats.org/drawingml/2006/main">
-            <a:off x="8153400" y="2914650"/>
-            <a:ext cx="3105150" cy="1476375"/>
+          <p:cNvPr id="9" name="">
+            <a:extLst xmlns:a="http://schemas.openxmlformats.org/drawingml/2006/main">
+              <a:ext uri="{FF2B5EF4-FFF2-40B4-BE49-F238E27FC236}">
+                <a16:creationId xmlns:a16="http://schemas.microsoft.com/office/drawing/2014/main" id="{1B32987A-6D36-4B81-9360-F734AD05A41A}"/>
+              </a:ext>
+            </a:extLst>
+          </p:cNvPr>
+          <p:cNvSpPr>
+            <a:spLocks xmlns:a="http://schemas.openxmlformats.org/drawingml/2006/main" noGrp="1"/>
+          </p:cNvSpPr>
+          <p:nvPr/>
+        </p:nvSpPr>
+        <p:spPr>
+          <a:xfrm xmlns:a="http://schemas.openxmlformats.org/drawingml/2006/main">
+            <a:off x="8210550" y="2952750"/>
+            <a:ext cx="2857500" cy="1428750"/>
           </a:xfrm>
           <a:prstGeom xmlns:a="http://schemas.openxmlformats.org/drawingml/2006/main" prst="roundRect">
             <a:avLst>
-              <a:gd name="adj" fmla="val 10323"/>
+              <a:gd name="adj" fmla="val 10667"/>
             </a:avLst>
           </a:prstGeom>
           <a:solidFill xmlns:a="http://schemas.openxmlformats.org/drawingml/2006/main">
@@ -3922,22 +4166,22 @@
       </p:sp>
       <p:sp>
         <p:nvSpPr>
-          <p:cNvPr id="9" name="">
-            <a:extLst xmlns:a="http://schemas.openxmlformats.org/drawingml/2006/main">
-              <a:ext uri="{FF2B5EF4-FFF2-40B4-BE49-F238E27FC236}">
-                <a16:creationId xmlns:a16="http://schemas.microsoft.com/office/drawing/2014/main" id="{36302C76-FE03-446F-82B6-A38241F3462E}"/>
-              </a:ext>
-            </a:extLst>
-          </p:cNvPr>
-          <p:cNvSpPr>
-            <a:spLocks xmlns:a="http://schemas.openxmlformats.org/drawingml/2006/main" noGrp="1"/>
-          </p:cNvSpPr>
-          <p:nvPr/>
-        </p:nvSpPr>
-        <p:spPr>
-          <a:xfrm xmlns:a="http://schemas.openxmlformats.org/drawingml/2006/main">
-            <a:off x="1276350" y="3333750"/>
-            <a:ext cx="2095500" cy="323850"/>
+          <p:cNvPr id="10" name="">
+            <a:extLst xmlns:a="http://schemas.openxmlformats.org/drawingml/2006/main">
+              <a:ext uri="{FF2B5EF4-FFF2-40B4-BE49-F238E27FC236}">
+                <a16:creationId xmlns:a16="http://schemas.microsoft.com/office/drawing/2014/main" id="{EC3CD8CA-AFD8-4E0B-A246-702CED20B67B}"/>
+              </a:ext>
+            </a:extLst>
+          </p:cNvPr>
+          <p:cNvSpPr>
+            <a:spLocks xmlns:a="http://schemas.openxmlformats.org/drawingml/2006/main" noGrp="1"/>
+          </p:cNvSpPr>
+          <p:nvPr/>
+        </p:nvSpPr>
+        <p:spPr>
+          <a:xfrm xmlns:a="http://schemas.openxmlformats.org/drawingml/2006/main">
+            <a:off x="1485900" y="3371850"/>
+            <a:ext cx="2000250" cy="342900"/>
           </a:xfrm>
           <a:prstGeom xmlns:a="http://schemas.openxmlformats.org/drawingml/2006/main" prst="rect">
             <a:avLst/>
@@ -3953,41 +4197,41 @@
           <a:lstStyle xmlns:a="http://schemas.openxmlformats.org/drawingml/2006/main"/>
           <a:p xmlns:a="http://schemas.openxmlformats.org/drawingml/2006/main">
             <a:pPr algn="l">
-              <a:defRPr sz="2175" b="1">
+              <a:defRPr sz="2325" b="1">
                 <a:solidFill>
                   <a:srgbClr val="17375F"/>
                 </a:solidFill>
               </a:defRPr>
             </a:pPr>
             <a:r>
-              <a:rPr sz="2175" b="1">
+              <a:rPr sz="2325" b="1">
                 <a:solidFill>
                   <a:srgbClr val="17375F"/>
                 </a:solidFill>
               </a:rPr>
-              <a:t>Sales signal</a:t>
-            </a:r>
-          </a:p>
-        </p:txBody>
-      </p:sp>
-      <p:sp>
-        <p:nvSpPr>
-          <p:cNvPr id="10" name="">
-            <a:extLst xmlns:a="http://schemas.openxmlformats.org/drawingml/2006/main">
-              <a:ext uri="{FF2B5EF4-FFF2-40B4-BE49-F238E27FC236}">
-                <a16:creationId xmlns:a16="http://schemas.microsoft.com/office/drawing/2014/main" id="{2645DEC8-5095-4AF1-B6FC-5B4B64770B77}"/>
-              </a:ext>
-            </a:extLst>
-          </p:cNvPr>
-          <p:cNvSpPr>
-            <a:spLocks xmlns:a="http://schemas.openxmlformats.org/drawingml/2006/main" noGrp="1"/>
-          </p:cNvSpPr>
-          <p:nvPr/>
-        </p:nvSpPr>
-        <p:spPr>
-          <a:xfrm xmlns:a="http://schemas.openxmlformats.org/drawingml/2006/main">
-            <a:off x="1276350" y="3762375"/>
-            <a:ext cx="2190750" cy="419100"/>
+              <a:t>Sales</a:t>
+            </a:r>
+          </a:p>
+        </p:txBody>
+      </p:sp>
+      <p:sp>
+        <p:nvSpPr>
+          <p:cNvPr id="11" name="">
+            <a:extLst xmlns:a="http://schemas.openxmlformats.org/drawingml/2006/main">
+              <a:ext uri="{FF2B5EF4-FFF2-40B4-BE49-F238E27FC236}">
+                <a16:creationId xmlns:a16="http://schemas.microsoft.com/office/drawing/2014/main" id="{01829F7A-334E-46C7-9B3A-E073B0D531B3}"/>
+              </a:ext>
+            </a:extLst>
+          </p:cNvPr>
+          <p:cNvSpPr>
+            <a:spLocks xmlns:a="http://schemas.openxmlformats.org/drawingml/2006/main" noGrp="1"/>
+          </p:cNvSpPr>
+          <p:nvPr/>
+        </p:nvSpPr>
+        <p:spPr>
+          <a:xfrm xmlns:a="http://schemas.openxmlformats.org/drawingml/2006/main">
+            <a:off x="1485900" y="3848100"/>
+            <a:ext cx="2000250" cy="323850"/>
           </a:xfrm>
           <a:prstGeom xmlns:a="http://schemas.openxmlformats.org/drawingml/2006/main" prst="rect">
             <a:avLst/>
@@ -4005,39 +4249,39 @@
             <a:pPr algn="l">
               <a:defRPr sz="1350" b="0">
                 <a:solidFill>
-                  <a:srgbClr val="516173"/>
+                  <a:srgbClr val="526173"/>
                 </a:solidFill>
               </a:defRPr>
             </a:pPr>
             <a:r>
               <a:rPr sz="1350" b="0">
                 <a:solidFill>
-                  <a:srgbClr val="516173"/>
+                  <a:srgbClr val="526173"/>
                 </a:solidFill>
               </a:rPr>
-              <a:t>What is moving through the business.</a:t>
-            </a:r>
-          </a:p>
-        </p:txBody>
-      </p:sp>
-      <p:sp>
-        <p:nvSpPr>
-          <p:cNvPr id="11" name="">
-            <a:extLst xmlns:a="http://schemas.openxmlformats.org/drawingml/2006/main">
-              <a:ext uri="{FF2B5EF4-FFF2-40B4-BE49-F238E27FC236}">
-                <a16:creationId xmlns:a16="http://schemas.microsoft.com/office/drawing/2014/main" id="{1BF8818E-9E55-45FE-AEEF-CBB4EE79F07E}"/>
-              </a:ext>
-            </a:extLst>
-          </p:cNvPr>
-          <p:cNvSpPr>
-            <a:spLocks xmlns:a="http://schemas.openxmlformats.org/drawingml/2006/main" noGrp="1"/>
-          </p:cNvSpPr>
-          <p:nvPr/>
-        </p:nvSpPr>
-        <p:spPr>
-          <a:xfrm xmlns:a="http://schemas.openxmlformats.org/drawingml/2006/main">
-            <a:off x="4895850" y="3333750"/>
-            <a:ext cx="2095500" cy="323850"/>
+              <a:t>How the business is moving.</a:t>
+            </a:r>
+          </a:p>
+        </p:txBody>
+      </p:sp>
+      <p:sp>
+        <p:nvSpPr>
+          <p:cNvPr id="12" name="">
+            <a:extLst xmlns:a="http://schemas.openxmlformats.org/drawingml/2006/main">
+              <a:ext uri="{FF2B5EF4-FFF2-40B4-BE49-F238E27FC236}">
+                <a16:creationId xmlns:a16="http://schemas.microsoft.com/office/drawing/2014/main" id="{FF149227-2391-4E90-8F85-4C23DCB1E417}"/>
+              </a:ext>
+            </a:extLst>
+          </p:cNvPr>
+          <p:cNvSpPr>
+            <a:spLocks xmlns:a="http://schemas.openxmlformats.org/drawingml/2006/main" noGrp="1"/>
+          </p:cNvSpPr>
+          <p:nvPr/>
+        </p:nvSpPr>
+        <p:spPr>
+          <a:xfrm xmlns:a="http://schemas.openxmlformats.org/drawingml/2006/main">
+            <a:off x="5029200" y="3371850"/>
+            <a:ext cx="2000250" cy="342900"/>
           </a:xfrm>
           <a:prstGeom xmlns:a="http://schemas.openxmlformats.org/drawingml/2006/main" prst="rect">
             <a:avLst/>
@@ -4053,14 +4297,14 @@
           <a:lstStyle xmlns:a="http://schemas.openxmlformats.org/drawingml/2006/main"/>
           <a:p xmlns:a="http://schemas.openxmlformats.org/drawingml/2006/main">
             <a:pPr algn="l">
-              <a:defRPr sz="2175" b="1">
+              <a:defRPr sz="2325" b="1">
                 <a:solidFill>
                   <a:srgbClr val="3D78DD"/>
                 </a:solidFill>
               </a:defRPr>
             </a:pPr>
             <a:r>
-              <a:rPr sz="2175" b="1">
+              <a:rPr sz="2325" b="1">
                 <a:solidFill>
                   <a:srgbClr val="3D78DD"/>
                 </a:solidFill>
@@ -4072,22 +4316,22 @@
       </p:sp>
       <p:sp>
         <p:nvSpPr>
-          <p:cNvPr id="12" name="">
-            <a:extLst xmlns:a="http://schemas.openxmlformats.org/drawingml/2006/main">
-              <a:ext uri="{FF2B5EF4-FFF2-40B4-BE49-F238E27FC236}">
-                <a16:creationId xmlns:a16="http://schemas.microsoft.com/office/drawing/2014/main" id="{C57DF0AE-7347-41C6-A292-A6EA98076EBA}"/>
-              </a:ext>
-            </a:extLst>
-          </p:cNvPr>
-          <p:cNvSpPr>
-            <a:spLocks xmlns:a="http://schemas.openxmlformats.org/drawingml/2006/main" noGrp="1"/>
-          </p:cNvSpPr>
-          <p:nvPr/>
-        </p:nvSpPr>
-        <p:spPr>
-          <a:xfrm xmlns:a="http://schemas.openxmlformats.org/drawingml/2006/main">
-            <a:off x="4895850" y="3762375"/>
-            <a:ext cx="2190750" cy="419100"/>
+          <p:cNvPr id="13" name="">
+            <a:extLst xmlns:a="http://schemas.openxmlformats.org/drawingml/2006/main">
+              <a:ext uri="{FF2B5EF4-FFF2-40B4-BE49-F238E27FC236}">
+                <a16:creationId xmlns:a16="http://schemas.microsoft.com/office/drawing/2014/main" id="{83D5AAEA-F274-457E-A9D1-11BDDEDEDE26}"/>
+              </a:ext>
+            </a:extLst>
+          </p:cNvPr>
+          <p:cNvSpPr>
+            <a:spLocks xmlns:a="http://schemas.openxmlformats.org/drawingml/2006/main" noGrp="1"/>
+          </p:cNvSpPr>
+          <p:nvPr/>
+        </p:nvSpPr>
+        <p:spPr>
+          <a:xfrm xmlns:a="http://schemas.openxmlformats.org/drawingml/2006/main">
+            <a:off x="5029200" y="3848100"/>
+            <a:ext cx="2000250" cy="323850"/>
           </a:xfrm>
           <a:prstGeom xmlns:a="http://schemas.openxmlformats.org/drawingml/2006/main" prst="rect">
             <a:avLst/>
@@ -4105,39 +4349,39 @@
             <a:pPr algn="l">
               <a:defRPr sz="1350" b="0">
                 <a:solidFill>
-                  <a:srgbClr val="516173"/>
+                  <a:srgbClr val="526173"/>
                 </a:solidFill>
               </a:defRPr>
             </a:pPr>
             <a:r>
               <a:rPr sz="1350" b="0">
                 <a:solidFill>
-                  <a:srgbClr val="516173"/>
+                  <a:srgbClr val="526173"/>
                 </a:solidFill>
               </a:rPr>
-              <a:t>What customers still need to pay.</a:t>
-            </a:r>
-          </a:p>
-        </p:txBody>
-      </p:sp>
-      <p:sp>
-        <p:nvSpPr>
-          <p:cNvPr id="13" name="">
-            <a:extLst xmlns:a="http://schemas.openxmlformats.org/drawingml/2006/main">
-              <a:ext uri="{FF2B5EF4-FFF2-40B4-BE49-F238E27FC236}">
-                <a16:creationId xmlns:a16="http://schemas.microsoft.com/office/drawing/2014/main" id="{AF1A9F62-2312-45D3-8762-36F61A48CFAE}"/>
-              </a:ext>
-            </a:extLst>
-          </p:cNvPr>
-          <p:cNvSpPr>
-            <a:spLocks xmlns:a="http://schemas.openxmlformats.org/drawingml/2006/main" noGrp="1"/>
-          </p:cNvSpPr>
-          <p:nvPr/>
-        </p:nvSpPr>
-        <p:spPr>
-          <a:xfrm xmlns:a="http://schemas.openxmlformats.org/drawingml/2006/main">
-            <a:off x="8515350" y="3333750"/>
-            <a:ext cx="2095500" cy="323850"/>
+              <a:t>What customers still owe.</a:t>
+            </a:r>
+          </a:p>
+        </p:txBody>
+      </p:sp>
+      <p:sp>
+        <p:nvSpPr>
+          <p:cNvPr id="14" name="">
+            <a:extLst xmlns:a="http://schemas.openxmlformats.org/drawingml/2006/main">
+              <a:ext uri="{FF2B5EF4-FFF2-40B4-BE49-F238E27FC236}">
+                <a16:creationId xmlns:a16="http://schemas.microsoft.com/office/drawing/2014/main" id="{4B50664E-4082-4555-A890-3A178489ECEA}"/>
+              </a:ext>
+            </a:extLst>
+          </p:cNvPr>
+          <p:cNvSpPr>
+            <a:spLocks xmlns:a="http://schemas.openxmlformats.org/drawingml/2006/main" noGrp="1"/>
+          </p:cNvSpPr>
+          <p:nvPr/>
+        </p:nvSpPr>
+        <p:spPr>
+          <a:xfrm xmlns:a="http://schemas.openxmlformats.org/drawingml/2006/main">
+            <a:off x="8572500" y="3371850"/>
+            <a:ext cx="2000250" cy="342900"/>
           </a:xfrm>
           <a:prstGeom xmlns:a="http://schemas.openxmlformats.org/drawingml/2006/main" prst="rect">
             <a:avLst/>
@@ -4153,41 +4397,41 @@
           <a:lstStyle xmlns:a="http://schemas.openxmlformats.org/drawingml/2006/main"/>
           <a:p xmlns:a="http://schemas.openxmlformats.org/drawingml/2006/main">
             <a:pPr algn="l">
-              <a:defRPr sz="2175" b="1">
-                <a:solidFill>
-                  <a:srgbClr val="A77D00"/>
+              <a:defRPr sz="2325" b="1">
+                <a:solidFill>
+                  <a:srgbClr val="9A7200"/>
                 </a:solidFill>
               </a:defRPr>
             </a:pPr>
             <a:r>
-              <a:rPr sz="2175" b="1">
-                <a:solidFill>
-                  <a:srgbClr val="A77D00"/>
+              <a:rPr sz="2325" b="1">
+                <a:solidFill>
+                  <a:srgbClr val="9A7200"/>
                 </a:solidFill>
               </a:rPr>
-              <a:t>Bank position</a:t>
-            </a:r>
-          </a:p>
-        </p:txBody>
-      </p:sp>
-      <p:sp>
-        <p:nvSpPr>
-          <p:cNvPr id="14" name="">
-            <a:extLst xmlns:a="http://schemas.openxmlformats.org/drawingml/2006/main">
-              <a:ext uri="{FF2B5EF4-FFF2-40B4-BE49-F238E27FC236}">
-                <a16:creationId xmlns:a16="http://schemas.microsoft.com/office/drawing/2014/main" id="{4F2B2420-4433-44E6-A688-52F47D06F7F5}"/>
-              </a:ext>
-            </a:extLst>
-          </p:cNvPr>
-          <p:cNvSpPr>
-            <a:spLocks xmlns:a="http://schemas.openxmlformats.org/drawingml/2006/main" noGrp="1"/>
-          </p:cNvSpPr>
-          <p:nvPr/>
-        </p:nvSpPr>
-        <p:spPr>
-          <a:xfrm xmlns:a="http://schemas.openxmlformats.org/drawingml/2006/main">
-            <a:off x="8515350" y="3762375"/>
-            <a:ext cx="2190750" cy="419100"/>
+              <a:t>Bank</a:t>
+            </a:r>
+          </a:p>
+        </p:txBody>
+      </p:sp>
+      <p:sp>
+        <p:nvSpPr>
+          <p:cNvPr id="15" name="">
+            <a:extLst xmlns:a="http://schemas.openxmlformats.org/drawingml/2006/main">
+              <a:ext uri="{FF2B5EF4-FFF2-40B4-BE49-F238E27FC236}">
+                <a16:creationId xmlns:a16="http://schemas.microsoft.com/office/drawing/2014/main" id="{A2A79F24-7A2A-400A-85BD-653403C3C265}"/>
+              </a:ext>
+            </a:extLst>
+          </p:cNvPr>
+          <p:cNvSpPr>
+            <a:spLocks xmlns:a="http://schemas.openxmlformats.org/drawingml/2006/main" noGrp="1"/>
+          </p:cNvSpPr>
+          <p:nvPr/>
+        </p:nvSpPr>
+        <p:spPr>
+          <a:xfrm xmlns:a="http://schemas.openxmlformats.org/drawingml/2006/main">
+            <a:off x="8572500" y="3848100"/>
+            <a:ext cx="2000250" cy="323850"/>
           </a:xfrm>
           <a:prstGeom xmlns:a="http://schemas.openxmlformats.org/drawingml/2006/main" prst="rect">
             <a:avLst/>
@@ -4205,39 +4449,39 @@
             <a:pPr algn="l">
               <a:defRPr sz="1350" b="0">
                 <a:solidFill>
-                  <a:srgbClr val="516173"/>
+                  <a:srgbClr val="526173"/>
                 </a:solidFill>
               </a:defRPr>
             </a:pPr>
             <a:r>
               <a:rPr sz="1350" b="0">
                 <a:solidFill>
-                  <a:srgbClr val="516173"/>
+                  <a:srgbClr val="526173"/>
                 </a:solidFill>
               </a:rPr>
-              <a:t>What finance can verify from the ledger.</a:t>
-            </a:r>
-          </a:p>
-        </p:txBody>
-      </p:sp>
-      <p:sp>
-        <p:nvSpPr>
-          <p:cNvPr id="15" name="">
-            <a:extLst xmlns:a="http://schemas.openxmlformats.org/drawingml/2006/main">
-              <a:ext uri="{FF2B5EF4-FFF2-40B4-BE49-F238E27FC236}">
-                <a16:creationId xmlns:a16="http://schemas.microsoft.com/office/drawing/2014/main" id="{42239A40-A272-4EB9-A054-59A17DEAA052}"/>
-              </a:ext>
-            </a:extLst>
-          </p:cNvPr>
-          <p:cNvSpPr>
-            <a:spLocks xmlns:a="http://schemas.openxmlformats.org/drawingml/2006/main" noGrp="1"/>
-          </p:cNvSpPr>
-          <p:nvPr/>
-        </p:nvSpPr>
-        <p:spPr>
-          <a:xfrm xmlns:a="http://schemas.openxmlformats.org/drawingml/2006/main">
-            <a:off x="1143000" y="5219700"/>
-            <a:ext cx="8763000" cy="419100"/>
+              <a:t>What finance can verify.</a:t>
+            </a:r>
+          </a:p>
+        </p:txBody>
+      </p:sp>
+      <p:sp>
+        <p:nvSpPr>
+          <p:cNvPr id="16" name="">
+            <a:extLst xmlns:a="http://schemas.openxmlformats.org/drawingml/2006/main">
+              <a:ext uri="{FF2B5EF4-FFF2-40B4-BE49-F238E27FC236}">
+                <a16:creationId xmlns:a16="http://schemas.microsoft.com/office/drawing/2014/main" id="{B8408FF5-D0F9-4E2C-8326-028F4CA164EE}"/>
+              </a:ext>
+            </a:extLst>
+          </p:cNvPr>
+          <p:cNvSpPr>
+            <a:spLocks xmlns:a="http://schemas.openxmlformats.org/drawingml/2006/main" noGrp="1"/>
+          </p:cNvSpPr>
+          <p:nvPr/>
+        </p:nvSpPr>
+        <p:spPr>
+          <a:xfrm xmlns:a="http://schemas.openxmlformats.org/drawingml/2006/main">
+            <a:off x="1333500" y="5191125"/>
+            <a:ext cx="8572500" cy="419100"/>
           </a:xfrm>
           <a:prstGeom xmlns:a="http://schemas.openxmlformats.org/drawingml/2006/main" prst="rect">
             <a:avLst/>
@@ -4252,20 +4496,70 @@
           <a:bodyPr xmlns:a="http://schemas.openxmlformats.org/drawingml/2006/main"/>
           <a:lstStyle xmlns:a="http://schemas.openxmlformats.org/drawingml/2006/main"/>
           <a:p xmlns:a="http://schemas.openxmlformats.org/drawingml/2006/main">
-            <a:pPr algn="l">
-              <a:defRPr sz="1875" b="1">
+            <a:pPr algn="ctr">
+              <a:defRPr sz="2025" b="1">
                 <a:solidFill>
                   <a:srgbClr val="111827"/>
                 </a:solidFill>
               </a:defRPr>
             </a:pPr>
             <a:r>
-              <a:rPr sz="1875" b="1">
+              <a:rPr sz="2025" b="1">
                 <a:solidFill>
                   <a:srgbClr val="111827"/>
                 </a:solidFill>
               </a:rPr>
-              <a:t>The result: a CEO can understand the state of the business before opening the detailed pages.</a:t>
+              <a:t>No raw data dump. No mixed sections. Just the first answer a CEO needs.</a:t>
+            </a:r>
+          </a:p>
+        </p:txBody>
+      </p:sp>
+      <p:sp>
+        <p:nvSpPr>
+          <p:cNvPr id="17" name="">
+            <a:extLst xmlns:a="http://schemas.openxmlformats.org/drawingml/2006/main">
+              <a:ext uri="{FF2B5EF4-FFF2-40B4-BE49-F238E27FC236}">
+                <a16:creationId xmlns:a16="http://schemas.microsoft.com/office/drawing/2014/main" id="{DC683368-ECD6-465C-861B-43ED44072DB8}"/>
+              </a:ext>
+            </a:extLst>
+          </p:cNvPr>
+          <p:cNvSpPr>
+            <a:spLocks xmlns:a="http://schemas.openxmlformats.org/drawingml/2006/main" noGrp="1"/>
+          </p:cNvSpPr>
+          <p:nvPr/>
+        </p:nvSpPr>
+        <p:spPr>
+          <a:xfrm xmlns:a="http://schemas.openxmlformats.org/drawingml/2006/main">
+            <a:off x="685800" y="6419850"/>
+            <a:ext cx="2095500" cy="228600"/>
+          </a:xfrm>
+          <a:prstGeom xmlns:a="http://schemas.openxmlformats.org/drawingml/2006/main" prst="rect">
+            <a:avLst/>
+          </a:prstGeom>
+          <a:noFill xmlns:a="http://schemas.openxmlformats.org/drawingml/2006/main"/>
+          <a:ln xmlns:a="http://schemas.openxmlformats.org/drawingml/2006/main" w="0">
+            <a:noFill/>
+            <a:prstDash val="solid"/>
+          </a:ln>
+        </p:spPr>
+        <p:txBody>
+          <a:bodyPr xmlns:a="http://schemas.openxmlformats.org/drawingml/2006/main"/>
+          <a:lstStyle xmlns:a="http://schemas.openxmlformats.org/drawingml/2006/main"/>
+          <a:p xmlns:a="http://schemas.openxmlformats.org/drawingml/2006/main">
+            <a:pPr algn="l">
+              <a:defRPr sz="900" b="1">
+                <a:solidFill>
+                  <a:srgbClr val="8EA0B4"/>
+                </a:solidFill>
+              </a:defRPr>
+            </a:pPr>
+            <a:r>
+              <a:rPr sz="900" b="1">
+                <a:solidFill>
+                  <a:srgbClr val="8EA0B4"/>
+                </a:solidFill>
+              </a:rPr>
+              <a:t>AG Health ERP · 4/9</a:t>
             </a:r>
           </a:p>
         </p:txBody>
@@ -4273,7 +4567,7 @@
     </p:spTree>
     <p:extLst>
       <p:ext uri="{BB962C8B-B14F-4D97-AF65-F5344CB8AC3E}">
-        <p14:creationId xmlns:p14="http://schemas.microsoft.com/office/powerpoint/2010/main" val="1774344117"/>
+        <p14:creationId xmlns:p14="http://schemas.microsoft.com/office/powerpoint/2010/main" val="1302547273"/>
       </p:ext>
     </p:extLst>
   </p:cSld>
@@ -4286,7 +4580,7 @@
     <p:bg>
       <p:bgPr>
         <a:solidFill xmlns:a="http://schemas.openxmlformats.org/drawingml/2006/main">
-          <a:srgbClr val="F7FBFF"/>
+          <a:srgbClr val="F6FBFF"/>
         </a:solidFill>
       </p:bgPr>
     </p:bg>
@@ -4301,22 +4595,22 @@
       </p:grpSpPr>
       <p:sp>
         <p:nvSpPr>
-          <p:cNvPr id="30" name="">
-            <a:extLst xmlns:a="http://schemas.openxmlformats.org/drawingml/2006/main">
-              <a:ext uri="{FF2B5EF4-FFF2-40B4-BE49-F238E27FC236}">
-                <a16:creationId xmlns:a16="http://schemas.microsoft.com/office/drawing/2014/main" id="{698333ED-EF04-4D43-8E75-E30ACBD6CC8B}"/>
-              </a:ext>
-            </a:extLst>
-          </p:cNvPr>
-          <p:cNvSpPr>
-            <a:spLocks xmlns:a="http://schemas.openxmlformats.org/drawingml/2006/main" noGrp="1"/>
-          </p:cNvSpPr>
-          <p:nvPr/>
-        </p:nvSpPr>
-        <p:spPr>
-          <a:xfrm xmlns:a="http://schemas.openxmlformats.org/drawingml/2006/main">
-            <a:off x="10096500" y="0"/>
-            <a:ext cx="2000250" cy="2000250"/>
+          <p:cNvPr id="20" name="">
+            <a:extLst xmlns:a="http://schemas.openxmlformats.org/drawingml/2006/main">
+              <a:ext uri="{FF2B5EF4-FFF2-40B4-BE49-F238E27FC236}">
+                <a16:creationId xmlns:a16="http://schemas.microsoft.com/office/drawing/2014/main" id="{6D754AB5-8F51-48B4-BE28-B846095DAD15}"/>
+              </a:ext>
+            </a:extLst>
+          </p:cNvPr>
+          <p:cNvSpPr>
+            <a:spLocks xmlns:a="http://schemas.openxmlformats.org/drawingml/2006/main" noGrp="1"/>
+          </p:cNvSpPr>
+          <p:nvPr/>
+        </p:nvSpPr>
+        <p:spPr>
+          <a:xfrm xmlns:a="http://schemas.openxmlformats.org/drawingml/2006/main">
+            <a:off x="9886950" y="0"/>
+            <a:ext cx="2095500" cy="2095500"/>
           </a:xfrm>
           <a:prstGeom xmlns:a="http://schemas.openxmlformats.org/drawingml/2006/main" prst="ellipse">
             <a:avLst/>
@@ -4335,7 +4629,7 @@
           <p:cNvPr id="2" name="">
             <a:extLst xmlns:a="http://schemas.openxmlformats.org/drawingml/2006/main">
               <a:ext uri="{FF2B5EF4-FFF2-40B4-BE49-F238E27FC236}">
-                <a16:creationId xmlns:a16="http://schemas.microsoft.com/office/drawing/2014/main" id="{26592344-6049-4714-8550-0F5BD445B97E}"/>
+                <a16:creationId xmlns:a16="http://schemas.microsoft.com/office/drawing/2014/main" id="{E096E558-6E07-4FD4-A48F-E483F7F7780A}"/>
               </a:ext>
             </a:extLst>
           </p:cNvPr>
@@ -4347,7 +4641,7 @@
         <p:spPr>
           <a:xfrm xmlns:a="http://schemas.openxmlformats.org/drawingml/2006/main">
             <a:off x="0" y="5524500"/>
-            <a:ext cx="1333500" cy="1333500"/>
+            <a:ext cx="1295400" cy="1295400"/>
           </a:xfrm>
           <a:prstGeom xmlns:a="http://schemas.openxmlformats.org/drawingml/2006/main" prst="ellipse">
             <a:avLst/>
@@ -4366,19 +4660,48 @@
           <p:cNvPr id="3" name="">
             <a:extLst xmlns:a="http://schemas.openxmlformats.org/drawingml/2006/main">
               <a:ext uri="{FF2B5EF4-FFF2-40B4-BE49-F238E27FC236}">
-                <a16:creationId xmlns:a16="http://schemas.microsoft.com/office/drawing/2014/main" id="{B6CB49A3-9B9E-4AE1-A064-5ACA47B681B8}"/>
-              </a:ext>
-            </a:extLst>
-          </p:cNvPr>
-          <p:cNvSpPr>
-            <a:spLocks xmlns:a="http://schemas.openxmlformats.org/drawingml/2006/main" noGrp="1"/>
-          </p:cNvSpPr>
-          <p:nvPr/>
-        </p:nvSpPr>
-        <p:spPr>
-          <a:xfrm xmlns:a="http://schemas.openxmlformats.org/drawingml/2006/main">
-            <a:off x="723900" y="514350"/>
-            <a:ext cx="3429000" cy="266700"/>
+                <a16:creationId xmlns:a16="http://schemas.microsoft.com/office/drawing/2014/main" id="{BC4C4BFA-0104-4A55-B8F4-4524B088011C}"/>
+              </a:ext>
+            </a:extLst>
+          </p:cNvPr>
+          <p:cNvSpPr>
+            <a:spLocks xmlns:a="http://schemas.openxmlformats.org/drawingml/2006/main" noGrp="1"/>
+          </p:cNvSpPr>
+          <p:nvPr/>
+        </p:nvSpPr>
+        <p:spPr>
+          <a:xfrm xmlns:a="http://schemas.openxmlformats.org/drawingml/2006/main">
+            <a:off x="0" y="0"/>
+            <a:ext cx="12192000" cy="6858000"/>
+          </a:xfrm>
+          <a:prstGeom xmlns:a="http://schemas.openxmlformats.org/drawingml/2006/main" prst="rect">
+            <a:avLst/>
+          </a:prstGeom>
+          <a:noFill xmlns:a="http://schemas.openxmlformats.org/drawingml/2006/main"/>
+          <a:ln xmlns:a="http://schemas.openxmlformats.org/drawingml/2006/main" w="0">
+            <a:noFill/>
+            <a:prstDash val="solid"/>
+          </a:ln>
+        </p:spPr>
+      </p:sp>
+      <p:sp>
+        <p:nvSpPr>
+          <p:cNvPr id="4" name="">
+            <a:extLst xmlns:a="http://schemas.openxmlformats.org/drawingml/2006/main">
+              <a:ext uri="{FF2B5EF4-FFF2-40B4-BE49-F238E27FC236}">
+                <a16:creationId xmlns:a16="http://schemas.microsoft.com/office/drawing/2014/main" id="{9847919F-514B-46AB-A7ED-EF45C7720D12}"/>
+              </a:ext>
+            </a:extLst>
+          </p:cNvPr>
+          <p:cNvSpPr>
+            <a:spLocks xmlns:a="http://schemas.openxmlformats.org/drawingml/2006/main" noGrp="1"/>
+          </p:cNvSpPr>
+          <p:nvPr/>
+        </p:nvSpPr>
+        <p:spPr>
+          <a:xfrm xmlns:a="http://schemas.openxmlformats.org/drawingml/2006/main">
+            <a:off x="685800" y="495300"/>
+            <a:ext cx="3429000" cy="285750"/>
           </a:xfrm>
           <a:prstGeom xmlns:a="http://schemas.openxmlformats.org/drawingml/2006/main" prst="rect">
             <a:avLst/>
@@ -4406,29 +4729,29 @@
                   <a:srgbClr val="E2BE2D"/>
                 </a:solidFill>
               </a:rPr>
-              <a:t>BUSINESS COVERAGE</a:t>
-            </a:r>
-          </a:p>
-        </p:txBody>
-      </p:sp>
-      <p:sp>
-        <p:nvSpPr>
-          <p:cNvPr id="4" name="">
-            <a:extLst xmlns:a="http://schemas.openxmlformats.org/drawingml/2006/main">
-              <a:ext uri="{FF2B5EF4-FFF2-40B4-BE49-F238E27FC236}">
-                <a16:creationId xmlns:a16="http://schemas.microsoft.com/office/drawing/2014/main" id="{3800E5D3-DA04-4487-9290-DF44FFE4C3C8}"/>
-              </a:ext>
-            </a:extLst>
-          </p:cNvPr>
-          <p:cNvSpPr>
-            <a:spLocks xmlns:a="http://schemas.openxmlformats.org/drawingml/2006/main" noGrp="1"/>
-          </p:cNvSpPr>
-          <p:nvPr/>
-        </p:nvSpPr>
-        <p:spPr>
-          <a:xfrm xmlns:a="http://schemas.openxmlformats.org/drawingml/2006/main">
-            <a:off x="723900" y="914400"/>
-            <a:ext cx="8096250" cy="876300"/>
+              <a:t>INVENTORY</a:t>
+            </a:r>
+          </a:p>
+        </p:txBody>
+      </p:sp>
+      <p:sp>
+        <p:nvSpPr>
+          <p:cNvPr id="5" name="">
+            <a:extLst xmlns:a="http://schemas.openxmlformats.org/drawingml/2006/main">
+              <a:ext uri="{FF2B5EF4-FFF2-40B4-BE49-F238E27FC236}">
+                <a16:creationId xmlns:a16="http://schemas.microsoft.com/office/drawing/2014/main" id="{E45C62C4-DF43-4CA2-8A55-23F93FA9F284}"/>
+              </a:ext>
+            </a:extLst>
+          </p:cNvPr>
+          <p:cNvSpPr>
+            <a:spLocks xmlns:a="http://schemas.openxmlformats.org/drawingml/2006/main" noGrp="1"/>
+          </p:cNvSpPr>
+          <p:nvPr/>
+        </p:nvSpPr>
+        <p:spPr>
+          <a:xfrm xmlns:a="http://schemas.openxmlformats.org/drawingml/2006/main">
+            <a:off x="685800" y="895350"/>
+            <a:ext cx="8286750" cy="895350"/>
           </a:xfrm>
           <a:prstGeom xmlns:a="http://schemas.openxmlformats.org/drawingml/2006/main" prst="rect">
             <a:avLst/>
@@ -4444,41 +4767,41 @@
           <a:lstStyle xmlns:a="http://schemas.openxmlformats.org/drawingml/2006/main"/>
           <a:p xmlns:a="http://schemas.openxmlformats.org/drawingml/2006/main">
             <a:pPr algn="l">
-              <a:defRPr sz="3450" b="1">
+              <a:defRPr sz="3375" b="1">
                 <a:solidFill>
                   <a:srgbClr val="111827"/>
                 </a:solidFill>
               </a:defRPr>
             </a:pPr>
             <a:r>
-              <a:rPr sz="3450" b="1">
+              <a:rPr sz="3375" b="1">
                 <a:solidFill>
                   <a:srgbClr val="111827"/>
                 </a:solidFill>
               </a:rPr>
-              <a:t>Every module has a clean purpose</a:t>
-            </a:r>
-          </a:p>
-        </p:txBody>
-      </p:sp>
-      <p:sp>
-        <p:nvSpPr>
-          <p:cNvPr id="5" name="">
-            <a:extLst xmlns:a="http://schemas.openxmlformats.org/drawingml/2006/main">
-              <a:ext uri="{FF2B5EF4-FFF2-40B4-BE49-F238E27FC236}">
-                <a16:creationId xmlns:a16="http://schemas.microsoft.com/office/drawing/2014/main" id="{7C992FB5-7CB6-450D-A162-09E5653846A9}"/>
-              </a:ext>
-            </a:extLst>
-          </p:cNvPr>
-          <p:cNvSpPr>
-            <a:spLocks xmlns:a="http://schemas.openxmlformats.org/drawingml/2006/main" noGrp="1"/>
-          </p:cNvSpPr>
-          <p:nvPr/>
-        </p:nvSpPr>
-        <p:spPr>
-          <a:xfrm xmlns:a="http://schemas.openxmlformats.org/drawingml/2006/main">
-            <a:off x="742950" y="1866900"/>
-            <a:ext cx="7810500" cy="552450"/>
+              <a:t>Stock becomes easier to explain</a:t>
+            </a:r>
+          </a:p>
+        </p:txBody>
+      </p:sp>
+      <p:sp>
+        <p:nvSpPr>
+          <p:cNvPr id="6" name="">
+            <a:extLst xmlns:a="http://schemas.openxmlformats.org/drawingml/2006/main">
+              <a:ext uri="{FF2B5EF4-FFF2-40B4-BE49-F238E27FC236}">
+                <a16:creationId xmlns:a16="http://schemas.microsoft.com/office/drawing/2014/main" id="{6C4C5140-C00F-463D-AB63-8539E1D91E83}"/>
+              </a:ext>
+            </a:extLst>
+          </p:cNvPr>
+          <p:cNvSpPr>
+            <a:spLocks xmlns:a="http://schemas.openxmlformats.org/drawingml/2006/main" noGrp="1"/>
+          </p:cNvSpPr>
+          <p:nvPr/>
+        </p:nvSpPr>
+        <p:spPr>
+          <a:xfrm xmlns:a="http://schemas.openxmlformats.org/drawingml/2006/main">
+            <a:off x="704850" y="1866900"/>
+            <a:ext cx="7429500" cy="571500"/>
           </a:xfrm>
           <a:prstGeom xmlns:a="http://schemas.openxmlformats.org/drawingml/2006/main" prst="rect">
             <a:avLst/>
@@ -4496,43 +4819,43 @@
             <a:pPr algn="l">
               <a:defRPr sz="1575" b="0">
                 <a:solidFill>
-                  <a:srgbClr val="516173"/>
+                  <a:srgbClr val="526173"/>
                 </a:solidFill>
               </a:defRPr>
             </a:pPr>
             <a:r>
               <a:rPr sz="1575" b="0">
                 <a:solidFill>
-                  <a:srgbClr val="516173"/>
+                  <a:srgbClr val="526173"/>
                 </a:solidFill>
               </a:rPr>
-              <a:t>The system avoids mixing unrelated data so each page answers one kind of business question.</a:t>
-            </a:r>
-          </a:p>
-        </p:txBody>
-      </p:sp>
-      <p:sp>
-        <p:nvSpPr>
-          <p:cNvPr id="6" name="">
-            <a:extLst xmlns:a="http://schemas.openxmlformats.org/drawingml/2006/main">
-              <a:ext uri="{FF2B5EF4-FFF2-40B4-BE49-F238E27FC236}">
-                <a16:creationId xmlns:a16="http://schemas.microsoft.com/office/drawing/2014/main" id="{CA941292-D16D-4CD0-9469-EA82F46F2B8D}"/>
-              </a:ext>
-            </a:extLst>
-          </p:cNvPr>
-          <p:cNvSpPr>
-            <a:spLocks xmlns:a="http://schemas.openxmlformats.org/drawingml/2006/main" noGrp="1"/>
-          </p:cNvSpPr>
-          <p:nvPr/>
-        </p:nvSpPr>
-        <p:spPr>
-          <a:xfrm xmlns:a="http://schemas.openxmlformats.org/drawingml/2006/main">
-            <a:off x="1000125" y="2857500"/>
-            <a:ext cx="2857500" cy="952500"/>
+              <a:t>Inventory and packing data stay separated, so teams can understand what stock exists and what it supports.</a:t>
+            </a:r>
+          </a:p>
+        </p:txBody>
+      </p:sp>
+      <p:sp>
+        <p:nvSpPr>
+          <p:cNvPr id="7" name="">
+            <a:extLst xmlns:a="http://schemas.openxmlformats.org/drawingml/2006/main">
+              <a:ext uri="{FF2B5EF4-FFF2-40B4-BE49-F238E27FC236}">
+                <a16:creationId xmlns:a16="http://schemas.microsoft.com/office/drawing/2014/main" id="{E09840B8-EB2F-48B5-9056-188025580439}"/>
+              </a:ext>
+            </a:extLst>
+          </p:cNvPr>
+          <p:cNvSpPr>
+            <a:spLocks xmlns:a="http://schemas.openxmlformats.org/drawingml/2006/main" noGrp="1"/>
+          </p:cNvSpPr>
+          <p:nvPr/>
+        </p:nvSpPr>
+        <p:spPr>
+          <a:xfrm xmlns:a="http://schemas.openxmlformats.org/drawingml/2006/main">
+            <a:off x="628650" y="2581275"/>
+            <a:ext cx="5600700" cy="3124200"/>
           </a:xfrm>
           <a:prstGeom xmlns:a="http://schemas.openxmlformats.org/drawingml/2006/main" prst="roundRect">
             <a:avLst>
-              <a:gd name="adj" fmla="val 16000"/>
+              <a:gd name="adj" fmla="val 4878"/>
             </a:avLst>
           </a:prstGeom>
           <a:solidFill xmlns:a="http://schemas.openxmlformats.org/drawingml/2006/main">
@@ -4554,25 +4877,27 @@
       </p:sp>
       <p:sp>
         <p:nvSpPr>
-          <p:cNvPr id="7" name="">
-            <a:extLst xmlns:a="http://schemas.openxmlformats.org/drawingml/2006/main">
-              <a:ext uri="{FF2B5EF4-FFF2-40B4-BE49-F238E27FC236}">
-                <a16:creationId xmlns:a16="http://schemas.microsoft.com/office/drawing/2014/main" id="{9768C1B4-D0A4-473B-8879-3D774501F753}"/>
-              </a:ext>
-            </a:extLst>
-          </p:cNvPr>
-          <p:cNvSpPr>
-            <a:spLocks xmlns:a="http://schemas.openxmlformats.org/drawingml/2006/main" noGrp="1"/>
-          </p:cNvSpPr>
-          <p:nvPr/>
-        </p:nvSpPr>
-        <p:spPr>
-          <a:xfrm xmlns:a="http://schemas.openxmlformats.org/drawingml/2006/main">
-            <a:off x="1247775" y="3143250"/>
-            <a:ext cx="171450" cy="171450"/>
-          </a:xfrm>
-          <a:prstGeom xmlns:a="http://schemas.openxmlformats.org/drawingml/2006/main" prst="ellipse">
-            <a:avLst/>
+          <p:cNvPr id="8" name="">
+            <a:extLst xmlns:a="http://schemas.openxmlformats.org/drawingml/2006/main">
+              <a:ext uri="{FF2B5EF4-FFF2-40B4-BE49-F238E27FC236}">
+                <a16:creationId xmlns:a16="http://schemas.microsoft.com/office/drawing/2014/main" id="{910263E6-C17B-4F31-A3BE-2D7B617D8CF9}"/>
+              </a:ext>
+            </a:extLst>
+          </p:cNvPr>
+          <p:cNvSpPr>
+            <a:spLocks xmlns:a="http://schemas.openxmlformats.org/drawingml/2006/main" noGrp="1"/>
+          </p:cNvSpPr>
+          <p:nvPr/>
+        </p:nvSpPr>
+        <p:spPr>
+          <a:xfrm xmlns:a="http://schemas.openxmlformats.org/drawingml/2006/main">
+            <a:off x="628650" y="2581275"/>
+            <a:ext cx="5600700" cy="419100"/>
+          </a:xfrm>
+          <a:prstGeom xmlns:a="http://schemas.openxmlformats.org/drawingml/2006/main" prst="roundRect">
+            <a:avLst>
+              <a:gd name="adj" fmla="val 36364"/>
+            </a:avLst>
           </a:prstGeom>
           <a:solidFill xmlns:a="http://schemas.openxmlformats.org/drawingml/2006/main">
             <a:srgbClr val="17375F"/>
@@ -4585,22 +4910,173 @@
       </p:sp>
       <p:sp>
         <p:nvSpPr>
-          <p:cNvPr id="8" name="">
-            <a:extLst xmlns:a="http://schemas.openxmlformats.org/drawingml/2006/main">
-              <a:ext uri="{FF2B5EF4-FFF2-40B4-BE49-F238E27FC236}">
-                <a16:creationId xmlns:a16="http://schemas.microsoft.com/office/drawing/2014/main" id="{F6ED49F2-5341-49B1-8675-C61ECD2478E5}"/>
-              </a:ext>
-            </a:extLst>
-          </p:cNvPr>
-          <p:cNvSpPr>
-            <a:spLocks xmlns:a="http://schemas.openxmlformats.org/drawingml/2006/main" noGrp="1"/>
-          </p:cNvSpPr>
-          <p:nvPr/>
-        </p:nvSpPr>
-        <p:spPr>
-          <a:xfrm xmlns:a="http://schemas.openxmlformats.org/drawingml/2006/main">
-            <a:off x="1590675" y="3067050"/>
-            <a:ext cx="1809750" cy="266700"/>
+          <p:cNvPr id="9" name="">
+            <a:extLst xmlns:a="http://schemas.openxmlformats.org/drawingml/2006/main">
+              <a:ext uri="{FF2B5EF4-FFF2-40B4-BE49-F238E27FC236}">
+                <a16:creationId xmlns:a16="http://schemas.microsoft.com/office/drawing/2014/main" id="{E62DE015-7249-45EA-B2CB-007CD189BE50}"/>
+              </a:ext>
+            </a:extLst>
+          </p:cNvPr>
+          <p:cNvSpPr>
+            <a:spLocks xmlns:a="http://schemas.openxmlformats.org/drawingml/2006/main" noGrp="1"/>
+          </p:cNvSpPr>
+          <p:nvPr/>
+        </p:nvSpPr>
+        <p:spPr>
+          <a:xfrm xmlns:a="http://schemas.openxmlformats.org/drawingml/2006/main">
+            <a:off x="838200" y="2695575"/>
+            <a:ext cx="95250" cy="95250"/>
+          </a:xfrm>
+          <a:prstGeom xmlns:a="http://schemas.openxmlformats.org/drawingml/2006/main" prst="ellipse">
+            <a:avLst/>
+          </a:prstGeom>
+          <a:solidFill xmlns:a="http://schemas.openxmlformats.org/drawingml/2006/main">
+            <a:srgbClr val="FF6464"/>
+          </a:solidFill>
+          <a:ln xmlns:a="http://schemas.openxmlformats.org/drawingml/2006/main" w="0">
+            <a:noFill/>
+            <a:prstDash val="solid"/>
+          </a:ln>
+        </p:spPr>
+      </p:sp>
+      <p:sp>
+        <p:nvSpPr>
+          <p:cNvPr id="10" name="">
+            <a:extLst xmlns:a="http://schemas.openxmlformats.org/drawingml/2006/main">
+              <a:ext uri="{FF2B5EF4-FFF2-40B4-BE49-F238E27FC236}">
+                <a16:creationId xmlns:a16="http://schemas.microsoft.com/office/drawing/2014/main" id="{29153E25-BDC9-4D47-9523-555875A385D8}"/>
+              </a:ext>
+            </a:extLst>
+          </p:cNvPr>
+          <p:cNvSpPr>
+            <a:spLocks xmlns:a="http://schemas.openxmlformats.org/drawingml/2006/main" noGrp="1"/>
+          </p:cNvSpPr>
+          <p:nvPr/>
+        </p:nvSpPr>
+        <p:spPr>
+          <a:xfrm xmlns:a="http://schemas.openxmlformats.org/drawingml/2006/main">
+            <a:off x="1009650" y="2695575"/>
+            <a:ext cx="95250" cy="95250"/>
+          </a:xfrm>
+          <a:prstGeom xmlns:a="http://schemas.openxmlformats.org/drawingml/2006/main" prst="ellipse">
+            <a:avLst/>
+          </a:prstGeom>
+          <a:solidFill xmlns:a="http://schemas.openxmlformats.org/drawingml/2006/main">
+            <a:srgbClr val="FFD166"/>
+          </a:solidFill>
+          <a:ln xmlns:a="http://schemas.openxmlformats.org/drawingml/2006/main" w="0">
+            <a:noFill/>
+            <a:prstDash val="solid"/>
+          </a:ln>
+        </p:spPr>
+      </p:sp>
+      <p:sp>
+        <p:nvSpPr>
+          <p:cNvPr id="11" name="">
+            <a:extLst xmlns:a="http://schemas.openxmlformats.org/drawingml/2006/main">
+              <a:ext uri="{FF2B5EF4-FFF2-40B4-BE49-F238E27FC236}">
+                <a16:creationId xmlns:a16="http://schemas.microsoft.com/office/drawing/2014/main" id="{DEE9CA72-F180-4669-959D-DC7859D0158F}"/>
+              </a:ext>
+            </a:extLst>
+          </p:cNvPr>
+          <p:cNvSpPr>
+            <a:spLocks xmlns:a="http://schemas.openxmlformats.org/drawingml/2006/main" noGrp="1"/>
+          </p:cNvSpPr>
+          <p:nvPr/>
+        </p:nvSpPr>
+        <p:spPr>
+          <a:xfrm xmlns:a="http://schemas.openxmlformats.org/drawingml/2006/main">
+            <a:off x="1181100" y="2695575"/>
+            <a:ext cx="95250" cy="95250"/>
+          </a:xfrm>
+          <a:prstGeom xmlns:a="http://schemas.openxmlformats.org/drawingml/2006/main" prst="ellipse">
+            <a:avLst/>
+          </a:prstGeom>
+          <a:solidFill xmlns:a="http://schemas.openxmlformats.org/drawingml/2006/main">
+            <a:srgbClr val="06D6A0"/>
+          </a:solidFill>
+          <a:ln xmlns:a="http://schemas.openxmlformats.org/drawingml/2006/main" w="0">
+            <a:noFill/>
+            <a:prstDash val="solid"/>
+          </a:ln>
+        </p:spPr>
+      </p:sp>
+      <p:pic>
+        <p:nvPicPr>
+          <p:cNvPr id="31" name=""/>
+          <p:cNvPicPr>
+            <a:picLocks xmlns:a="http://schemas.openxmlformats.org/drawingml/2006/main" noChangeAspect="1"/>
+          </p:cNvPicPr>
+          <p:nvPr/>
+        </p:nvPicPr>
+        <p:blipFill>
+          <a:blip xmlns:r="http://schemas.openxmlformats.org/officeDocument/2006/relationships" xmlns:a="http://schemas.openxmlformats.org/drawingml/2006/main" r:embed="Rc2e8013b81ff4a24"/>
+          <a:srcRect xmlns:a="http://schemas.openxmlformats.org/drawingml/2006/main" l="0" t="6797" r="0" b="6797"/>
+          <a:stretch xmlns:a="http://schemas.openxmlformats.org/drawingml/2006/main">
+            <a:fillRect l="0" t="0" r="0" b="0"/>
+          </a:stretch>
+        </p:blipFill>
+        <p:spPr>
+          <a:xfrm xmlns:a="http://schemas.openxmlformats.org/drawingml/2006/main">
+            <a:off x="762000" y="2714625"/>
+            <a:ext cx="5334000" cy="2857500"/>
+          </a:xfrm>
+          <a:prstGeom xmlns:a="http://schemas.openxmlformats.org/drawingml/2006/main" prst="roundRect">
+            <a:avLst>
+              <a:gd name="adj" fmla="val 4000"/>
+            </a:avLst>
+          </a:prstGeom>
+        </p:spPr>
+      </p:pic>
+      <p:sp>
+        <p:nvSpPr>
+          <p:cNvPr id="13" name="">
+            <a:extLst xmlns:a="http://schemas.openxmlformats.org/drawingml/2006/main">
+              <a:ext uri="{FF2B5EF4-FFF2-40B4-BE49-F238E27FC236}">
+                <a16:creationId xmlns:a16="http://schemas.microsoft.com/office/drawing/2014/main" id="{2AA6EA32-4532-4F32-A672-8BF1DAB3DEBC}"/>
+              </a:ext>
+            </a:extLst>
+          </p:cNvPr>
+          <p:cNvSpPr>
+            <a:spLocks xmlns:a="http://schemas.openxmlformats.org/drawingml/2006/main" noGrp="1"/>
+          </p:cNvSpPr>
+          <p:nvPr/>
+        </p:nvSpPr>
+        <p:spPr>
+          <a:xfrm xmlns:a="http://schemas.openxmlformats.org/drawingml/2006/main">
+            <a:off x="7000875" y="3267075"/>
+            <a:ext cx="123825" cy="123825"/>
+          </a:xfrm>
+          <a:prstGeom xmlns:a="http://schemas.openxmlformats.org/drawingml/2006/main" prst="ellipse">
+            <a:avLst/>
+          </a:prstGeom>
+          <a:solidFill xmlns:a="http://schemas.openxmlformats.org/drawingml/2006/main">
+            <a:srgbClr val="17375F"/>
+          </a:solidFill>
+          <a:ln xmlns:a="http://schemas.openxmlformats.org/drawingml/2006/main" w="0">
+            <a:noFill/>
+            <a:prstDash val="solid"/>
+          </a:ln>
+        </p:spPr>
+      </p:sp>
+      <p:sp>
+        <p:nvSpPr>
+          <p:cNvPr id="14" name="">
+            <a:extLst xmlns:a="http://schemas.openxmlformats.org/drawingml/2006/main">
+              <a:ext uri="{FF2B5EF4-FFF2-40B4-BE49-F238E27FC236}">
+                <a16:creationId xmlns:a16="http://schemas.microsoft.com/office/drawing/2014/main" id="{9F9C93B8-DB65-46AD-9CB1-8F7B81E41FB3}"/>
+              </a:ext>
+            </a:extLst>
+          </p:cNvPr>
+          <p:cNvSpPr>
+            <a:spLocks xmlns:a="http://schemas.openxmlformats.org/drawingml/2006/main" noGrp="1"/>
+          </p:cNvSpPr>
+          <p:nvPr/>
+        </p:nvSpPr>
+        <p:spPr>
+          <a:xfrm xmlns:a="http://schemas.openxmlformats.org/drawingml/2006/main">
+            <a:off x="7286625" y="3190875"/>
+            <a:ext cx="3429000" cy="381000"/>
           </a:xfrm>
           <a:prstGeom xmlns:a="http://schemas.openxmlformats.org/drawingml/2006/main" prst="rect">
             <a:avLst/>
@@ -4616,41 +5092,72 @@
           <a:lstStyle xmlns:a="http://schemas.openxmlformats.org/drawingml/2006/main"/>
           <a:p xmlns:a="http://schemas.openxmlformats.org/drawingml/2006/main">
             <a:pPr algn="l">
-              <a:defRPr sz="1800" b="1">
+              <a:defRPr sz="1500" b="1">
                 <a:solidFill>
                   <a:srgbClr val="111827"/>
                 </a:solidFill>
               </a:defRPr>
             </a:pPr>
             <a:r>
-              <a:rPr sz="1800" b="1">
+              <a:rPr sz="1500" b="1">
                 <a:solidFill>
                   <a:srgbClr val="111827"/>
                 </a:solidFill>
               </a:rPr>
-              <a:t>Inventory</a:t>
-            </a:r>
-          </a:p>
-        </p:txBody>
-      </p:sp>
-      <p:sp>
-        <p:nvSpPr>
-          <p:cNvPr id="9" name="">
-            <a:extLst xmlns:a="http://schemas.openxmlformats.org/drawingml/2006/main">
-              <a:ext uri="{FF2B5EF4-FFF2-40B4-BE49-F238E27FC236}">
-                <a16:creationId xmlns:a16="http://schemas.microsoft.com/office/drawing/2014/main" id="{23AC7349-6E3E-4C91-9465-6B55EB06E927}"/>
-              </a:ext>
-            </a:extLst>
-          </p:cNvPr>
-          <p:cNvSpPr>
-            <a:spLocks xmlns:a="http://schemas.openxmlformats.org/drawingml/2006/main" noGrp="1"/>
-          </p:cNvSpPr>
-          <p:nvPr/>
-        </p:nvSpPr>
-        <p:spPr>
-          <a:xfrm xmlns:a="http://schemas.openxmlformats.org/drawingml/2006/main">
-            <a:off x="1590675" y="3390900"/>
-            <a:ext cx="1952625" cy="247650"/>
+              <a:t>Item categories stay separated</a:t>
+            </a:r>
+          </a:p>
+        </p:txBody>
+      </p:sp>
+      <p:sp>
+        <p:nvSpPr>
+          <p:cNvPr id="15" name="">
+            <a:extLst xmlns:a="http://schemas.openxmlformats.org/drawingml/2006/main">
+              <a:ext uri="{FF2B5EF4-FFF2-40B4-BE49-F238E27FC236}">
+                <a16:creationId xmlns:a16="http://schemas.microsoft.com/office/drawing/2014/main" id="{D2BE5336-3E6E-4CA2-A5E5-6A86C10F6906}"/>
+              </a:ext>
+            </a:extLst>
+          </p:cNvPr>
+          <p:cNvSpPr>
+            <a:spLocks xmlns:a="http://schemas.openxmlformats.org/drawingml/2006/main" noGrp="1"/>
+          </p:cNvSpPr>
+          <p:nvPr/>
+        </p:nvSpPr>
+        <p:spPr>
+          <a:xfrm xmlns:a="http://schemas.openxmlformats.org/drawingml/2006/main">
+            <a:off x="7000875" y="3857625"/>
+            <a:ext cx="123825" cy="123825"/>
+          </a:xfrm>
+          <a:prstGeom xmlns:a="http://schemas.openxmlformats.org/drawingml/2006/main" prst="ellipse">
+            <a:avLst/>
+          </a:prstGeom>
+          <a:solidFill xmlns:a="http://schemas.openxmlformats.org/drawingml/2006/main">
+            <a:srgbClr val="E2BE2D"/>
+          </a:solidFill>
+          <a:ln xmlns:a="http://schemas.openxmlformats.org/drawingml/2006/main" w="0">
+            <a:noFill/>
+            <a:prstDash val="solid"/>
+          </a:ln>
+        </p:spPr>
+      </p:sp>
+      <p:sp>
+        <p:nvSpPr>
+          <p:cNvPr id="16" name="">
+            <a:extLst xmlns:a="http://schemas.openxmlformats.org/drawingml/2006/main">
+              <a:ext uri="{FF2B5EF4-FFF2-40B4-BE49-F238E27FC236}">
+                <a16:creationId xmlns:a16="http://schemas.microsoft.com/office/drawing/2014/main" id="{C18B690B-B345-49B3-B47A-1FADC1AE5BAE}"/>
+              </a:ext>
+            </a:extLst>
+          </p:cNvPr>
+          <p:cNvSpPr>
+            <a:spLocks xmlns:a="http://schemas.openxmlformats.org/drawingml/2006/main" noGrp="1"/>
+          </p:cNvSpPr>
+          <p:nvPr/>
+        </p:nvSpPr>
+        <p:spPr>
+          <a:xfrm xmlns:a="http://schemas.openxmlformats.org/drawingml/2006/main">
+            <a:off x="7286625" y="3781425"/>
+            <a:ext cx="3429000" cy="381000"/>
           </a:xfrm>
           <a:prstGeom xmlns:a="http://schemas.openxmlformats.org/drawingml/2006/main" prst="rect">
             <a:avLst/>
@@ -4666,113 +5173,72 @@
           <a:lstStyle xmlns:a="http://schemas.openxmlformats.org/drawingml/2006/main"/>
           <a:p xmlns:a="http://schemas.openxmlformats.org/drawingml/2006/main">
             <a:pPr algn="l">
-              <a:defRPr sz="1275" b="0">
-                <a:solidFill>
-                  <a:srgbClr val="516173"/>
+              <a:defRPr sz="1500" b="0">
+                <a:solidFill>
+                  <a:srgbClr val="111827"/>
                 </a:solidFill>
               </a:defRPr>
             </a:pPr>
             <a:r>
-              <a:rPr sz="1275" b="0">
-                <a:solidFill>
-                  <a:srgbClr val="516173"/>
+              <a:rPr sz="1500" b="0">
+                <a:solidFill>
+                  <a:srgbClr val="111827"/>
                 </a:solidFill>
               </a:rPr>
-              <a:t>What do we have?</a:t>
-            </a:r>
-          </a:p>
-        </p:txBody>
-      </p:sp>
-      <p:sp>
-        <p:nvSpPr>
-          <p:cNvPr id="10" name="">
-            <a:extLst xmlns:a="http://schemas.openxmlformats.org/drawingml/2006/main">
-              <a:ext uri="{FF2B5EF4-FFF2-40B4-BE49-F238E27FC236}">
-                <a16:creationId xmlns:a16="http://schemas.microsoft.com/office/drawing/2014/main" id="{9784CE75-6F45-48BE-AEE1-1FE62E3A6706}"/>
-              </a:ext>
-            </a:extLst>
-          </p:cNvPr>
-          <p:cNvSpPr>
-            <a:spLocks xmlns:a="http://schemas.openxmlformats.org/drawingml/2006/main" noGrp="1"/>
-          </p:cNvSpPr>
-          <p:nvPr/>
-        </p:nvSpPr>
-        <p:spPr>
-          <a:xfrm xmlns:a="http://schemas.openxmlformats.org/drawingml/2006/main">
-            <a:off x="4429125" y="2857500"/>
-            <a:ext cx="2857500" cy="952500"/>
-          </a:xfrm>
-          <a:prstGeom xmlns:a="http://schemas.openxmlformats.org/drawingml/2006/main" prst="roundRect">
-            <a:avLst>
-              <a:gd name="adj" fmla="val 16000"/>
-            </a:avLst>
+              <a:t>Stock value is clearly marked as calculated</a:t>
+            </a:r>
+          </a:p>
+        </p:txBody>
+      </p:sp>
+      <p:sp>
+        <p:nvSpPr>
+          <p:cNvPr id="17" name="">
+            <a:extLst xmlns:a="http://schemas.openxmlformats.org/drawingml/2006/main">
+              <a:ext uri="{FF2B5EF4-FFF2-40B4-BE49-F238E27FC236}">
+                <a16:creationId xmlns:a16="http://schemas.microsoft.com/office/drawing/2014/main" id="{BC7C6785-F4FF-4FB8-9C74-D75FE7EC1949}"/>
+              </a:ext>
+            </a:extLst>
+          </p:cNvPr>
+          <p:cNvSpPr>
+            <a:spLocks xmlns:a="http://schemas.openxmlformats.org/drawingml/2006/main" noGrp="1"/>
+          </p:cNvSpPr>
+          <p:nvPr/>
+        </p:nvSpPr>
+        <p:spPr>
+          <a:xfrm xmlns:a="http://schemas.openxmlformats.org/drawingml/2006/main">
+            <a:off x="7000875" y="4448175"/>
+            <a:ext cx="123825" cy="123825"/>
+          </a:xfrm>
+          <a:prstGeom xmlns:a="http://schemas.openxmlformats.org/drawingml/2006/main" prst="ellipse">
+            <a:avLst/>
           </a:prstGeom>
           <a:solidFill xmlns:a="http://schemas.openxmlformats.org/drawingml/2006/main">
-            <a:srgbClr val="FBFDFF"/>
-          </a:solidFill>
-          <a:ln xmlns:a="http://schemas.openxmlformats.org/drawingml/2006/main" w="9525">
-            <a:solidFill>
-              <a:srgbClr val="DBE8F4"/>
-            </a:solidFill>
-            <a:prstDash val="solid"/>
-          </a:ln>
-        </p:spPr>
-        <p:style>
-          <a:lnRef xmlns:a="http://schemas.openxmlformats.org/drawingml/2006/main" idx="0"/>
-          <a:fillRef xmlns:a="http://schemas.openxmlformats.org/drawingml/2006/main" idx="0"/>
-          <a:effectRef xmlns:a="http://schemas.openxmlformats.org/drawingml/2006/main" idx="4"/>
-          <a:fontRef xmlns:a="http://schemas.openxmlformats.org/drawingml/2006/main" idx="major"/>
-        </p:style>
-      </p:sp>
-      <p:sp>
-        <p:nvSpPr>
-          <p:cNvPr id="11" name="">
-            <a:extLst xmlns:a="http://schemas.openxmlformats.org/drawingml/2006/main">
-              <a:ext uri="{FF2B5EF4-FFF2-40B4-BE49-F238E27FC236}">
-                <a16:creationId xmlns:a16="http://schemas.microsoft.com/office/drawing/2014/main" id="{4021E40C-DD5D-416A-899F-C863EB037849}"/>
-              </a:ext>
-            </a:extLst>
-          </p:cNvPr>
-          <p:cNvSpPr>
-            <a:spLocks xmlns:a="http://schemas.openxmlformats.org/drawingml/2006/main" noGrp="1"/>
-          </p:cNvSpPr>
-          <p:nvPr/>
-        </p:nvSpPr>
-        <p:spPr>
-          <a:xfrm xmlns:a="http://schemas.openxmlformats.org/drawingml/2006/main">
-            <a:off x="4676775" y="3143250"/>
-            <a:ext cx="171450" cy="171450"/>
-          </a:xfrm>
-          <a:prstGeom xmlns:a="http://schemas.openxmlformats.org/drawingml/2006/main" prst="ellipse">
-            <a:avLst/>
-          </a:prstGeom>
-          <a:solidFill xmlns:a="http://schemas.openxmlformats.org/drawingml/2006/main">
-            <a:srgbClr val="3D78DD"/>
-          </a:solidFill>
-          <a:ln xmlns:a="http://schemas.openxmlformats.org/drawingml/2006/main" w="0">
-            <a:noFill/>
-            <a:prstDash val="solid"/>
-          </a:ln>
-        </p:spPr>
-      </p:sp>
-      <p:sp>
-        <p:nvSpPr>
-          <p:cNvPr id="12" name="">
-            <a:extLst xmlns:a="http://schemas.openxmlformats.org/drawingml/2006/main">
-              <a:ext uri="{FF2B5EF4-FFF2-40B4-BE49-F238E27FC236}">
-                <a16:creationId xmlns:a16="http://schemas.microsoft.com/office/drawing/2014/main" id="{ACC2721B-9030-4196-AE8C-352A8EF5F54E}"/>
-              </a:ext>
-            </a:extLst>
-          </p:cNvPr>
-          <p:cNvSpPr>
-            <a:spLocks xmlns:a="http://schemas.openxmlformats.org/drawingml/2006/main" noGrp="1"/>
-          </p:cNvSpPr>
-          <p:nvPr/>
-        </p:nvSpPr>
-        <p:spPr>
-          <a:xfrm xmlns:a="http://schemas.openxmlformats.org/drawingml/2006/main">
-            <a:off x="5019675" y="3067050"/>
-            <a:ext cx="1809750" cy="266700"/>
+            <a:srgbClr val="10B981"/>
+          </a:solidFill>
+          <a:ln xmlns:a="http://schemas.openxmlformats.org/drawingml/2006/main" w="0">
+            <a:noFill/>
+            <a:prstDash val="solid"/>
+          </a:ln>
+        </p:spPr>
+      </p:sp>
+      <p:sp>
+        <p:nvSpPr>
+          <p:cNvPr id="18" name="">
+            <a:extLst xmlns:a="http://schemas.openxmlformats.org/drawingml/2006/main">
+              <a:ext uri="{FF2B5EF4-FFF2-40B4-BE49-F238E27FC236}">
+                <a16:creationId xmlns:a16="http://schemas.microsoft.com/office/drawing/2014/main" id="{DFE11937-DACE-43C1-BFB0-D97D58D0DDC3}"/>
+              </a:ext>
+            </a:extLst>
+          </p:cNvPr>
+          <p:cNvSpPr>
+            <a:spLocks xmlns:a="http://schemas.openxmlformats.org/drawingml/2006/main" noGrp="1"/>
+          </p:cNvSpPr>
+          <p:nvPr/>
+        </p:nvSpPr>
+        <p:spPr>
+          <a:xfrm xmlns:a="http://schemas.openxmlformats.org/drawingml/2006/main">
+            <a:off x="7286625" y="4371975"/>
+            <a:ext cx="3429000" cy="381000"/>
           </a:xfrm>
           <a:prstGeom xmlns:a="http://schemas.openxmlformats.org/drawingml/2006/main" prst="rect">
             <a:avLst/>
@@ -4788,41 +5254,41 @@
           <a:lstStyle xmlns:a="http://schemas.openxmlformats.org/drawingml/2006/main"/>
           <a:p xmlns:a="http://schemas.openxmlformats.org/drawingml/2006/main">
             <a:pPr algn="l">
-              <a:defRPr sz="1800" b="1">
+              <a:defRPr sz="1500" b="0">
                 <a:solidFill>
                   <a:srgbClr val="111827"/>
                 </a:solidFill>
               </a:defRPr>
             </a:pPr>
             <a:r>
-              <a:rPr sz="1800" b="1">
+              <a:rPr sz="1500" b="0">
                 <a:solidFill>
                   <a:srgbClr val="111827"/>
                 </a:solidFill>
               </a:rPr>
-              <a:t>Packing</a:t>
-            </a:r>
-          </a:p>
-        </p:txBody>
-      </p:sp>
-      <p:sp>
-        <p:nvSpPr>
-          <p:cNvPr id="13" name="">
-            <a:extLst xmlns:a="http://schemas.openxmlformats.org/drawingml/2006/main">
-              <a:ext uri="{FF2B5EF4-FFF2-40B4-BE49-F238E27FC236}">
-                <a16:creationId xmlns:a16="http://schemas.microsoft.com/office/drawing/2014/main" id="{EACD4265-3166-4987-AF8F-9937BB41B227}"/>
-              </a:ext>
-            </a:extLst>
-          </p:cNvPr>
-          <p:cNvSpPr>
-            <a:spLocks xmlns:a="http://schemas.openxmlformats.org/drawingml/2006/main" noGrp="1"/>
-          </p:cNvSpPr>
-          <p:nvPr/>
-        </p:nvSpPr>
-        <p:spPr>
-          <a:xfrm xmlns:a="http://schemas.openxmlformats.org/drawingml/2006/main">
-            <a:off x="5019675" y="3390900"/>
-            <a:ext cx="1952625" cy="247650"/>
+              <a:t>Detailed rows stay below the summary</a:t>
+            </a:r>
+          </a:p>
+        </p:txBody>
+      </p:sp>
+      <p:sp>
+        <p:nvSpPr>
+          <p:cNvPr id="19" name="">
+            <a:extLst xmlns:a="http://schemas.openxmlformats.org/drawingml/2006/main">
+              <a:ext uri="{FF2B5EF4-FFF2-40B4-BE49-F238E27FC236}">
+                <a16:creationId xmlns:a16="http://schemas.microsoft.com/office/drawing/2014/main" id="{ADECE0DE-0BE0-498D-9F8F-D9E99422A416}"/>
+              </a:ext>
+            </a:extLst>
+          </p:cNvPr>
+          <p:cNvSpPr>
+            <a:spLocks xmlns:a="http://schemas.openxmlformats.org/drawingml/2006/main" noGrp="1"/>
+          </p:cNvSpPr>
+          <p:nvPr/>
+        </p:nvSpPr>
+        <p:spPr>
+          <a:xfrm xmlns:a="http://schemas.openxmlformats.org/drawingml/2006/main">
+            <a:off x="685800" y="6419850"/>
+            <a:ext cx="2095500" cy="228600"/>
           </a:xfrm>
           <a:prstGeom xmlns:a="http://schemas.openxmlformats.org/drawingml/2006/main" prst="rect">
             <a:avLst/>
@@ -4838,707 +5304,19 @@
           <a:lstStyle xmlns:a="http://schemas.openxmlformats.org/drawingml/2006/main"/>
           <a:p xmlns:a="http://schemas.openxmlformats.org/drawingml/2006/main">
             <a:pPr algn="l">
-              <a:defRPr sz="1275" b="0">
-                <a:solidFill>
-                  <a:srgbClr val="516173"/>
+              <a:defRPr sz="900" b="1">
+                <a:solidFill>
+                  <a:srgbClr val="8EA0B4"/>
                 </a:solidFill>
               </a:defRPr>
             </a:pPr>
             <a:r>
-              <a:rPr sz="1275" b="0">
-                <a:solidFill>
-                  <a:srgbClr val="516173"/>
+              <a:rPr sz="900" b="1">
+                <a:solidFill>
+                  <a:srgbClr val="8EA0B4"/>
                 </a:solidFill>
               </a:rPr>
-              <a:t>What supports production?</a:t>
-            </a:r>
-          </a:p>
-        </p:txBody>
-      </p:sp>
-      <p:sp>
-        <p:nvSpPr>
-          <p:cNvPr id="14" name="">
-            <a:extLst xmlns:a="http://schemas.openxmlformats.org/drawingml/2006/main">
-              <a:ext uri="{FF2B5EF4-FFF2-40B4-BE49-F238E27FC236}">
-                <a16:creationId xmlns:a16="http://schemas.microsoft.com/office/drawing/2014/main" id="{B89FEF65-8F0F-4979-B67E-6098D3515DE7}"/>
-              </a:ext>
-            </a:extLst>
-          </p:cNvPr>
-          <p:cNvSpPr>
-            <a:spLocks xmlns:a="http://schemas.openxmlformats.org/drawingml/2006/main" noGrp="1"/>
-          </p:cNvSpPr>
-          <p:nvPr/>
-        </p:nvSpPr>
-        <p:spPr>
-          <a:xfrm xmlns:a="http://schemas.openxmlformats.org/drawingml/2006/main">
-            <a:off x="7858125" y="2857500"/>
-            <a:ext cx="2857500" cy="952500"/>
-          </a:xfrm>
-          <a:prstGeom xmlns:a="http://schemas.openxmlformats.org/drawingml/2006/main" prst="roundRect">
-            <a:avLst>
-              <a:gd name="adj" fmla="val 16000"/>
-            </a:avLst>
-          </a:prstGeom>
-          <a:solidFill xmlns:a="http://schemas.openxmlformats.org/drawingml/2006/main">
-            <a:srgbClr val="FFFFFF"/>
-          </a:solidFill>
-          <a:ln xmlns:a="http://schemas.openxmlformats.org/drawingml/2006/main" w="9525">
-            <a:solidFill>
-              <a:srgbClr val="DBE8F4"/>
-            </a:solidFill>
-            <a:prstDash val="solid"/>
-          </a:ln>
-        </p:spPr>
-        <p:style>
-          <a:lnRef xmlns:a="http://schemas.openxmlformats.org/drawingml/2006/main" idx="0"/>
-          <a:fillRef xmlns:a="http://schemas.openxmlformats.org/drawingml/2006/main" idx="0"/>
-          <a:effectRef xmlns:a="http://schemas.openxmlformats.org/drawingml/2006/main" idx="4"/>
-          <a:fontRef xmlns:a="http://schemas.openxmlformats.org/drawingml/2006/main" idx="major"/>
-        </p:style>
-      </p:sp>
-      <p:sp>
-        <p:nvSpPr>
-          <p:cNvPr id="15" name="">
-            <a:extLst xmlns:a="http://schemas.openxmlformats.org/drawingml/2006/main">
-              <a:ext uri="{FF2B5EF4-FFF2-40B4-BE49-F238E27FC236}">
-                <a16:creationId xmlns:a16="http://schemas.microsoft.com/office/drawing/2014/main" id="{503A064F-A1D0-40CB-8C32-5C55EF025882}"/>
-              </a:ext>
-            </a:extLst>
-          </p:cNvPr>
-          <p:cNvSpPr>
-            <a:spLocks xmlns:a="http://schemas.openxmlformats.org/drawingml/2006/main" noGrp="1"/>
-          </p:cNvSpPr>
-          <p:nvPr/>
-        </p:nvSpPr>
-        <p:spPr>
-          <a:xfrm xmlns:a="http://schemas.openxmlformats.org/drawingml/2006/main">
-            <a:off x="8105775" y="3143250"/>
-            <a:ext cx="171450" cy="171450"/>
-          </a:xfrm>
-          <a:prstGeom xmlns:a="http://schemas.openxmlformats.org/drawingml/2006/main" prst="ellipse">
-            <a:avLst/>
-          </a:prstGeom>
-          <a:solidFill xmlns:a="http://schemas.openxmlformats.org/drawingml/2006/main">
-            <a:srgbClr val="10B981"/>
-          </a:solidFill>
-          <a:ln xmlns:a="http://schemas.openxmlformats.org/drawingml/2006/main" w="0">
-            <a:noFill/>
-            <a:prstDash val="solid"/>
-          </a:ln>
-        </p:spPr>
-      </p:sp>
-      <p:sp>
-        <p:nvSpPr>
-          <p:cNvPr id="16" name="">
-            <a:extLst xmlns:a="http://schemas.openxmlformats.org/drawingml/2006/main">
-              <a:ext uri="{FF2B5EF4-FFF2-40B4-BE49-F238E27FC236}">
-                <a16:creationId xmlns:a16="http://schemas.microsoft.com/office/drawing/2014/main" id="{CC66B1C4-BB0A-4FD5-B256-E982894476D3}"/>
-              </a:ext>
-            </a:extLst>
-          </p:cNvPr>
-          <p:cNvSpPr>
-            <a:spLocks xmlns:a="http://schemas.openxmlformats.org/drawingml/2006/main" noGrp="1"/>
-          </p:cNvSpPr>
-          <p:nvPr/>
-        </p:nvSpPr>
-        <p:spPr>
-          <a:xfrm xmlns:a="http://schemas.openxmlformats.org/drawingml/2006/main">
-            <a:off x="8448675" y="3067050"/>
-            <a:ext cx="1809750" cy="266700"/>
-          </a:xfrm>
-          <a:prstGeom xmlns:a="http://schemas.openxmlformats.org/drawingml/2006/main" prst="rect">
-            <a:avLst/>
-          </a:prstGeom>
-          <a:noFill xmlns:a="http://schemas.openxmlformats.org/drawingml/2006/main"/>
-          <a:ln xmlns:a="http://schemas.openxmlformats.org/drawingml/2006/main" w="0">
-            <a:noFill/>
-            <a:prstDash val="solid"/>
-          </a:ln>
-        </p:spPr>
-        <p:txBody>
-          <a:bodyPr xmlns:a="http://schemas.openxmlformats.org/drawingml/2006/main"/>
-          <a:lstStyle xmlns:a="http://schemas.openxmlformats.org/drawingml/2006/main"/>
-          <a:p xmlns:a="http://schemas.openxmlformats.org/drawingml/2006/main">
-            <a:pPr algn="l">
-              <a:defRPr sz="1800" b="1">
-                <a:solidFill>
-                  <a:srgbClr val="111827"/>
-                </a:solidFill>
-              </a:defRPr>
-            </a:pPr>
-            <a:r>
-              <a:rPr sz="1800" b="1">
-                <a:solidFill>
-                  <a:srgbClr val="111827"/>
-                </a:solidFill>
-              </a:rPr>
-              <a:t>Production</a:t>
-            </a:r>
-          </a:p>
-        </p:txBody>
-      </p:sp>
-      <p:sp>
-        <p:nvSpPr>
-          <p:cNvPr id="17" name="">
-            <a:extLst xmlns:a="http://schemas.openxmlformats.org/drawingml/2006/main">
-              <a:ext uri="{FF2B5EF4-FFF2-40B4-BE49-F238E27FC236}">
-                <a16:creationId xmlns:a16="http://schemas.microsoft.com/office/drawing/2014/main" id="{16F966C1-F047-428C-8634-3D4B09466B32}"/>
-              </a:ext>
-            </a:extLst>
-          </p:cNvPr>
-          <p:cNvSpPr>
-            <a:spLocks xmlns:a="http://schemas.openxmlformats.org/drawingml/2006/main" noGrp="1"/>
-          </p:cNvSpPr>
-          <p:nvPr/>
-        </p:nvSpPr>
-        <p:spPr>
-          <a:xfrm xmlns:a="http://schemas.openxmlformats.org/drawingml/2006/main">
-            <a:off x="8448675" y="3390900"/>
-            <a:ext cx="1952625" cy="247650"/>
-          </a:xfrm>
-          <a:prstGeom xmlns:a="http://schemas.openxmlformats.org/drawingml/2006/main" prst="rect">
-            <a:avLst/>
-          </a:prstGeom>
-          <a:noFill xmlns:a="http://schemas.openxmlformats.org/drawingml/2006/main"/>
-          <a:ln xmlns:a="http://schemas.openxmlformats.org/drawingml/2006/main" w="0">
-            <a:noFill/>
-            <a:prstDash val="solid"/>
-          </a:ln>
-        </p:spPr>
-        <p:txBody>
-          <a:bodyPr xmlns:a="http://schemas.openxmlformats.org/drawingml/2006/main"/>
-          <a:lstStyle xmlns:a="http://schemas.openxmlformats.org/drawingml/2006/main"/>
-          <a:p xmlns:a="http://schemas.openxmlformats.org/drawingml/2006/main">
-            <a:pPr algn="l">
-              <a:defRPr sz="1275" b="0">
-                <a:solidFill>
-                  <a:srgbClr val="516173"/>
-                </a:solidFill>
-              </a:defRPr>
-            </a:pPr>
-            <a:r>
-              <a:rPr sz="1275" b="0">
-                <a:solidFill>
-                  <a:srgbClr val="516173"/>
-                </a:solidFill>
-              </a:rPr>
-              <a:t>What was made?</a:t>
-            </a:r>
-          </a:p>
-        </p:txBody>
-      </p:sp>
-      <p:sp>
-        <p:nvSpPr>
-          <p:cNvPr id="18" name="">
-            <a:extLst xmlns:a="http://schemas.openxmlformats.org/drawingml/2006/main">
-              <a:ext uri="{FF2B5EF4-FFF2-40B4-BE49-F238E27FC236}">
-                <a16:creationId xmlns:a16="http://schemas.microsoft.com/office/drawing/2014/main" id="{B9B619DA-9331-4F85-AA8D-D166DA19C35F}"/>
-              </a:ext>
-            </a:extLst>
-          </p:cNvPr>
-          <p:cNvSpPr>
-            <a:spLocks xmlns:a="http://schemas.openxmlformats.org/drawingml/2006/main" noGrp="1"/>
-          </p:cNvSpPr>
-          <p:nvPr/>
-        </p:nvSpPr>
-        <p:spPr>
-          <a:xfrm xmlns:a="http://schemas.openxmlformats.org/drawingml/2006/main">
-            <a:off x="1000125" y="4114800"/>
-            <a:ext cx="2857500" cy="952500"/>
-          </a:xfrm>
-          <a:prstGeom xmlns:a="http://schemas.openxmlformats.org/drawingml/2006/main" prst="roundRect">
-            <a:avLst>
-              <a:gd name="adj" fmla="val 16000"/>
-            </a:avLst>
-          </a:prstGeom>
-          <a:solidFill xmlns:a="http://schemas.openxmlformats.org/drawingml/2006/main">
-            <a:srgbClr val="FBFDFF"/>
-          </a:solidFill>
-          <a:ln xmlns:a="http://schemas.openxmlformats.org/drawingml/2006/main" w="9525">
-            <a:solidFill>
-              <a:srgbClr val="DBE8F4"/>
-            </a:solidFill>
-            <a:prstDash val="solid"/>
-          </a:ln>
-        </p:spPr>
-        <p:style>
-          <a:lnRef xmlns:a="http://schemas.openxmlformats.org/drawingml/2006/main" idx="0"/>
-          <a:fillRef xmlns:a="http://schemas.openxmlformats.org/drawingml/2006/main" idx="0"/>
-          <a:effectRef xmlns:a="http://schemas.openxmlformats.org/drawingml/2006/main" idx="4"/>
-          <a:fontRef xmlns:a="http://schemas.openxmlformats.org/drawingml/2006/main" idx="major"/>
-        </p:style>
-      </p:sp>
-      <p:sp>
-        <p:nvSpPr>
-          <p:cNvPr id="19" name="">
-            <a:extLst xmlns:a="http://schemas.openxmlformats.org/drawingml/2006/main">
-              <a:ext uri="{FF2B5EF4-FFF2-40B4-BE49-F238E27FC236}">
-                <a16:creationId xmlns:a16="http://schemas.microsoft.com/office/drawing/2014/main" id="{FE40B800-43B1-4D84-A303-3E308F7F583E}"/>
-              </a:ext>
-            </a:extLst>
-          </p:cNvPr>
-          <p:cNvSpPr>
-            <a:spLocks xmlns:a="http://schemas.openxmlformats.org/drawingml/2006/main" noGrp="1"/>
-          </p:cNvSpPr>
-          <p:nvPr/>
-        </p:nvSpPr>
-        <p:spPr>
-          <a:xfrm xmlns:a="http://schemas.openxmlformats.org/drawingml/2006/main">
-            <a:off x="1247775" y="4400550"/>
-            <a:ext cx="171450" cy="171450"/>
-          </a:xfrm>
-          <a:prstGeom xmlns:a="http://schemas.openxmlformats.org/drawingml/2006/main" prst="ellipse">
-            <a:avLst/>
-          </a:prstGeom>
-          <a:solidFill xmlns:a="http://schemas.openxmlformats.org/drawingml/2006/main">
-            <a:srgbClr val="E2BE2D"/>
-          </a:solidFill>
-          <a:ln xmlns:a="http://schemas.openxmlformats.org/drawingml/2006/main" w="0">
-            <a:noFill/>
-            <a:prstDash val="solid"/>
-          </a:ln>
-        </p:spPr>
-      </p:sp>
-      <p:sp>
-        <p:nvSpPr>
-          <p:cNvPr id="20" name="">
-            <a:extLst xmlns:a="http://schemas.openxmlformats.org/drawingml/2006/main">
-              <a:ext uri="{FF2B5EF4-FFF2-40B4-BE49-F238E27FC236}">
-                <a16:creationId xmlns:a16="http://schemas.microsoft.com/office/drawing/2014/main" id="{317190BE-5410-4431-8EB0-0B4D9E3B167A}"/>
-              </a:ext>
-            </a:extLst>
-          </p:cNvPr>
-          <p:cNvSpPr>
-            <a:spLocks xmlns:a="http://schemas.openxmlformats.org/drawingml/2006/main" noGrp="1"/>
-          </p:cNvSpPr>
-          <p:nvPr/>
-        </p:nvSpPr>
-        <p:spPr>
-          <a:xfrm xmlns:a="http://schemas.openxmlformats.org/drawingml/2006/main">
-            <a:off x="1590675" y="4324350"/>
-            <a:ext cx="1809750" cy="266700"/>
-          </a:xfrm>
-          <a:prstGeom xmlns:a="http://schemas.openxmlformats.org/drawingml/2006/main" prst="rect">
-            <a:avLst/>
-          </a:prstGeom>
-          <a:noFill xmlns:a="http://schemas.openxmlformats.org/drawingml/2006/main"/>
-          <a:ln xmlns:a="http://schemas.openxmlformats.org/drawingml/2006/main" w="0">
-            <a:noFill/>
-            <a:prstDash val="solid"/>
-          </a:ln>
-        </p:spPr>
-        <p:txBody>
-          <a:bodyPr xmlns:a="http://schemas.openxmlformats.org/drawingml/2006/main"/>
-          <a:lstStyle xmlns:a="http://schemas.openxmlformats.org/drawingml/2006/main"/>
-          <a:p xmlns:a="http://schemas.openxmlformats.org/drawingml/2006/main">
-            <a:pPr algn="l">
-              <a:defRPr sz="1800" b="1">
-                <a:solidFill>
-                  <a:srgbClr val="111827"/>
-                </a:solidFill>
-              </a:defRPr>
-            </a:pPr>
-            <a:r>
-              <a:rPr sz="1800" b="1">
-                <a:solidFill>
-                  <a:srgbClr val="111827"/>
-                </a:solidFill>
-              </a:rPr>
-              <a:t>Sales</a:t>
-            </a:r>
-          </a:p>
-        </p:txBody>
-      </p:sp>
-      <p:sp>
-        <p:nvSpPr>
-          <p:cNvPr id="21" name="">
-            <a:extLst xmlns:a="http://schemas.openxmlformats.org/drawingml/2006/main">
-              <a:ext uri="{FF2B5EF4-FFF2-40B4-BE49-F238E27FC236}">
-                <a16:creationId xmlns:a16="http://schemas.microsoft.com/office/drawing/2014/main" id="{06F6F745-FFDA-400E-B797-CFDF3E2075AA}"/>
-              </a:ext>
-            </a:extLst>
-          </p:cNvPr>
-          <p:cNvSpPr>
-            <a:spLocks xmlns:a="http://schemas.openxmlformats.org/drawingml/2006/main" noGrp="1"/>
-          </p:cNvSpPr>
-          <p:nvPr/>
-        </p:nvSpPr>
-        <p:spPr>
-          <a:xfrm xmlns:a="http://schemas.openxmlformats.org/drawingml/2006/main">
-            <a:off x="1590675" y="4648200"/>
-            <a:ext cx="1952625" cy="247650"/>
-          </a:xfrm>
-          <a:prstGeom xmlns:a="http://schemas.openxmlformats.org/drawingml/2006/main" prst="rect">
-            <a:avLst/>
-          </a:prstGeom>
-          <a:noFill xmlns:a="http://schemas.openxmlformats.org/drawingml/2006/main"/>
-          <a:ln xmlns:a="http://schemas.openxmlformats.org/drawingml/2006/main" w="0">
-            <a:noFill/>
-            <a:prstDash val="solid"/>
-          </a:ln>
-        </p:spPr>
-        <p:txBody>
-          <a:bodyPr xmlns:a="http://schemas.openxmlformats.org/drawingml/2006/main"/>
-          <a:lstStyle xmlns:a="http://schemas.openxmlformats.org/drawingml/2006/main"/>
-          <a:p xmlns:a="http://schemas.openxmlformats.org/drawingml/2006/main">
-            <a:pPr algn="l">
-              <a:defRPr sz="1275" b="0">
-                <a:solidFill>
-                  <a:srgbClr val="516173"/>
-                </a:solidFill>
-              </a:defRPr>
-            </a:pPr>
-            <a:r>
-              <a:rPr sz="1275" b="0">
-                <a:solidFill>
-                  <a:srgbClr val="516173"/>
-                </a:solidFill>
-              </a:rPr>
-              <a:t>What was sold?</a:t>
-            </a:r>
-          </a:p>
-        </p:txBody>
-      </p:sp>
-      <p:sp>
-        <p:nvSpPr>
-          <p:cNvPr id="22" name="">
-            <a:extLst xmlns:a="http://schemas.openxmlformats.org/drawingml/2006/main">
-              <a:ext uri="{FF2B5EF4-FFF2-40B4-BE49-F238E27FC236}">
-                <a16:creationId xmlns:a16="http://schemas.microsoft.com/office/drawing/2014/main" id="{850FA3BC-CDDE-4884-8B45-69FC7A734E85}"/>
-              </a:ext>
-            </a:extLst>
-          </p:cNvPr>
-          <p:cNvSpPr>
-            <a:spLocks xmlns:a="http://schemas.openxmlformats.org/drawingml/2006/main" noGrp="1"/>
-          </p:cNvSpPr>
-          <p:nvPr/>
-        </p:nvSpPr>
-        <p:spPr>
-          <a:xfrm xmlns:a="http://schemas.openxmlformats.org/drawingml/2006/main">
-            <a:off x="4429125" y="4114800"/>
-            <a:ext cx="2857500" cy="952500"/>
-          </a:xfrm>
-          <a:prstGeom xmlns:a="http://schemas.openxmlformats.org/drawingml/2006/main" prst="roundRect">
-            <a:avLst>
-              <a:gd name="adj" fmla="val 16000"/>
-            </a:avLst>
-          </a:prstGeom>
-          <a:solidFill xmlns:a="http://schemas.openxmlformats.org/drawingml/2006/main">
-            <a:srgbClr val="FFFFFF"/>
-          </a:solidFill>
-          <a:ln xmlns:a="http://schemas.openxmlformats.org/drawingml/2006/main" w="9525">
-            <a:solidFill>
-              <a:srgbClr val="DBE8F4"/>
-            </a:solidFill>
-            <a:prstDash val="solid"/>
-          </a:ln>
-        </p:spPr>
-        <p:style>
-          <a:lnRef xmlns:a="http://schemas.openxmlformats.org/drawingml/2006/main" idx="0"/>
-          <a:fillRef xmlns:a="http://schemas.openxmlformats.org/drawingml/2006/main" idx="0"/>
-          <a:effectRef xmlns:a="http://schemas.openxmlformats.org/drawingml/2006/main" idx="4"/>
-          <a:fontRef xmlns:a="http://schemas.openxmlformats.org/drawingml/2006/main" idx="major"/>
-        </p:style>
-      </p:sp>
-      <p:sp>
-        <p:nvSpPr>
-          <p:cNvPr id="23" name="">
-            <a:extLst xmlns:a="http://schemas.openxmlformats.org/drawingml/2006/main">
-              <a:ext uri="{FF2B5EF4-FFF2-40B4-BE49-F238E27FC236}">
-                <a16:creationId xmlns:a16="http://schemas.microsoft.com/office/drawing/2014/main" id="{5C62C355-9941-4952-BBF2-EB4B796EFB20}"/>
-              </a:ext>
-            </a:extLst>
-          </p:cNvPr>
-          <p:cNvSpPr>
-            <a:spLocks xmlns:a="http://schemas.openxmlformats.org/drawingml/2006/main" noGrp="1"/>
-          </p:cNvSpPr>
-          <p:nvPr/>
-        </p:nvSpPr>
-        <p:spPr>
-          <a:xfrm xmlns:a="http://schemas.openxmlformats.org/drawingml/2006/main">
-            <a:off x="4676775" y="4400550"/>
-            <a:ext cx="171450" cy="171450"/>
-          </a:xfrm>
-          <a:prstGeom xmlns:a="http://schemas.openxmlformats.org/drawingml/2006/main" prst="ellipse">
-            <a:avLst/>
-          </a:prstGeom>
-          <a:solidFill xmlns:a="http://schemas.openxmlformats.org/drawingml/2006/main">
-            <a:srgbClr val="F97316"/>
-          </a:solidFill>
-          <a:ln xmlns:a="http://schemas.openxmlformats.org/drawingml/2006/main" w="0">
-            <a:noFill/>
-            <a:prstDash val="solid"/>
-          </a:ln>
-        </p:spPr>
-      </p:sp>
-      <p:sp>
-        <p:nvSpPr>
-          <p:cNvPr id="24" name="">
-            <a:extLst xmlns:a="http://schemas.openxmlformats.org/drawingml/2006/main">
-              <a:ext uri="{FF2B5EF4-FFF2-40B4-BE49-F238E27FC236}">
-                <a16:creationId xmlns:a16="http://schemas.microsoft.com/office/drawing/2014/main" id="{511662A0-83EF-4F58-9D46-141D68A192CB}"/>
-              </a:ext>
-            </a:extLst>
-          </p:cNvPr>
-          <p:cNvSpPr>
-            <a:spLocks xmlns:a="http://schemas.openxmlformats.org/drawingml/2006/main" noGrp="1"/>
-          </p:cNvSpPr>
-          <p:nvPr/>
-        </p:nvSpPr>
-        <p:spPr>
-          <a:xfrm xmlns:a="http://schemas.openxmlformats.org/drawingml/2006/main">
-            <a:off x="5019675" y="4324350"/>
-            <a:ext cx="1809750" cy="266700"/>
-          </a:xfrm>
-          <a:prstGeom xmlns:a="http://schemas.openxmlformats.org/drawingml/2006/main" prst="rect">
-            <a:avLst/>
-          </a:prstGeom>
-          <a:noFill xmlns:a="http://schemas.openxmlformats.org/drawingml/2006/main"/>
-          <a:ln xmlns:a="http://schemas.openxmlformats.org/drawingml/2006/main" w="0">
-            <a:noFill/>
-            <a:prstDash val="solid"/>
-          </a:ln>
-        </p:spPr>
-        <p:txBody>
-          <a:bodyPr xmlns:a="http://schemas.openxmlformats.org/drawingml/2006/main"/>
-          <a:lstStyle xmlns:a="http://schemas.openxmlformats.org/drawingml/2006/main"/>
-          <a:p xmlns:a="http://schemas.openxmlformats.org/drawingml/2006/main">
-            <a:pPr algn="l">
-              <a:defRPr sz="1800" b="1">
-                <a:solidFill>
-                  <a:srgbClr val="111827"/>
-                </a:solidFill>
-              </a:defRPr>
-            </a:pPr>
-            <a:r>
-              <a:rPr sz="1800" b="1">
-                <a:solidFill>
-                  <a:srgbClr val="111827"/>
-                </a:solidFill>
-              </a:rPr>
-              <a:t>Freight</a:t>
-            </a:r>
-          </a:p>
-        </p:txBody>
-      </p:sp>
-      <p:sp>
-        <p:nvSpPr>
-          <p:cNvPr id="25" name="">
-            <a:extLst xmlns:a="http://schemas.openxmlformats.org/drawingml/2006/main">
-              <a:ext uri="{FF2B5EF4-FFF2-40B4-BE49-F238E27FC236}">
-                <a16:creationId xmlns:a16="http://schemas.microsoft.com/office/drawing/2014/main" id="{417F644B-4C00-4119-B5E7-386EA564CCD7}"/>
-              </a:ext>
-            </a:extLst>
-          </p:cNvPr>
-          <p:cNvSpPr>
-            <a:spLocks xmlns:a="http://schemas.openxmlformats.org/drawingml/2006/main" noGrp="1"/>
-          </p:cNvSpPr>
-          <p:nvPr/>
-        </p:nvSpPr>
-        <p:spPr>
-          <a:xfrm xmlns:a="http://schemas.openxmlformats.org/drawingml/2006/main">
-            <a:off x="5019675" y="4648200"/>
-            <a:ext cx="1952625" cy="247650"/>
-          </a:xfrm>
-          <a:prstGeom xmlns:a="http://schemas.openxmlformats.org/drawingml/2006/main" prst="rect">
-            <a:avLst/>
-          </a:prstGeom>
-          <a:noFill xmlns:a="http://schemas.openxmlformats.org/drawingml/2006/main"/>
-          <a:ln xmlns:a="http://schemas.openxmlformats.org/drawingml/2006/main" w="0">
-            <a:noFill/>
-            <a:prstDash val="solid"/>
-          </a:ln>
-        </p:spPr>
-        <p:txBody>
-          <a:bodyPr xmlns:a="http://schemas.openxmlformats.org/drawingml/2006/main"/>
-          <a:lstStyle xmlns:a="http://schemas.openxmlformats.org/drawingml/2006/main"/>
-          <a:p xmlns:a="http://schemas.openxmlformats.org/drawingml/2006/main">
-            <a:pPr algn="l">
-              <a:defRPr sz="1275" b="0">
-                <a:solidFill>
-                  <a:srgbClr val="516173"/>
-                </a:solidFill>
-              </a:defRPr>
-            </a:pPr>
-            <a:r>
-              <a:rPr sz="1275" b="0">
-                <a:solidFill>
-                  <a:srgbClr val="516173"/>
-                </a:solidFill>
-              </a:rPr>
-              <a:t>What did delivery cost?</a:t>
-            </a:r>
-          </a:p>
-        </p:txBody>
-      </p:sp>
-      <p:sp>
-        <p:nvSpPr>
-          <p:cNvPr id="26" name="">
-            <a:extLst xmlns:a="http://schemas.openxmlformats.org/drawingml/2006/main">
-              <a:ext uri="{FF2B5EF4-FFF2-40B4-BE49-F238E27FC236}">
-                <a16:creationId xmlns:a16="http://schemas.microsoft.com/office/drawing/2014/main" id="{E53BE66F-DE9D-4C06-AC7C-EB28C4768B75}"/>
-              </a:ext>
-            </a:extLst>
-          </p:cNvPr>
-          <p:cNvSpPr>
-            <a:spLocks xmlns:a="http://schemas.openxmlformats.org/drawingml/2006/main" noGrp="1"/>
-          </p:cNvSpPr>
-          <p:nvPr/>
-        </p:nvSpPr>
-        <p:spPr>
-          <a:xfrm xmlns:a="http://schemas.openxmlformats.org/drawingml/2006/main">
-            <a:off x="7858125" y="4114800"/>
-            <a:ext cx="2857500" cy="952500"/>
-          </a:xfrm>
-          <a:prstGeom xmlns:a="http://schemas.openxmlformats.org/drawingml/2006/main" prst="roundRect">
-            <a:avLst>
-              <a:gd name="adj" fmla="val 16000"/>
-            </a:avLst>
-          </a:prstGeom>
-          <a:solidFill xmlns:a="http://schemas.openxmlformats.org/drawingml/2006/main">
-            <a:srgbClr val="FBFDFF"/>
-          </a:solidFill>
-          <a:ln xmlns:a="http://schemas.openxmlformats.org/drawingml/2006/main" w="9525">
-            <a:solidFill>
-              <a:srgbClr val="DBE8F4"/>
-            </a:solidFill>
-            <a:prstDash val="solid"/>
-          </a:ln>
-        </p:spPr>
-        <p:style>
-          <a:lnRef xmlns:a="http://schemas.openxmlformats.org/drawingml/2006/main" idx="0"/>
-          <a:fillRef xmlns:a="http://schemas.openxmlformats.org/drawingml/2006/main" idx="0"/>
-          <a:effectRef xmlns:a="http://schemas.openxmlformats.org/drawingml/2006/main" idx="4"/>
-          <a:fontRef xmlns:a="http://schemas.openxmlformats.org/drawingml/2006/main" idx="major"/>
-        </p:style>
-      </p:sp>
-      <p:sp>
-        <p:nvSpPr>
-          <p:cNvPr id="27" name="">
-            <a:extLst xmlns:a="http://schemas.openxmlformats.org/drawingml/2006/main">
-              <a:ext uri="{FF2B5EF4-FFF2-40B4-BE49-F238E27FC236}">
-                <a16:creationId xmlns:a16="http://schemas.microsoft.com/office/drawing/2014/main" id="{2E211736-C5E8-45F5-96D4-704F96F41292}"/>
-              </a:ext>
-            </a:extLst>
-          </p:cNvPr>
-          <p:cNvSpPr>
-            <a:spLocks xmlns:a="http://schemas.openxmlformats.org/drawingml/2006/main" noGrp="1"/>
-          </p:cNvSpPr>
-          <p:nvPr/>
-        </p:nvSpPr>
-        <p:spPr>
-          <a:xfrm xmlns:a="http://schemas.openxmlformats.org/drawingml/2006/main">
-            <a:off x="8105775" y="4400550"/>
-            <a:ext cx="171450" cy="171450"/>
-          </a:xfrm>
-          <a:prstGeom xmlns:a="http://schemas.openxmlformats.org/drawingml/2006/main" prst="ellipse">
-            <a:avLst/>
-          </a:prstGeom>
-          <a:solidFill xmlns:a="http://schemas.openxmlformats.org/drawingml/2006/main">
-            <a:srgbClr val="7C6CF2"/>
-          </a:solidFill>
-          <a:ln xmlns:a="http://schemas.openxmlformats.org/drawingml/2006/main" w="0">
-            <a:noFill/>
-            <a:prstDash val="solid"/>
-          </a:ln>
-        </p:spPr>
-      </p:sp>
-      <p:sp>
-        <p:nvSpPr>
-          <p:cNvPr id="28" name="">
-            <a:extLst xmlns:a="http://schemas.openxmlformats.org/drawingml/2006/main">
-              <a:ext uri="{FF2B5EF4-FFF2-40B4-BE49-F238E27FC236}">
-                <a16:creationId xmlns:a16="http://schemas.microsoft.com/office/drawing/2014/main" id="{BAA60DE9-A128-4347-BF09-1ADCE526FF11}"/>
-              </a:ext>
-            </a:extLst>
-          </p:cNvPr>
-          <p:cNvSpPr>
-            <a:spLocks xmlns:a="http://schemas.openxmlformats.org/drawingml/2006/main" noGrp="1"/>
-          </p:cNvSpPr>
-          <p:nvPr/>
-        </p:nvSpPr>
-        <p:spPr>
-          <a:xfrm xmlns:a="http://schemas.openxmlformats.org/drawingml/2006/main">
-            <a:off x="8448675" y="4324350"/>
-            <a:ext cx="1809750" cy="266700"/>
-          </a:xfrm>
-          <a:prstGeom xmlns:a="http://schemas.openxmlformats.org/drawingml/2006/main" prst="rect">
-            <a:avLst/>
-          </a:prstGeom>
-          <a:noFill xmlns:a="http://schemas.openxmlformats.org/drawingml/2006/main"/>
-          <a:ln xmlns:a="http://schemas.openxmlformats.org/drawingml/2006/main" w="0">
-            <a:noFill/>
-            <a:prstDash val="solid"/>
-          </a:ln>
-        </p:spPr>
-        <p:txBody>
-          <a:bodyPr xmlns:a="http://schemas.openxmlformats.org/drawingml/2006/main"/>
-          <a:lstStyle xmlns:a="http://schemas.openxmlformats.org/drawingml/2006/main"/>
-          <a:p xmlns:a="http://schemas.openxmlformats.org/drawingml/2006/main">
-            <a:pPr algn="l">
-              <a:defRPr sz="1800" b="1">
-                <a:solidFill>
-                  <a:srgbClr val="111827"/>
-                </a:solidFill>
-              </a:defRPr>
-            </a:pPr>
-            <a:r>
-              <a:rPr sz="1800" b="1">
-                <a:solidFill>
-                  <a:srgbClr val="111827"/>
-                </a:solidFill>
-              </a:rPr>
-              <a:t>Orders</a:t>
-            </a:r>
-          </a:p>
-        </p:txBody>
-      </p:sp>
-      <p:sp>
-        <p:nvSpPr>
-          <p:cNvPr id="29" name="">
-            <a:extLst xmlns:a="http://schemas.openxmlformats.org/drawingml/2006/main">
-              <a:ext uri="{FF2B5EF4-FFF2-40B4-BE49-F238E27FC236}">
-                <a16:creationId xmlns:a16="http://schemas.microsoft.com/office/drawing/2014/main" id="{ED4FD4CA-8943-403E-A022-28EB2430756A}"/>
-              </a:ext>
-            </a:extLst>
-          </p:cNvPr>
-          <p:cNvSpPr>
-            <a:spLocks xmlns:a="http://schemas.openxmlformats.org/drawingml/2006/main" noGrp="1"/>
-          </p:cNvSpPr>
-          <p:nvPr/>
-        </p:nvSpPr>
-        <p:spPr>
-          <a:xfrm xmlns:a="http://schemas.openxmlformats.org/drawingml/2006/main">
-            <a:off x="8448675" y="4648200"/>
-            <a:ext cx="1952625" cy="247650"/>
-          </a:xfrm>
-          <a:prstGeom xmlns:a="http://schemas.openxmlformats.org/drawingml/2006/main" prst="rect">
-            <a:avLst/>
-          </a:prstGeom>
-          <a:noFill xmlns:a="http://schemas.openxmlformats.org/drawingml/2006/main"/>
-          <a:ln xmlns:a="http://schemas.openxmlformats.org/drawingml/2006/main" w="0">
-            <a:noFill/>
-            <a:prstDash val="solid"/>
-          </a:ln>
-        </p:spPr>
-        <p:txBody>
-          <a:bodyPr xmlns:a="http://schemas.openxmlformats.org/drawingml/2006/main"/>
-          <a:lstStyle xmlns:a="http://schemas.openxmlformats.org/drawingml/2006/main"/>
-          <a:p xmlns:a="http://schemas.openxmlformats.org/drawingml/2006/main">
-            <a:pPr algn="l">
-              <a:defRPr sz="1275" b="0">
-                <a:solidFill>
-                  <a:srgbClr val="516173"/>
-                </a:solidFill>
-              </a:defRPr>
-            </a:pPr>
-            <a:r>
-              <a:rPr sz="1275" b="0">
-                <a:solidFill>
-                  <a:srgbClr val="516173"/>
-                </a:solidFill>
-              </a:rPr>
-              <a:t>What is pending?</a:t>
+              <a:t>AG Health ERP · 5/9</a:t>
             </a:r>
           </a:p>
         </p:txBody>
@@ -5546,7 +5324,7 @@
     </p:spTree>
     <p:extLst>
       <p:ext uri="{BB962C8B-B14F-4D97-AF65-F5344CB8AC3E}">
-        <p14:creationId xmlns:p14="http://schemas.microsoft.com/office/powerpoint/2010/main" val="1883776024"/>
+        <p14:creationId xmlns:p14="http://schemas.microsoft.com/office/powerpoint/2010/main" val="110089348"/>
       </p:ext>
     </p:extLst>
   </p:cSld>
@@ -5559,7 +5337,7 @@
     <p:bg>
       <p:bgPr>
         <a:solidFill xmlns:a="http://schemas.openxmlformats.org/drawingml/2006/main">
-          <a:srgbClr val="F7FBFF"/>
+          <a:srgbClr val="F6FBFF"/>
         </a:solidFill>
       </p:bgPr>
     </p:bg>
@@ -5574,22 +5352,22 @@
       </p:grpSpPr>
       <p:sp>
         <p:nvSpPr>
-          <p:cNvPr id="12" name="">
-            <a:extLst xmlns:a="http://schemas.openxmlformats.org/drawingml/2006/main">
-              <a:ext uri="{FF2B5EF4-FFF2-40B4-BE49-F238E27FC236}">
-                <a16:creationId xmlns:a16="http://schemas.microsoft.com/office/drawing/2014/main" id="{BB1197EF-325B-4A69-8AB3-41328C9CDC8F}"/>
-              </a:ext>
-            </a:extLst>
-          </p:cNvPr>
-          <p:cNvSpPr>
-            <a:spLocks xmlns:a="http://schemas.openxmlformats.org/drawingml/2006/main" noGrp="1"/>
-          </p:cNvSpPr>
-          <p:nvPr/>
-        </p:nvSpPr>
-        <p:spPr>
-          <a:xfrm xmlns:a="http://schemas.openxmlformats.org/drawingml/2006/main">
-            <a:off x="10096500" y="0"/>
-            <a:ext cx="2000250" cy="2000250"/>
+          <p:cNvPr id="22" name="">
+            <a:extLst xmlns:a="http://schemas.openxmlformats.org/drawingml/2006/main">
+              <a:ext uri="{FF2B5EF4-FFF2-40B4-BE49-F238E27FC236}">
+                <a16:creationId xmlns:a16="http://schemas.microsoft.com/office/drawing/2014/main" id="{B5201D61-1DD4-4021-8492-BCE6AD75A4B1}"/>
+              </a:ext>
+            </a:extLst>
+          </p:cNvPr>
+          <p:cNvSpPr>
+            <a:spLocks xmlns:a="http://schemas.openxmlformats.org/drawingml/2006/main" noGrp="1"/>
+          </p:cNvSpPr>
+          <p:nvPr/>
+        </p:nvSpPr>
+        <p:spPr>
+          <a:xfrm xmlns:a="http://schemas.openxmlformats.org/drawingml/2006/main">
+            <a:off x="9886950" y="0"/>
+            <a:ext cx="2095500" cy="2095500"/>
           </a:xfrm>
           <a:prstGeom xmlns:a="http://schemas.openxmlformats.org/drawingml/2006/main" prst="ellipse">
             <a:avLst/>
@@ -5608,7 +5386,7 @@
           <p:cNvPr id="2" name="">
             <a:extLst xmlns:a="http://schemas.openxmlformats.org/drawingml/2006/main">
               <a:ext uri="{FF2B5EF4-FFF2-40B4-BE49-F238E27FC236}">
-                <a16:creationId xmlns:a16="http://schemas.microsoft.com/office/drawing/2014/main" id="{2CE628AE-85C8-42C9-BB14-00EBA64BF81A}"/>
+                <a16:creationId xmlns:a16="http://schemas.microsoft.com/office/drawing/2014/main" id="{45F67654-5D37-4ECF-BC2D-D2ABD66B5210}"/>
               </a:ext>
             </a:extLst>
           </p:cNvPr>
@@ -5620,7 +5398,7 @@
         <p:spPr>
           <a:xfrm xmlns:a="http://schemas.openxmlformats.org/drawingml/2006/main">
             <a:off x="0" y="5524500"/>
-            <a:ext cx="1333500" cy="1333500"/>
+            <a:ext cx="1295400" cy="1295400"/>
           </a:xfrm>
           <a:prstGeom xmlns:a="http://schemas.openxmlformats.org/drawingml/2006/main" prst="ellipse">
             <a:avLst/>
@@ -5639,19 +5417,48 @@
           <p:cNvPr id="3" name="">
             <a:extLst xmlns:a="http://schemas.openxmlformats.org/drawingml/2006/main">
               <a:ext uri="{FF2B5EF4-FFF2-40B4-BE49-F238E27FC236}">
-                <a16:creationId xmlns:a16="http://schemas.microsoft.com/office/drawing/2014/main" id="{CD5E78B1-CC00-4E9D-B951-904957BF7625}"/>
-              </a:ext>
-            </a:extLst>
-          </p:cNvPr>
-          <p:cNvSpPr>
-            <a:spLocks xmlns:a="http://schemas.openxmlformats.org/drawingml/2006/main" noGrp="1"/>
-          </p:cNvSpPr>
-          <p:nvPr/>
-        </p:nvSpPr>
-        <p:spPr>
-          <a:xfrm xmlns:a="http://schemas.openxmlformats.org/drawingml/2006/main">
-            <a:off x="723900" y="514350"/>
-            <a:ext cx="3429000" cy="266700"/>
+                <a16:creationId xmlns:a16="http://schemas.microsoft.com/office/drawing/2014/main" id="{F0AC2913-2548-45B7-A054-7F5733DDD5D9}"/>
+              </a:ext>
+            </a:extLst>
+          </p:cNvPr>
+          <p:cNvSpPr>
+            <a:spLocks xmlns:a="http://schemas.openxmlformats.org/drawingml/2006/main" noGrp="1"/>
+          </p:cNvSpPr>
+          <p:nvPr/>
+        </p:nvSpPr>
+        <p:spPr>
+          <a:xfrm xmlns:a="http://schemas.openxmlformats.org/drawingml/2006/main">
+            <a:off x="0" y="0"/>
+            <a:ext cx="12192000" cy="6858000"/>
+          </a:xfrm>
+          <a:prstGeom xmlns:a="http://schemas.openxmlformats.org/drawingml/2006/main" prst="rect">
+            <a:avLst/>
+          </a:prstGeom>
+          <a:noFill xmlns:a="http://schemas.openxmlformats.org/drawingml/2006/main"/>
+          <a:ln xmlns:a="http://schemas.openxmlformats.org/drawingml/2006/main" w="0">
+            <a:noFill/>
+            <a:prstDash val="solid"/>
+          </a:ln>
+        </p:spPr>
+      </p:sp>
+      <p:sp>
+        <p:nvSpPr>
+          <p:cNvPr id="4" name="">
+            <a:extLst xmlns:a="http://schemas.openxmlformats.org/drawingml/2006/main">
+              <a:ext uri="{FF2B5EF4-FFF2-40B4-BE49-F238E27FC236}">
+                <a16:creationId xmlns:a16="http://schemas.microsoft.com/office/drawing/2014/main" id="{6E93DA78-8416-4F07-8FF0-3FFB3EB844D7}"/>
+              </a:ext>
+            </a:extLst>
+          </p:cNvPr>
+          <p:cNvSpPr>
+            <a:spLocks xmlns:a="http://schemas.openxmlformats.org/drawingml/2006/main" noGrp="1"/>
+          </p:cNvSpPr>
+          <p:nvPr/>
+        </p:nvSpPr>
+        <p:spPr>
+          <a:xfrm xmlns:a="http://schemas.openxmlformats.org/drawingml/2006/main">
+            <a:off x="685800" y="495300"/>
+            <a:ext cx="3429000" cy="285750"/>
           </a:xfrm>
           <a:prstGeom xmlns:a="http://schemas.openxmlformats.org/drawingml/2006/main" prst="rect">
             <a:avLst/>
@@ -5679,29 +5486,29 @@
                   <a:srgbClr val="E2BE2D"/>
                 </a:solidFill>
               </a:rPr>
-              <a:t>DATA ASSISTANT</a:t>
-            </a:r>
-          </a:p>
-        </p:txBody>
-      </p:sp>
-      <p:sp>
-        <p:nvSpPr>
-          <p:cNvPr id="4" name="">
-            <a:extLst xmlns:a="http://schemas.openxmlformats.org/drawingml/2006/main">
-              <a:ext uri="{FF2B5EF4-FFF2-40B4-BE49-F238E27FC236}">
-                <a16:creationId xmlns:a16="http://schemas.microsoft.com/office/drawing/2014/main" id="{3F4D0968-F02E-4EC9-81F3-85252A13B2FB}"/>
-              </a:ext>
-            </a:extLst>
-          </p:cNvPr>
-          <p:cNvSpPr>
-            <a:spLocks xmlns:a="http://schemas.openxmlformats.org/drawingml/2006/main" noGrp="1"/>
-          </p:cNvSpPr>
-          <p:nvPr/>
-        </p:nvSpPr>
-        <p:spPr>
-          <a:xfrm xmlns:a="http://schemas.openxmlformats.org/drawingml/2006/main">
-            <a:off x="723900" y="914400"/>
-            <a:ext cx="8096250" cy="876300"/>
+              <a:t>PRODUCTION</a:t>
+            </a:r>
+          </a:p>
+        </p:txBody>
+      </p:sp>
+      <p:sp>
+        <p:nvSpPr>
+          <p:cNvPr id="5" name="">
+            <a:extLst xmlns:a="http://schemas.openxmlformats.org/drawingml/2006/main">
+              <a:ext uri="{FF2B5EF4-FFF2-40B4-BE49-F238E27FC236}">
+                <a16:creationId xmlns:a16="http://schemas.microsoft.com/office/drawing/2014/main" id="{1357797B-BD3D-466D-9706-04208E8755A5}"/>
+              </a:ext>
+            </a:extLst>
+          </p:cNvPr>
+          <p:cNvSpPr>
+            <a:spLocks xmlns:a="http://schemas.openxmlformats.org/drawingml/2006/main" noGrp="1"/>
+          </p:cNvSpPr>
+          <p:nvPr/>
+        </p:nvSpPr>
+        <p:spPr>
+          <a:xfrm xmlns:a="http://schemas.openxmlformats.org/drawingml/2006/main">
+            <a:off x="685800" y="895350"/>
+            <a:ext cx="8286750" cy="895350"/>
           </a:xfrm>
           <a:prstGeom xmlns:a="http://schemas.openxmlformats.org/drawingml/2006/main" prst="rect">
             <a:avLst/>
@@ -5717,41 +5524,41 @@
           <a:lstStyle xmlns:a="http://schemas.openxmlformats.org/drawingml/2006/main"/>
           <a:p xmlns:a="http://schemas.openxmlformats.org/drawingml/2006/main">
             <a:pPr algn="l">
-              <a:defRPr sz="3450" b="1">
+              <a:defRPr sz="3375" b="1">
                 <a:solidFill>
                   <a:srgbClr val="111827"/>
                 </a:solidFill>
               </a:defRPr>
             </a:pPr>
             <a:r>
-              <a:rPr sz="3450" b="1">
+              <a:rPr sz="3375" b="1">
                 <a:solidFill>
                   <a:srgbClr val="111827"/>
                 </a:solidFill>
               </a:rPr>
-              <a:t>Managers can ask the system directly</a:t>
-            </a:r>
-          </a:p>
-        </p:txBody>
-      </p:sp>
-      <p:sp>
-        <p:nvSpPr>
-          <p:cNvPr id="5" name="">
-            <a:extLst xmlns:a="http://schemas.openxmlformats.org/drawingml/2006/main">
-              <a:ext uri="{FF2B5EF4-FFF2-40B4-BE49-F238E27FC236}">
-                <a16:creationId xmlns:a16="http://schemas.microsoft.com/office/drawing/2014/main" id="{EE2AAAD6-30B2-47CA-9808-09030CA95E74}"/>
-              </a:ext>
-            </a:extLst>
-          </p:cNvPr>
-          <p:cNvSpPr>
-            <a:spLocks xmlns:a="http://schemas.openxmlformats.org/drawingml/2006/main" noGrp="1"/>
-          </p:cNvSpPr>
-          <p:nvPr/>
-        </p:nvSpPr>
-        <p:spPr>
-          <a:xfrm xmlns:a="http://schemas.openxmlformats.org/drawingml/2006/main">
-            <a:off x="742950" y="1866900"/>
-            <a:ext cx="7810500" cy="552450"/>
+              <a:t>Output is shown in a way people can read</a:t>
+            </a:r>
+          </a:p>
+        </p:txBody>
+      </p:sp>
+      <p:sp>
+        <p:nvSpPr>
+          <p:cNvPr id="6" name="">
+            <a:extLst xmlns:a="http://schemas.openxmlformats.org/drawingml/2006/main">
+              <a:ext uri="{FF2B5EF4-FFF2-40B4-BE49-F238E27FC236}">
+                <a16:creationId xmlns:a16="http://schemas.microsoft.com/office/drawing/2014/main" id="{12BE5803-137C-4516-A32C-F05AB658C792}"/>
+              </a:ext>
+            </a:extLst>
+          </p:cNvPr>
+          <p:cNvSpPr>
+            <a:spLocks xmlns:a="http://schemas.openxmlformats.org/drawingml/2006/main" noGrp="1"/>
+          </p:cNvSpPr>
+          <p:nvPr/>
+        </p:nvSpPr>
+        <p:spPr>
+          <a:xfrm xmlns:a="http://schemas.openxmlformats.org/drawingml/2006/main">
+            <a:off x="704850" y="1866900"/>
+            <a:ext cx="7429500" cy="571500"/>
           </a:xfrm>
           <a:prstGeom xmlns:a="http://schemas.openxmlformats.org/drawingml/2006/main" prst="rect">
             <a:avLst/>
@@ -5769,43 +5576,43 @@
             <a:pPr algn="l">
               <a:defRPr sz="1575" b="0">
                 <a:solidFill>
-                  <a:srgbClr val="516173"/>
+                  <a:srgbClr val="526173"/>
                 </a:solidFill>
               </a:defRPr>
             </a:pPr>
             <a:r>
               <a:rPr sz="1575" b="0">
                 <a:solidFill>
-                  <a:srgbClr val="516173"/>
+                  <a:srgbClr val="526173"/>
                 </a:solidFill>
               </a:rPr>
-              <a:t>The chatbot answers from mapped ERP data only, so it helps users find information without inventing values.</a:t>
-            </a:r>
-          </a:p>
-        </p:txBody>
-      </p:sp>
-      <p:sp>
-        <p:nvSpPr>
-          <p:cNvPr id="6" name="">
-            <a:extLst xmlns:a="http://schemas.openxmlformats.org/drawingml/2006/main">
-              <a:ext uri="{FF2B5EF4-FFF2-40B4-BE49-F238E27FC236}">
-                <a16:creationId xmlns:a16="http://schemas.microsoft.com/office/drawing/2014/main" id="{5C5F6063-69F7-4554-B1A5-879FA09D71D8}"/>
-              </a:ext>
-            </a:extLst>
-          </p:cNvPr>
-          <p:cNvSpPr>
-            <a:spLocks xmlns:a="http://schemas.openxmlformats.org/drawingml/2006/main" noGrp="1"/>
-          </p:cNvSpPr>
-          <p:nvPr/>
-        </p:nvSpPr>
-        <p:spPr>
-          <a:xfrm xmlns:a="http://schemas.openxmlformats.org/drawingml/2006/main">
-            <a:off x="1200150" y="2781300"/>
-            <a:ext cx="4095750" cy="2381250"/>
+              <a:t>Production is shown as pieces, with supporting stock context and detailed rows when needed.</a:t>
+            </a:r>
+          </a:p>
+        </p:txBody>
+      </p:sp>
+      <p:sp>
+        <p:nvSpPr>
+          <p:cNvPr id="7" name="">
+            <a:extLst xmlns:a="http://schemas.openxmlformats.org/drawingml/2006/main">
+              <a:ext uri="{FF2B5EF4-FFF2-40B4-BE49-F238E27FC236}">
+                <a16:creationId xmlns:a16="http://schemas.microsoft.com/office/drawing/2014/main" id="{97F5F49E-8CFE-44B3-BAFA-E325DB3BD750}"/>
+              </a:ext>
+            </a:extLst>
+          </p:cNvPr>
+          <p:cNvSpPr>
+            <a:spLocks xmlns:a="http://schemas.openxmlformats.org/drawingml/2006/main" noGrp="1"/>
+          </p:cNvSpPr>
+          <p:nvPr/>
+        </p:nvSpPr>
+        <p:spPr>
+          <a:xfrm xmlns:a="http://schemas.openxmlformats.org/drawingml/2006/main">
+            <a:off x="5981700" y="2533650"/>
+            <a:ext cx="5219700" cy="3124200"/>
           </a:xfrm>
           <a:prstGeom xmlns:a="http://schemas.openxmlformats.org/drawingml/2006/main" prst="roundRect">
             <a:avLst>
-              <a:gd name="adj" fmla="val 6400"/>
+              <a:gd name="adj" fmla="val 4878"/>
             </a:avLst>
           </a:prstGeom>
           <a:solidFill xmlns:a="http://schemas.openxmlformats.org/drawingml/2006/main">
@@ -5827,181 +5634,183 @@
       </p:sp>
       <p:sp>
         <p:nvSpPr>
-          <p:cNvPr id="7" name="">
-            <a:extLst xmlns:a="http://schemas.openxmlformats.org/drawingml/2006/main">
-              <a:ext uri="{FF2B5EF4-FFF2-40B4-BE49-F238E27FC236}">
-                <a16:creationId xmlns:a16="http://schemas.microsoft.com/office/drawing/2014/main" id="{21EB6D4F-C5AB-4192-A927-F16B6C6DC74E}"/>
-              </a:ext>
-            </a:extLst>
-          </p:cNvPr>
-          <p:cNvSpPr>
-            <a:spLocks xmlns:a="http://schemas.openxmlformats.org/drawingml/2006/main" noGrp="1"/>
-          </p:cNvSpPr>
-          <p:nvPr/>
-        </p:nvSpPr>
-        <p:spPr>
-          <a:xfrm xmlns:a="http://schemas.openxmlformats.org/drawingml/2006/main">
-            <a:off x="1600200" y="3143250"/>
-            <a:ext cx="3048000" cy="323850"/>
-          </a:xfrm>
-          <a:prstGeom xmlns:a="http://schemas.openxmlformats.org/drawingml/2006/main" prst="rect">
-            <a:avLst/>
-          </a:prstGeom>
-          <a:noFill xmlns:a="http://schemas.openxmlformats.org/drawingml/2006/main"/>
-          <a:ln xmlns:a="http://schemas.openxmlformats.org/drawingml/2006/main" w="0">
-            <a:noFill/>
-            <a:prstDash val="solid"/>
-          </a:ln>
-        </p:spPr>
-        <p:txBody>
-          <a:bodyPr xmlns:a="http://schemas.openxmlformats.org/drawingml/2006/main"/>
-          <a:lstStyle xmlns:a="http://schemas.openxmlformats.org/drawingml/2006/main"/>
-          <a:p xmlns:a="http://schemas.openxmlformats.org/drawingml/2006/main">
-            <a:pPr algn="l">
-              <a:defRPr sz="2250" b="1">
-                <a:solidFill>
-                  <a:srgbClr val="111827"/>
-                </a:solidFill>
-              </a:defRPr>
-            </a:pPr>
-            <a:r>
-              <a:rPr sz="2250" b="1">
-                <a:solidFill>
-                  <a:srgbClr val="111827"/>
-                </a:solidFill>
-              </a:rPr>
-              <a:t>Ask natural questions</a:t>
-            </a:r>
-          </a:p>
-        </p:txBody>
-      </p:sp>
-      <p:sp>
-        <p:nvSpPr>
           <p:cNvPr id="8" name="">
             <a:extLst xmlns:a="http://schemas.openxmlformats.org/drawingml/2006/main">
               <a:ext uri="{FF2B5EF4-FFF2-40B4-BE49-F238E27FC236}">
-                <a16:creationId xmlns:a16="http://schemas.microsoft.com/office/drawing/2014/main" id="{EF210F13-1F7C-4DBA-8C42-8D8BC5B52311}"/>
-              </a:ext>
-            </a:extLst>
-          </p:cNvPr>
-          <p:cNvSpPr>
-            <a:spLocks xmlns:a="http://schemas.openxmlformats.org/drawingml/2006/main" noGrp="1"/>
-          </p:cNvSpPr>
-          <p:nvPr/>
-        </p:nvSpPr>
-        <p:spPr>
-          <a:xfrm xmlns:a="http://schemas.openxmlformats.org/drawingml/2006/main">
-            <a:off x="1619250" y="3752850"/>
-            <a:ext cx="3143250" cy="1143000"/>
-          </a:xfrm>
-          <a:prstGeom xmlns:a="http://schemas.openxmlformats.org/drawingml/2006/main" prst="rect">
-            <a:avLst/>
-          </a:prstGeom>
-          <a:noFill xmlns:a="http://schemas.openxmlformats.org/drawingml/2006/main"/>
-          <a:ln xmlns:a="http://schemas.openxmlformats.org/drawingml/2006/main" w="0">
-            <a:noFill/>
-            <a:prstDash val="solid"/>
-          </a:ln>
-        </p:spPr>
-        <p:txBody>
-          <a:bodyPr xmlns:a="http://schemas.openxmlformats.org/drawingml/2006/main"/>
-          <a:lstStyle xmlns:a="http://schemas.openxmlformats.org/drawingml/2006/main"/>
-          <a:p xmlns:a="http://schemas.openxmlformats.org/drawingml/2006/main">
-            <a:pPr algn="l">
-              <a:defRPr sz="1650" b="0">
-                <a:solidFill>
-                  <a:srgbClr val="516173"/>
-                </a:solidFill>
-              </a:defRPr>
-            </a:pPr>
-            <a:r>
-              <a:rPr sz="1650" b="0">
-                <a:solidFill>
-                  <a:srgbClr val="516173"/>
-                </a:solidFill>
-              </a:rPr>
-              <a:t>“Show sales summary”</a:t>
-            </a:r>
-          </a:p>
-          <a:p xmlns:a="http://schemas.openxmlformats.org/drawingml/2006/main">
-            <a:pPr algn="l">
-              <a:defRPr sz="1650" b="0">
-                <a:solidFill>
-                  <a:srgbClr val="516173"/>
-                </a:solidFill>
-              </a:defRPr>
-            </a:pPr>
-            <a:r>
-              <a:rPr sz="1650" b="0">
-                <a:solidFill>
-                  <a:srgbClr val="516173"/>
-                </a:solidFill>
-              </a:rPr>
-              <a:t>“What is packing stock?”</a:t>
-            </a:r>
-          </a:p>
-          <a:p xmlns:a="http://schemas.openxmlformats.org/drawingml/2006/main">
-            <a:pPr algn="l">
-              <a:defRPr sz="1650" b="0">
-                <a:solidFill>
-                  <a:srgbClr val="516173"/>
-                </a:solidFill>
-              </a:defRPr>
-            </a:pPr>
-            <a:r>
-              <a:rPr sz="1650" b="0">
-                <a:solidFill>
-                  <a:srgbClr val="516173"/>
-                </a:solidFill>
-              </a:rPr>
-              <a:t>“Which orders are pending?”</a:t>
-            </a:r>
-          </a:p>
-          <a:p xmlns:a="http://schemas.openxmlformats.org/drawingml/2006/main">
-            <a:pPr algn="l">
-              <a:defRPr sz="1650" b="0">
-                <a:solidFill>
-                  <a:srgbClr val="516173"/>
-                </a:solidFill>
-              </a:defRPr>
-            </a:pPr>
-            <a:r>
-              <a:rPr sz="1650" b="0">
-                <a:solidFill>
-                  <a:srgbClr val="516173"/>
-                </a:solidFill>
-              </a:rPr>
-              <a:t>“Where does this number come from?”</a:t>
-            </a:r>
-          </a:p>
-        </p:txBody>
-      </p:sp>
-      <p:sp>
-        <p:nvSpPr>
-          <p:cNvPr id="9" name="">
-            <a:extLst xmlns:a="http://schemas.openxmlformats.org/drawingml/2006/main">
-              <a:ext uri="{FF2B5EF4-FFF2-40B4-BE49-F238E27FC236}">
-                <a16:creationId xmlns:a16="http://schemas.microsoft.com/office/drawing/2014/main" id="{5DF0F457-4C67-411F-86E2-09C9E20EA36D}"/>
-              </a:ext>
-            </a:extLst>
-          </p:cNvPr>
-          <p:cNvSpPr>
-            <a:spLocks xmlns:a="http://schemas.openxmlformats.org/drawingml/2006/main" noGrp="1"/>
-          </p:cNvSpPr>
-          <p:nvPr/>
-        </p:nvSpPr>
-        <p:spPr>
-          <a:xfrm xmlns:a="http://schemas.openxmlformats.org/drawingml/2006/main">
-            <a:off x="6286500" y="2781300"/>
-            <a:ext cx="4095750" cy="2381250"/>
+                <a16:creationId xmlns:a16="http://schemas.microsoft.com/office/drawing/2014/main" id="{B198278C-121B-43FD-BDEB-8A9789FF0EB5}"/>
+              </a:ext>
+            </a:extLst>
+          </p:cNvPr>
+          <p:cNvSpPr>
+            <a:spLocks xmlns:a="http://schemas.openxmlformats.org/drawingml/2006/main" noGrp="1"/>
+          </p:cNvSpPr>
+          <p:nvPr/>
+        </p:nvSpPr>
+        <p:spPr>
+          <a:xfrm xmlns:a="http://schemas.openxmlformats.org/drawingml/2006/main">
+            <a:off x="5981700" y="2533650"/>
+            <a:ext cx="5219700" cy="419100"/>
           </a:xfrm>
           <a:prstGeom xmlns:a="http://schemas.openxmlformats.org/drawingml/2006/main" prst="roundRect">
             <a:avLst>
-              <a:gd name="adj" fmla="val 6400"/>
+              <a:gd name="adj" fmla="val 36364"/>
             </a:avLst>
           </a:prstGeom>
           <a:solidFill xmlns:a="http://schemas.openxmlformats.org/drawingml/2006/main">
-            <a:srgbClr val="EAF4FF"/>
+            <a:srgbClr val="17375F"/>
+          </a:solidFill>
+          <a:ln xmlns:a="http://schemas.openxmlformats.org/drawingml/2006/main" w="0">
+            <a:noFill/>
+            <a:prstDash val="solid"/>
+          </a:ln>
+        </p:spPr>
+      </p:sp>
+      <p:sp>
+        <p:nvSpPr>
+          <p:cNvPr id="9" name="">
+            <a:extLst xmlns:a="http://schemas.openxmlformats.org/drawingml/2006/main">
+              <a:ext uri="{FF2B5EF4-FFF2-40B4-BE49-F238E27FC236}">
+                <a16:creationId xmlns:a16="http://schemas.microsoft.com/office/drawing/2014/main" id="{F9EA95A8-1389-44B3-8AB5-D45FA620E776}"/>
+              </a:ext>
+            </a:extLst>
+          </p:cNvPr>
+          <p:cNvSpPr>
+            <a:spLocks xmlns:a="http://schemas.openxmlformats.org/drawingml/2006/main" noGrp="1"/>
+          </p:cNvSpPr>
+          <p:nvPr/>
+        </p:nvSpPr>
+        <p:spPr>
+          <a:xfrm xmlns:a="http://schemas.openxmlformats.org/drawingml/2006/main">
+            <a:off x="6191250" y="2647950"/>
+            <a:ext cx="95250" cy="95250"/>
+          </a:xfrm>
+          <a:prstGeom xmlns:a="http://schemas.openxmlformats.org/drawingml/2006/main" prst="ellipse">
+            <a:avLst/>
+          </a:prstGeom>
+          <a:solidFill xmlns:a="http://schemas.openxmlformats.org/drawingml/2006/main">
+            <a:srgbClr val="FF6464"/>
+          </a:solidFill>
+          <a:ln xmlns:a="http://schemas.openxmlformats.org/drawingml/2006/main" w="0">
+            <a:noFill/>
+            <a:prstDash val="solid"/>
+          </a:ln>
+        </p:spPr>
+      </p:sp>
+      <p:sp>
+        <p:nvSpPr>
+          <p:cNvPr id="10" name="">
+            <a:extLst xmlns:a="http://schemas.openxmlformats.org/drawingml/2006/main">
+              <a:ext uri="{FF2B5EF4-FFF2-40B4-BE49-F238E27FC236}">
+                <a16:creationId xmlns:a16="http://schemas.microsoft.com/office/drawing/2014/main" id="{FD9C7E0B-2EFF-4E0C-A1EE-F4EF6F696F5D}"/>
+              </a:ext>
+            </a:extLst>
+          </p:cNvPr>
+          <p:cNvSpPr>
+            <a:spLocks xmlns:a="http://schemas.openxmlformats.org/drawingml/2006/main" noGrp="1"/>
+          </p:cNvSpPr>
+          <p:nvPr/>
+        </p:nvSpPr>
+        <p:spPr>
+          <a:xfrm xmlns:a="http://schemas.openxmlformats.org/drawingml/2006/main">
+            <a:off x="6362700" y="2647950"/>
+            <a:ext cx="95250" cy="95250"/>
+          </a:xfrm>
+          <a:prstGeom xmlns:a="http://schemas.openxmlformats.org/drawingml/2006/main" prst="ellipse">
+            <a:avLst/>
+          </a:prstGeom>
+          <a:solidFill xmlns:a="http://schemas.openxmlformats.org/drawingml/2006/main">
+            <a:srgbClr val="FFD166"/>
+          </a:solidFill>
+          <a:ln xmlns:a="http://schemas.openxmlformats.org/drawingml/2006/main" w="0">
+            <a:noFill/>
+            <a:prstDash val="solid"/>
+          </a:ln>
+        </p:spPr>
+      </p:sp>
+      <p:sp>
+        <p:nvSpPr>
+          <p:cNvPr id="11" name="">
+            <a:extLst xmlns:a="http://schemas.openxmlformats.org/drawingml/2006/main">
+              <a:ext uri="{FF2B5EF4-FFF2-40B4-BE49-F238E27FC236}">
+                <a16:creationId xmlns:a16="http://schemas.microsoft.com/office/drawing/2014/main" id="{AB218B81-006B-41E4-A629-985F372C1AE5}"/>
+              </a:ext>
+            </a:extLst>
+          </p:cNvPr>
+          <p:cNvSpPr>
+            <a:spLocks xmlns:a="http://schemas.openxmlformats.org/drawingml/2006/main" noGrp="1"/>
+          </p:cNvSpPr>
+          <p:nvPr/>
+        </p:nvSpPr>
+        <p:spPr>
+          <a:xfrm xmlns:a="http://schemas.openxmlformats.org/drawingml/2006/main">
+            <a:off x="6534150" y="2647950"/>
+            <a:ext cx="95250" cy="95250"/>
+          </a:xfrm>
+          <a:prstGeom xmlns:a="http://schemas.openxmlformats.org/drawingml/2006/main" prst="ellipse">
+            <a:avLst/>
+          </a:prstGeom>
+          <a:solidFill xmlns:a="http://schemas.openxmlformats.org/drawingml/2006/main">
+            <a:srgbClr val="06D6A0"/>
+          </a:solidFill>
+          <a:ln xmlns:a="http://schemas.openxmlformats.org/drawingml/2006/main" w="0">
+            <a:noFill/>
+            <a:prstDash val="solid"/>
+          </a:ln>
+        </p:spPr>
+      </p:sp>
+      <p:pic>
+        <p:nvPicPr>
+          <p:cNvPr id="33" name=""/>
+          <p:cNvPicPr>
+            <a:picLocks xmlns:a="http://schemas.openxmlformats.org/drawingml/2006/main" noChangeAspect="1"/>
+          </p:cNvPicPr>
+          <p:nvPr/>
+        </p:nvPicPr>
+        <p:blipFill>
+          <a:blip xmlns:r="http://schemas.openxmlformats.org/officeDocument/2006/relationships" xmlns:a="http://schemas.openxmlformats.org/drawingml/2006/main" r:embed="R48dbf719cdba48dc"/>
+          <a:srcRect xmlns:a="http://schemas.openxmlformats.org/drawingml/2006/main" l="0" t="3474" r="0" b="3474"/>
+          <a:stretch xmlns:a="http://schemas.openxmlformats.org/drawingml/2006/main">
+            <a:fillRect l="0" t="0" r="0" b="0"/>
+          </a:stretch>
+        </p:blipFill>
+        <p:spPr>
+          <a:xfrm xmlns:a="http://schemas.openxmlformats.org/drawingml/2006/main">
+            <a:off x="6115050" y="2667000"/>
+            <a:ext cx="4953000" cy="2857500"/>
+          </a:xfrm>
+          <a:prstGeom xmlns:a="http://schemas.openxmlformats.org/drawingml/2006/main" prst="roundRect">
+            <a:avLst>
+              <a:gd name="adj" fmla="val 4000"/>
+            </a:avLst>
+          </a:prstGeom>
+        </p:spPr>
+      </p:pic>
+      <p:sp>
+        <p:nvSpPr>
+          <p:cNvPr id="13" name="">
+            <a:extLst xmlns:a="http://schemas.openxmlformats.org/drawingml/2006/main">
+              <a:ext uri="{FF2B5EF4-FFF2-40B4-BE49-F238E27FC236}">
+                <a16:creationId xmlns:a16="http://schemas.microsoft.com/office/drawing/2014/main" id="{38078697-49A8-4A8A-B269-FC1382C6B848}"/>
+              </a:ext>
+            </a:extLst>
+          </p:cNvPr>
+          <p:cNvSpPr>
+            <a:spLocks xmlns:a="http://schemas.openxmlformats.org/drawingml/2006/main" noGrp="1"/>
+          </p:cNvSpPr>
+          <p:nvPr/>
+        </p:nvSpPr>
+        <p:spPr>
+          <a:xfrm xmlns:a="http://schemas.openxmlformats.org/drawingml/2006/main">
+            <a:off x="914400" y="2990850"/>
+            <a:ext cx="3857625" cy="2000250"/>
+          </a:xfrm>
+          <a:prstGeom xmlns:a="http://schemas.openxmlformats.org/drawingml/2006/main" prst="roundRect">
+            <a:avLst>
+              <a:gd name="adj" fmla="val 7619"/>
+            </a:avLst>
+          </a:prstGeom>
+          <a:solidFill xmlns:a="http://schemas.openxmlformats.org/drawingml/2006/main">
+            <a:srgbClr val="FFFFFF"/>
           </a:solidFill>
           <a:ln xmlns:a="http://schemas.openxmlformats.org/drawingml/2006/main" w="9525">
             <a:solidFill>
@@ -6019,22 +5828,22 @@
       </p:sp>
       <p:sp>
         <p:nvSpPr>
-          <p:cNvPr id="10" name="">
-            <a:extLst xmlns:a="http://schemas.openxmlformats.org/drawingml/2006/main">
-              <a:ext uri="{FF2B5EF4-FFF2-40B4-BE49-F238E27FC236}">
-                <a16:creationId xmlns:a16="http://schemas.microsoft.com/office/drawing/2014/main" id="{0F48F032-B331-48B2-8BAD-A164C1449D8C}"/>
-              </a:ext>
-            </a:extLst>
-          </p:cNvPr>
-          <p:cNvSpPr>
-            <a:spLocks xmlns:a="http://schemas.openxmlformats.org/drawingml/2006/main" noGrp="1"/>
-          </p:cNvSpPr>
-          <p:nvPr/>
-        </p:nvSpPr>
-        <p:spPr>
-          <a:xfrm xmlns:a="http://schemas.openxmlformats.org/drawingml/2006/main">
-            <a:off x="6705600" y="3143250"/>
-            <a:ext cx="2952750" cy="323850"/>
+          <p:cNvPr id="14" name="">
+            <a:extLst xmlns:a="http://schemas.openxmlformats.org/drawingml/2006/main">
+              <a:ext uri="{FF2B5EF4-FFF2-40B4-BE49-F238E27FC236}">
+                <a16:creationId xmlns:a16="http://schemas.microsoft.com/office/drawing/2014/main" id="{115B184C-B707-4B6E-900B-659A3C3DDF8B}"/>
+              </a:ext>
+            </a:extLst>
+          </p:cNvPr>
+          <p:cNvSpPr>
+            <a:spLocks xmlns:a="http://schemas.openxmlformats.org/drawingml/2006/main" noGrp="1"/>
+          </p:cNvSpPr>
+          <p:nvPr/>
+        </p:nvSpPr>
+        <p:spPr>
+          <a:xfrm xmlns:a="http://schemas.openxmlformats.org/drawingml/2006/main">
+            <a:off x="1257300" y="3352800"/>
+            <a:ext cx="2857500" cy="323850"/>
           </a:xfrm>
           <a:prstGeom xmlns:a="http://schemas.openxmlformats.org/drawingml/2006/main" prst="rect">
             <a:avLst/>
@@ -6050,41 +5859,72 @@
           <a:lstStyle xmlns:a="http://schemas.openxmlformats.org/drawingml/2006/main"/>
           <a:p xmlns:a="http://schemas.openxmlformats.org/drawingml/2006/main">
             <a:pPr algn="l">
-              <a:defRPr sz="2250" b="1">
-                <a:solidFill>
-                  <a:srgbClr val="17375F"/>
+              <a:defRPr sz="2100" b="1">
+                <a:solidFill>
+                  <a:srgbClr val="111827"/>
                 </a:solidFill>
               </a:defRPr>
             </a:pPr>
             <a:r>
-              <a:rPr sz="2250" b="1">
-                <a:solidFill>
-                  <a:srgbClr val="17375F"/>
+              <a:rPr sz="2100" b="1">
+                <a:solidFill>
+                  <a:srgbClr val="111827"/>
                 </a:solidFill>
               </a:rPr>
-              <a:t>Answers stay grounded</a:t>
-            </a:r>
-          </a:p>
-        </p:txBody>
-      </p:sp>
-      <p:sp>
-        <p:nvSpPr>
-          <p:cNvPr id="11" name="">
-            <a:extLst xmlns:a="http://schemas.openxmlformats.org/drawingml/2006/main">
-              <a:ext uri="{FF2B5EF4-FFF2-40B4-BE49-F238E27FC236}">
-                <a16:creationId xmlns:a16="http://schemas.microsoft.com/office/drawing/2014/main" id="{D2A26D1F-69E9-4F42-8C37-70BA84A486BD}"/>
-              </a:ext>
-            </a:extLst>
-          </p:cNvPr>
-          <p:cNvSpPr>
-            <a:spLocks xmlns:a="http://schemas.openxmlformats.org/drawingml/2006/main" noGrp="1"/>
-          </p:cNvSpPr>
-          <p:nvPr/>
-        </p:nvSpPr>
-        <p:spPr>
-          <a:xfrm xmlns:a="http://schemas.openxmlformats.org/drawingml/2006/main">
-            <a:off x="6724650" y="3752850"/>
-            <a:ext cx="3048000" cy="857250"/>
+              <a:t>What the page answers</a:t>
+            </a:r>
+          </a:p>
+        </p:txBody>
+      </p:sp>
+      <p:sp>
+        <p:nvSpPr>
+          <p:cNvPr id="15" name="">
+            <a:extLst xmlns:a="http://schemas.openxmlformats.org/drawingml/2006/main">
+              <a:ext uri="{FF2B5EF4-FFF2-40B4-BE49-F238E27FC236}">
+                <a16:creationId xmlns:a16="http://schemas.microsoft.com/office/drawing/2014/main" id="{59285401-07CD-4FFB-B7B6-BD821152ADA8}"/>
+              </a:ext>
+            </a:extLst>
+          </p:cNvPr>
+          <p:cNvSpPr>
+            <a:spLocks xmlns:a="http://schemas.openxmlformats.org/drawingml/2006/main" noGrp="1"/>
+          </p:cNvSpPr>
+          <p:nvPr/>
+        </p:nvSpPr>
+        <p:spPr>
+          <a:xfrm xmlns:a="http://schemas.openxmlformats.org/drawingml/2006/main">
+            <a:off x="1295400" y="4000500"/>
+            <a:ext cx="123825" cy="123825"/>
+          </a:xfrm>
+          <a:prstGeom xmlns:a="http://schemas.openxmlformats.org/drawingml/2006/main" prst="ellipse">
+            <a:avLst/>
+          </a:prstGeom>
+          <a:solidFill xmlns:a="http://schemas.openxmlformats.org/drawingml/2006/main">
+            <a:srgbClr val="10B981"/>
+          </a:solidFill>
+          <a:ln xmlns:a="http://schemas.openxmlformats.org/drawingml/2006/main" w="0">
+            <a:noFill/>
+            <a:prstDash val="solid"/>
+          </a:ln>
+        </p:spPr>
+      </p:sp>
+      <p:sp>
+        <p:nvSpPr>
+          <p:cNvPr id="16" name="">
+            <a:extLst xmlns:a="http://schemas.openxmlformats.org/drawingml/2006/main">
+              <a:ext uri="{FF2B5EF4-FFF2-40B4-BE49-F238E27FC236}">
+                <a16:creationId xmlns:a16="http://schemas.microsoft.com/office/drawing/2014/main" id="{3B5E005A-2878-421D-A902-2EAACE9EF4EF}"/>
+              </a:ext>
+            </a:extLst>
+          </p:cNvPr>
+          <p:cNvSpPr>
+            <a:spLocks xmlns:a="http://schemas.openxmlformats.org/drawingml/2006/main" noGrp="1"/>
+          </p:cNvSpPr>
+          <p:nvPr/>
+        </p:nvSpPr>
+        <p:spPr>
+          <a:xfrm xmlns:a="http://schemas.openxmlformats.org/drawingml/2006/main">
+            <a:off x="1581150" y="3924300"/>
+            <a:ext cx="2857500" cy="381000"/>
           </a:xfrm>
           <a:prstGeom xmlns:a="http://schemas.openxmlformats.org/drawingml/2006/main" prst="rect">
             <a:avLst/>
@@ -6100,19 +5940,231 @@
           <a:lstStyle xmlns:a="http://schemas.openxmlformats.org/drawingml/2006/main"/>
           <a:p xmlns:a="http://schemas.openxmlformats.org/drawingml/2006/main">
             <a:pPr algn="l">
-              <a:defRPr sz="1650" b="0">
-                <a:solidFill>
-                  <a:srgbClr val="516173"/>
+              <a:defRPr sz="1500" b="0">
+                <a:solidFill>
+                  <a:srgbClr val="111827"/>
                 </a:solidFill>
               </a:defRPr>
             </a:pPr>
             <a:r>
-              <a:rPr sz="1650" b="0">
-                <a:solidFill>
-                  <a:srgbClr val="516173"/>
+              <a:rPr sz="1500" b="0">
+                <a:solidFill>
+                  <a:srgbClr val="111827"/>
                 </a:solidFill>
               </a:rPr>
-              <a:t>The assistant reads the same live summary API as the dashboard and explains the source behind each answer.</a:t>
+              <a:t>What was produced?</a:t>
+            </a:r>
+          </a:p>
+        </p:txBody>
+      </p:sp>
+      <p:sp>
+        <p:nvSpPr>
+          <p:cNvPr id="17" name="">
+            <a:extLst xmlns:a="http://schemas.openxmlformats.org/drawingml/2006/main">
+              <a:ext uri="{FF2B5EF4-FFF2-40B4-BE49-F238E27FC236}">
+                <a16:creationId xmlns:a16="http://schemas.microsoft.com/office/drawing/2014/main" id="{D8E120A9-F89F-4E23-BA03-34308004C30B}"/>
+              </a:ext>
+            </a:extLst>
+          </p:cNvPr>
+          <p:cNvSpPr>
+            <a:spLocks xmlns:a="http://schemas.openxmlformats.org/drawingml/2006/main" noGrp="1"/>
+          </p:cNvSpPr>
+          <p:nvPr/>
+        </p:nvSpPr>
+        <p:spPr>
+          <a:xfrm xmlns:a="http://schemas.openxmlformats.org/drawingml/2006/main">
+            <a:off x="1295400" y="4419600"/>
+            <a:ext cx="123825" cy="123825"/>
+          </a:xfrm>
+          <a:prstGeom xmlns:a="http://schemas.openxmlformats.org/drawingml/2006/main" prst="ellipse">
+            <a:avLst/>
+          </a:prstGeom>
+          <a:solidFill xmlns:a="http://schemas.openxmlformats.org/drawingml/2006/main">
+            <a:srgbClr val="10B981"/>
+          </a:solidFill>
+          <a:ln xmlns:a="http://schemas.openxmlformats.org/drawingml/2006/main" w="0">
+            <a:noFill/>
+            <a:prstDash val="solid"/>
+          </a:ln>
+        </p:spPr>
+      </p:sp>
+      <p:sp>
+        <p:nvSpPr>
+          <p:cNvPr id="18" name="">
+            <a:extLst xmlns:a="http://schemas.openxmlformats.org/drawingml/2006/main">
+              <a:ext uri="{FF2B5EF4-FFF2-40B4-BE49-F238E27FC236}">
+                <a16:creationId xmlns:a16="http://schemas.microsoft.com/office/drawing/2014/main" id="{F284C22A-64DA-4DF4-A8BE-229489BFE223}"/>
+              </a:ext>
+            </a:extLst>
+          </p:cNvPr>
+          <p:cNvSpPr>
+            <a:spLocks xmlns:a="http://schemas.openxmlformats.org/drawingml/2006/main" noGrp="1"/>
+          </p:cNvSpPr>
+          <p:nvPr/>
+        </p:nvSpPr>
+        <p:spPr>
+          <a:xfrm xmlns:a="http://schemas.openxmlformats.org/drawingml/2006/main">
+            <a:off x="1581150" y="4343400"/>
+            <a:ext cx="2857500" cy="381000"/>
+          </a:xfrm>
+          <a:prstGeom xmlns:a="http://schemas.openxmlformats.org/drawingml/2006/main" prst="rect">
+            <a:avLst/>
+          </a:prstGeom>
+          <a:noFill xmlns:a="http://schemas.openxmlformats.org/drawingml/2006/main"/>
+          <a:ln xmlns:a="http://schemas.openxmlformats.org/drawingml/2006/main" w="0">
+            <a:noFill/>
+            <a:prstDash val="solid"/>
+          </a:ln>
+        </p:spPr>
+        <p:txBody>
+          <a:bodyPr xmlns:a="http://schemas.openxmlformats.org/drawingml/2006/main"/>
+          <a:lstStyle xmlns:a="http://schemas.openxmlformats.org/drawingml/2006/main"/>
+          <a:p xmlns:a="http://schemas.openxmlformats.org/drawingml/2006/main">
+            <a:pPr algn="l">
+              <a:defRPr sz="1500" b="0">
+                <a:solidFill>
+                  <a:srgbClr val="111827"/>
+                </a:solidFill>
+              </a:defRPr>
+            </a:pPr>
+            <a:r>
+              <a:rPr sz="1500" b="0">
+                <a:solidFill>
+                  <a:srgbClr val="111827"/>
+                </a:solidFill>
+              </a:rPr>
+              <a:t>Which goods are finished?</a:t>
+            </a:r>
+          </a:p>
+        </p:txBody>
+      </p:sp>
+      <p:sp>
+        <p:nvSpPr>
+          <p:cNvPr id="19" name="">
+            <a:extLst xmlns:a="http://schemas.openxmlformats.org/drawingml/2006/main">
+              <a:ext uri="{FF2B5EF4-FFF2-40B4-BE49-F238E27FC236}">
+                <a16:creationId xmlns:a16="http://schemas.microsoft.com/office/drawing/2014/main" id="{F67DE273-3C42-4E41-8429-EA2D777DBA35}"/>
+              </a:ext>
+            </a:extLst>
+          </p:cNvPr>
+          <p:cNvSpPr>
+            <a:spLocks xmlns:a="http://schemas.openxmlformats.org/drawingml/2006/main" noGrp="1"/>
+          </p:cNvSpPr>
+          <p:nvPr/>
+        </p:nvSpPr>
+        <p:spPr>
+          <a:xfrm xmlns:a="http://schemas.openxmlformats.org/drawingml/2006/main">
+            <a:off x="1295400" y="4838700"/>
+            <a:ext cx="123825" cy="123825"/>
+          </a:xfrm>
+          <a:prstGeom xmlns:a="http://schemas.openxmlformats.org/drawingml/2006/main" prst="ellipse">
+            <a:avLst/>
+          </a:prstGeom>
+          <a:solidFill xmlns:a="http://schemas.openxmlformats.org/drawingml/2006/main">
+            <a:srgbClr val="10B981"/>
+          </a:solidFill>
+          <a:ln xmlns:a="http://schemas.openxmlformats.org/drawingml/2006/main" w="0">
+            <a:noFill/>
+            <a:prstDash val="solid"/>
+          </a:ln>
+        </p:spPr>
+      </p:sp>
+      <p:sp>
+        <p:nvSpPr>
+          <p:cNvPr id="20" name="">
+            <a:extLst xmlns:a="http://schemas.openxmlformats.org/drawingml/2006/main">
+              <a:ext uri="{FF2B5EF4-FFF2-40B4-BE49-F238E27FC236}">
+                <a16:creationId xmlns:a16="http://schemas.microsoft.com/office/drawing/2014/main" id="{0D27954A-E23D-4316-874E-581D0C0146AB}"/>
+              </a:ext>
+            </a:extLst>
+          </p:cNvPr>
+          <p:cNvSpPr>
+            <a:spLocks xmlns:a="http://schemas.openxmlformats.org/drawingml/2006/main" noGrp="1"/>
+          </p:cNvSpPr>
+          <p:nvPr/>
+        </p:nvSpPr>
+        <p:spPr>
+          <a:xfrm xmlns:a="http://schemas.openxmlformats.org/drawingml/2006/main">
+            <a:off x="1581150" y="4762500"/>
+            <a:ext cx="2857500" cy="381000"/>
+          </a:xfrm>
+          <a:prstGeom xmlns:a="http://schemas.openxmlformats.org/drawingml/2006/main" prst="rect">
+            <a:avLst/>
+          </a:prstGeom>
+          <a:noFill xmlns:a="http://schemas.openxmlformats.org/drawingml/2006/main"/>
+          <a:ln xmlns:a="http://schemas.openxmlformats.org/drawingml/2006/main" w="0">
+            <a:noFill/>
+            <a:prstDash val="solid"/>
+          </a:ln>
+        </p:spPr>
+        <p:txBody>
+          <a:bodyPr xmlns:a="http://schemas.openxmlformats.org/drawingml/2006/main"/>
+          <a:lstStyle xmlns:a="http://schemas.openxmlformats.org/drawingml/2006/main"/>
+          <a:p xmlns:a="http://schemas.openxmlformats.org/drawingml/2006/main">
+            <a:pPr algn="l">
+              <a:defRPr sz="1500" b="0">
+                <a:solidFill>
+                  <a:srgbClr val="111827"/>
+                </a:solidFill>
+              </a:defRPr>
+            </a:pPr>
+            <a:r>
+              <a:rPr sz="1500" b="0">
+                <a:solidFill>
+                  <a:srgbClr val="111827"/>
+                </a:solidFill>
+              </a:rPr>
+              <a:t>What stock supports production?</a:t>
+            </a:r>
+          </a:p>
+        </p:txBody>
+      </p:sp>
+      <p:sp>
+        <p:nvSpPr>
+          <p:cNvPr id="21" name="">
+            <a:extLst xmlns:a="http://schemas.openxmlformats.org/drawingml/2006/main">
+              <a:ext uri="{FF2B5EF4-FFF2-40B4-BE49-F238E27FC236}">
+                <a16:creationId xmlns:a16="http://schemas.microsoft.com/office/drawing/2014/main" id="{598B9DAF-0557-4E3B-877C-5883D0D72EFF}"/>
+              </a:ext>
+            </a:extLst>
+          </p:cNvPr>
+          <p:cNvSpPr>
+            <a:spLocks xmlns:a="http://schemas.openxmlformats.org/drawingml/2006/main" noGrp="1"/>
+          </p:cNvSpPr>
+          <p:nvPr/>
+        </p:nvSpPr>
+        <p:spPr>
+          <a:xfrm xmlns:a="http://schemas.openxmlformats.org/drawingml/2006/main">
+            <a:off x="685800" y="6419850"/>
+            <a:ext cx="2095500" cy="228600"/>
+          </a:xfrm>
+          <a:prstGeom xmlns:a="http://schemas.openxmlformats.org/drawingml/2006/main" prst="rect">
+            <a:avLst/>
+          </a:prstGeom>
+          <a:noFill xmlns:a="http://schemas.openxmlformats.org/drawingml/2006/main"/>
+          <a:ln xmlns:a="http://schemas.openxmlformats.org/drawingml/2006/main" w="0">
+            <a:noFill/>
+            <a:prstDash val="solid"/>
+          </a:ln>
+        </p:spPr>
+        <p:txBody>
+          <a:bodyPr xmlns:a="http://schemas.openxmlformats.org/drawingml/2006/main"/>
+          <a:lstStyle xmlns:a="http://schemas.openxmlformats.org/drawingml/2006/main"/>
+          <a:p xmlns:a="http://schemas.openxmlformats.org/drawingml/2006/main">
+            <a:pPr algn="l">
+              <a:defRPr sz="900" b="1">
+                <a:solidFill>
+                  <a:srgbClr val="8EA0B4"/>
+                </a:solidFill>
+              </a:defRPr>
+            </a:pPr>
+            <a:r>
+              <a:rPr sz="900" b="1">
+                <a:solidFill>
+                  <a:srgbClr val="8EA0B4"/>
+                </a:solidFill>
+              </a:rPr>
+              <a:t>AG Health ERP · 6/9</a:t>
             </a:r>
           </a:p>
         </p:txBody>
@@ -6120,7 +6172,7 @@
     </p:spTree>
     <p:extLst>
       <p:ext uri="{BB962C8B-B14F-4D97-AF65-F5344CB8AC3E}">
-        <p14:creationId xmlns:p14="http://schemas.microsoft.com/office/powerpoint/2010/main" val="1904210385"/>
+        <p14:creationId xmlns:p14="http://schemas.microsoft.com/office/powerpoint/2010/main" val="649565914"/>
       </p:ext>
     </p:extLst>
   </p:cSld>
@@ -6133,7 +6185,7 @@
     <p:bg>
       <p:bgPr>
         <a:solidFill xmlns:a="http://schemas.openxmlformats.org/drawingml/2006/main">
-          <a:srgbClr val="F7FBFF"/>
+          <a:srgbClr val="F6FBFF"/>
         </a:solidFill>
       </p:bgPr>
     </p:bg>
@@ -6148,22 +6200,22 @@
       </p:grpSpPr>
       <p:sp>
         <p:nvSpPr>
-          <p:cNvPr id="13" name="">
-            <a:extLst xmlns:a="http://schemas.openxmlformats.org/drawingml/2006/main">
-              <a:ext uri="{FF2B5EF4-FFF2-40B4-BE49-F238E27FC236}">
-                <a16:creationId xmlns:a16="http://schemas.microsoft.com/office/drawing/2014/main" id="{013510C3-6577-4267-A926-9B33E6E5CFE0}"/>
-              </a:ext>
-            </a:extLst>
-          </p:cNvPr>
-          <p:cNvSpPr>
-            <a:spLocks xmlns:a="http://schemas.openxmlformats.org/drawingml/2006/main" noGrp="1"/>
-          </p:cNvSpPr>
-          <p:nvPr/>
-        </p:nvSpPr>
-        <p:spPr>
-          <a:xfrm xmlns:a="http://schemas.openxmlformats.org/drawingml/2006/main">
-            <a:off x="10096500" y="0"/>
-            <a:ext cx="2000250" cy="2000250"/>
+          <p:cNvPr id="22" name="">
+            <a:extLst xmlns:a="http://schemas.openxmlformats.org/drawingml/2006/main">
+              <a:ext uri="{FF2B5EF4-FFF2-40B4-BE49-F238E27FC236}">
+                <a16:creationId xmlns:a16="http://schemas.microsoft.com/office/drawing/2014/main" id="{11D11B55-750F-4C56-B1AC-C6FD984084E4}"/>
+              </a:ext>
+            </a:extLst>
+          </p:cNvPr>
+          <p:cNvSpPr>
+            <a:spLocks xmlns:a="http://schemas.openxmlformats.org/drawingml/2006/main" noGrp="1"/>
+          </p:cNvSpPr>
+          <p:nvPr/>
+        </p:nvSpPr>
+        <p:spPr>
+          <a:xfrm xmlns:a="http://schemas.openxmlformats.org/drawingml/2006/main">
+            <a:off x="9886950" y="0"/>
+            <a:ext cx="2095500" cy="2095500"/>
           </a:xfrm>
           <a:prstGeom xmlns:a="http://schemas.openxmlformats.org/drawingml/2006/main" prst="ellipse">
             <a:avLst/>
@@ -6182,7 +6234,7 @@
           <p:cNvPr id="2" name="">
             <a:extLst xmlns:a="http://schemas.openxmlformats.org/drawingml/2006/main">
               <a:ext uri="{FF2B5EF4-FFF2-40B4-BE49-F238E27FC236}">
-                <a16:creationId xmlns:a16="http://schemas.microsoft.com/office/drawing/2014/main" id="{FC15ABFE-DAE2-45E0-A681-349C333A0FC4}"/>
+                <a16:creationId xmlns:a16="http://schemas.microsoft.com/office/drawing/2014/main" id="{A3C31D7D-6202-4A33-AFE9-C5B7E4D088C6}"/>
               </a:ext>
             </a:extLst>
           </p:cNvPr>
@@ -6194,7 +6246,7 @@
         <p:spPr>
           <a:xfrm xmlns:a="http://schemas.openxmlformats.org/drawingml/2006/main">
             <a:off x="0" y="5524500"/>
-            <a:ext cx="1333500" cy="1333500"/>
+            <a:ext cx="1295400" cy="1295400"/>
           </a:xfrm>
           <a:prstGeom xmlns:a="http://schemas.openxmlformats.org/drawingml/2006/main" prst="ellipse">
             <a:avLst/>
@@ -6213,19 +6265,48 @@
           <p:cNvPr id="3" name="">
             <a:extLst xmlns:a="http://schemas.openxmlformats.org/drawingml/2006/main">
               <a:ext uri="{FF2B5EF4-FFF2-40B4-BE49-F238E27FC236}">
-                <a16:creationId xmlns:a16="http://schemas.microsoft.com/office/drawing/2014/main" id="{9CA410EC-CC2B-4D55-B04A-70FAE5D674B8}"/>
-              </a:ext>
-            </a:extLst>
-          </p:cNvPr>
-          <p:cNvSpPr>
-            <a:spLocks xmlns:a="http://schemas.openxmlformats.org/drawingml/2006/main" noGrp="1"/>
-          </p:cNvSpPr>
-          <p:nvPr/>
-        </p:nvSpPr>
-        <p:spPr>
-          <a:xfrm xmlns:a="http://schemas.openxmlformats.org/drawingml/2006/main">
-            <a:off x="723900" y="514350"/>
-            <a:ext cx="3429000" cy="266700"/>
+                <a16:creationId xmlns:a16="http://schemas.microsoft.com/office/drawing/2014/main" id="{97D17A39-0841-4B41-A0F3-E8EA6F985E6D}"/>
+              </a:ext>
+            </a:extLst>
+          </p:cNvPr>
+          <p:cNvSpPr>
+            <a:spLocks xmlns:a="http://schemas.openxmlformats.org/drawingml/2006/main" noGrp="1"/>
+          </p:cNvSpPr>
+          <p:nvPr/>
+        </p:nvSpPr>
+        <p:spPr>
+          <a:xfrm xmlns:a="http://schemas.openxmlformats.org/drawingml/2006/main">
+            <a:off x="0" y="0"/>
+            <a:ext cx="12192000" cy="6858000"/>
+          </a:xfrm>
+          <a:prstGeom xmlns:a="http://schemas.openxmlformats.org/drawingml/2006/main" prst="rect">
+            <a:avLst/>
+          </a:prstGeom>
+          <a:noFill xmlns:a="http://schemas.openxmlformats.org/drawingml/2006/main"/>
+          <a:ln xmlns:a="http://schemas.openxmlformats.org/drawingml/2006/main" w="0">
+            <a:noFill/>
+            <a:prstDash val="solid"/>
+          </a:ln>
+        </p:spPr>
+      </p:sp>
+      <p:sp>
+        <p:nvSpPr>
+          <p:cNvPr id="4" name="">
+            <a:extLst xmlns:a="http://schemas.openxmlformats.org/drawingml/2006/main">
+              <a:ext uri="{FF2B5EF4-FFF2-40B4-BE49-F238E27FC236}">
+                <a16:creationId xmlns:a16="http://schemas.microsoft.com/office/drawing/2014/main" id="{466BC7DA-4241-4960-8CBA-EA759C80F405}"/>
+              </a:ext>
+            </a:extLst>
+          </p:cNvPr>
+          <p:cNvSpPr>
+            <a:spLocks xmlns:a="http://schemas.openxmlformats.org/drawingml/2006/main" noGrp="1"/>
+          </p:cNvSpPr>
+          <p:nvPr/>
+        </p:nvSpPr>
+        <p:spPr>
+          <a:xfrm xmlns:a="http://schemas.openxmlformats.org/drawingml/2006/main">
+            <a:off x="685800" y="495300"/>
+            <a:ext cx="3429000" cy="285750"/>
           </a:xfrm>
           <a:prstGeom xmlns:a="http://schemas.openxmlformats.org/drawingml/2006/main" prst="rect">
             <a:avLst/>
@@ -6253,29 +6334,29 @@
                   <a:srgbClr val="E2BE2D"/>
                 </a:solidFill>
               </a:rPr>
-              <a:t>FINAL MESSAGE</a:t>
-            </a:r>
-          </a:p>
-        </p:txBody>
-      </p:sp>
-      <p:sp>
-        <p:nvSpPr>
-          <p:cNvPr id="4" name="">
-            <a:extLst xmlns:a="http://schemas.openxmlformats.org/drawingml/2006/main">
-              <a:ext uri="{FF2B5EF4-FFF2-40B4-BE49-F238E27FC236}">
-                <a16:creationId xmlns:a16="http://schemas.microsoft.com/office/drawing/2014/main" id="{C0FC8BAE-F47F-49F1-9E60-8C8B797CC208}"/>
-              </a:ext>
-            </a:extLst>
-          </p:cNvPr>
-          <p:cNvSpPr>
-            <a:spLocks xmlns:a="http://schemas.openxmlformats.org/drawingml/2006/main" noGrp="1"/>
-          </p:cNvSpPr>
-          <p:nvPr/>
-        </p:nvSpPr>
-        <p:spPr>
-          <a:xfrm xmlns:a="http://schemas.openxmlformats.org/drawingml/2006/main">
-            <a:off x="723900" y="914400"/>
-            <a:ext cx="8096250" cy="876300"/>
+              <a:t>SALES</a:t>
+            </a:r>
+          </a:p>
+        </p:txBody>
+      </p:sp>
+      <p:sp>
+        <p:nvSpPr>
+          <p:cNvPr id="5" name="">
+            <a:extLst xmlns:a="http://schemas.openxmlformats.org/drawingml/2006/main">
+              <a:ext uri="{FF2B5EF4-FFF2-40B4-BE49-F238E27FC236}">
+                <a16:creationId xmlns:a16="http://schemas.microsoft.com/office/drawing/2014/main" id="{84AF428E-E703-45D9-B28E-64045E437DF1}"/>
+              </a:ext>
+            </a:extLst>
+          </p:cNvPr>
+          <p:cNvSpPr>
+            <a:spLocks xmlns:a="http://schemas.openxmlformats.org/drawingml/2006/main" noGrp="1"/>
+          </p:cNvSpPr>
+          <p:nvPr/>
+        </p:nvSpPr>
+        <p:spPr>
+          <a:xfrm xmlns:a="http://schemas.openxmlformats.org/drawingml/2006/main">
+            <a:off x="685800" y="895350"/>
+            <a:ext cx="8286750" cy="895350"/>
           </a:xfrm>
           <a:prstGeom xmlns:a="http://schemas.openxmlformats.org/drawingml/2006/main" prst="rect">
             <a:avLst/>
@@ -6291,41 +6372,41 @@
           <a:lstStyle xmlns:a="http://schemas.openxmlformats.org/drawingml/2006/main"/>
           <a:p xmlns:a="http://schemas.openxmlformats.org/drawingml/2006/main">
             <a:pPr algn="l">
-              <a:defRPr sz="3450" b="1">
+              <a:defRPr sz="3375" b="1">
                 <a:solidFill>
                   <a:srgbClr val="111827"/>
                 </a:solidFill>
               </a:defRPr>
             </a:pPr>
             <a:r>
-              <a:rPr sz="3450" b="1">
+              <a:rPr sz="3375" b="1">
                 <a:solidFill>
                   <a:srgbClr val="111827"/>
                 </a:solidFill>
               </a:rPr>
-              <a:t>This is the decision layer AG Health needs</a:t>
-            </a:r>
-          </a:p>
-        </p:txBody>
-      </p:sp>
-      <p:sp>
-        <p:nvSpPr>
-          <p:cNvPr id="5" name="">
-            <a:extLst xmlns:a="http://schemas.openxmlformats.org/drawingml/2006/main">
-              <a:ext uri="{FF2B5EF4-FFF2-40B4-BE49-F238E27FC236}">
-                <a16:creationId xmlns:a16="http://schemas.microsoft.com/office/drawing/2014/main" id="{FB54AC6D-9672-4777-8E87-CDF8587BA35B}"/>
-              </a:ext>
-            </a:extLst>
-          </p:cNvPr>
-          <p:cNvSpPr>
-            <a:spLocks xmlns:a="http://schemas.openxmlformats.org/drawingml/2006/main" noGrp="1"/>
-          </p:cNvSpPr>
-          <p:nvPr/>
-        </p:nvSpPr>
-        <p:spPr>
-          <a:xfrm xmlns:a="http://schemas.openxmlformats.org/drawingml/2006/main">
-            <a:off x="742950" y="1866900"/>
-            <a:ext cx="7810500" cy="552450"/>
+              <a:t>Sales analysis is built for questions</a:t>
+            </a:r>
+          </a:p>
+        </p:txBody>
+      </p:sp>
+      <p:sp>
+        <p:nvSpPr>
+          <p:cNvPr id="6" name="">
+            <a:extLst xmlns:a="http://schemas.openxmlformats.org/drawingml/2006/main">
+              <a:ext uri="{FF2B5EF4-FFF2-40B4-BE49-F238E27FC236}">
+                <a16:creationId xmlns:a16="http://schemas.microsoft.com/office/drawing/2014/main" id="{E6D87A4B-ABD8-4103-AC98-40B6F3AA7C82}"/>
+              </a:ext>
+            </a:extLst>
+          </p:cNvPr>
+          <p:cNvSpPr>
+            <a:spLocks xmlns:a="http://schemas.openxmlformats.org/drawingml/2006/main" noGrp="1"/>
+          </p:cNvSpPr>
+          <p:nvPr/>
+        </p:nvSpPr>
+        <p:spPr>
+          <a:xfrm xmlns:a="http://schemas.openxmlformats.org/drawingml/2006/main">
+            <a:off x="704850" y="1866900"/>
+            <a:ext cx="7429500" cy="571500"/>
           </a:xfrm>
           <a:prstGeom xmlns:a="http://schemas.openxmlformats.org/drawingml/2006/main" prst="rect">
             <a:avLst/>
@@ -6343,43 +6424,43 @@
             <a:pPr algn="l">
               <a:defRPr sz="1575" b="0">
                 <a:solidFill>
-                  <a:srgbClr val="516173"/>
+                  <a:srgbClr val="526173"/>
                 </a:solidFill>
               </a:defRPr>
             </a:pPr>
             <a:r>
               <a:rPr sz="1575" b="0">
                 <a:solidFill>
-                  <a:srgbClr val="516173"/>
+                  <a:srgbClr val="526173"/>
                 </a:solidFill>
               </a:rPr>
-              <a:t>The project brings ERP data, clean dashboards, focused modules, and question-based reporting into one management-ready experience.</a:t>
-            </a:r>
-          </a:p>
-        </p:txBody>
-      </p:sp>
-      <p:sp>
-        <p:nvSpPr>
-          <p:cNvPr id="6" name="">
-            <a:extLst xmlns:a="http://schemas.openxmlformats.org/drawingml/2006/main">
-              <a:ext uri="{FF2B5EF4-FFF2-40B4-BE49-F238E27FC236}">
-                <a16:creationId xmlns:a16="http://schemas.microsoft.com/office/drawing/2014/main" id="{72BA0002-92B8-4A5D-A299-9A21D1DAAD5B}"/>
-              </a:ext>
-            </a:extLst>
-          </p:cNvPr>
-          <p:cNvSpPr>
-            <a:spLocks xmlns:a="http://schemas.openxmlformats.org/drawingml/2006/main" noGrp="1"/>
-          </p:cNvSpPr>
-          <p:nvPr/>
-        </p:nvSpPr>
-        <p:spPr>
-          <a:xfrm xmlns:a="http://schemas.openxmlformats.org/drawingml/2006/main">
-            <a:off x="1104900" y="2781300"/>
-            <a:ext cx="9982200" cy="2095500"/>
+              <a:t>The sales page supports product, dealer, place, and time-based analysis without putting everything on one screen.</a:t>
+            </a:r>
+          </a:p>
+        </p:txBody>
+      </p:sp>
+      <p:sp>
+        <p:nvSpPr>
+          <p:cNvPr id="7" name="">
+            <a:extLst xmlns:a="http://schemas.openxmlformats.org/drawingml/2006/main">
+              <a:ext uri="{FF2B5EF4-FFF2-40B4-BE49-F238E27FC236}">
+                <a16:creationId xmlns:a16="http://schemas.microsoft.com/office/drawing/2014/main" id="{2E982688-581D-4687-8A60-4462F03C672A}"/>
+              </a:ext>
+            </a:extLst>
+          </p:cNvPr>
+          <p:cNvSpPr>
+            <a:spLocks xmlns:a="http://schemas.openxmlformats.org/drawingml/2006/main" noGrp="1"/>
+          </p:cNvSpPr>
+          <p:nvPr/>
+        </p:nvSpPr>
+        <p:spPr>
+          <a:xfrm xmlns:a="http://schemas.openxmlformats.org/drawingml/2006/main">
+            <a:off x="647700" y="2533650"/>
+            <a:ext cx="5314950" cy="3124200"/>
           </a:xfrm>
           <a:prstGeom xmlns:a="http://schemas.openxmlformats.org/drawingml/2006/main" prst="roundRect">
             <a:avLst>
-              <a:gd name="adj" fmla="val 7273"/>
+              <a:gd name="adj" fmla="val 4878"/>
             </a:avLst>
           </a:prstGeom>
           <a:solidFill xmlns:a="http://schemas.openxmlformats.org/drawingml/2006/main">
@@ -6401,22 +6482,206 @@
       </p:sp>
       <p:sp>
         <p:nvSpPr>
-          <p:cNvPr id="7" name="">
-            <a:extLst xmlns:a="http://schemas.openxmlformats.org/drawingml/2006/main">
-              <a:ext uri="{FF2B5EF4-FFF2-40B4-BE49-F238E27FC236}">
-                <a16:creationId xmlns:a16="http://schemas.microsoft.com/office/drawing/2014/main" id="{4183509A-2D3E-4C80-960D-43F7B14904D9}"/>
-              </a:ext>
-            </a:extLst>
-          </p:cNvPr>
-          <p:cNvSpPr>
-            <a:spLocks xmlns:a="http://schemas.openxmlformats.org/drawingml/2006/main" noGrp="1"/>
-          </p:cNvSpPr>
-          <p:nvPr/>
-        </p:nvSpPr>
-        <p:spPr>
-          <a:xfrm xmlns:a="http://schemas.openxmlformats.org/drawingml/2006/main">
-            <a:off x="1543050" y="3143250"/>
-            <a:ext cx="3048000" cy="342900"/>
+          <p:cNvPr id="8" name="">
+            <a:extLst xmlns:a="http://schemas.openxmlformats.org/drawingml/2006/main">
+              <a:ext uri="{FF2B5EF4-FFF2-40B4-BE49-F238E27FC236}">
+                <a16:creationId xmlns:a16="http://schemas.microsoft.com/office/drawing/2014/main" id="{2D63F84D-C8F5-49EF-904F-1D5775797215}"/>
+              </a:ext>
+            </a:extLst>
+          </p:cNvPr>
+          <p:cNvSpPr>
+            <a:spLocks xmlns:a="http://schemas.openxmlformats.org/drawingml/2006/main" noGrp="1"/>
+          </p:cNvSpPr>
+          <p:nvPr/>
+        </p:nvSpPr>
+        <p:spPr>
+          <a:xfrm xmlns:a="http://schemas.openxmlformats.org/drawingml/2006/main">
+            <a:off x="647700" y="2533650"/>
+            <a:ext cx="5314950" cy="419100"/>
+          </a:xfrm>
+          <a:prstGeom xmlns:a="http://schemas.openxmlformats.org/drawingml/2006/main" prst="roundRect">
+            <a:avLst>
+              <a:gd name="adj" fmla="val 36364"/>
+            </a:avLst>
+          </a:prstGeom>
+          <a:solidFill xmlns:a="http://schemas.openxmlformats.org/drawingml/2006/main">
+            <a:srgbClr val="17375F"/>
+          </a:solidFill>
+          <a:ln xmlns:a="http://schemas.openxmlformats.org/drawingml/2006/main" w="0">
+            <a:noFill/>
+            <a:prstDash val="solid"/>
+          </a:ln>
+        </p:spPr>
+      </p:sp>
+      <p:sp>
+        <p:nvSpPr>
+          <p:cNvPr id="9" name="">
+            <a:extLst xmlns:a="http://schemas.openxmlformats.org/drawingml/2006/main">
+              <a:ext uri="{FF2B5EF4-FFF2-40B4-BE49-F238E27FC236}">
+                <a16:creationId xmlns:a16="http://schemas.microsoft.com/office/drawing/2014/main" id="{5D68DB1E-DFAF-4691-8697-D06758F39F24}"/>
+              </a:ext>
+            </a:extLst>
+          </p:cNvPr>
+          <p:cNvSpPr>
+            <a:spLocks xmlns:a="http://schemas.openxmlformats.org/drawingml/2006/main" noGrp="1"/>
+          </p:cNvSpPr>
+          <p:nvPr/>
+        </p:nvSpPr>
+        <p:spPr>
+          <a:xfrm xmlns:a="http://schemas.openxmlformats.org/drawingml/2006/main">
+            <a:off x="857250" y="2647950"/>
+            <a:ext cx="95250" cy="95250"/>
+          </a:xfrm>
+          <a:prstGeom xmlns:a="http://schemas.openxmlformats.org/drawingml/2006/main" prst="ellipse">
+            <a:avLst/>
+          </a:prstGeom>
+          <a:solidFill xmlns:a="http://schemas.openxmlformats.org/drawingml/2006/main">
+            <a:srgbClr val="FF6464"/>
+          </a:solidFill>
+          <a:ln xmlns:a="http://schemas.openxmlformats.org/drawingml/2006/main" w="0">
+            <a:noFill/>
+            <a:prstDash val="solid"/>
+          </a:ln>
+        </p:spPr>
+      </p:sp>
+      <p:sp>
+        <p:nvSpPr>
+          <p:cNvPr id="10" name="">
+            <a:extLst xmlns:a="http://schemas.openxmlformats.org/drawingml/2006/main">
+              <a:ext uri="{FF2B5EF4-FFF2-40B4-BE49-F238E27FC236}">
+                <a16:creationId xmlns:a16="http://schemas.microsoft.com/office/drawing/2014/main" id="{FCF61720-CA74-4611-A395-DFCE71A5F53D}"/>
+              </a:ext>
+            </a:extLst>
+          </p:cNvPr>
+          <p:cNvSpPr>
+            <a:spLocks xmlns:a="http://schemas.openxmlformats.org/drawingml/2006/main" noGrp="1"/>
+          </p:cNvSpPr>
+          <p:nvPr/>
+        </p:nvSpPr>
+        <p:spPr>
+          <a:xfrm xmlns:a="http://schemas.openxmlformats.org/drawingml/2006/main">
+            <a:off x="1028700" y="2647950"/>
+            <a:ext cx="95250" cy="95250"/>
+          </a:xfrm>
+          <a:prstGeom xmlns:a="http://schemas.openxmlformats.org/drawingml/2006/main" prst="ellipse">
+            <a:avLst/>
+          </a:prstGeom>
+          <a:solidFill xmlns:a="http://schemas.openxmlformats.org/drawingml/2006/main">
+            <a:srgbClr val="FFD166"/>
+          </a:solidFill>
+          <a:ln xmlns:a="http://schemas.openxmlformats.org/drawingml/2006/main" w="0">
+            <a:noFill/>
+            <a:prstDash val="solid"/>
+          </a:ln>
+        </p:spPr>
+      </p:sp>
+      <p:sp>
+        <p:nvSpPr>
+          <p:cNvPr id="11" name="">
+            <a:extLst xmlns:a="http://schemas.openxmlformats.org/drawingml/2006/main">
+              <a:ext uri="{FF2B5EF4-FFF2-40B4-BE49-F238E27FC236}">
+                <a16:creationId xmlns:a16="http://schemas.microsoft.com/office/drawing/2014/main" id="{00F6B16F-B716-4BC0-9600-AA1EC0B545F6}"/>
+              </a:ext>
+            </a:extLst>
+          </p:cNvPr>
+          <p:cNvSpPr>
+            <a:spLocks xmlns:a="http://schemas.openxmlformats.org/drawingml/2006/main" noGrp="1"/>
+          </p:cNvSpPr>
+          <p:nvPr/>
+        </p:nvSpPr>
+        <p:spPr>
+          <a:xfrm xmlns:a="http://schemas.openxmlformats.org/drawingml/2006/main">
+            <a:off x="1200150" y="2647950"/>
+            <a:ext cx="95250" cy="95250"/>
+          </a:xfrm>
+          <a:prstGeom xmlns:a="http://schemas.openxmlformats.org/drawingml/2006/main" prst="ellipse">
+            <a:avLst/>
+          </a:prstGeom>
+          <a:solidFill xmlns:a="http://schemas.openxmlformats.org/drawingml/2006/main">
+            <a:srgbClr val="06D6A0"/>
+          </a:solidFill>
+          <a:ln xmlns:a="http://schemas.openxmlformats.org/drawingml/2006/main" w="0">
+            <a:noFill/>
+            <a:prstDash val="solid"/>
+          </a:ln>
+        </p:spPr>
+      </p:sp>
+      <p:pic>
+        <p:nvPicPr>
+          <p:cNvPr id="33" name=""/>
+          <p:cNvPicPr>
+            <a:picLocks xmlns:a="http://schemas.openxmlformats.org/drawingml/2006/main" noChangeAspect="1"/>
+          </p:cNvPicPr>
+          <p:nvPr/>
+        </p:nvPicPr>
+        <p:blipFill>
+          <a:blip xmlns:r="http://schemas.openxmlformats.org/officeDocument/2006/relationships" xmlns:a="http://schemas.openxmlformats.org/drawingml/2006/main" r:embed="R5fbecfcbb7dc4144"/>
+          <a:srcRect xmlns:a="http://schemas.openxmlformats.org/drawingml/2006/main" l="0" t="4352" r="0" b="4352"/>
+          <a:stretch xmlns:a="http://schemas.openxmlformats.org/drawingml/2006/main">
+            <a:fillRect l="0" t="0" r="0" b="0"/>
+          </a:stretch>
+        </p:blipFill>
+        <p:spPr>
+          <a:xfrm xmlns:a="http://schemas.openxmlformats.org/drawingml/2006/main">
+            <a:off x="781050" y="2667000"/>
+            <a:ext cx="5048250" cy="2857500"/>
+          </a:xfrm>
+          <a:prstGeom xmlns:a="http://schemas.openxmlformats.org/drawingml/2006/main" prst="roundRect">
+            <a:avLst>
+              <a:gd name="adj" fmla="val 4000"/>
+            </a:avLst>
+          </a:prstGeom>
+        </p:spPr>
+      </p:pic>
+      <p:sp>
+        <p:nvSpPr>
+          <p:cNvPr id="13" name="">
+            <a:extLst xmlns:a="http://schemas.openxmlformats.org/drawingml/2006/main">
+              <a:ext uri="{FF2B5EF4-FFF2-40B4-BE49-F238E27FC236}">
+                <a16:creationId xmlns:a16="http://schemas.microsoft.com/office/drawing/2014/main" id="{9587F864-BAAB-4FE4-AE55-45710FE48DAB}"/>
+              </a:ext>
+            </a:extLst>
+          </p:cNvPr>
+          <p:cNvSpPr>
+            <a:spLocks xmlns:a="http://schemas.openxmlformats.org/drawingml/2006/main" noGrp="1"/>
+          </p:cNvSpPr>
+          <p:nvPr/>
+        </p:nvSpPr>
+        <p:spPr>
+          <a:xfrm xmlns:a="http://schemas.openxmlformats.org/drawingml/2006/main">
+            <a:off x="6858000" y="3105150"/>
+            <a:ext cx="123825" cy="123825"/>
+          </a:xfrm>
+          <a:prstGeom xmlns:a="http://schemas.openxmlformats.org/drawingml/2006/main" prst="ellipse">
+            <a:avLst/>
+          </a:prstGeom>
+          <a:solidFill xmlns:a="http://schemas.openxmlformats.org/drawingml/2006/main">
+            <a:srgbClr val="3D78DD"/>
+          </a:solidFill>
+          <a:ln xmlns:a="http://schemas.openxmlformats.org/drawingml/2006/main" w="0">
+            <a:noFill/>
+            <a:prstDash val="solid"/>
+          </a:ln>
+        </p:spPr>
+      </p:sp>
+      <p:sp>
+        <p:nvSpPr>
+          <p:cNvPr id="14" name="">
+            <a:extLst xmlns:a="http://schemas.openxmlformats.org/drawingml/2006/main">
+              <a:ext uri="{FF2B5EF4-FFF2-40B4-BE49-F238E27FC236}">
+                <a16:creationId xmlns:a16="http://schemas.microsoft.com/office/drawing/2014/main" id="{130377DB-72F9-45BD-9150-AB2B784C29FB}"/>
+              </a:ext>
+            </a:extLst>
+          </p:cNvPr>
+          <p:cNvSpPr>
+            <a:spLocks xmlns:a="http://schemas.openxmlformats.org/drawingml/2006/main" noGrp="1"/>
+          </p:cNvSpPr>
+          <p:nvPr/>
+        </p:nvSpPr>
+        <p:spPr>
+          <a:xfrm xmlns:a="http://schemas.openxmlformats.org/drawingml/2006/main">
+            <a:off x="7143750" y="3028950"/>
+            <a:ext cx="3619500" cy="381000"/>
           </a:xfrm>
           <a:prstGeom xmlns:a="http://schemas.openxmlformats.org/drawingml/2006/main" prst="rect">
             <a:avLst/>
@@ -6432,41 +6697,72 @@
           <a:lstStyle xmlns:a="http://schemas.openxmlformats.org/drawingml/2006/main"/>
           <a:p xmlns:a="http://schemas.openxmlformats.org/drawingml/2006/main">
             <a:pPr algn="l">
-              <a:defRPr sz="2400" b="1">
+              <a:defRPr sz="1500" b="1">
                 <a:solidFill>
                   <a:srgbClr val="111827"/>
                 </a:solidFill>
               </a:defRPr>
             </a:pPr>
             <a:r>
-              <a:rPr sz="2400" b="1">
+              <a:rPr sz="1500" b="1">
                 <a:solidFill>
                   <a:srgbClr val="111827"/>
                 </a:solidFill>
               </a:rPr>
-              <a:t>Why it is valuable</a:t>
-            </a:r>
-          </a:p>
-        </p:txBody>
-      </p:sp>
-      <p:sp>
-        <p:nvSpPr>
-          <p:cNvPr id="8" name="">
-            <a:extLst xmlns:a="http://schemas.openxmlformats.org/drawingml/2006/main">
-              <a:ext uri="{FF2B5EF4-FFF2-40B4-BE49-F238E27FC236}">
-                <a16:creationId xmlns:a16="http://schemas.microsoft.com/office/drawing/2014/main" id="{4C5AA2FB-D478-4E61-BF96-536B005BC782}"/>
-              </a:ext>
-            </a:extLst>
-          </p:cNvPr>
-          <p:cNvSpPr>
-            <a:spLocks xmlns:a="http://schemas.openxmlformats.org/drawingml/2006/main" noGrp="1"/>
-          </p:cNvSpPr>
-          <p:nvPr/>
-        </p:nvSpPr>
-        <p:spPr>
-          <a:xfrm xmlns:a="http://schemas.openxmlformats.org/drawingml/2006/main">
-            <a:off x="1581150" y="3733800"/>
-            <a:ext cx="6858000" cy="1104900"/>
+              <a:t>Search by product</a:t>
+            </a:r>
+          </a:p>
+        </p:txBody>
+      </p:sp>
+      <p:sp>
+        <p:nvSpPr>
+          <p:cNvPr id="15" name="">
+            <a:extLst xmlns:a="http://schemas.openxmlformats.org/drawingml/2006/main">
+              <a:ext uri="{FF2B5EF4-FFF2-40B4-BE49-F238E27FC236}">
+                <a16:creationId xmlns:a16="http://schemas.microsoft.com/office/drawing/2014/main" id="{BF3490DC-8372-457F-A97B-17CEA0819160}"/>
+              </a:ext>
+            </a:extLst>
+          </p:cNvPr>
+          <p:cNvSpPr>
+            <a:spLocks xmlns:a="http://schemas.openxmlformats.org/drawingml/2006/main" noGrp="1"/>
+          </p:cNvSpPr>
+          <p:nvPr/>
+        </p:nvSpPr>
+        <p:spPr>
+          <a:xfrm xmlns:a="http://schemas.openxmlformats.org/drawingml/2006/main">
+            <a:off x="6858000" y="3619500"/>
+            <a:ext cx="123825" cy="123825"/>
+          </a:xfrm>
+          <a:prstGeom xmlns:a="http://schemas.openxmlformats.org/drawingml/2006/main" prst="ellipse">
+            <a:avLst/>
+          </a:prstGeom>
+          <a:solidFill xmlns:a="http://schemas.openxmlformats.org/drawingml/2006/main">
+            <a:srgbClr val="3D78DD"/>
+          </a:solidFill>
+          <a:ln xmlns:a="http://schemas.openxmlformats.org/drawingml/2006/main" w="0">
+            <a:noFill/>
+            <a:prstDash val="solid"/>
+          </a:ln>
+        </p:spPr>
+      </p:sp>
+      <p:sp>
+        <p:nvSpPr>
+          <p:cNvPr id="16" name="">
+            <a:extLst xmlns:a="http://schemas.openxmlformats.org/drawingml/2006/main">
+              <a:ext uri="{FF2B5EF4-FFF2-40B4-BE49-F238E27FC236}">
+                <a16:creationId xmlns:a16="http://schemas.microsoft.com/office/drawing/2014/main" id="{49251197-EA54-4513-A490-7C4C000D6CDA}"/>
+              </a:ext>
+            </a:extLst>
+          </p:cNvPr>
+          <p:cNvSpPr>
+            <a:spLocks xmlns:a="http://schemas.openxmlformats.org/drawingml/2006/main" noGrp="1"/>
+          </p:cNvSpPr>
+          <p:nvPr/>
+        </p:nvSpPr>
+        <p:spPr>
+          <a:xfrm xmlns:a="http://schemas.openxmlformats.org/drawingml/2006/main">
+            <a:off x="7143750" y="3543300"/>
+            <a:ext cx="3619500" cy="381000"/>
           </a:xfrm>
           <a:prstGeom xmlns:a="http://schemas.openxmlformats.org/drawingml/2006/main" prst="rect">
             <a:avLst/>
@@ -6482,115 +6778,531 @@
           <a:lstStyle xmlns:a="http://schemas.openxmlformats.org/drawingml/2006/main"/>
           <a:p xmlns:a="http://schemas.openxmlformats.org/drawingml/2006/main">
             <a:pPr algn="l">
-              <a:defRPr sz="1800" b="0">
-                <a:solidFill>
-                  <a:srgbClr val="516173"/>
+              <a:defRPr sz="1500" b="0">
+                <a:solidFill>
+                  <a:srgbClr val="111827"/>
                 </a:solidFill>
               </a:defRPr>
             </a:pPr>
             <a:r>
-              <a:rPr sz="1800" b="0">
-                <a:solidFill>
-                  <a:srgbClr val="516173"/>
+              <a:rPr sz="1500" b="0">
+                <a:solidFill>
+                  <a:srgbClr val="111827"/>
                 </a:solidFill>
               </a:rPr>
-              <a:t>Cleaner executive view</a:t>
-            </a:r>
-          </a:p>
+              <a:t>Filter by location and dealer</a:t>
+            </a:r>
+          </a:p>
+        </p:txBody>
+      </p:sp>
+      <p:sp>
+        <p:nvSpPr>
+          <p:cNvPr id="17" name="">
+            <a:extLst xmlns:a="http://schemas.openxmlformats.org/drawingml/2006/main">
+              <a:ext uri="{FF2B5EF4-FFF2-40B4-BE49-F238E27FC236}">
+                <a16:creationId xmlns:a16="http://schemas.microsoft.com/office/drawing/2014/main" id="{1D20E09C-1A14-4F9A-B181-93EEED24E7EB}"/>
+              </a:ext>
+            </a:extLst>
+          </p:cNvPr>
+          <p:cNvSpPr>
+            <a:spLocks xmlns:a="http://schemas.openxmlformats.org/drawingml/2006/main" noGrp="1"/>
+          </p:cNvSpPr>
+          <p:nvPr/>
+        </p:nvSpPr>
+        <p:spPr>
+          <a:xfrm xmlns:a="http://schemas.openxmlformats.org/drawingml/2006/main">
+            <a:off x="6858000" y="4133850"/>
+            <a:ext cx="123825" cy="123825"/>
+          </a:xfrm>
+          <a:prstGeom xmlns:a="http://schemas.openxmlformats.org/drawingml/2006/main" prst="ellipse">
+            <a:avLst/>
+          </a:prstGeom>
+          <a:solidFill xmlns:a="http://schemas.openxmlformats.org/drawingml/2006/main">
+            <a:srgbClr val="3D78DD"/>
+          </a:solidFill>
+          <a:ln xmlns:a="http://schemas.openxmlformats.org/drawingml/2006/main" w="0">
+            <a:noFill/>
+            <a:prstDash val="solid"/>
+          </a:ln>
+        </p:spPr>
+      </p:sp>
+      <p:sp>
+        <p:nvSpPr>
+          <p:cNvPr id="18" name="">
+            <a:extLst xmlns:a="http://schemas.openxmlformats.org/drawingml/2006/main">
+              <a:ext uri="{FF2B5EF4-FFF2-40B4-BE49-F238E27FC236}">
+                <a16:creationId xmlns:a16="http://schemas.microsoft.com/office/drawing/2014/main" id="{EB113355-1DCE-44DE-8A98-03C223F0255E}"/>
+              </a:ext>
+            </a:extLst>
+          </p:cNvPr>
+          <p:cNvSpPr>
+            <a:spLocks xmlns:a="http://schemas.openxmlformats.org/drawingml/2006/main" noGrp="1"/>
+          </p:cNvSpPr>
+          <p:nvPr/>
+        </p:nvSpPr>
+        <p:spPr>
+          <a:xfrm xmlns:a="http://schemas.openxmlformats.org/drawingml/2006/main">
+            <a:off x="7143750" y="4057650"/>
+            <a:ext cx="3619500" cy="381000"/>
+          </a:xfrm>
+          <a:prstGeom xmlns:a="http://schemas.openxmlformats.org/drawingml/2006/main" prst="rect">
+            <a:avLst/>
+          </a:prstGeom>
+          <a:noFill xmlns:a="http://schemas.openxmlformats.org/drawingml/2006/main"/>
+          <a:ln xmlns:a="http://schemas.openxmlformats.org/drawingml/2006/main" w="0">
+            <a:noFill/>
+            <a:prstDash val="solid"/>
+          </a:ln>
+        </p:spPr>
+        <p:txBody>
+          <a:bodyPr xmlns:a="http://schemas.openxmlformats.org/drawingml/2006/main"/>
+          <a:lstStyle xmlns:a="http://schemas.openxmlformats.org/drawingml/2006/main"/>
           <a:p xmlns:a="http://schemas.openxmlformats.org/drawingml/2006/main">
             <a:pPr algn="l">
-              <a:defRPr sz="1800" b="0">
-                <a:solidFill>
-                  <a:srgbClr val="516173"/>
+              <a:defRPr sz="1500" b="0">
+                <a:solidFill>
+                  <a:srgbClr val="111827"/>
                 </a:solidFill>
               </a:defRPr>
             </a:pPr>
             <a:r>
-              <a:rPr sz="1800" b="0">
-                <a:solidFill>
-                  <a:srgbClr val="516173"/>
+              <a:rPr sz="1500" b="0">
+                <a:solidFill>
+                  <a:srgbClr val="111827"/>
                 </a:solidFill>
               </a:rPr>
-              <a:t>Less manual checking</a:t>
-            </a:r>
-          </a:p>
+              <a:t>See contribution and trend</a:t>
+            </a:r>
+          </a:p>
+        </p:txBody>
+      </p:sp>
+      <p:sp>
+        <p:nvSpPr>
+          <p:cNvPr id="19" name="">
+            <a:extLst xmlns:a="http://schemas.openxmlformats.org/drawingml/2006/main">
+              <a:ext uri="{FF2B5EF4-FFF2-40B4-BE49-F238E27FC236}">
+                <a16:creationId xmlns:a16="http://schemas.microsoft.com/office/drawing/2014/main" id="{5D4F968B-199B-43DB-ACCF-8B3D9FFCDA9D}"/>
+              </a:ext>
+            </a:extLst>
+          </p:cNvPr>
+          <p:cNvSpPr>
+            <a:spLocks xmlns:a="http://schemas.openxmlformats.org/drawingml/2006/main" noGrp="1"/>
+          </p:cNvSpPr>
+          <p:nvPr/>
+        </p:nvSpPr>
+        <p:spPr>
+          <a:xfrm xmlns:a="http://schemas.openxmlformats.org/drawingml/2006/main">
+            <a:off x="6858000" y="4648200"/>
+            <a:ext cx="123825" cy="123825"/>
+          </a:xfrm>
+          <a:prstGeom xmlns:a="http://schemas.openxmlformats.org/drawingml/2006/main" prst="ellipse">
+            <a:avLst/>
+          </a:prstGeom>
+          <a:solidFill xmlns:a="http://schemas.openxmlformats.org/drawingml/2006/main">
+            <a:srgbClr val="3D78DD"/>
+          </a:solidFill>
+          <a:ln xmlns:a="http://schemas.openxmlformats.org/drawingml/2006/main" w="0">
+            <a:noFill/>
+            <a:prstDash val="solid"/>
+          </a:ln>
+        </p:spPr>
+      </p:sp>
+      <p:sp>
+        <p:nvSpPr>
+          <p:cNvPr id="20" name="">
+            <a:extLst xmlns:a="http://schemas.openxmlformats.org/drawingml/2006/main">
+              <a:ext uri="{FF2B5EF4-FFF2-40B4-BE49-F238E27FC236}">
+                <a16:creationId xmlns:a16="http://schemas.microsoft.com/office/drawing/2014/main" id="{4C7031E7-07D9-42AA-9ED6-80B8134EA5EB}"/>
+              </a:ext>
+            </a:extLst>
+          </p:cNvPr>
+          <p:cNvSpPr>
+            <a:spLocks xmlns:a="http://schemas.openxmlformats.org/drawingml/2006/main" noGrp="1"/>
+          </p:cNvSpPr>
+          <p:nvPr/>
+        </p:nvSpPr>
+        <p:spPr>
+          <a:xfrm xmlns:a="http://schemas.openxmlformats.org/drawingml/2006/main">
+            <a:off x="7143750" y="4572000"/>
+            <a:ext cx="3619500" cy="381000"/>
+          </a:xfrm>
+          <a:prstGeom xmlns:a="http://schemas.openxmlformats.org/drawingml/2006/main" prst="rect">
+            <a:avLst/>
+          </a:prstGeom>
+          <a:noFill xmlns:a="http://schemas.openxmlformats.org/drawingml/2006/main"/>
+          <a:ln xmlns:a="http://schemas.openxmlformats.org/drawingml/2006/main" w="0">
+            <a:noFill/>
+            <a:prstDash val="solid"/>
+          </a:ln>
+        </p:spPr>
+        <p:txBody>
+          <a:bodyPr xmlns:a="http://schemas.openxmlformats.org/drawingml/2006/main"/>
+          <a:lstStyle xmlns:a="http://schemas.openxmlformats.org/drawingml/2006/main"/>
           <a:p xmlns:a="http://schemas.openxmlformats.org/drawingml/2006/main">
             <a:pPr algn="l">
-              <a:defRPr sz="1800" b="0">
-                <a:solidFill>
-                  <a:srgbClr val="516173"/>
+              <a:defRPr sz="1500" b="0">
+                <a:solidFill>
+                  <a:srgbClr val="111827"/>
                 </a:solidFill>
               </a:defRPr>
             </a:pPr>
             <a:r>
-              <a:rPr sz="1800" b="0">
-                <a:solidFill>
-                  <a:srgbClr val="516173"/>
+              <a:rPr sz="1500" b="0">
+                <a:solidFill>
+                  <a:srgbClr val="111827"/>
                 </a:solidFill>
               </a:rPr>
-              <a:t>Better module separation</a:t>
-            </a:r>
-          </a:p>
+              <a:t>Open detailed rows only when needed</a:t>
+            </a:r>
+          </a:p>
+        </p:txBody>
+      </p:sp>
+      <p:sp>
+        <p:nvSpPr>
+          <p:cNvPr id="21" name="">
+            <a:extLst xmlns:a="http://schemas.openxmlformats.org/drawingml/2006/main">
+              <a:ext uri="{FF2B5EF4-FFF2-40B4-BE49-F238E27FC236}">
+                <a16:creationId xmlns:a16="http://schemas.microsoft.com/office/drawing/2014/main" id="{F338EC8F-42F0-4416-8E34-AAA4211CE963}"/>
+              </a:ext>
+            </a:extLst>
+          </p:cNvPr>
+          <p:cNvSpPr>
+            <a:spLocks xmlns:a="http://schemas.openxmlformats.org/drawingml/2006/main" noGrp="1"/>
+          </p:cNvSpPr>
+          <p:nvPr/>
+        </p:nvSpPr>
+        <p:spPr>
+          <a:xfrm xmlns:a="http://schemas.openxmlformats.org/drawingml/2006/main">
+            <a:off x="685800" y="6419850"/>
+            <a:ext cx="2095500" cy="228600"/>
+          </a:xfrm>
+          <a:prstGeom xmlns:a="http://schemas.openxmlformats.org/drawingml/2006/main" prst="rect">
+            <a:avLst/>
+          </a:prstGeom>
+          <a:noFill xmlns:a="http://schemas.openxmlformats.org/drawingml/2006/main"/>
+          <a:ln xmlns:a="http://schemas.openxmlformats.org/drawingml/2006/main" w="0">
+            <a:noFill/>
+            <a:prstDash val="solid"/>
+          </a:ln>
+        </p:spPr>
+        <p:txBody>
+          <a:bodyPr xmlns:a="http://schemas.openxmlformats.org/drawingml/2006/main"/>
+          <a:lstStyle xmlns:a="http://schemas.openxmlformats.org/drawingml/2006/main"/>
           <a:p xmlns:a="http://schemas.openxmlformats.org/drawingml/2006/main">
             <a:pPr algn="l">
-              <a:defRPr sz="1800" b="0">
-                <a:solidFill>
-                  <a:srgbClr val="516173"/>
+              <a:defRPr sz="900" b="1">
+                <a:solidFill>
+                  <a:srgbClr val="8EA0B4"/>
                 </a:solidFill>
               </a:defRPr>
             </a:pPr>
             <a:r>
-              <a:rPr sz="1800" b="0">
-                <a:solidFill>
-                  <a:srgbClr val="516173"/>
+              <a:rPr sz="900" b="1">
+                <a:solidFill>
+                  <a:srgbClr val="8EA0B4"/>
                 </a:solidFill>
               </a:rPr>
-              <a:t>Faster answers from live ERP</a:t>
-            </a:r>
-          </a:p>
+              <a:t>AG Health ERP · 7/9</a:t>
+            </a:r>
+          </a:p>
+        </p:txBody>
+      </p:sp>
+    </p:spTree>
+    <p:extLst>
+      <p:ext uri="{BB962C8B-B14F-4D97-AF65-F5344CB8AC3E}">
+        <p14:creationId xmlns:p14="http://schemas.microsoft.com/office/powerpoint/2010/main" val="1366690017"/>
+      </p:ext>
+    </p:extLst>
+  </p:cSld>
+</p:sld>
+</file>
+
+<file path=ppt/slides/slide8.xml><?xml version="1.0" encoding="utf-8"?>
+<p:sld xmlns:p="http://schemas.openxmlformats.org/presentationml/2006/main">
+  <p:cSld>
+    <p:bg>
+      <p:bgPr>
+        <a:solidFill xmlns:a="http://schemas.openxmlformats.org/drawingml/2006/main">
+          <a:srgbClr val="F6FBFF"/>
+        </a:solidFill>
+      </p:bgPr>
+    </p:bg>
+    <p:spTree>
+      <p:nvGrpSpPr>
+        <p:cNvPr id="1" name=""/>
+        <p:cNvGrpSpPr/>
+        <p:nvPr/>
+      </p:nvGrpSpPr>
+      <p:grpSpPr>
+        <a:xfrm xmlns:a="http://schemas.openxmlformats.org/drawingml/2006/main"/>
+      </p:grpSpPr>
+      <p:sp>
+        <p:nvSpPr>
+          <p:cNvPr id="17" name="">
+            <a:extLst xmlns:a="http://schemas.openxmlformats.org/drawingml/2006/main">
+              <a:ext uri="{FF2B5EF4-FFF2-40B4-BE49-F238E27FC236}">
+                <a16:creationId xmlns:a16="http://schemas.microsoft.com/office/drawing/2014/main" id="{57787595-C077-4708-88E2-5C1AAD2865A7}"/>
+              </a:ext>
+            </a:extLst>
+          </p:cNvPr>
+          <p:cNvSpPr>
+            <a:spLocks xmlns:a="http://schemas.openxmlformats.org/drawingml/2006/main" noGrp="1"/>
+          </p:cNvSpPr>
+          <p:nvPr/>
+        </p:nvSpPr>
+        <p:spPr>
+          <a:xfrm xmlns:a="http://schemas.openxmlformats.org/drawingml/2006/main">
+            <a:off x="9886950" y="0"/>
+            <a:ext cx="2095500" cy="2095500"/>
+          </a:xfrm>
+          <a:prstGeom xmlns:a="http://schemas.openxmlformats.org/drawingml/2006/main" prst="ellipse">
+            <a:avLst/>
+          </a:prstGeom>
+          <a:solidFill xmlns:a="http://schemas.openxmlformats.org/drawingml/2006/main">
+            <a:srgbClr val="EAF4FF"/>
+          </a:solidFill>
+          <a:ln xmlns:a="http://schemas.openxmlformats.org/drawingml/2006/main" w="0">
+            <a:noFill/>
+            <a:prstDash val="solid"/>
+          </a:ln>
+        </p:spPr>
+      </p:sp>
+      <p:sp>
+        <p:nvSpPr>
+          <p:cNvPr id="2" name="">
+            <a:extLst xmlns:a="http://schemas.openxmlformats.org/drawingml/2006/main">
+              <a:ext uri="{FF2B5EF4-FFF2-40B4-BE49-F238E27FC236}">
+                <a16:creationId xmlns:a16="http://schemas.microsoft.com/office/drawing/2014/main" id="{69F4481B-C84F-450C-9B4A-4A2206C338A7}"/>
+              </a:ext>
+            </a:extLst>
+          </p:cNvPr>
+          <p:cNvSpPr>
+            <a:spLocks xmlns:a="http://schemas.openxmlformats.org/drawingml/2006/main" noGrp="1"/>
+          </p:cNvSpPr>
+          <p:nvPr/>
+        </p:nvSpPr>
+        <p:spPr>
+          <a:xfrm xmlns:a="http://schemas.openxmlformats.org/drawingml/2006/main">
+            <a:off x="0" y="5524500"/>
+            <a:ext cx="1295400" cy="1295400"/>
+          </a:xfrm>
+          <a:prstGeom xmlns:a="http://schemas.openxmlformats.org/drawingml/2006/main" prst="ellipse">
+            <a:avLst/>
+          </a:prstGeom>
+          <a:solidFill xmlns:a="http://schemas.openxmlformats.org/drawingml/2006/main">
+            <a:srgbClr val="FFF3D6"/>
+          </a:solidFill>
+          <a:ln xmlns:a="http://schemas.openxmlformats.org/drawingml/2006/main" w="0">
+            <a:noFill/>
+            <a:prstDash val="solid"/>
+          </a:ln>
+        </p:spPr>
+      </p:sp>
+      <p:sp>
+        <p:nvSpPr>
+          <p:cNvPr id="3" name="">
+            <a:extLst xmlns:a="http://schemas.openxmlformats.org/drawingml/2006/main">
+              <a:ext uri="{FF2B5EF4-FFF2-40B4-BE49-F238E27FC236}">
+                <a16:creationId xmlns:a16="http://schemas.microsoft.com/office/drawing/2014/main" id="{CBB4C20E-530A-4758-83E0-F56D77484A4A}"/>
+              </a:ext>
+            </a:extLst>
+          </p:cNvPr>
+          <p:cNvSpPr>
+            <a:spLocks xmlns:a="http://schemas.openxmlformats.org/drawingml/2006/main" noGrp="1"/>
+          </p:cNvSpPr>
+          <p:nvPr/>
+        </p:nvSpPr>
+        <p:spPr>
+          <a:xfrm xmlns:a="http://schemas.openxmlformats.org/drawingml/2006/main">
+            <a:off x="0" y="0"/>
+            <a:ext cx="12192000" cy="6858000"/>
+          </a:xfrm>
+          <a:prstGeom xmlns:a="http://schemas.openxmlformats.org/drawingml/2006/main" prst="rect">
+            <a:avLst/>
+          </a:prstGeom>
+          <a:noFill xmlns:a="http://schemas.openxmlformats.org/drawingml/2006/main"/>
+          <a:ln xmlns:a="http://schemas.openxmlformats.org/drawingml/2006/main" w="0">
+            <a:noFill/>
+            <a:prstDash val="solid"/>
+          </a:ln>
+        </p:spPr>
+      </p:sp>
+      <p:sp>
+        <p:nvSpPr>
+          <p:cNvPr id="4" name="">
+            <a:extLst xmlns:a="http://schemas.openxmlformats.org/drawingml/2006/main">
+              <a:ext uri="{FF2B5EF4-FFF2-40B4-BE49-F238E27FC236}">
+                <a16:creationId xmlns:a16="http://schemas.microsoft.com/office/drawing/2014/main" id="{6859A2DE-8167-4298-9419-5AA120526F10}"/>
+              </a:ext>
+            </a:extLst>
+          </p:cNvPr>
+          <p:cNvSpPr>
+            <a:spLocks xmlns:a="http://schemas.openxmlformats.org/drawingml/2006/main" noGrp="1"/>
+          </p:cNvSpPr>
+          <p:nvPr/>
+        </p:nvSpPr>
+        <p:spPr>
+          <a:xfrm xmlns:a="http://schemas.openxmlformats.org/drawingml/2006/main">
+            <a:off x="685800" y="495300"/>
+            <a:ext cx="3429000" cy="285750"/>
+          </a:xfrm>
+          <a:prstGeom xmlns:a="http://schemas.openxmlformats.org/drawingml/2006/main" prst="rect">
+            <a:avLst/>
+          </a:prstGeom>
+          <a:noFill xmlns:a="http://schemas.openxmlformats.org/drawingml/2006/main"/>
+          <a:ln xmlns:a="http://schemas.openxmlformats.org/drawingml/2006/main" w="0">
+            <a:noFill/>
+            <a:prstDash val="solid"/>
+          </a:ln>
+        </p:spPr>
+        <p:txBody>
+          <a:bodyPr xmlns:a="http://schemas.openxmlformats.org/drawingml/2006/main"/>
+          <a:lstStyle xmlns:a="http://schemas.openxmlformats.org/drawingml/2006/main"/>
           <a:p xmlns:a="http://schemas.openxmlformats.org/drawingml/2006/main">
             <a:pPr algn="l">
-              <a:defRPr sz="1800" b="0">
-                <a:solidFill>
-                  <a:srgbClr val="516173"/>
+              <a:defRPr sz="1125" b="1">
+                <a:solidFill>
+                  <a:srgbClr val="E2BE2D"/>
                 </a:solidFill>
               </a:defRPr>
             </a:pPr>
             <a:r>
-              <a:rPr sz="1800" b="0">
-                <a:solidFill>
-                  <a:srgbClr val="516173"/>
+              <a:rPr sz="1125" b="1">
+                <a:solidFill>
+                  <a:srgbClr val="E2BE2D"/>
                 </a:solidFill>
               </a:rPr>
-              <a:t>A professional base for future analytics</a:t>
-            </a:r>
-          </a:p>
-        </p:txBody>
-      </p:sp>
-      <p:sp>
-        <p:nvSpPr>
-          <p:cNvPr id="9" name="">
-            <a:extLst xmlns:a="http://schemas.openxmlformats.org/drawingml/2006/main">
-              <a:ext uri="{FF2B5EF4-FFF2-40B4-BE49-F238E27FC236}">
-                <a16:creationId xmlns:a16="http://schemas.microsoft.com/office/drawing/2014/main" id="{58734AEB-DF25-4E38-8576-3BD01A5E8BF9}"/>
-              </a:ext>
-            </a:extLst>
-          </p:cNvPr>
-          <p:cNvSpPr>
-            <a:spLocks xmlns:a="http://schemas.openxmlformats.org/drawingml/2006/main" noGrp="1"/>
-          </p:cNvSpPr>
-          <p:nvPr/>
-        </p:nvSpPr>
-        <p:spPr>
-          <a:xfrm xmlns:a="http://schemas.openxmlformats.org/drawingml/2006/main">
-            <a:off x="9029700" y="3238500"/>
-            <a:ext cx="1143000" cy="1143000"/>
-          </a:xfrm>
-          <a:prstGeom xmlns:a="http://schemas.openxmlformats.org/drawingml/2006/main" prst="ellipse">
-            <a:avLst/>
+              <a:t>CHATBOT</a:t>
+            </a:r>
+          </a:p>
+        </p:txBody>
+      </p:sp>
+      <p:sp>
+        <p:nvSpPr>
+          <p:cNvPr id="5" name="">
+            <a:extLst xmlns:a="http://schemas.openxmlformats.org/drawingml/2006/main">
+              <a:ext uri="{FF2B5EF4-FFF2-40B4-BE49-F238E27FC236}">
+                <a16:creationId xmlns:a16="http://schemas.microsoft.com/office/drawing/2014/main" id="{053EE10D-C0B9-4646-8917-EB3C7EDF7B8B}"/>
+              </a:ext>
+            </a:extLst>
+          </p:cNvPr>
+          <p:cNvSpPr>
+            <a:spLocks xmlns:a="http://schemas.openxmlformats.org/drawingml/2006/main" noGrp="1"/>
+          </p:cNvSpPr>
+          <p:nvPr/>
+        </p:nvSpPr>
+        <p:spPr>
+          <a:xfrm xmlns:a="http://schemas.openxmlformats.org/drawingml/2006/main">
+            <a:off x="685800" y="895350"/>
+            <a:ext cx="8286750" cy="895350"/>
+          </a:xfrm>
+          <a:prstGeom xmlns:a="http://schemas.openxmlformats.org/drawingml/2006/main" prst="rect">
+            <a:avLst/>
+          </a:prstGeom>
+          <a:noFill xmlns:a="http://schemas.openxmlformats.org/drawingml/2006/main"/>
+          <a:ln xmlns:a="http://schemas.openxmlformats.org/drawingml/2006/main" w="0">
+            <a:noFill/>
+            <a:prstDash val="solid"/>
+          </a:ln>
+        </p:spPr>
+        <p:txBody>
+          <a:bodyPr xmlns:a="http://schemas.openxmlformats.org/drawingml/2006/main"/>
+          <a:lstStyle xmlns:a="http://schemas.openxmlformats.org/drawingml/2006/main"/>
+          <a:p xmlns:a="http://schemas.openxmlformats.org/drawingml/2006/main">
+            <a:pPr algn="l">
+              <a:defRPr sz="3375" b="1">
+                <a:solidFill>
+                  <a:srgbClr val="111827"/>
+                </a:solidFill>
+              </a:defRPr>
+            </a:pPr>
+            <a:r>
+              <a:rPr sz="3375" b="1">
+                <a:solidFill>
+                  <a:srgbClr val="111827"/>
+                </a:solidFill>
+              </a:rPr>
+              <a:t>Users can ask instead of searching</a:t>
+            </a:r>
+          </a:p>
+        </p:txBody>
+      </p:sp>
+      <p:sp>
+        <p:nvSpPr>
+          <p:cNvPr id="6" name="">
+            <a:extLst xmlns:a="http://schemas.openxmlformats.org/drawingml/2006/main">
+              <a:ext uri="{FF2B5EF4-FFF2-40B4-BE49-F238E27FC236}">
+                <a16:creationId xmlns:a16="http://schemas.microsoft.com/office/drawing/2014/main" id="{6AC79BE4-8549-436E-8206-658A512B0C38}"/>
+              </a:ext>
+            </a:extLst>
+          </p:cNvPr>
+          <p:cNvSpPr>
+            <a:spLocks xmlns:a="http://schemas.openxmlformats.org/drawingml/2006/main" noGrp="1"/>
+          </p:cNvSpPr>
+          <p:nvPr/>
+        </p:nvSpPr>
+        <p:spPr>
+          <a:xfrm xmlns:a="http://schemas.openxmlformats.org/drawingml/2006/main">
+            <a:off x="704850" y="1866900"/>
+            <a:ext cx="7429500" cy="571500"/>
+          </a:xfrm>
+          <a:prstGeom xmlns:a="http://schemas.openxmlformats.org/drawingml/2006/main" prst="rect">
+            <a:avLst/>
+          </a:prstGeom>
+          <a:noFill xmlns:a="http://schemas.openxmlformats.org/drawingml/2006/main"/>
+          <a:ln xmlns:a="http://schemas.openxmlformats.org/drawingml/2006/main" w="0">
+            <a:noFill/>
+            <a:prstDash val="solid"/>
+          </a:ln>
+        </p:spPr>
+        <p:txBody>
+          <a:bodyPr xmlns:a="http://schemas.openxmlformats.org/drawingml/2006/main"/>
+          <a:lstStyle xmlns:a="http://schemas.openxmlformats.org/drawingml/2006/main"/>
+          <a:p xmlns:a="http://schemas.openxmlformats.org/drawingml/2006/main">
+            <a:pPr algn="l">
+              <a:defRPr sz="1575" b="0">
+                <a:solidFill>
+                  <a:srgbClr val="526173"/>
+                </a:solidFill>
+              </a:defRPr>
+            </a:pPr>
+            <a:r>
+              <a:rPr sz="1575" b="0">
+                <a:solidFill>
+                  <a:srgbClr val="526173"/>
+                </a:solidFill>
+              </a:rPr>
+              <a:t>The assistant reads the mapped ERP summary and answers practical questions from the same project data.</a:t>
+            </a:r>
+          </a:p>
+        </p:txBody>
+      </p:sp>
+      <p:sp>
+        <p:nvSpPr>
+          <p:cNvPr id="7" name="">
+            <a:extLst xmlns:a="http://schemas.openxmlformats.org/drawingml/2006/main">
+              <a:ext uri="{FF2B5EF4-FFF2-40B4-BE49-F238E27FC236}">
+                <a16:creationId xmlns:a16="http://schemas.microsoft.com/office/drawing/2014/main" id="{46AE62EC-1B01-4AF7-9C88-E9A7B072D6D2}"/>
+              </a:ext>
+            </a:extLst>
+          </p:cNvPr>
+          <p:cNvSpPr>
+            <a:spLocks xmlns:a="http://schemas.openxmlformats.org/drawingml/2006/main" noGrp="1"/>
+          </p:cNvSpPr>
+          <p:nvPr/>
+        </p:nvSpPr>
+        <p:spPr>
+          <a:xfrm xmlns:a="http://schemas.openxmlformats.org/drawingml/2006/main">
+            <a:off x="6343650" y="2247900"/>
+            <a:ext cx="4362450" cy="3505200"/>
+          </a:xfrm>
+          <a:prstGeom xmlns:a="http://schemas.openxmlformats.org/drawingml/2006/main" prst="roundRect">
+            <a:avLst>
+              <a:gd name="adj" fmla="val 4348"/>
+            </a:avLst>
           </a:prstGeom>
           <a:solidFill xmlns:a="http://schemas.openxmlformats.org/drawingml/2006/main">
-            <a:srgbClr val="FFF3D6"/>
+            <a:srgbClr val="FFFFFF"/>
           </a:solidFill>
           <a:ln xmlns:a="http://schemas.openxmlformats.org/drawingml/2006/main" w="9525">
             <a:solidFill>
@@ -6599,31 +7311,101 @@
             <a:prstDash val="solid"/>
           </a:ln>
         </p:spPr>
+        <p:style>
+          <a:lnRef xmlns:a="http://schemas.openxmlformats.org/drawingml/2006/main" idx="0"/>
+          <a:fillRef xmlns:a="http://schemas.openxmlformats.org/drawingml/2006/main" idx="0"/>
+          <a:effectRef xmlns:a="http://schemas.openxmlformats.org/drawingml/2006/main" idx="4"/>
+          <a:fontRef xmlns:a="http://schemas.openxmlformats.org/drawingml/2006/main" idx="major"/>
+        </p:style>
+      </p:sp>
+      <p:sp>
+        <p:nvSpPr>
+          <p:cNvPr id="8" name="">
+            <a:extLst xmlns:a="http://schemas.openxmlformats.org/drawingml/2006/main">
+              <a:ext uri="{FF2B5EF4-FFF2-40B4-BE49-F238E27FC236}">
+                <a16:creationId xmlns:a16="http://schemas.microsoft.com/office/drawing/2014/main" id="{CC536681-FD2E-43AD-B45D-C3B63C0F52D7}"/>
+              </a:ext>
+            </a:extLst>
+          </p:cNvPr>
+          <p:cNvSpPr>
+            <a:spLocks xmlns:a="http://schemas.openxmlformats.org/drawingml/2006/main" noGrp="1"/>
+          </p:cNvSpPr>
+          <p:nvPr/>
+        </p:nvSpPr>
+        <p:spPr>
+          <a:xfrm xmlns:a="http://schemas.openxmlformats.org/drawingml/2006/main">
+            <a:off x="6343650" y="2247900"/>
+            <a:ext cx="4362450" cy="419100"/>
+          </a:xfrm>
+          <a:prstGeom xmlns:a="http://schemas.openxmlformats.org/drawingml/2006/main" prst="roundRect">
+            <a:avLst>
+              <a:gd name="adj" fmla="val 36364"/>
+            </a:avLst>
+          </a:prstGeom>
+          <a:solidFill xmlns:a="http://schemas.openxmlformats.org/drawingml/2006/main">
+            <a:srgbClr val="17375F"/>
+          </a:solidFill>
+          <a:ln xmlns:a="http://schemas.openxmlformats.org/drawingml/2006/main" w="0">
+            <a:noFill/>
+            <a:prstDash val="solid"/>
+          </a:ln>
+        </p:spPr>
+      </p:sp>
+      <p:sp>
+        <p:nvSpPr>
+          <p:cNvPr id="9" name="">
+            <a:extLst xmlns:a="http://schemas.openxmlformats.org/drawingml/2006/main">
+              <a:ext uri="{FF2B5EF4-FFF2-40B4-BE49-F238E27FC236}">
+                <a16:creationId xmlns:a16="http://schemas.microsoft.com/office/drawing/2014/main" id="{4C823292-E84B-41F9-B9C3-71ECA609BE0D}"/>
+              </a:ext>
+            </a:extLst>
+          </p:cNvPr>
+          <p:cNvSpPr>
+            <a:spLocks xmlns:a="http://schemas.openxmlformats.org/drawingml/2006/main" noGrp="1"/>
+          </p:cNvSpPr>
+          <p:nvPr/>
+        </p:nvSpPr>
+        <p:spPr>
+          <a:xfrm xmlns:a="http://schemas.openxmlformats.org/drawingml/2006/main">
+            <a:off x="6553200" y="2362200"/>
+            <a:ext cx="95250" cy="95250"/>
+          </a:xfrm>
+          <a:prstGeom xmlns:a="http://schemas.openxmlformats.org/drawingml/2006/main" prst="ellipse">
+            <a:avLst/>
+          </a:prstGeom>
+          <a:solidFill xmlns:a="http://schemas.openxmlformats.org/drawingml/2006/main">
+            <a:srgbClr val="FF6464"/>
+          </a:solidFill>
+          <a:ln xmlns:a="http://schemas.openxmlformats.org/drawingml/2006/main" w="0">
+            <a:noFill/>
+            <a:prstDash val="solid"/>
+          </a:ln>
+        </p:spPr>
       </p:sp>
       <p:sp>
         <p:nvSpPr>
           <p:cNvPr id="10" name="">
             <a:extLst xmlns:a="http://schemas.openxmlformats.org/drawingml/2006/main">
               <a:ext uri="{FF2B5EF4-FFF2-40B4-BE49-F238E27FC236}">
-                <a16:creationId xmlns:a16="http://schemas.microsoft.com/office/drawing/2014/main" id="{F4686CB1-51C5-49A6-AA56-52546C6DE5D1}"/>
-              </a:ext>
-            </a:extLst>
-          </p:cNvPr>
-          <p:cNvSpPr>
-            <a:spLocks xmlns:a="http://schemas.openxmlformats.org/drawingml/2006/main" noGrp="1"/>
-          </p:cNvSpPr>
-          <p:nvPr/>
-        </p:nvSpPr>
-        <p:spPr>
-          <a:xfrm xmlns:a="http://schemas.openxmlformats.org/drawingml/2006/main">
-            <a:off x="9334500" y="3543300"/>
-            <a:ext cx="533400" cy="533400"/>
+                <a16:creationId xmlns:a16="http://schemas.microsoft.com/office/drawing/2014/main" id="{DB0C907A-3EF7-4FD4-B2FF-F53648C710CE}"/>
+              </a:ext>
+            </a:extLst>
+          </p:cNvPr>
+          <p:cNvSpPr>
+            <a:spLocks xmlns:a="http://schemas.openxmlformats.org/drawingml/2006/main" noGrp="1"/>
+          </p:cNvSpPr>
+          <p:nvPr/>
+        </p:nvSpPr>
+        <p:spPr>
+          <a:xfrm xmlns:a="http://schemas.openxmlformats.org/drawingml/2006/main">
+            <a:off x="6724650" y="2362200"/>
+            <a:ext cx="95250" cy="95250"/>
           </a:xfrm>
           <a:prstGeom xmlns:a="http://schemas.openxmlformats.org/drawingml/2006/main" prst="ellipse">
             <a:avLst/>
           </a:prstGeom>
           <a:solidFill xmlns:a="http://schemas.openxmlformats.org/drawingml/2006/main">
-            <a:srgbClr val="E2BE2D"/>
+            <a:srgbClr val="FFD166"/>
           </a:solidFill>
           <a:ln xmlns:a="http://schemas.openxmlformats.org/drawingml/2006/main" w="0">
             <a:noFill/>
@@ -6636,19 +7418,118 @@
           <p:cNvPr id="11" name="">
             <a:extLst xmlns:a="http://schemas.openxmlformats.org/drawingml/2006/main">
               <a:ext uri="{FF2B5EF4-FFF2-40B4-BE49-F238E27FC236}">
-                <a16:creationId xmlns:a16="http://schemas.microsoft.com/office/drawing/2014/main" id="{E957DB2E-1691-4DB5-B07F-063ADDE74664}"/>
-              </a:ext>
-            </a:extLst>
-          </p:cNvPr>
-          <p:cNvSpPr>
-            <a:spLocks xmlns:a="http://schemas.openxmlformats.org/drawingml/2006/main" noGrp="1"/>
-          </p:cNvSpPr>
-          <p:nvPr/>
-        </p:nvSpPr>
-        <p:spPr>
-          <a:xfrm xmlns:a="http://schemas.openxmlformats.org/drawingml/2006/main">
-            <a:off x="1676400" y="5429250"/>
-            <a:ext cx="4000500" cy="400050"/>
+                <a16:creationId xmlns:a16="http://schemas.microsoft.com/office/drawing/2014/main" id="{4F9E5EC9-EA91-4C5A-9F4A-99C57C6302D3}"/>
+              </a:ext>
+            </a:extLst>
+          </p:cNvPr>
+          <p:cNvSpPr>
+            <a:spLocks xmlns:a="http://schemas.openxmlformats.org/drawingml/2006/main" noGrp="1"/>
+          </p:cNvSpPr>
+          <p:nvPr/>
+        </p:nvSpPr>
+        <p:spPr>
+          <a:xfrm xmlns:a="http://schemas.openxmlformats.org/drawingml/2006/main">
+            <a:off x="6896100" y="2362200"/>
+            <a:ext cx="95250" cy="95250"/>
+          </a:xfrm>
+          <a:prstGeom xmlns:a="http://schemas.openxmlformats.org/drawingml/2006/main" prst="ellipse">
+            <a:avLst/>
+          </a:prstGeom>
+          <a:solidFill xmlns:a="http://schemas.openxmlformats.org/drawingml/2006/main">
+            <a:srgbClr val="06D6A0"/>
+          </a:solidFill>
+          <a:ln xmlns:a="http://schemas.openxmlformats.org/drawingml/2006/main" w="0">
+            <a:noFill/>
+            <a:prstDash val="solid"/>
+          </a:ln>
+        </p:spPr>
+      </p:sp>
+      <p:pic>
+        <p:nvPicPr>
+          <p:cNvPr id="28" name=""/>
+          <p:cNvPicPr>
+            <a:picLocks xmlns:a="http://schemas.openxmlformats.org/drawingml/2006/main" noChangeAspect="1"/>
+          </p:cNvPicPr>
+          <p:nvPr/>
+        </p:nvPicPr>
+        <p:blipFill>
+          <a:blip xmlns:r="http://schemas.openxmlformats.org/officeDocument/2006/relationships" xmlns:a="http://schemas.openxmlformats.org/drawingml/2006/main" r:embed="Rdf4c346dacde4e41"/>
+          <a:srcRect xmlns:a="http://schemas.openxmlformats.org/drawingml/2006/main" l="10794" t="0" r="10794" b="0"/>
+          <a:stretch xmlns:a="http://schemas.openxmlformats.org/drawingml/2006/main">
+            <a:fillRect l="0" t="0" r="0" b="0"/>
+          </a:stretch>
+        </p:blipFill>
+        <p:spPr>
+          <a:xfrm xmlns:a="http://schemas.openxmlformats.org/drawingml/2006/main">
+            <a:off x="6477000" y="2381250"/>
+            <a:ext cx="4095750" cy="3238500"/>
+          </a:xfrm>
+          <a:prstGeom xmlns:a="http://schemas.openxmlformats.org/drawingml/2006/main" prst="roundRect">
+            <a:avLst>
+              <a:gd name="adj" fmla="val 3529"/>
+            </a:avLst>
+          </a:prstGeom>
+        </p:spPr>
+      </p:pic>
+      <p:sp>
+        <p:nvSpPr>
+          <p:cNvPr id="13" name="">
+            <a:extLst xmlns:a="http://schemas.openxmlformats.org/drawingml/2006/main">
+              <a:ext uri="{FF2B5EF4-FFF2-40B4-BE49-F238E27FC236}">
+                <a16:creationId xmlns:a16="http://schemas.microsoft.com/office/drawing/2014/main" id="{08574D67-EBD4-4611-B402-71D2D19DE22E}"/>
+              </a:ext>
+            </a:extLst>
+          </p:cNvPr>
+          <p:cNvSpPr>
+            <a:spLocks xmlns:a="http://schemas.openxmlformats.org/drawingml/2006/main" noGrp="1"/>
+          </p:cNvSpPr>
+          <p:nvPr/>
+        </p:nvSpPr>
+        <p:spPr>
+          <a:xfrm xmlns:a="http://schemas.openxmlformats.org/drawingml/2006/main">
+            <a:off x="971550" y="2857500"/>
+            <a:ext cx="4095750" cy="2190750"/>
+          </a:xfrm>
+          <a:prstGeom xmlns:a="http://schemas.openxmlformats.org/drawingml/2006/main" prst="roundRect">
+            <a:avLst>
+              <a:gd name="adj" fmla="val 6957"/>
+            </a:avLst>
+          </a:prstGeom>
+          <a:solidFill xmlns:a="http://schemas.openxmlformats.org/drawingml/2006/main">
+            <a:srgbClr val="FFFFFF"/>
+          </a:solidFill>
+          <a:ln xmlns:a="http://schemas.openxmlformats.org/drawingml/2006/main" w="9525">
+            <a:solidFill>
+              <a:srgbClr val="DBE8F4"/>
+            </a:solidFill>
+            <a:prstDash val="solid"/>
+          </a:ln>
+        </p:spPr>
+        <p:style>
+          <a:lnRef xmlns:a="http://schemas.openxmlformats.org/drawingml/2006/main" idx="0"/>
+          <a:fillRef xmlns:a="http://schemas.openxmlformats.org/drawingml/2006/main" idx="0"/>
+          <a:effectRef xmlns:a="http://schemas.openxmlformats.org/drawingml/2006/main" idx="4"/>
+          <a:fontRef xmlns:a="http://schemas.openxmlformats.org/drawingml/2006/main" idx="major"/>
+        </p:style>
+      </p:sp>
+      <p:sp>
+        <p:nvSpPr>
+          <p:cNvPr id="14" name="">
+            <a:extLst xmlns:a="http://schemas.openxmlformats.org/drawingml/2006/main">
+              <a:ext uri="{FF2B5EF4-FFF2-40B4-BE49-F238E27FC236}">
+                <a16:creationId xmlns:a16="http://schemas.microsoft.com/office/drawing/2014/main" id="{BEA00DC8-606D-4E4A-832A-5544672ED990}"/>
+              </a:ext>
+            </a:extLst>
+          </p:cNvPr>
+          <p:cNvSpPr>
+            <a:spLocks xmlns:a="http://schemas.openxmlformats.org/drawingml/2006/main" noGrp="1"/>
+          </p:cNvSpPr>
+          <p:nvPr/>
+        </p:nvSpPr>
+        <p:spPr>
+          <a:xfrm xmlns:a="http://schemas.openxmlformats.org/drawingml/2006/main">
+            <a:off x="1314450" y="3200400"/>
+            <a:ext cx="2286000" cy="323850"/>
           </a:xfrm>
           <a:prstGeom xmlns:a="http://schemas.openxmlformats.org/drawingml/2006/main" prst="rect">
             <a:avLst/>
@@ -6664,41 +7545,41 @@
           <a:lstStyle xmlns:a="http://schemas.openxmlformats.org/drawingml/2006/main"/>
           <a:p xmlns:a="http://schemas.openxmlformats.org/drawingml/2006/main">
             <a:pPr algn="l">
-              <a:defRPr sz="2250" b="1">
-                <a:solidFill>
-                  <a:srgbClr val="17375F"/>
+              <a:defRPr sz="2175" b="1">
+                <a:solidFill>
+                  <a:srgbClr val="111827"/>
                 </a:solidFill>
               </a:defRPr>
             </a:pPr>
             <a:r>
-              <a:rPr sz="2250" b="1">
-                <a:solidFill>
-                  <a:srgbClr val="17375F"/>
+              <a:rPr sz="2175" b="1">
+                <a:solidFill>
+                  <a:srgbClr val="111827"/>
                 </a:solidFill>
               </a:rPr>
-              <a:t>Ready for demo</a:t>
-            </a:r>
-          </a:p>
-        </p:txBody>
-      </p:sp>
-      <p:sp>
-        <p:nvSpPr>
-          <p:cNvPr id="12" name="">
-            <a:extLst xmlns:a="http://schemas.openxmlformats.org/drawingml/2006/main">
-              <a:ext uri="{FF2B5EF4-FFF2-40B4-BE49-F238E27FC236}">
-                <a16:creationId xmlns:a16="http://schemas.microsoft.com/office/drawing/2014/main" id="{F70C22E5-A1B9-4E19-AE56-D5188A0A63B4}"/>
-              </a:ext>
-            </a:extLst>
-          </p:cNvPr>
-          <p:cNvSpPr>
-            <a:spLocks xmlns:a="http://schemas.openxmlformats.org/drawingml/2006/main" noGrp="1"/>
-          </p:cNvSpPr>
-          <p:nvPr/>
-        </p:nvSpPr>
-        <p:spPr>
-          <a:xfrm xmlns:a="http://schemas.openxmlformats.org/drawingml/2006/main">
-            <a:off x="1676400" y="5829300"/>
-            <a:ext cx="8001000" cy="381000"/>
+              <a:t>Ask things like</a:t>
+            </a:r>
+          </a:p>
+        </p:txBody>
+      </p:sp>
+      <p:sp>
+        <p:nvSpPr>
+          <p:cNvPr id="15" name="">
+            <a:extLst xmlns:a="http://schemas.openxmlformats.org/drawingml/2006/main">
+              <a:ext uri="{FF2B5EF4-FFF2-40B4-BE49-F238E27FC236}">
+                <a16:creationId xmlns:a16="http://schemas.microsoft.com/office/drawing/2014/main" id="{81868E56-09DB-4B45-9760-C01D816946A7}"/>
+              </a:ext>
+            </a:extLst>
+          </p:cNvPr>
+          <p:cNvSpPr>
+            <a:spLocks xmlns:a="http://schemas.openxmlformats.org/drawingml/2006/main" noGrp="1"/>
+          </p:cNvSpPr>
+          <p:nvPr/>
+        </p:nvSpPr>
+        <p:spPr>
+          <a:xfrm xmlns:a="http://schemas.openxmlformats.org/drawingml/2006/main">
+            <a:off x="1352550" y="3752850"/>
+            <a:ext cx="3238500" cy="1143000"/>
           </a:xfrm>
           <a:prstGeom xmlns:a="http://schemas.openxmlformats.org/drawingml/2006/main" prst="rect">
             <a:avLst/>
@@ -6714,19 +7595,120 @@
           <a:lstStyle xmlns:a="http://schemas.openxmlformats.org/drawingml/2006/main"/>
           <a:p xmlns:a="http://schemas.openxmlformats.org/drawingml/2006/main">
             <a:pPr algn="l">
-              <a:defRPr sz="1500" b="0">
-                <a:solidFill>
-                  <a:srgbClr val="516173"/>
+              <a:defRPr sz="1650" b="0">
+                <a:solidFill>
+                  <a:srgbClr val="526173"/>
                 </a:solidFill>
               </a:defRPr>
             </a:pPr>
             <a:r>
-              <a:rPr sz="1500" b="0">
-                <a:solidFill>
-                  <a:srgbClr val="516173"/>
+              <a:rPr sz="1650" b="0">
+                <a:solidFill>
+                  <a:srgbClr val="526173"/>
                 </a:solidFill>
               </a:rPr>
-              <a:t>Next: validate final field mappings with finance and present the live dashboard with real management questions.</a:t>
+              <a:t>• Show sales summary</a:t>
+            </a:r>
+          </a:p>
+          <a:p xmlns:a="http://schemas.openxmlformats.org/drawingml/2006/main">
+            <a:pPr algn="l">
+              <a:defRPr sz="1650" b="0">
+                <a:solidFill>
+                  <a:srgbClr val="526173"/>
+                </a:solidFill>
+              </a:defRPr>
+            </a:pPr>
+            <a:r>
+              <a:rPr sz="1650" b="0">
+                <a:solidFill>
+                  <a:srgbClr val="526173"/>
+                </a:solidFill>
+              </a:rPr>
+              <a:t>• What is packing stock?</a:t>
+            </a:r>
+          </a:p>
+          <a:p xmlns:a="http://schemas.openxmlformats.org/drawingml/2006/main">
+            <a:pPr algn="l">
+              <a:defRPr sz="1650" b="0">
+                <a:solidFill>
+                  <a:srgbClr val="526173"/>
+                </a:solidFill>
+              </a:defRPr>
+            </a:pPr>
+            <a:r>
+              <a:rPr sz="1650" b="0">
+                <a:solidFill>
+                  <a:srgbClr val="526173"/>
+                </a:solidFill>
+              </a:rPr>
+              <a:t>• Which orders are pending?</a:t>
+            </a:r>
+          </a:p>
+          <a:p xmlns:a="http://schemas.openxmlformats.org/drawingml/2006/main">
+            <a:pPr algn="l">
+              <a:defRPr sz="1650" b="0">
+                <a:solidFill>
+                  <a:srgbClr val="526173"/>
+                </a:solidFill>
+              </a:defRPr>
+            </a:pPr>
+            <a:r>
+              <a:rPr sz="1650" b="0">
+                <a:solidFill>
+                  <a:srgbClr val="526173"/>
+                </a:solidFill>
+              </a:rPr>
+              <a:t>• Where does this number come from?</a:t>
+            </a:r>
+          </a:p>
+        </p:txBody>
+      </p:sp>
+      <p:sp>
+        <p:nvSpPr>
+          <p:cNvPr id="16" name="">
+            <a:extLst xmlns:a="http://schemas.openxmlformats.org/drawingml/2006/main">
+              <a:ext uri="{FF2B5EF4-FFF2-40B4-BE49-F238E27FC236}">
+                <a16:creationId xmlns:a16="http://schemas.microsoft.com/office/drawing/2014/main" id="{47236F51-DB10-4BEF-9CEE-0EB28303F7B3}"/>
+              </a:ext>
+            </a:extLst>
+          </p:cNvPr>
+          <p:cNvSpPr>
+            <a:spLocks xmlns:a="http://schemas.openxmlformats.org/drawingml/2006/main" noGrp="1"/>
+          </p:cNvSpPr>
+          <p:nvPr/>
+        </p:nvSpPr>
+        <p:spPr>
+          <a:xfrm xmlns:a="http://schemas.openxmlformats.org/drawingml/2006/main">
+            <a:off x="685800" y="6419850"/>
+            <a:ext cx="2095500" cy="228600"/>
+          </a:xfrm>
+          <a:prstGeom xmlns:a="http://schemas.openxmlformats.org/drawingml/2006/main" prst="rect">
+            <a:avLst/>
+          </a:prstGeom>
+          <a:noFill xmlns:a="http://schemas.openxmlformats.org/drawingml/2006/main"/>
+          <a:ln xmlns:a="http://schemas.openxmlformats.org/drawingml/2006/main" w="0">
+            <a:noFill/>
+            <a:prstDash val="solid"/>
+          </a:ln>
+        </p:spPr>
+        <p:txBody>
+          <a:bodyPr xmlns:a="http://schemas.openxmlformats.org/drawingml/2006/main"/>
+          <a:lstStyle xmlns:a="http://schemas.openxmlformats.org/drawingml/2006/main"/>
+          <a:p xmlns:a="http://schemas.openxmlformats.org/drawingml/2006/main">
+            <a:pPr algn="l">
+              <a:defRPr sz="900" b="1">
+                <a:solidFill>
+                  <a:srgbClr val="8EA0B4"/>
+                </a:solidFill>
+              </a:defRPr>
+            </a:pPr>
+            <a:r>
+              <a:rPr sz="900" b="1">
+                <a:solidFill>
+                  <a:srgbClr val="8EA0B4"/>
+                </a:solidFill>
+              </a:rPr>
+              <a:t>AG Health ERP · 8/9</a:t>
             </a:r>
           </a:p>
         </p:txBody>
@@ -6734,7 +7716,457 @@
     </p:spTree>
     <p:extLst>
       <p:ext uri="{BB962C8B-B14F-4D97-AF65-F5344CB8AC3E}">
-        <p14:creationId xmlns:p14="http://schemas.microsoft.com/office/powerpoint/2010/main" val="1317472926"/>
+        <p14:creationId xmlns:p14="http://schemas.microsoft.com/office/powerpoint/2010/main" val="788324786"/>
+      </p:ext>
+    </p:extLst>
+  </p:cSld>
+</p:sld>
+</file>
+
+<file path=ppt/slides/slide9.xml><?xml version="1.0" encoding="utf-8"?>
+<p:sld xmlns:p="http://schemas.openxmlformats.org/presentationml/2006/main">
+  <p:cSld>
+    <p:bg>
+      <p:bgPr>
+        <a:solidFill xmlns:a="http://schemas.openxmlformats.org/drawingml/2006/main">
+          <a:srgbClr val="17375F"/>
+        </a:solidFill>
+      </p:bgPr>
+    </p:bg>
+    <p:spTree>
+      <p:nvGrpSpPr>
+        <p:cNvPr id="1" name=""/>
+        <p:cNvGrpSpPr/>
+        <p:nvPr/>
+      </p:nvGrpSpPr>
+      <p:grpSpPr>
+        <a:xfrm xmlns:a="http://schemas.openxmlformats.org/drawingml/2006/main"/>
+      </p:grpSpPr>
+      <p:sp>
+        <p:nvSpPr>
+          <p:cNvPr id="9" name="">
+            <a:extLst xmlns:a="http://schemas.openxmlformats.org/drawingml/2006/main">
+              <a:ext uri="{FF2B5EF4-FFF2-40B4-BE49-F238E27FC236}">
+                <a16:creationId xmlns:a16="http://schemas.microsoft.com/office/drawing/2014/main" id="{A48FBF9F-F579-4AC6-809E-3BDE7BA404A0}"/>
+              </a:ext>
+            </a:extLst>
+          </p:cNvPr>
+          <p:cNvSpPr>
+            <a:spLocks xmlns:a="http://schemas.openxmlformats.org/drawingml/2006/main" noGrp="1"/>
+          </p:cNvSpPr>
+          <p:nvPr/>
+        </p:nvSpPr>
+        <p:spPr>
+          <a:xfrm xmlns:a="http://schemas.openxmlformats.org/drawingml/2006/main">
+            <a:off x="8572500" y="476250"/>
+            <a:ext cx="2952750" cy="2952750"/>
+          </a:xfrm>
+          <a:prstGeom xmlns:a="http://schemas.openxmlformats.org/drawingml/2006/main" prst="ellipse">
+            <a:avLst/>
+          </a:prstGeom>
+          <a:solidFill xmlns:a="http://schemas.openxmlformats.org/drawingml/2006/main">
+            <a:srgbClr val="244D7D"/>
+          </a:solidFill>
+          <a:ln xmlns:a="http://schemas.openxmlformats.org/drawingml/2006/main" w="0">
+            <a:noFill/>
+            <a:prstDash val="solid"/>
+          </a:ln>
+        </p:spPr>
+      </p:sp>
+      <p:sp>
+        <p:nvSpPr>
+          <p:cNvPr id="2" name="">
+            <a:extLst xmlns:a="http://schemas.openxmlformats.org/drawingml/2006/main">
+              <a:ext uri="{FF2B5EF4-FFF2-40B4-BE49-F238E27FC236}">
+                <a16:creationId xmlns:a16="http://schemas.microsoft.com/office/drawing/2014/main" id="{98413D68-37F7-4316-9AE0-785AB7A31E8B}"/>
+              </a:ext>
+            </a:extLst>
+          </p:cNvPr>
+          <p:cNvSpPr>
+            <a:spLocks xmlns:a="http://schemas.openxmlformats.org/drawingml/2006/main" noGrp="1"/>
+          </p:cNvSpPr>
+          <p:nvPr/>
+        </p:nvSpPr>
+        <p:spPr>
+          <a:xfrm xmlns:a="http://schemas.openxmlformats.org/drawingml/2006/main">
+            <a:off x="285750" y="5143500"/>
+            <a:ext cx="1428750" cy="1428750"/>
+          </a:xfrm>
+          <a:prstGeom xmlns:a="http://schemas.openxmlformats.org/drawingml/2006/main" prst="ellipse">
+            <a:avLst/>
+          </a:prstGeom>
+          <a:solidFill xmlns:a="http://schemas.openxmlformats.org/drawingml/2006/main">
+            <a:srgbClr val="294F78"/>
+          </a:solidFill>
+          <a:ln xmlns:a="http://schemas.openxmlformats.org/drawingml/2006/main" w="0">
+            <a:noFill/>
+            <a:prstDash val="solid"/>
+          </a:ln>
+        </p:spPr>
+      </p:sp>
+      <p:sp>
+        <p:nvSpPr>
+          <p:cNvPr id="3" name="">
+            <a:extLst xmlns:a="http://schemas.openxmlformats.org/drawingml/2006/main">
+              <a:ext uri="{FF2B5EF4-FFF2-40B4-BE49-F238E27FC236}">
+                <a16:creationId xmlns:a16="http://schemas.microsoft.com/office/drawing/2014/main" id="{613F5CF0-63C4-4ED1-9E8C-E07B042B4A94}"/>
+              </a:ext>
+            </a:extLst>
+          </p:cNvPr>
+          <p:cNvSpPr>
+            <a:spLocks xmlns:a="http://schemas.openxmlformats.org/drawingml/2006/main" noGrp="1"/>
+          </p:cNvSpPr>
+          <p:nvPr/>
+        </p:nvSpPr>
+        <p:spPr>
+          <a:xfrm xmlns:a="http://schemas.openxmlformats.org/drawingml/2006/main">
+            <a:off x="723900" y="552450"/>
+            <a:ext cx="2476500" cy="266700"/>
+          </a:xfrm>
+          <a:prstGeom xmlns:a="http://schemas.openxmlformats.org/drawingml/2006/main" prst="rect">
+            <a:avLst/>
+          </a:prstGeom>
+          <a:noFill xmlns:a="http://schemas.openxmlformats.org/drawingml/2006/main"/>
+          <a:ln xmlns:a="http://schemas.openxmlformats.org/drawingml/2006/main" w="0">
+            <a:noFill/>
+            <a:prstDash val="solid"/>
+          </a:ln>
+        </p:spPr>
+        <p:txBody>
+          <a:bodyPr xmlns:a="http://schemas.openxmlformats.org/drawingml/2006/main"/>
+          <a:lstStyle xmlns:a="http://schemas.openxmlformats.org/drawingml/2006/main"/>
+          <a:p xmlns:a="http://schemas.openxmlformats.org/drawingml/2006/main">
+            <a:pPr algn="l">
+              <a:defRPr sz="1200" b="1">
+                <a:solidFill>
+                  <a:srgbClr val="E2BE2D"/>
+                </a:solidFill>
+              </a:defRPr>
+            </a:pPr>
+            <a:r>
+              <a:rPr sz="1200" b="1">
+                <a:solidFill>
+                  <a:srgbClr val="E2BE2D"/>
+                </a:solidFill>
+              </a:rPr>
+              <a:t>FINAL MESSAGE</a:t>
+            </a:r>
+          </a:p>
+        </p:txBody>
+      </p:sp>
+      <p:sp>
+        <p:nvSpPr>
+          <p:cNvPr id="4" name="">
+            <a:extLst xmlns:a="http://schemas.openxmlformats.org/drawingml/2006/main">
+              <a:ext uri="{FF2B5EF4-FFF2-40B4-BE49-F238E27FC236}">
+                <a16:creationId xmlns:a16="http://schemas.microsoft.com/office/drawing/2014/main" id="{80A9CA51-0B90-448B-9FA3-262549A93455}"/>
+              </a:ext>
+            </a:extLst>
+          </p:cNvPr>
+          <p:cNvSpPr>
+            <a:spLocks xmlns:a="http://schemas.openxmlformats.org/drawingml/2006/main" noGrp="1"/>
+          </p:cNvSpPr>
+          <p:nvPr/>
+        </p:nvSpPr>
+        <p:spPr>
+          <a:xfrm xmlns:a="http://schemas.openxmlformats.org/drawingml/2006/main">
+            <a:off x="723900" y="1219200"/>
+            <a:ext cx="7239000" cy="1285875"/>
+          </a:xfrm>
+          <a:prstGeom xmlns:a="http://schemas.openxmlformats.org/drawingml/2006/main" prst="rect">
+            <a:avLst/>
+          </a:prstGeom>
+          <a:noFill xmlns:a="http://schemas.openxmlformats.org/drawingml/2006/main"/>
+          <a:ln xmlns:a="http://schemas.openxmlformats.org/drawingml/2006/main" w="0">
+            <a:noFill/>
+            <a:prstDash val="solid"/>
+          </a:ln>
+        </p:spPr>
+        <p:txBody>
+          <a:bodyPr xmlns:a="http://schemas.openxmlformats.org/drawingml/2006/main"/>
+          <a:lstStyle xmlns:a="http://schemas.openxmlformats.org/drawingml/2006/main"/>
+          <a:p xmlns:a="http://schemas.openxmlformats.org/drawingml/2006/main">
+            <a:pPr algn="l">
+              <a:defRPr sz="3750" b="1">
+                <a:solidFill>
+                  <a:srgbClr val="FFFFFF"/>
+                </a:solidFill>
+              </a:defRPr>
+            </a:pPr>
+            <a:r>
+              <a:rPr sz="3750" b="1">
+                <a:solidFill>
+                  <a:srgbClr val="FFFFFF"/>
+                </a:solidFill>
+              </a:rPr>
+              <a:t>AG Health gets a dashboard that is easy to trust and easy to present</a:t>
+            </a:r>
+          </a:p>
+        </p:txBody>
+      </p:sp>
+      <p:sp>
+        <p:nvSpPr>
+          <p:cNvPr id="5" name="">
+            <a:extLst xmlns:a="http://schemas.openxmlformats.org/drawingml/2006/main">
+              <a:ext uri="{FF2B5EF4-FFF2-40B4-BE49-F238E27FC236}">
+                <a16:creationId xmlns:a16="http://schemas.microsoft.com/office/drawing/2014/main" id="{6CF8344E-EBD7-4B8E-A62E-6DE5E1024982}"/>
+              </a:ext>
+            </a:extLst>
+          </p:cNvPr>
+          <p:cNvSpPr>
+            <a:spLocks xmlns:a="http://schemas.openxmlformats.org/drawingml/2006/main" noGrp="1"/>
+          </p:cNvSpPr>
+          <p:nvPr/>
+        </p:nvSpPr>
+        <p:spPr>
+          <a:xfrm xmlns:a="http://schemas.openxmlformats.org/drawingml/2006/main">
+            <a:off x="914400" y="3143250"/>
+            <a:ext cx="9429750" cy="1809750"/>
+          </a:xfrm>
+          <a:prstGeom xmlns:a="http://schemas.openxmlformats.org/drawingml/2006/main" prst="roundRect">
+            <a:avLst>
+              <a:gd name="adj" fmla="val 8421"/>
+            </a:avLst>
+          </a:prstGeom>
+          <a:solidFill xmlns:a="http://schemas.openxmlformats.org/drawingml/2006/main">
+            <a:srgbClr val="FFFFFF"/>
+          </a:solidFill>
+          <a:ln xmlns:a="http://schemas.openxmlformats.org/drawingml/2006/main" w="9525">
+            <a:solidFill>
+              <a:srgbClr val="DBE8F4"/>
+            </a:solidFill>
+            <a:prstDash val="solid"/>
+          </a:ln>
+        </p:spPr>
+        <p:style>
+          <a:lnRef xmlns:a="http://schemas.openxmlformats.org/drawingml/2006/main" idx="0"/>
+          <a:fillRef xmlns:a="http://schemas.openxmlformats.org/drawingml/2006/main" idx="0"/>
+          <a:effectRef xmlns:a="http://schemas.openxmlformats.org/drawingml/2006/main" idx="4"/>
+          <a:fontRef xmlns:a="http://schemas.openxmlformats.org/drawingml/2006/main" idx="major"/>
+        </p:style>
+      </p:sp>
+      <p:sp>
+        <p:nvSpPr>
+          <p:cNvPr id="6" name="">
+            <a:extLst xmlns:a="http://schemas.openxmlformats.org/drawingml/2006/main">
+              <a:ext uri="{FF2B5EF4-FFF2-40B4-BE49-F238E27FC236}">
+                <a16:creationId xmlns:a16="http://schemas.microsoft.com/office/drawing/2014/main" id="{13819195-F3B6-4B67-BEDD-E3C8FBF25B24}"/>
+              </a:ext>
+            </a:extLst>
+          </p:cNvPr>
+          <p:cNvSpPr>
+            <a:spLocks xmlns:a="http://schemas.openxmlformats.org/drawingml/2006/main" noGrp="1"/>
+          </p:cNvSpPr>
+          <p:nvPr/>
+        </p:nvSpPr>
+        <p:spPr>
+          <a:xfrm xmlns:a="http://schemas.openxmlformats.org/drawingml/2006/main">
+            <a:off x="1333500" y="3486150"/>
+            <a:ext cx="3429000" cy="342900"/>
+          </a:xfrm>
+          <a:prstGeom xmlns:a="http://schemas.openxmlformats.org/drawingml/2006/main" prst="rect">
+            <a:avLst/>
+          </a:prstGeom>
+          <a:noFill xmlns:a="http://schemas.openxmlformats.org/drawingml/2006/main"/>
+          <a:ln xmlns:a="http://schemas.openxmlformats.org/drawingml/2006/main" w="0">
+            <a:noFill/>
+            <a:prstDash val="solid"/>
+          </a:ln>
+        </p:spPr>
+        <p:txBody>
+          <a:bodyPr xmlns:a="http://schemas.openxmlformats.org/drawingml/2006/main"/>
+          <a:lstStyle xmlns:a="http://schemas.openxmlformats.org/drawingml/2006/main"/>
+          <a:p xmlns:a="http://schemas.openxmlformats.org/drawingml/2006/main">
+            <a:pPr algn="l">
+              <a:defRPr sz="2400" b="1">
+                <a:solidFill>
+                  <a:srgbClr val="111827"/>
+                </a:solidFill>
+              </a:defRPr>
+            </a:pPr>
+            <a:r>
+              <a:rPr sz="2400" b="1">
+                <a:solidFill>
+                  <a:srgbClr val="111827"/>
+                </a:solidFill>
+              </a:rPr>
+              <a:t>What makes it valuable</a:t>
+            </a:r>
+          </a:p>
+        </p:txBody>
+      </p:sp>
+      <p:sp>
+        <p:nvSpPr>
+          <p:cNvPr id="7" name="">
+            <a:extLst xmlns:a="http://schemas.openxmlformats.org/drawingml/2006/main">
+              <a:ext uri="{FF2B5EF4-FFF2-40B4-BE49-F238E27FC236}">
+                <a16:creationId xmlns:a16="http://schemas.microsoft.com/office/drawing/2014/main" id="{3E342664-ED71-4D15-9800-8B9B60BC7816}"/>
+              </a:ext>
+            </a:extLst>
+          </p:cNvPr>
+          <p:cNvSpPr>
+            <a:spLocks xmlns:a="http://schemas.openxmlformats.org/drawingml/2006/main" noGrp="1"/>
+          </p:cNvSpPr>
+          <p:nvPr/>
+        </p:nvSpPr>
+        <p:spPr>
+          <a:xfrm xmlns:a="http://schemas.openxmlformats.org/drawingml/2006/main">
+            <a:off x="1371600" y="4057650"/>
+            <a:ext cx="6858000" cy="1047750"/>
+          </a:xfrm>
+          <a:prstGeom xmlns:a="http://schemas.openxmlformats.org/drawingml/2006/main" prst="rect">
+            <a:avLst/>
+          </a:prstGeom>
+          <a:noFill xmlns:a="http://schemas.openxmlformats.org/drawingml/2006/main"/>
+          <a:ln xmlns:a="http://schemas.openxmlformats.org/drawingml/2006/main" w="0">
+            <a:noFill/>
+            <a:prstDash val="solid"/>
+          </a:ln>
+        </p:spPr>
+        <p:txBody>
+          <a:bodyPr xmlns:a="http://schemas.openxmlformats.org/drawingml/2006/main"/>
+          <a:lstStyle xmlns:a="http://schemas.openxmlformats.org/drawingml/2006/main"/>
+          <a:p xmlns:a="http://schemas.openxmlformats.org/drawingml/2006/main">
+            <a:pPr algn="l">
+              <a:defRPr sz="1650" b="0">
+                <a:solidFill>
+                  <a:srgbClr val="526173"/>
+                </a:solidFill>
+              </a:defRPr>
+            </a:pPr>
+            <a:r>
+              <a:rPr sz="1650" b="0">
+                <a:solidFill>
+                  <a:srgbClr val="526173"/>
+                </a:solidFill>
+              </a:rPr>
+              <a:t>Cleaner executive view</a:t>
+            </a:r>
+          </a:p>
+          <a:p xmlns:a="http://schemas.openxmlformats.org/drawingml/2006/main">
+            <a:pPr algn="l">
+              <a:defRPr sz="1650" b="0">
+                <a:solidFill>
+                  <a:srgbClr val="526173"/>
+                </a:solidFill>
+              </a:defRPr>
+            </a:pPr>
+            <a:r>
+              <a:rPr sz="1650" b="0">
+                <a:solidFill>
+                  <a:srgbClr val="526173"/>
+                </a:solidFill>
+              </a:rPr>
+              <a:t>Focused module pages</a:t>
+            </a:r>
+          </a:p>
+          <a:p xmlns:a="http://schemas.openxmlformats.org/drawingml/2006/main">
+            <a:pPr algn="l">
+              <a:defRPr sz="1650" b="0">
+                <a:solidFill>
+                  <a:srgbClr val="526173"/>
+                </a:solidFill>
+              </a:defRPr>
+            </a:pPr>
+            <a:r>
+              <a:rPr sz="1650" b="0">
+                <a:solidFill>
+                  <a:srgbClr val="526173"/>
+                </a:solidFill>
+              </a:rPr>
+              <a:t>Real project screenshots for demo</a:t>
+            </a:r>
+          </a:p>
+          <a:p xmlns:a="http://schemas.openxmlformats.org/drawingml/2006/main">
+            <a:pPr algn="l">
+              <a:defRPr sz="1650" b="0">
+                <a:solidFill>
+                  <a:srgbClr val="526173"/>
+                </a:solidFill>
+              </a:defRPr>
+            </a:pPr>
+            <a:r>
+              <a:rPr sz="1650" b="0">
+                <a:solidFill>
+                  <a:srgbClr val="526173"/>
+                </a:solidFill>
+              </a:rPr>
+              <a:t>ERP-backed data explanations</a:t>
+            </a:r>
+          </a:p>
+          <a:p xmlns:a="http://schemas.openxmlformats.org/drawingml/2006/main">
+            <a:pPr algn="l">
+              <a:defRPr sz="1650" b="0">
+                <a:solidFill>
+                  <a:srgbClr val="526173"/>
+                </a:solidFill>
+              </a:defRPr>
+            </a:pPr>
+            <a:r>
+              <a:rPr sz="1650" b="0">
+                <a:solidFill>
+                  <a:srgbClr val="526173"/>
+                </a:solidFill>
+              </a:rPr>
+              <a:t>Working chatbot for quick answers</a:t>
+            </a:r>
+          </a:p>
+        </p:txBody>
+      </p:sp>
+      <p:sp>
+        <p:nvSpPr>
+          <p:cNvPr id="8" name="">
+            <a:extLst xmlns:a="http://schemas.openxmlformats.org/drawingml/2006/main">
+              <a:ext uri="{FF2B5EF4-FFF2-40B4-BE49-F238E27FC236}">
+                <a16:creationId xmlns:a16="http://schemas.microsoft.com/office/drawing/2014/main" id="{583E5D61-090B-4937-A631-800C808E166D}"/>
+              </a:ext>
+            </a:extLst>
+          </p:cNvPr>
+          <p:cNvSpPr>
+            <a:spLocks xmlns:a="http://schemas.openxmlformats.org/drawingml/2006/main" noGrp="1"/>
+          </p:cNvSpPr>
+          <p:nvPr/>
+        </p:nvSpPr>
+        <p:spPr>
+          <a:xfrm xmlns:a="http://schemas.openxmlformats.org/drawingml/2006/main">
+            <a:off x="781050" y="5667375"/>
+            <a:ext cx="9334500" cy="400050"/>
+          </a:xfrm>
+          <a:prstGeom xmlns:a="http://schemas.openxmlformats.org/drawingml/2006/main" prst="rect">
+            <a:avLst/>
+          </a:prstGeom>
+          <a:noFill xmlns:a="http://schemas.openxmlformats.org/drawingml/2006/main"/>
+          <a:ln xmlns:a="http://schemas.openxmlformats.org/drawingml/2006/main" w="0">
+            <a:noFill/>
+            <a:prstDash val="solid"/>
+          </a:ln>
+        </p:spPr>
+        <p:txBody>
+          <a:bodyPr xmlns:a="http://schemas.openxmlformats.org/drawingml/2006/main"/>
+          <a:lstStyle xmlns:a="http://schemas.openxmlformats.org/drawingml/2006/main"/>
+          <a:p xmlns:a="http://schemas.openxmlformats.org/drawingml/2006/main">
+            <a:pPr algn="l">
+              <a:defRPr sz="1800" b="1">
+                <a:solidFill>
+                  <a:srgbClr val="FFFFFF"/>
+                </a:solidFill>
+              </a:defRPr>
+            </a:pPr>
+            <a:r>
+              <a:rPr sz="1800" b="1">
+                <a:solidFill>
+                  <a:srgbClr val="FFFFFF"/>
+                </a:solidFill>
+              </a:rPr>
+              <a:t>Next step: validate final ERP field mappings with finance, then demo the live dashboard using real management questions.</a:t>
+            </a:r>
+          </a:p>
+        </p:txBody>
+      </p:sp>
+    </p:spTree>
+    <p:extLst>
+      <p:ext uri="{BB962C8B-B14F-4D97-AF65-F5344CB8AC3E}">
+        <p14:creationId xmlns:p14="http://schemas.microsoft.com/office/powerpoint/2010/main" val="101848051"/>
       </p:ext>
     </p:extLst>
   </p:cSld>
